--- a/In.Plan MEIO process 06-09-2026.pptx
+++ b/In.Plan MEIO process 06-09-2026.pptx
@@ -3360,7 +3360,7 @@
         <p:spPr>
           <a:xfrm>
             <a:off x="4515000" y="1760000"/>
-            <a:ext cx="2425000" cy="840000"/>
+            <a:ext cx="2425000" cy="1344000"/>
           </a:xfrm>
           <a:prstGeom prst="rect">
             <a:avLst/>
@@ -3402,6 +3402,18 @@
               <a:t>Минимальный размер партии и кратность</a:t>
             </a:r>
           </a:p>
+          <a:p>
+            <a:r>
+              <a:rPr sz="900" b="0"/>
+              <a:t>Срок годности и остаточный срок при приёмке</a:t>
+            </a:r>
+          </a:p>
+          <a:p>
+            <a:r>
+              <a:rPr sz="900" b="0"/>
+              <a:t>Политика FEFO</a:t>
+            </a:r>
+          </a:p>
         </p:txBody>
       </p:sp>
       <p:sp>
@@ -3412,7 +3424,7 @@
         </p:nvSpPr>
         <p:spPr>
           <a:xfrm>
-            <a:off x="4515000" y="2750000"/>
+            <a:off x="4515000" y="3254000"/>
             <a:ext cx="2425000" cy="620000"/>
           </a:xfrm>
           <a:prstGeom prst="roundRect">
@@ -3456,7 +3468,7 @@
         </p:nvSpPr>
         <p:spPr>
           <a:xfrm>
-            <a:off x="4515000" y="3470000"/>
+            <a:off x="4515000" y="3974000"/>
             <a:ext cx="2425000" cy="840000"/>
           </a:xfrm>
           <a:prstGeom prst="rect">
@@ -3624,7 +3636,7 @@
         <p:spPr>
           <a:xfrm>
             <a:off x="7090000" y="1760000"/>
-            <a:ext cx="2425000" cy="840000"/>
+            <a:ext cx="2425000" cy="1344000"/>
           </a:xfrm>
           <a:prstGeom prst="rect">
             <a:avLst/>
@@ -3666,6 +3678,18 @@
               <a:t>Рекомендованный уровень сервиса</a:t>
             </a:r>
           </a:p>
+          <a:p>
+            <a:r>
+              <a:rPr sz="900" b="0"/>
+              <a:t>Ограничение: покрытие ≤ остаточного срока годности</a:t>
+            </a:r>
+          </a:p>
+          <a:p>
+            <a:r>
+              <a:rPr sz="900" b="0"/>
+              <a:t>Стоимость списаний и уценки</a:t>
+            </a:r>
+          </a:p>
         </p:txBody>
       </p:sp>
       <p:sp>
@@ -3676,7 +3700,7 @@
         </p:nvSpPr>
         <p:spPr>
           <a:xfrm>
-            <a:off x="7090000" y="2750000"/>
+            <a:off x="7090000" y="3254000"/>
             <a:ext cx="2425000" cy="620000"/>
           </a:xfrm>
           <a:prstGeom prst="roundRect">
@@ -3720,7 +3744,7 @@
         </p:nvSpPr>
         <p:spPr>
           <a:xfrm>
-            <a:off x="7090000" y="3470000"/>
+            <a:off x="7090000" y="3974000"/>
             <a:ext cx="2425000" cy="504000"/>
           </a:xfrm>
           <a:prstGeom prst="rect">
@@ -3761,7 +3785,7 @@
         </p:nvSpPr>
         <p:spPr>
           <a:xfrm>
-            <a:off x="7090000" y="4124000"/>
+            <a:off x="7090000" y="4628000"/>
             <a:ext cx="2425000" cy="620000"/>
           </a:xfrm>
           <a:prstGeom prst="rect">
@@ -4036,7 +4060,7 @@
         </p:nvSpPr>
         <p:spPr>
           <a:xfrm>
-            <a:off x="100000" y="3420000"/>
+            <a:off x="100000" y="2606666"/>
             <a:ext cx="1600000" cy="620000"/>
           </a:xfrm>
           <a:prstGeom prst="rect">
@@ -4080,7 +4104,7 @@
         </p:nvSpPr>
         <p:spPr>
           <a:xfrm>
-            <a:off x="100000" y="5860000"/>
+            <a:off x="100000" y="4233332"/>
             <a:ext cx="1600000" cy="620000"/>
           </a:xfrm>
           <a:prstGeom prst="rect">
@@ -4116,9 +4140,53 @@
           </a:p>
         </p:txBody>
       </p:sp>
+      <p:sp>
+        <p:nvSpPr>
+          <p:cNvPr id="27" name="Rectangle 26"/>
+          <p:cNvSpPr/>
+          <p:nvPr/>
+        </p:nvSpPr>
+        <p:spPr>
+          <a:xfrm>
+            <a:off x="100000" y="5859998"/>
+            <a:ext cx="1600000" cy="620000"/>
+          </a:xfrm>
+          <a:prstGeom prst="rect">
+            <a:avLst/>
+          </a:prstGeom>
+          <a:solidFill>
+            <a:schemeClr val="accent2"/>
+          </a:solidFill>
+        </p:spPr>
+        <p:style>
+          <a:lnRef idx="1">
+            <a:schemeClr val="accent1"/>
+          </a:lnRef>
+          <a:fillRef idx="3">
+            <a:schemeClr val="accent1"/>
+          </a:fillRef>
+          <a:effectRef idx="2">
+            <a:schemeClr val="accent1"/>
+          </a:effectRef>
+          <a:fontRef idx="minor">
+            <a:schemeClr val="lt1"/>
+          </a:fontRef>
+        </p:style>
+        <p:txBody>
+          <a:bodyPr rtlCol="0" anchor="ctr" wrap="square"/>
+          <a:lstStyle/>
+          <a:p>
+            <a:pPr algn="ctr"/>
+            <a:r>
+              <a:rPr sz="900"/>
+              <a:t>Сроки годности и требования сетей к остаточному сроку из ERP</a:t>
+            </a:r>
+          </a:p>
+        </p:txBody>
+      </p:sp>
       <p:cxnSp>
         <p:nvCxnSpPr>
-          <p:cNvPr id="27" name="Connector 26"/>
+          <p:cNvPr id="28" name="Connector 27"/>
           <p:cNvCxnSpPr>
             <a:stCxn id="4" idx="3"/>
             <a:endCxn id="8" idx="1"/>
@@ -4129,42 +4197,6 @@
           <a:xfrm>
             <a:off x="4365000" y="1350000"/>
             <a:ext cx="150000" cy="0"/>
-          </a:xfrm>
-          <a:prstGeom prst="line">
-            <a:avLst/>
-          </a:prstGeom>
-          <a:ln>
-            <a:tailEnd type="triangle"/>
-          </a:ln>
-        </p:spPr>
-        <p:style>
-          <a:lnRef idx="2">
-            <a:schemeClr val="accent1"/>
-          </a:lnRef>
-          <a:fillRef idx="0">
-            <a:schemeClr val="accent1"/>
-          </a:fillRef>
-          <a:effectRef idx="1">
-            <a:schemeClr val="accent1"/>
-          </a:effectRef>
-          <a:fontRef idx="minor">
-            <a:schemeClr val="tx1"/>
-          </a:fontRef>
-        </p:style>
-      </p:cxnSp>
-      <p:cxnSp>
-        <p:nvCxnSpPr>
-          <p:cNvPr id="28" name="Connector 27"/>
-          <p:cNvCxnSpPr>
-            <a:stCxn id="8" idx="2"/>
-            <a:endCxn id="10" idx="0"/>
-          </p:cNvCxnSpPr>
-          <p:nvPr/>
-        </p:nvCxnSpPr>
-        <p:spPr>
-          <a:xfrm>
-            <a:off x="5727500" y="1660000"/>
-            <a:ext cx="0" cy="1090000"/>
           </a:xfrm>
           <a:prstGeom prst="line">
             <a:avLst/>
@@ -4192,15 +4224,15 @@
         <p:nvCxnSpPr>
           <p:cNvPr id="29" name="Connector 28"/>
           <p:cNvCxnSpPr>
-            <a:stCxn id="10" idx="3"/>
-            <a:endCxn id="14" idx="1"/>
+            <a:stCxn id="8" idx="2"/>
+            <a:endCxn id="10" idx="0"/>
           </p:cNvCxnSpPr>
           <p:nvPr/>
         </p:nvCxnSpPr>
         <p:spPr>
-          <a:xfrm flipV="1">
-            <a:off x="6940000" y="1350000"/>
-            <a:ext cx="150000" cy="1710000"/>
+          <a:xfrm>
+            <a:off x="5727500" y="1660000"/>
+            <a:ext cx="0" cy="1594000"/>
           </a:xfrm>
           <a:prstGeom prst="line">
             <a:avLst/>
@@ -4228,15 +4260,15 @@
         <p:nvCxnSpPr>
           <p:cNvPr id="30" name="Connector 29"/>
           <p:cNvCxnSpPr>
-            <a:stCxn id="14" idx="2"/>
-            <a:endCxn id="16" idx="0"/>
+            <a:stCxn id="10" idx="3"/>
+            <a:endCxn id="14" idx="1"/>
           </p:cNvCxnSpPr>
           <p:nvPr/>
         </p:nvCxnSpPr>
         <p:spPr>
-          <a:xfrm>
-            <a:off x="8302500" y="1660000"/>
-            <a:ext cx="0" cy="1090000"/>
+          <a:xfrm flipV="1">
+            <a:off x="6940000" y="1350000"/>
+            <a:ext cx="150000" cy="2214000"/>
           </a:xfrm>
           <a:prstGeom prst="line">
             <a:avLst/>
@@ -4264,15 +4296,15 @@
         <p:nvCxnSpPr>
           <p:cNvPr id="31" name="Connector 30"/>
           <p:cNvCxnSpPr>
-            <a:stCxn id="16" idx="3"/>
-            <a:endCxn id="21" idx="1"/>
+            <a:stCxn id="14" idx="2"/>
+            <a:endCxn id="16" idx="0"/>
           </p:cNvCxnSpPr>
           <p:nvPr/>
         </p:nvCxnSpPr>
         <p:spPr>
-          <a:xfrm flipV="1">
-            <a:off x="9515000" y="1350000"/>
-            <a:ext cx="150000" cy="1710000"/>
+          <a:xfrm>
+            <a:off x="8302500" y="1660000"/>
+            <a:ext cx="0" cy="1594000"/>
           </a:xfrm>
           <a:prstGeom prst="line">
             <a:avLst/>
@@ -4300,15 +4332,15 @@
         <p:nvCxnSpPr>
           <p:cNvPr id="32" name="Connector 31"/>
           <p:cNvCxnSpPr>
-            <a:stCxn id="24" idx="3"/>
-            <a:endCxn id="4" idx="1"/>
+            <a:stCxn id="16" idx="3"/>
+            <a:endCxn id="21" idx="1"/>
           </p:cNvCxnSpPr>
           <p:nvPr/>
         </p:nvCxnSpPr>
         <p:spPr>
-          <a:xfrm>
-            <a:off x="1700000" y="1290000"/>
-            <a:ext cx="240000" cy="60000"/>
+          <a:xfrm flipV="1">
+            <a:off x="9515000" y="1350000"/>
+            <a:ext cx="150000" cy="2214000"/>
           </a:xfrm>
           <a:prstGeom prst="line">
             <a:avLst/>
@@ -4336,17 +4368,17 @@
         <p:nvCxnSpPr>
           <p:cNvPr id="33" name="Connector 32"/>
           <p:cNvCxnSpPr>
-            <a:stCxn id="25" idx="3"/>
-            <a:endCxn id="8" idx="1"/>
+            <a:stCxn id="24" idx="3"/>
+            <a:endCxn id="4" idx="1"/>
           </p:cNvCxnSpPr>
           <p:nvPr/>
         </p:nvCxnSpPr>
         <p:spPr>
-          <a:xfrm flipV="1">
-            <a:off x="1700000" y="1350000"/>
-            <a:ext cx="2815000" cy="2380000"/>
-          </a:xfrm>
-          <a:prstGeom prst="bentConnector3">
+          <a:xfrm>
+            <a:off x="1700000" y="1290000"/>
+            <a:ext cx="240000" cy="60000"/>
+          </a:xfrm>
+          <a:prstGeom prst="line">
             <a:avLst/>
           </a:prstGeom>
           <a:ln>
@@ -4372,7 +4404,7 @@
         <p:nvCxnSpPr>
           <p:cNvPr id="34" name="Connector 33"/>
           <p:cNvCxnSpPr>
-            <a:stCxn id="26" idx="3"/>
+            <a:stCxn id="25" idx="3"/>
             <a:endCxn id="8" idx="1"/>
           </p:cNvCxnSpPr>
           <p:nvPr/>
@@ -4380,7 +4412,7 @@
         <p:spPr>
           <a:xfrm flipV="1">
             <a:off x="1700000" y="1350000"/>
-            <a:ext cx="2815000" cy="4820000"/>
+            <a:ext cx="2815000" cy="1566666"/>
           </a:xfrm>
           <a:prstGeom prst="bentConnector3">
             <a:avLst/>
@@ -4408,17 +4440,17 @@
         <p:nvCxnSpPr>
           <p:cNvPr id="35" name="Connector 34"/>
           <p:cNvCxnSpPr>
-            <a:stCxn id="14" idx="2"/>
-            <a:endCxn id="18" idx="0"/>
+            <a:stCxn id="26" idx="3"/>
+            <a:endCxn id="8" idx="1"/>
           </p:cNvCxnSpPr>
           <p:nvPr/>
         </p:nvCxnSpPr>
         <p:spPr>
-          <a:xfrm>
-            <a:off x="8302500" y="1660000"/>
-            <a:ext cx="0" cy="2464000"/>
-          </a:xfrm>
-          <a:prstGeom prst="line">
+          <a:xfrm flipV="1">
+            <a:off x="1700000" y="1350000"/>
+            <a:ext cx="2815000" cy="3193332"/>
+          </a:xfrm>
+          <a:prstGeom prst="bentConnector3">
             <a:avLst/>
           </a:prstGeom>
           <a:ln>
@@ -4443,6 +4475,78 @@
       <p:cxnSp>
         <p:nvCxnSpPr>
           <p:cNvPr id="36" name="Connector 35"/>
+          <p:cNvCxnSpPr>
+            <a:stCxn id="27" idx="3"/>
+            <a:endCxn id="8" idx="1"/>
+          </p:cNvCxnSpPr>
+          <p:nvPr/>
+        </p:nvCxnSpPr>
+        <p:spPr>
+          <a:xfrm flipV="1">
+            <a:off x="1700000" y="1350000"/>
+            <a:ext cx="2815000" cy="4819998"/>
+          </a:xfrm>
+          <a:prstGeom prst="bentConnector3">
+            <a:avLst/>
+          </a:prstGeom>
+          <a:ln>
+            <a:tailEnd type="triangle"/>
+          </a:ln>
+        </p:spPr>
+        <p:style>
+          <a:lnRef idx="2">
+            <a:schemeClr val="accent1"/>
+          </a:lnRef>
+          <a:fillRef idx="0">
+            <a:schemeClr val="accent1"/>
+          </a:fillRef>
+          <a:effectRef idx="1">
+            <a:schemeClr val="accent1"/>
+          </a:effectRef>
+          <a:fontRef idx="minor">
+            <a:schemeClr val="tx1"/>
+          </a:fontRef>
+        </p:style>
+      </p:cxnSp>
+      <p:cxnSp>
+        <p:nvCxnSpPr>
+          <p:cNvPr id="37" name="Connector 36"/>
+          <p:cNvCxnSpPr>
+            <a:stCxn id="14" idx="2"/>
+            <a:endCxn id="18" idx="0"/>
+          </p:cNvCxnSpPr>
+          <p:nvPr/>
+        </p:nvCxnSpPr>
+        <p:spPr>
+          <a:xfrm>
+            <a:off x="8302500" y="1660000"/>
+            <a:ext cx="0" cy="2968000"/>
+          </a:xfrm>
+          <a:prstGeom prst="line">
+            <a:avLst/>
+          </a:prstGeom>
+          <a:ln>
+            <a:tailEnd type="triangle"/>
+          </a:ln>
+        </p:spPr>
+        <p:style>
+          <a:lnRef idx="2">
+            <a:schemeClr val="accent1"/>
+          </a:lnRef>
+          <a:fillRef idx="0">
+            <a:schemeClr val="accent1"/>
+          </a:fillRef>
+          <a:effectRef idx="1">
+            <a:schemeClr val="accent1"/>
+          </a:effectRef>
+          <a:fontRef idx="minor">
+            <a:schemeClr val="tx1"/>
+          </a:fontRef>
+        </p:style>
+      </p:cxnSp>
+      <p:cxnSp>
+        <p:nvCxnSpPr>
+          <p:cNvPr id="38" name="Connector 37"/>
           <p:cNvCxnSpPr>
             <a:stCxn id="21" idx="2"/>
             <a:endCxn id="23" idx="0"/>

--- a/In.Plan MEIO process 06-09-2026.pptx
+++ b/In.Plan MEIO process 06-09-2026.pptx
@@ -3360,7 +3360,7 @@
         <p:spPr>
           <a:xfrm>
             <a:off x="4515000" y="1760000"/>
-            <a:ext cx="2425000" cy="1344000"/>
+            <a:ext cx="2425000" cy="1680000"/>
           </a:xfrm>
           <a:prstGeom prst="rect">
             <a:avLst/>
@@ -3387,6 +3387,12 @@
           <a:p>
             <a:r>
               <a:rPr sz="900" b="0"/>
+              <a:t>База неопределённости: расчёт в модуле или ошибка прогноза из DP</a:t>
+            </a:r>
+          </a:p>
+          <a:p>
+            <a:r>
+              <a:rPr sz="900" b="0"/>
               <a:t>Спрос и волатильность</a:t>
             </a:r>
           </a:p>
@@ -3424,7 +3430,7 @@
         </p:nvSpPr>
         <p:spPr>
           <a:xfrm>
-            <a:off x="4515000" y="3254000"/>
+            <a:off x="4515000" y="3590000"/>
             <a:ext cx="2425000" cy="620000"/>
           </a:xfrm>
           <a:prstGeom prst="roundRect">
@@ -3468,7 +3474,7 @@
         </p:nvSpPr>
         <p:spPr>
           <a:xfrm>
-            <a:off x="4515000" y="3974000"/>
+            <a:off x="4515000" y="4310000"/>
             <a:ext cx="2425000" cy="840000"/>
           </a:xfrm>
           <a:prstGeom prst="rect">
@@ -4060,7 +4066,7 @@
         </p:nvSpPr>
         <p:spPr>
           <a:xfrm>
-            <a:off x="100000" y="2606666"/>
+            <a:off x="100000" y="2200000"/>
             <a:ext cx="1600000" cy="620000"/>
           </a:xfrm>
           <a:prstGeom prst="rect">
@@ -4104,7 +4110,7 @@
         </p:nvSpPr>
         <p:spPr>
           <a:xfrm>
-            <a:off x="100000" y="4233332"/>
+            <a:off x="100000" y="3420000"/>
             <a:ext cx="1600000" cy="620000"/>
           </a:xfrm>
           <a:prstGeom prst="rect">
@@ -4148,7 +4154,7 @@
         </p:nvSpPr>
         <p:spPr>
           <a:xfrm>
-            <a:off x="100000" y="5859998"/>
+            <a:off x="100000" y="4640000"/>
             <a:ext cx="1600000" cy="620000"/>
           </a:xfrm>
           <a:prstGeom prst="rect">
@@ -4184,9 +4190,53 @@
           </a:p>
         </p:txBody>
       </p:sp>
+      <p:sp>
+        <p:nvSpPr>
+          <p:cNvPr id="28" name="Rectangle 27"/>
+          <p:cNvSpPr/>
+          <p:nvPr/>
+        </p:nvSpPr>
+        <p:spPr>
+          <a:xfrm>
+            <a:off x="100000" y="5860000"/>
+            <a:ext cx="1600000" cy="620000"/>
+          </a:xfrm>
+          <a:prstGeom prst="rect">
+            <a:avLst/>
+          </a:prstGeom>
+          <a:solidFill>
+            <a:schemeClr val="accent2"/>
+          </a:solidFill>
+        </p:spPr>
+        <p:style>
+          <a:lnRef idx="1">
+            <a:schemeClr val="accent1"/>
+          </a:lnRef>
+          <a:fillRef idx="3">
+            <a:schemeClr val="accent1"/>
+          </a:fillRef>
+          <a:effectRef idx="2">
+            <a:schemeClr val="accent1"/>
+          </a:effectRef>
+          <a:fontRef idx="minor">
+            <a:schemeClr val="lt1"/>
+          </a:fontRef>
+        </p:style>
+        <p:txBody>
+          <a:bodyPr rtlCol="0" anchor="ctr" wrap="square"/>
+          <a:lstStyle/>
+          <a:p>
+            <a:pPr algn="ctr"/>
+            <a:r>
+              <a:rPr sz="900"/>
+              <a:t>Ошибка прогноза по горизонту из DP</a:t>
+            </a:r>
+          </a:p>
+        </p:txBody>
+      </p:sp>
       <p:cxnSp>
         <p:nvCxnSpPr>
-          <p:cNvPr id="28" name="Connector 27"/>
+          <p:cNvPr id="29" name="Connector 28"/>
           <p:cNvCxnSpPr>
             <a:stCxn id="4" idx="3"/>
             <a:endCxn id="8" idx="1"/>
@@ -4197,42 +4247,6 @@
           <a:xfrm>
             <a:off x="4365000" y="1350000"/>
             <a:ext cx="150000" cy="0"/>
-          </a:xfrm>
-          <a:prstGeom prst="line">
-            <a:avLst/>
-          </a:prstGeom>
-          <a:ln>
-            <a:tailEnd type="triangle"/>
-          </a:ln>
-        </p:spPr>
-        <p:style>
-          <a:lnRef idx="2">
-            <a:schemeClr val="accent1"/>
-          </a:lnRef>
-          <a:fillRef idx="0">
-            <a:schemeClr val="accent1"/>
-          </a:fillRef>
-          <a:effectRef idx="1">
-            <a:schemeClr val="accent1"/>
-          </a:effectRef>
-          <a:fontRef idx="minor">
-            <a:schemeClr val="tx1"/>
-          </a:fontRef>
-        </p:style>
-      </p:cxnSp>
-      <p:cxnSp>
-        <p:nvCxnSpPr>
-          <p:cNvPr id="29" name="Connector 28"/>
-          <p:cNvCxnSpPr>
-            <a:stCxn id="8" idx="2"/>
-            <a:endCxn id="10" idx="0"/>
-          </p:cNvCxnSpPr>
-          <p:nvPr/>
-        </p:nvCxnSpPr>
-        <p:spPr>
-          <a:xfrm>
-            <a:off x="5727500" y="1660000"/>
-            <a:ext cx="0" cy="1594000"/>
           </a:xfrm>
           <a:prstGeom prst="line">
             <a:avLst/>
@@ -4260,15 +4274,15 @@
         <p:nvCxnSpPr>
           <p:cNvPr id="30" name="Connector 29"/>
           <p:cNvCxnSpPr>
-            <a:stCxn id="10" idx="3"/>
-            <a:endCxn id="14" idx="1"/>
+            <a:stCxn id="8" idx="2"/>
+            <a:endCxn id="10" idx="0"/>
           </p:cNvCxnSpPr>
           <p:nvPr/>
         </p:nvCxnSpPr>
         <p:spPr>
-          <a:xfrm flipV="1">
-            <a:off x="6940000" y="1350000"/>
-            <a:ext cx="150000" cy="2214000"/>
+          <a:xfrm>
+            <a:off x="5727500" y="1660000"/>
+            <a:ext cx="0" cy="1930000"/>
           </a:xfrm>
           <a:prstGeom prst="line">
             <a:avLst/>
@@ -4296,15 +4310,15 @@
         <p:nvCxnSpPr>
           <p:cNvPr id="31" name="Connector 30"/>
           <p:cNvCxnSpPr>
-            <a:stCxn id="14" idx="2"/>
-            <a:endCxn id="16" idx="0"/>
+            <a:stCxn id="10" idx="3"/>
+            <a:endCxn id="14" idx="1"/>
           </p:cNvCxnSpPr>
           <p:nvPr/>
         </p:nvCxnSpPr>
         <p:spPr>
-          <a:xfrm>
-            <a:off x="8302500" y="1660000"/>
-            <a:ext cx="0" cy="1594000"/>
+          <a:xfrm flipV="1">
+            <a:off x="6940000" y="1350000"/>
+            <a:ext cx="150000" cy="2550000"/>
           </a:xfrm>
           <a:prstGeom prst="line">
             <a:avLst/>
@@ -4332,15 +4346,15 @@
         <p:nvCxnSpPr>
           <p:cNvPr id="32" name="Connector 31"/>
           <p:cNvCxnSpPr>
-            <a:stCxn id="16" idx="3"/>
-            <a:endCxn id="21" idx="1"/>
+            <a:stCxn id="14" idx="2"/>
+            <a:endCxn id="16" idx="0"/>
           </p:cNvCxnSpPr>
           <p:nvPr/>
         </p:nvCxnSpPr>
         <p:spPr>
-          <a:xfrm flipV="1">
-            <a:off x="9515000" y="1350000"/>
-            <a:ext cx="150000" cy="2214000"/>
+          <a:xfrm>
+            <a:off x="8302500" y="1660000"/>
+            <a:ext cx="0" cy="1594000"/>
           </a:xfrm>
           <a:prstGeom prst="line">
             <a:avLst/>
@@ -4368,15 +4382,15 @@
         <p:nvCxnSpPr>
           <p:cNvPr id="33" name="Connector 32"/>
           <p:cNvCxnSpPr>
-            <a:stCxn id="24" idx="3"/>
-            <a:endCxn id="4" idx="1"/>
+            <a:stCxn id="16" idx="3"/>
+            <a:endCxn id="21" idx="1"/>
           </p:cNvCxnSpPr>
           <p:nvPr/>
         </p:nvCxnSpPr>
         <p:spPr>
-          <a:xfrm>
-            <a:off x="1700000" y="1290000"/>
-            <a:ext cx="240000" cy="60000"/>
+          <a:xfrm flipV="1">
+            <a:off x="9515000" y="1350000"/>
+            <a:ext cx="150000" cy="2214000"/>
           </a:xfrm>
           <a:prstGeom prst="line">
             <a:avLst/>
@@ -4404,17 +4418,17 @@
         <p:nvCxnSpPr>
           <p:cNvPr id="34" name="Connector 33"/>
           <p:cNvCxnSpPr>
-            <a:stCxn id="25" idx="3"/>
-            <a:endCxn id="8" idx="1"/>
+            <a:stCxn id="24" idx="3"/>
+            <a:endCxn id="4" idx="1"/>
           </p:cNvCxnSpPr>
           <p:nvPr/>
         </p:nvCxnSpPr>
         <p:spPr>
-          <a:xfrm flipV="1">
-            <a:off x="1700000" y="1350000"/>
-            <a:ext cx="2815000" cy="1566666"/>
-          </a:xfrm>
-          <a:prstGeom prst="bentConnector3">
+          <a:xfrm>
+            <a:off x="1700000" y="1290000"/>
+            <a:ext cx="240000" cy="60000"/>
+          </a:xfrm>
+          <a:prstGeom prst="line">
             <a:avLst/>
           </a:prstGeom>
           <a:ln>
@@ -4440,7 +4454,7 @@
         <p:nvCxnSpPr>
           <p:cNvPr id="35" name="Connector 34"/>
           <p:cNvCxnSpPr>
-            <a:stCxn id="26" idx="3"/>
+            <a:stCxn id="25" idx="3"/>
             <a:endCxn id="8" idx="1"/>
           </p:cNvCxnSpPr>
           <p:nvPr/>
@@ -4448,7 +4462,7 @@
         <p:spPr>
           <a:xfrm flipV="1">
             <a:off x="1700000" y="1350000"/>
-            <a:ext cx="2815000" cy="3193332"/>
+            <a:ext cx="2815000" cy="1160000"/>
           </a:xfrm>
           <a:prstGeom prst="bentConnector3">
             <a:avLst/>
@@ -4476,7 +4490,7 @@
         <p:nvCxnSpPr>
           <p:cNvPr id="36" name="Connector 35"/>
           <p:cNvCxnSpPr>
-            <a:stCxn id="27" idx="3"/>
+            <a:stCxn id="26" idx="3"/>
             <a:endCxn id="8" idx="1"/>
           </p:cNvCxnSpPr>
           <p:nvPr/>
@@ -4484,7 +4498,7 @@
         <p:spPr>
           <a:xfrm flipV="1">
             <a:off x="1700000" y="1350000"/>
-            <a:ext cx="2815000" cy="4819998"/>
+            <a:ext cx="2815000" cy="2380000"/>
           </a:xfrm>
           <a:prstGeom prst="bentConnector3">
             <a:avLst/>
@@ -4512,17 +4526,17 @@
         <p:nvCxnSpPr>
           <p:cNvPr id="37" name="Connector 36"/>
           <p:cNvCxnSpPr>
-            <a:stCxn id="14" idx="2"/>
-            <a:endCxn id="18" idx="0"/>
+            <a:stCxn id="27" idx="3"/>
+            <a:endCxn id="8" idx="1"/>
           </p:cNvCxnSpPr>
           <p:nvPr/>
         </p:nvCxnSpPr>
         <p:spPr>
-          <a:xfrm>
-            <a:off x="8302500" y="1660000"/>
-            <a:ext cx="0" cy="2968000"/>
-          </a:xfrm>
-          <a:prstGeom prst="line">
+          <a:xfrm flipV="1">
+            <a:off x="1700000" y="1350000"/>
+            <a:ext cx="2815000" cy="3600000"/>
+          </a:xfrm>
+          <a:prstGeom prst="bentConnector3">
             <a:avLst/>
           </a:prstGeom>
           <a:ln>
@@ -4547,6 +4561,78 @@
       <p:cxnSp>
         <p:nvCxnSpPr>
           <p:cNvPr id="38" name="Connector 37"/>
+          <p:cNvCxnSpPr>
+            <a:stCxn id="28" idx="3"/>
+            <a:endCxn id="8" idx="1"/>
+          </p:cNvCxnSpPr>
+          <p:nvPr/>
+        </p:nvCxnSpPr>
+        <p:spPr>
+          <a:xfrm flipV="1">
+            <a:off x="1700000" y="1350000"/>
+            <a:ext cx="2815000" cy="4820000"/>
+          </a:xfrm>
+          <a:prstGeom prst="bentConnector3">
+            <a:avLst/>
+          </a:prstGeom>
+          <a:ln>
+            <a:tailEnd type="triangle"/>
+          </a:ln>
+        </p:spPr>
+        <p:style>
+          <a:lnRef idx="2">
+            <a:schemeClr val="accent1"/>
+          </a:lnRef>
+          <a:fillRef idx="0">
+            <a:schemeClr val="accent1"/>
+          </a:fillRef>
+          <a:effectRef idx="1">
+            <a:schemeClr val="accent1"/>
+          </a:effectRef>
+          <a:fontRef idx="minor">
+            <a:schemeClr val="tx1"/>
+          </a:fontRef>
+        </p:style>
+      </p:cxnSp>
+      <p:cxnSp>
+        <p:nvCxnSpPr>
+          <p:cNvPr id="39" name="Connector 38"/>
+          <p:cNvCxnSpPr>
+            <a:stCxn id="14" idx="2"/>
+            <a:endCxn id="18" idx="0"/>
+          </p:cNvCxnSpPr>
+          <p:nvPr/>
+        </p:nvCxnSpPr>
+        <p:spPr>
+          <a:xfrm>
+            <a:off x="8302500" y="1660000"/>
+            <a:ext cx="0" cy="2968000"/>
+          </a:xfrm>
+          <a:prstGeom prst="line">
+            <a:avLst/>
+          </a:prstGeom>
+          <a:ln>
+            <a:tailEnd type="triangle"/>
+          </a:ln>
+        </p:spPr>
+        <p:style>
+          <a:lnRef idx="2">
+            <a:schemeClr val="accent1"/>
+          </a:lnRef>
+          <a:fillRef idx="0">
+            <a:schemeClr val="accent1"/>
+          </a:fillRef>
+          <a:effectRef idx="1">
+            <a:schemeClr val="accent1"/>
+          </a:effectRef>
+          <a:fontRef idx="minor">
+            <a:schemeClr val="tx1"/>
+          </a:fontRef>
+        </p:style>
+      </p:cxnSp>
+      <p:cxnSp>
+        <p:nvCxnSpPr>
+          <p:cNvPr id="40" name="Connector 39"/>
           <p:cNvCxnSpPr>
             <a:stCxn id="21" idx="2"/>
             <a:endCxn id="23" idx="0"/>

--- a/In.Plan MEIO process 06-09-2026.pptx
+++ b/In.Plan MEIO process 06-09-2026.pptx
@@ -3211,7 +3211,7 @@
         <p:spPr>
           <a:xfrm>
             <a:off x="1940000" y="1760000"/>
-            <a:ext cx="2425000" cy="336000"/>
+            <a:ext cx="2425000" cy="1848000"/>
           </a:xfrm>
           <a:prstGeom prst="rect">
             <a:avLst/>
@@ -3226,7 +3226,7 @@
           <a:p>
             <a:r>
               <a:rPr sz="900" b="0"/>
-              <a:t>Анализ структуры текущих запасов</a:t>
+              <a:t>Структура текущих запасов по узлам и партиям</a:t>
             </a:r>
           </a:p>
           <a:p>
@@ -3235,11 +3235,229 @@
               <a:t>Фактические отгрузки за период</a:t>
             </a:r>
           </a:p>
-        </p:txBody>
-      </p:sp>
-      <p:sp>
-        <p:nvSpPr>
-          <p:cNvPr id="6" name="Rectangle 5"/>
+          <a:p>
+            <a:r>
+              <a:rPr sz="900" b="0"/>
+              <a:t>Остатки на руках, в заказе и в пути</a:t>
+            </a:r>
+          </a:p>
+          <a:p>
+            <a:r>
+              <a:rPr sz="900" b="0"/>
+              <a:t>Связки продукт-локация и эшелоны сети</a:t>
+            </a:r>
+          </a:p>
+          <a:p>
+            <a:r>
+              <a:rPr sz="900" b="0"/>
+              <a:t>Источники поставки, квоты и маршруты</a:t>
+            </a:r>
+          </a:p>
+          <a:p>
+            <a:r>
+              <a:rPr sz="900" b="0"/>
+              <a:t>Календари пополнения и производственные календари</a:t>
+            </a:r>
+          </a:p>
+          <a:p>
+            <a:r>
+              <a:rPr sz="900" b="0"/>
+              <a:t>Мощности хранения по температурным режимам</a:t>
+            </a:r>
+          </a:p>
+          <a:p>
+            <a:r>
+              <a:rPr sz="900" b="0"/>
+              <a:t>Незакрытый спрос и списания за период</a:t>
+            </a:r>
+          </a:p>
+        </p:txBody>
+      </p:sp>
+      <p:sp>
+        <p:nvSpPr>
+          <p:cNvPr id="6" name="Rounded Rectangle 5"/>
+          <p:cNvSpPr/>
+          <p:nvPr/>
+        </p:nvSpPr>
+        <p:spPr>
+          <a:xfrm>
+            <a:off x="1940000" y="3758000"/>
+            <a:ext cx="2425000" cy="620000"/>
+          </a:xfrm>
+          <a:prstGeom prst="roundRect">
+            <a:avLst/>
+          </a:prstGeom>
+          <a:solidFill>
+            <a:schemeClr val="accent1"/>
+          </a:solidFill>
+        </p:spPr>
+        <p:style>
+          <a:lnRef idx="1">
+            <a:schemeClr val="accent1"/>
+          </a:lnRef>
+          <a:fillRef idx="3">
+            <a:schemeClr val="accent1"/>
+          </a:fillRef>
+          <a:effectRef idx="2">
+            <a:schemeClr val="accent1"/>
+          </a:effectRef>
+          <a:fontRef idx="minor">
+            <a:schemeClr val="lt1"/>
+          </a:fontRef>
+        </p:style>
+        <p:txBody>
+          <a:bodyPr rtlCol="0" anchor="ctr" wrap="square"/>
+          <a:lstStyle/>
+          <a:p>
+            <a:pPr algn="ctr"/>
+            <a:r>
+              <a:rPr sz="1000"/>
+              <a:t>Проверка мастер-данных</a:t>
+            </a:r>
+          </a:p>
+        </p:txBody>
+      </p:sp>
+      <p:sp>
+        <p:nvSpPr>
+          <p:cNvPr id="7" name="TextBox 6"/>
+          <p:cNvSpPr txBox="1"/>
+          <p:nvPr/>
+        </p:nvSpPr>
+        <p:spPr>
+          <a:xfrm>
+            <a:off x="1940000" y="4478000"/>
+            <a:ext cx="2425000" cy="840000"/>
+          </a:xfrm>
+          <a:prstGeom prst="rect">
+            <a:avLst/>
+          </a:prstGeom>
+          <a:noFill/>
+        </p:spPr>
+        <p:txBody>
+          <a:bodyPr wrap="square">
+            <a:spAutoFit/>
+          </a:bodyPr>
+          <a:lstStyle/>
+          <a:p>
+            <a:r>
+              <a:rPr sz="900" b="0"/>
+              <a:t>Полнота карточек товара и локаций</a:t>
+            </a:r>
+          </a:p>
+          <a:p>
+            <a:r>
+              <a:rPr sz="900" b="0"/>
+              <a:t>Единицы измерения и кратности</a:t>
+            </a:r>
+          </a:p>
+          <a:p>
+            <a:r>
+              <a:rPr sz="900" b="0"/>
+              <a:t>Дубли и неактуальные записи</a:t>
+            </a:r>
+          </a:p>
+          <a:p>
+            <a:r>
+              <a:rPr sz="900" b="0"/>
+              <a:t>Атрибуты сроков годности и температурных режимов</a:t>
+            </a:r>
+          </a:p>
+        </p:txBody>
+      </p:sp>
+      <p:sp>
+        <p:nvSpPr>
+          <p:cNvPr id="8" name="Rounded Rectangle 7"/>
+          <p:cNvSpPr/>
+          <p:nvPr/>
+        </p:nvSpPr>
+        <p:spPr>
+          <a:xfrm>
+            <a:off x="1940000" y="5468000"/>
+            <a:ext cx="2425000" cy="620000"/>
+          </a:xfrm>
+          <a:prstGeom prst="roundRect">
+            <a:avLst/>
+          </a:prstGeom>
+          <a:solidFill>
+            <a:schemeClr val="accent1"/>
+          </a:solidFill>
+        </p:spPr>
+        <p:style>
+          <a:lnRef idx="1">
+            <a:schemeClr val="accent1"/>
+          </a:lnRef>
+          <a:fillRef idx="3">
+            <a:schemeClr val="accent1"/>
+          </a:fillRef>
+          <a:effectRef idx="2">
+            <a:schemeClr val="accent1"/>
+          </a:effectRef>
+          <a:fontRef idx="minor">
+            <a:schemeClr val="lt1"/>
+          </a:fontRef>
+        </p:style>
+        <p:txBody>
+          <a:bodyPr rtlCol="0" anchor="ctr" wrap="square"/>
+          <a:lstStyle/>
+          <a:p>
+            <a:pPr algn="ctr"/>
+            <a:r>
+              <a:rPr sz="1000"/>
+              <a:t>Проверка цепочки на связанность</a:t>
+            </a:r>
+          </a:p>
+        </p:txBody>
+      </p:sp>
+      <p:sp>
+        <p:nvSpPr>
+          <p:cNvPr id="9" name="TextBox 8"/>
+          <p:cNvSpPr txBox="1"/>
+          <p:nvPr/>
+        </p:nvSpPr>
+        <p:spPr>
+          <a:xfrm>
+            <a:off x="1940000" y="6188000"/>
+            <a:ext cx="2425000" cy="840000"/>
+          </a:xfrm>
+          <a:prstGeom prst="rect">
+            <a:avLst/>
+          </a:prstGeom>
+          <a:noFill/>
+        </p:spPr>
+        <p:txBody>
+          <a:bodyPr wrap="square">
+            <a:spAutoFit/>
+          </a:bodyPr>
+          <a:lstStyle/>
+          <a:p>
+            <a:r>
+              <a:rPr sz="900" b="0"/>
+              <a:t>У каждой связки продукт-локация есть источник поставки</a:t>
+            </a:r>
+          </a:p>
+          <a:p>
+            <a:r>
+              <a:rPr sz="900" b="0"/>
+              <a:t>Нет разрывов между эшелонами</a:t>
+            </a:r>
+          </a:p>
+          <a:p>
+            <a:r>
+              <a:rPr sz="900" b="0"/>
+              <a:t>Квоты и маршруты заданы для всех связей</a:t>
+            </a:r>
+          </a:p>
+          <a:p>
+            <a:r>
+              <a:rPr sz="900" b="0"/>
+              <a:t>Лидтаймы проставлены по всем дугам</a:t>
+            </a:r>
+          </a:p>
+        </p:txBody>
+      </p:sp>
+      <p:sp>
+        <p:nvSpPr>
+          <p:cNvPr id="10" name="Rectangle 9"/>
           <p:cNvSpPr/>
           <p:nvPr/>
         </p:nvSpPr>
@@ -3280,7 +3498,7 @@
       </p:sp>
       <p:sp>
         <p:nvSpPr>
-          <p:cNvPr id="7" name="TextBox 6"/>
+          <p:cNvPr id="11" name="TextBox 10"/>
           <p:cNvSpPr txBox="1"/>
           <p:nvPr/>
         </p:nvSpPr>
@@ -3309,7 +3527,7 @@
       </p:sp>
       <p:sp>
         <p:nvSpPr>
-          <p:cNvPr id="8" name="Rounded Rectangle 7"/>
+          <p:cNvPr id="12" name="Rounded Rectangle 11"/>
           <p:cNvSpPr/>
           <p:nvPr/>
         </p:nvSpPr>
@@ -3353,7 +3571,7 @@
       </p:sp>
       <p:sp>
         <p:nvSpPr>
-          <p:cNvPr id="9" name="TextBox 8"/>
+          <p:cNvPr id="13" name="TextBox 12"/>
           <p:cNvSpPr txBox="1"/>
           <p:nvPr/>
         </p:nvSpPr>
@@ -3424,7 +3642,7 @@
       </p:sp>
       <p:sp>
         <p:nvSpPr>
-          <p:cNvPr id="10" name="Rounded Rectangle 9"/>
+          <p:cNvPr id="14" name="Rounded Rectangle 13"/>
           <p:cNvSpPr/>
           <p:nvPr/>
         </p:nvSpPr>
@@ -3468,7 +3686,7 @@
       </p:sp>
       <p:sp>
         <p:nvSpPr>
-          <p:cNvPr id="11" name="TextBox 10"/>
+          <p:cNvPr id="15" name="TextBox 14"/>
           <p:cNvSpPr txBox="1"/>
           <p:nvPr/>
         </p:nvSpPr>
@@ -3521,7 +3739,7 @@
       </p:sp>
       <p:sp>
         <p:nvSpPr>
-          <p:cNvPr id="12" name="Rectangle 11"/>
+          <p:cNvPr id="16" name="Rectangle 15"/>
           <p:cNvSpPr/>
           <p:nvPr/>
         </p:nvSpPr>
@@ -3562,7 +3780,7 @@
       </p:sp>
       <p:sp>
         <p:nvSpPr>
-          <p:cNvPr id="13" name="TextBox 12"/>
+          <p:cNvPr id="17" name="TextBox 16"/>
           <p:cNvSpPr txBox="1"/>
           <p:nvPr/>
         </p:nvSpPr>
@@ -3591,7 +3809,7 @@
       </p:sp>
       <p:sp>
         <p:nvSpPr>
-          <p:cNvPr id="14" name="Rounded Rectangle 13"/>
+          <p:cNvPr id="18" name="Rounded Rectangle 17"/>
           <p:cNvSpPr/>
           <p:nvPr/>
         </p:nvSpPr>
@@ -3635,7 +3853,7 @@
       </p:sp>
       <p:sp>
         <p:nvSpPr>
-          <p:cNvPr id="15" name="TextBox 14"/>
+          <p:cNvPr id="19" name="TextBox 18"/>
           <p:cNvSpPr txBox="1"/>
           <p:nvPr/>
         </p:nvSpPr>
@@ -3700,7 +3918,7 @@
       </p:sp>
       <p:sp>
         <p:nvSpPr>
-          <p:cNvPr id="16" name="Rounded Rectangle 15"/>
+          <p:cNvPr id="20" name="Rounded Rectangle 19"/>
           <p:cNvSpPr/>
           <p:nvPr/>
         </p:nvSpPr>
@@ -3744,7 +3962,7 @@
       </p:sp>
       <p:sp>
         <p:nvSpPr>
-          <p:cNvPr id="17" name="TextBox 16"/>
+          <p:cNvPr id="21" name="TextBox 20"/>
           <p:cNvSpPr txBox="1"/>
           <p:nvPr/>
         </p:nvSpPr>
@@ -3785,7 +4003,7 @@
       </p:sp>
       <p:sp>
         <p:nvSpPr>
-          <p:cNvPr id="18" name="Rectangle 17"/>
+          <p:cNvPr id="22" name="Rectangle 21"/>
           <p:cNvSpPr/>
           <p:nvPr/>
         </p:nvSpPr>
@@ -3829,7 +4047,7 @@
       </p:sp>
       <p:sp>
         <p:nvSpPr>
-          <p:cNvPr id="19" name="Rectangle 18"/>
+          <p:cNvPr id="23" name="Rectangle 22"/>
           <p:cNvSpPr/>
           <p:nvPr/>
         </p:nvSpPr>
@@ -3870,7 +4088,7 @@
       </p:sp>
       <p:sp>
         <p:nvSpPr>
-          <p:cNvPr id="20" name="TextBox 19"/>
+          <p:cNvPr id="24" name="TextBox 23"/>
           <p:cNvSpPr txBox="1"/>
           <p:nvPr/>
         </p:nvSpPr>
@@ -3899,7 +4117,7 @@
       </p:sp>
       <p:sp>
         <p:nvSpPr>
-          <p:cNvPr id="21" name="Rounded Rectangle 20"/>
+          <p:cNvPr id="25" name="Rounded Rectangle 24"/>
           <p:cNvSpPr/>
           <p:nvPr/>
         </p:nvSpPr>
@@ -3943,7 +4161,7 @@
       </p:sp>
       <p:sp>
         <p:nvSpPr>
-          <p:cNvPr id="22" name="TextBox 21"/>
+          <p:cNvPr id="26" name="TextBox 25"/>
           <p:cNvSpPr txBox="1"/>
           <p:nvPr/>
         </p:nvSpPr>
@@ -3972,7 +4190,7 @@
       </p:sp>
       <p:sp>
         <p:nvSpPr>
-          <p:cNvPr id="23" name="Rectangle 22"/>
+          <p:cNvPr id="27" name="Rectangle 26"/>
           <p:cNvSpPr/>
           <p:nvPr/>
         </p:nvSpPr>
@@ -4016,7 +4234,7 @@
       </p:sp>
       <p:sp>
         <p:nvSpPr>
-          <p:cNvPr id="24" name="Rectangle 23"/>
+          <p:cNvPr id="28" name="Rectangle 27"/>
           <p:cNvSpPr/>
           <p:nvPr/>
         </p:nvSpPr>
@@ -4060,7 +4278,7 @@
       </p:sp>
       <p:sp>
         <p:nvSpPr>
-          <p:cNvPr id="25" name="Rectangle 24"/>
+          <p:cNvPr id="29" name="Rectangle 28"/>
           <p:cNvSpPr/>
           <p:nvPr/>
         </p:nvSpPr>
@@ -4104,7 +4322,7 @@
       </p:sp>
       <p:sp>
         <p:nvSpPr>
-          <p:cNvPr id="26" name="Rectangle 25"/>
+          <p:cNvPr id="30" name="Rectangle 29"/>
           <p:cNvSpPr/>
           <p:nvPr/>
         </p:nvSpPr>
@@ -4148,7 +4366,7 @@
       </p:sp>
       <p:sp>
         <p:nvSpPr>
-          <p:cNvPr id="27" name="Rectangle 26"/>
+          <p:cNvPr id="31" name="Rectangle 30"/>
           <p:cNvSpPr/>
           <p:nvPr/>
         </p:nvSpPr>
@@ -4192,7 +4410,7 @@
       </p:sp>
       <p:sp>
         <p:nvSpPr>
-          <p:cNvPr id="28" name="Rectangle 27"/>
+          <p:cNvPr id="32" name="Rectangle 31"/>
           <p:cNvSpPr/>
           <p:nvPr/>
         </p:nvSpPr>
@@ -4236,161 +4454,17 @@
       </p:sp>
       <p:cxnSp>
         <p:nvCxnSpPr>
-          <p:cNvPr id="29" name="Connector 28"/>
+          <p:cNvPr id="33" name="Connector 32"/>
           <p:cNvCxnSpPr>
-            <a:stCxn id="4" idx="3"/>
-            <a:endCxn id="8" idx="1"/>
+            <a:stCxn id="4" idx="2"/>
+            <a:endCxn id="6" idx="0"/>
           </p:cNvCxnSpPr>
           <p:nvPr/>
         </p:nvCxnSpPr>
         <p:spPr>
           <a:xfrm>
-            <a:off x="4365000" y="1350000"/>
-            <a:ext cx="150000" cy="0"/>
-          </a:xfrm>
-          <a:prstGeom prst="line">
-            <a:avLst/>
-          </a:prstGeom>
-          <a:ln>
-            <a:tailEnd type="triangle"/>
-          </a:ln>
-        </p:spPr>
-        <p:style>
-          <a:lnRef idx="2">
-            <a:schemeClr val="accent1"/>
-          </a:lnRef>
-          <a:fillRef idx="0">
-            <a:schemeClr val="accent1"/>
-          </a:fillRef>
-          <a:effectRef idx="1">
-            <a:schemeClr val="accent1"/>
-          </a:effectRef>
-          <a:fontRef idx="minor">
-            <a:schemeClr val="tx1"/>
-          </a:fontRef>
-        </p:style>
-      </p:cxnSp>
-      <p:cxnSp>
-        <p:nvCxnSpPr>
-          <p:cNvPr id="30" name="Connector 29"/>
-          <p:cNvCxnSpPr>
-            <a:stCxn id="8" idx="2"/>
-            <a:endCxn id="10" idx="0"/>
-          </p:cNvCxnSpPr>
-          <p:nvPr/>
-        </p:nvCxnSpPr>
-        <p:spPr>
-          <a:xfrm>
-            <a:off x="5727500" y="1660000"/>
-            <a:ext cx="0" cy="1930000"/>
-          </a:xfrm>
-          <a:prstGeom prst="line">
-            <a:avLst/>
-          </a:prstGeom>
-          <a:ln>
-            <a:tailEnd type="triangle"/>
-          </a:ln>
-        </p:spPr>
-        <p:style>
-          <a:lnRef idx="2">
-            <a:schemeClr val="accent1"/>
-          </a:lnRef>
-          <a:fillRef idx="0">
-            <a:schemeClr val="accent1"/>
-          </a:fillRef>
-          <a:effectRef idx="1">
-            <a:schemeClr val="accent1"/>
-          </a:effectRef>
-          <a:fontRef idx="minor">
-            <a:schemeClr val="tx1"/>
-          </a:fontRef>
-        </p:style>
-      </p:cxnSp>
-      <p:cxnSp>
-        <p:nvCxnSpPr>
-          <p:cNvPr id="31" name="Connector 30"/>
-          <p:cNvCxnSpPr>
-            <a:stCxn id="10" idx="3"/>
-            <a:endCxn id="14" idx="1"/>
-          </p:cNvCxnSpPr>
-          <p:nvPr/>
-        </p:nvCxnSpPr>
-        <p:spPr>
-          <a:xfrm flipV="1">
-            <a:off x="6940000" y="1350000"/>
-            <a:ext cx="150000" cy="2550000"/>
-          </a:xfrm>
-          <a:prstGeom prst="line">
-            <a:avLst/>
-          </a:prstGeom>
-          <a:ln>
-            <a:tailEnd type="triangle"/>
-          </a:ln>
-        </p:spPr>
-        <p:style>
-          <a:lnRef idx="2">
-            <a:schemeClr val="accent1"/>
-          </a:lnRef>
-          <a:fillRef idx="0">
-            <a:schemeClr val="accent1"/>
-          </a:fillRef>
-          <a:effectRef idx="1">
-            <a:schemeClr val="accent1"/>
-          </a:effectRef>
-          <a:fontRef idx="minor">
-            <a:schemeClr val="tx1"/>
-          </a:fontRef>
-        </p:style>
-      </p:cxnSp>
-      <p:cxnSp>
-        <p:nvCxnSpPr>
-          <p:cNvPr id="32" name="Connector 31"/>
-          <p:cNvCxnSpPr>
-            <a:stCxn id="14" idx="2"/>
-            <a:endCxn id="16" idx="0"/>
-          </p:cNvCxnSpPr>
-          <p:nvPr/>
-        </p:nvCxnSpPr>
-        <p:spPr>
-          <a:xfrm>
-            <a:off x="8302500" y="1660000"/>
-            <a:ext cx="0" cy="1594000"/>
-          </a:xfrm>
-          <a:prstGeom prst="line">
-            <a:avLst/>
-          </a:prstGeom>
-          <a:ln>
-            <a:tailEnd type="triangle"/>
-          </a:ln>
-        </p:spPr>
-        <p:style>
-          <a:lnRef idx="2">
-            <a:schemeClr val="accent1"/>
-          </a:lnRef>
-          <a:fillRef idx="0">
-            <a:schemeClr val="accent1"/>
-          </a:fillRef>
-          <a:effectRef idx="1">
-            <a:schemeClr val="accent1"/>
-          </a:effectRef>
-          <a:fontRef idx="minor">
-            <a:schemeClr val="tx1"/>
-          </a:fontRef>
-        </p:style>
-      </p:cxnSp>
-      <p:cxnSp>
-        <p:nvCxnSpPr>
-          <p:cNvPr id="33" name="Connector 32"/>
-          <p:cNvCxnSpPr>
-            <a:stCxn id="16" idx="3"/>
-            <a:endCxn id="21" idx="1"/>
-          </p:cNvCxnSpPr>
-          <p:nvPr/>
-        </p:nvCxnSpPr>
-        <p:spPr>
-          <a:xfrm flipV="1">
-            <a:off x="9515000" y="1350000"/>
-            <a:ext cx="150000" cy="2214000"/>
+            <a:off x="3152500" y="1660000"/>
+            <a:ext cx="0" cy="2098000"/>
           </a:xfrm>
           <a:prstGeom prst="line">
             <a:avLst/>
@@ -4418,15 +4492,15 @@
         <p:nvCxnSpPr>
           <p:cNvPr id="34" name="Connector 33"/>
           <p:cNvCxnSpPr>
-            <a:stCxn id="24" idx="3"/>
-            <a:endCxn id="4" idx="1"/>
+            <a:stCxn id="6" idx="2"/>
+            <a:endCxn id="8" idx="0"/>
           </p:cNvCxnSpPr>
           <p:nvPr/>
         </p:nvCxnSpPr>
         <p:spPr>
           <a:xfrm>
-            <a:off x="1700000" y="1290000"/>
-            <a:ext cx="240000" cy="60000"/>
+            <a:off x="3152500" y="4378000"/>
+            <a:ext cx="0" cy="1090000"/>
           </a:xfrm>
           <a:prstGeom prst="line">
             <a:avLst/>
@@ -4454,17 +4528,17 @@
         <p:nvCxnSpPr>
           <p:cNvPr id="35" name="Connector 34"/>
           <p:cNvCxnSpPr>
-            <a:stCxn id="25" idx="3"/>
-            <a:endCxn id="8" idx="1"/>
+            <a:stCxn id="8" idx="0"/>
+            <a:endCxn id="12" idx="2"/>
           </p:cNvCxnSpPr>
           <p:nvPr/>
         </p:nvCxnSpPr>
         <p:spPr>
           <a:xfrm flipV="1">
-            <a:off x="1700000" y="1350000"/>
-            <a:ext cx="2815000" cy="1160000"/>
-          </a:xfrm>
-          <a:prstGeom prst="bentConnector3">
+            <a:off x="3152500" y="1660000"/>
+            <a:ext cx="2575000" cy="3808000"/>
+          </a:xfrm>
+          <a:prstGeom prst="line">
             <a:avLst/>
           </a:prstGeom>
           <a:ln>
@@ -4490,17 +4564,17 @@
         <p:nvCxnSpPr>
           <p:cNvPr id="36" name="Connector 35"/>
           <p:cNvCxnSpPr>
-            <a:stCxn id="26" idx="3"/>
-            <a:endCxn id="8" idx="1"/>
+            <a:stCxn id="12" idx="2"/>
+            <a:endCxn id="14" idx="0"/>
           </p:cNvCxnSpPr>
           <p:nvPr/>
         </p:nvCxnSpPr>
         <p:spPr>
-          <a:xfrm flipV="1">
-            <a:off x="1700000" y="1350000"/>
-            <a:ext cx="2815000" cy="2380000"/>
-          </a:xfrm>
-          <a:prstGeom prst="bentConnector3">
+          <a:xfrm>
+            <a:off x="5727500" y="1660000"/>
+            <a:ext cx="0" cy="1930000"/>
+          </a:xfrm>
+          <a:prstGeom prst="line">
             <a:avLst/>
           </a:prstGeom>
           <a:ln>
@@ -4526,17 +4600,17 @@
         <p:nvCxnSpPr>
           <p:cNvPr id="37" name="Connector 36"/>
           <p:cNvCxnSpPr>
-            <a:stCxn id="27" idx="3"/>
-            <a:endCxn id="8" idx="1"/>
+            <a:stCxn id="14" idx="3"/>
+            <a:endCxn id="18" idx="1"/>
           </p:cNvCxnSpPr>
           <p:nvPr/>
         </p:nvCxnSpPr>
         <p:spPr>
           <a:xfrm flipV="1">
-            <a:off x="1700000" y="1350000"/>
-            <a:ext cx="2815000" cy="3600000"/>
-          </a:xfrm>
-          <a:prstGeom prst="bentConnector3">
+            <a:off x="6940000" y="1350000"/>
+            <a:ext cx="150000" cy="2550000"/>
+          </a:xfrm>
+          <a:prstGeom prst="line">
             <a:avLst/>
           </a:prstGeom>
           <a:ln>
@@ -4562,17 +4636,17 @@
         <p:nvCxnSpPr>
           <p:cNvPr id="38" name="Connector 37"/>
           <p:cNvCxnSpPr>
-            <a:stCxn id="28" idx="3"/>
-            <a:endCxn id="8" idx="1"/>
+            <a:stCxn id="18" idx="2"/>
+            <a:endCxn id="20" idx="0"/>
           </p:cNvCxnSpPr>
           <p:nvPr/>
         </p:nvCxnSpPr>
         <p:spPr>
-          <a:xfrm flipV="1">
-            <a:off x="1700000" y="1350000"/>
-            <a:ext cx="2815000" cy="4820000"/>
-          </a:xfrm>
-          <a:prstGeom prst="bentConnector3">
+          <a:xfrm>
+            <a:off x="8302500" y="1660000"/>
+            <a:ext cx="0" cy="1594000"/>
+          </a:xfrm>
+          <a:prstGeom prst="line">
             <a:avLst/>
           </a:prstGeom>
           <a:ln>
@@ -4598,15 +4672,15 @@
         <p:nvCxnSpPr>
           <p:cNvPr id="39" name="Connector 38"/>
           <p:cNvCxnSpPr>
-            <a:stCxn id="14" idx="2"/>
-            <a:endCxn id="18" idx="0"/>
+            <a:stCxn id="20" idx="3"/>
+            <a:endCxn id="25" idx="1"/>
           </p:cNvCxnSpPr>
           <p:nvPr/>
         </p:nvCxnSpPr>
         <p:spPr>
-          <a:xfrm>
-            <a:off x="8302500" y="1660000"/>
-            <a:ext cx="0" cy="2968000"/>
+          <a:xfrm flipV="1">
+            <a:off x="9515000" y="1350000"/>
+            <a:ext cx="150000" cy="2214000"/>
           </a:xfrm>
           <a:prstGeom prst="line">
             <a:avLst/>
@@ -4634,8 +4708,224 @@
         <p:nvCxnSpPr>
           <p:cNvPr id="40" name="Connector 39"/>
           <p:cNvCxnSpPr>
-            <a:stCxn id="21" idx="2"/>
-            <a:endCxn id="23" idx="0"/>
+            <a:stCxn id="28" idx="3"/>
+            <a:endCxn id="4" idx="1"/>
+          </p:cNvCxnSpPr>
+          <p:nvPr/>
+        </p:nvCxnSpPr>
+        <p:spPr>
+          <a:xfrm>
+            <a:off x="1700000" y="1290000"/>
+            <a:ext cx="240000" cy="60000"/>
+          </a:xfrm>
+          <a:prstGeom prst="line">
+            <a:avLst/>
+          </a:prstGeom>
+          <a:ln>
+            <a:tailEnd type="triangle"/>
+          </a:ln>
+        </p:spPr>
+        <p:style>
+          <a:lnRef idx="2">
+            <a:schemeClr val="accent1"/>
+          </a:lnRef>
+          <a:fillRef idx="0">
+            <a:schemeClr val="accent1"/>
+          </a:fillRef>
+          <a:effectRef idx="1">
+            <a:schemeClr val="accent1"/>
+          </a:effectRef>
+          <a:fontRef idx="minor">
+            <a:schemeClr val="tx1"/>
+          </a:fontRef>
+        </p:style>
+      </p:cxnSp>
+      <p:cxnSp>
+        <p:nvCxnSpPr>
+          <p:cNvPr id="41" name="Connector 40"/>
+          <p:cNvCxnSpPr>
+            <a:stCxn id="29" idx="3"/>
+            <a:endCxn id="12" idx="1"/>
+          </p:cNvCxnSpPr>
+          <p:nvPr/>
+        </p:nvCxnSpPr>
+        <p:spPr>
+          <a:xfrm flipV="1">
+            <a:off x="1700000" y="1350000"/>
+            <a:ext cx="2815000" cy="1160000"/>
+          </a:xfrm>
+          <a:prstGeom prst="bentConnector3">
+            <a:avLst/>
+          </a:prstGeom>
+          <a:ln>
+            <a:tailEnd type="triangle"/>
+          </a:ln>
+        </p:spPr>
+        <p:style>
+          <a:lnRef idx="2">
+            <a:schemeClr val="accent1"/>
+          </a:lnRef>
+          <a:fillRef idx="0">
+            <a:schemeClr val="accent1"/>
+          </a:fillRef>
+          <a:effectRef idx="1">
+            <a:schemeClr val="accent1"/>
+          </a:effectRef>
+          <a:fontRef idx="minor">
+            <a:schemeClr val="tx1"/>
+          </a:fontRef>
+        </p:style>
+      </p:cxnSp>
+      <p:cxnSp>
+        <p:nvCxnSpPr>
+          <p:cNvPr id="42" name="Connector 41"/>
+          <p:cNvCxnSpPr>
+            <a:stCxn id="30" idx="3"/>
+            <a:endCxn id="12" idx="1"/>
+          </p:cNvCxnSpPr>
+          <p:nvPr/>
+        </p:nvCxnSpPr>
+        <p:spPr>
+          <a:xfrm flipV="1">
+            <a:off x="1700000" y="1350000"/>
+            <a:ext cx="2815000" cy="2380000"/>
+          </a:xfrm>
+          <a:prstGeom prst="bentConnector3">
+            <a:avLst/>
+          </a:prstGeom>
+          <a:ln>
+            <a:tailEnd type="triangle"/>
+          </a:ln>
+        </p:spPr>
+        <p:style>
+          <a:lnRef idx="2">
+            <a:schemeClr val="accent1"/>
+          </a:lnRef>
+          <a:fillRef idx="0">
+            <a:schemeClr val="accent1"/>
+          </a:fillRef>
+          <a:effectRef idx="1">
+            <a:schemeClr val="accent1"/>
+          </a:effectRef>
+          <a:fontRef idx="minor">
+            <a:schemeClr val="tx1"/>
+          </a:fontRef>
+        </p:style>
+      </p:cxnSp>
+      <p:cxnSp>
+        <p:nvCxnSpPr>
+          <p:cNvPr id="43" name="Connector 42"/>
+          <p:cNvCxnSpPr>
+            <a:stCxn id="31" idx="3"/>
+            <a:endCxn id="12" idx="1"/>
+          </p:cNvCxnSpPr>
+          <p:nvPr/>
+        </p:nvCxnSpPr>
+        <p:spPr>
+          <a:xfrm flipV="1">
+            <a:off x="1700000" y="1350000"/>
+            <a:ext cx="2815000" cy="3600000"/>
+          </a:xfrm>
+          <a:prstGeom prst="bentConnector3">
+            <a:avLst/>
+          </a:prstGeom>
+          <a:ln>
+            <a:tailEnd type="triangle"/>
+          </a:ln>
+        </p:spPr>
+        <p:style>
+          <a:lnRef idx="2">
+            <a:schemeClr val="accent1"/>
+          </a:lnRef>
+          <a:fillRef idx="0">
+            <a:schemeClr val="accent1"/>
+          </a:fillRef>
+          <a:effectRef idx="1">
+            <a:schemeClr val="accent1"/>
+          </a:effectRef>
+          <a:fontRef idx="minor">
+            <a:schemeClr val="tx1"/>
+          </a:fontRef>
+        </p:style>
+      </p:cxnSp>
+      <p:cxnSp>
+        <p:nvCxnSpPr>
+          <p:cNvPr id="44" name="Connector 43"/>
+          <p:cNvCxnSpPr>
+            <a:stCxn id="32" idx="3"/>
+            <a:endCxn id="12" idx="1"/>
+          </p:cNvCxnSpPr>
+          <p:nvPr/>
+        </p:nvCxnSpPr>
+        <p:spPr>
+          <a:xfrm flipV="1">
+            <a:off x="1700000" y="1350000"/>
+            <a:ext cx="2815000" cy="4820000"/>
+          </a:xfrm>
+          <a:prstGeom prst="bentConnector3">
+            <a:avLst/>
+          </a:prstGeom>
+          <a:ln>
+            <a:tailEnd type="triangle"/>
+          </a:ln>
+        </p:spPr>
+        <p:style>
+          <a:lnRef idx="2">
+            <a:schemeClr val="accent1"/>
+          </a:lnRef>
+          <a:fillRef idx="0">
+            <a:schemeClr val="accent1"/>
+          </a:fillRef>
+          <a:effectRef idx="1">
+            <a:schemeClr val="accent1"/>
+          </a:effectRef>
+          <a:fontRef idx="minor">
+            <a:schemeClr val="tx1"/>
+          </a:fontRef>
+        </p:style>
+      </p:cxnSp>
+      <p:cxnSp>
+        <p:nvCxnSpPr>
+          <p:cNvPr id="45" name="Connector 44"/>
+          <p:cNvCxnSpPr>
+            <a:stCxn id="18" idx="2"/>
+            <a:endCxn id="22" idx="0"/>
+          </p:cNvCxnSpPr>
+          <p:nvPr/>
+        </p:nvCxnSpPr>
+        <p:spPr>
+          <a:xfrm>
+            <a:off x="8302500" y="1660000"/>
+            <a:ext cx="0" cy="2968000"/>
+          </a:xfrm>
+          <a:prstGeom prst="line">
+            <a:avLst/>
+          </a:prstGeom>
+          <a:ln>
+            <a:tailEnd type="triangle"/>
+          </a:ln>
+        </p:spPr>
+        <p:style>
+          <a:lnRef idx="2">
+            <a:schemeClr val="accent1"/>
+          </a:lnRef>
+          <a:fillRef idx="0">
+            <a:schemeClr val="accent1"/>
+          </a:fillRef>
+          <a:effectRef idx="1">
+            <a:schemeClr val="accent1"/>
+          </a:effectRef>
+          <a:fontRef idx="minor">
+            <a:schemeClr val="tx1"/>
+          </a:fontRef>
+        </p:style>
+      </p:cxnSp>
+      <p:cxnSp>
+        <p:nvCxnSpPr>
+          <p:cNvPr id="46" name="Connector 45"/>
+          <p:cNvCxnSpPr>
+            <a:stCxn id="25" idx="2"/>
+            <a:endCxn id="27" idx="0"/>
           </p:cNvCxnSpPr>
           <p:nvPr/>
         </p:nvCxnSpPr>

--- a/In.Plan MEIO process 06-09-2026.pptx
+++ b/In.Plan MEIO process 06-09-2026.pptx
@@ -3969,7 +3969,7 @@
         <p:spPr>
           <a:xfrm>
             <a:off x="7090000" y="3974000"/>
-            <a:ext cx="2425000" cy="504000"/>
+            <a:ext cx="2425000" cy="1344000"/>
           </a:xfrm>
           <a:prstGeom prst="rect">
             <a:avLst/>
@@ -3984,32 +3984,141 @@
           <a:p>
             <a:r>
               <a:rPr sz="900" b="0"/>
-              <a:t>Сценарное моделирование, 3 сценария</a:t>
+              <a:t>Пересчёт по фильтрам: склад, канал, категория, сегмент</a:t>
             </a:r>
           </a:p>
           <a:p>
             <a:r>
               <a:rPr sz="900" b="0"/>
-              <a:t>Изменение политик пополнения</a:t>
+              <a:t>Изменение целевого уровня сервиса</a:t>
             </a:r>
           </a:p>
           <a:p>
             <a:r>
               <a:rPr sz="900" b="0"/>
-              <a:t>Интерпретация и корректировка</a:t>
-            </a:r>
-          </a:p>
-        </p:txBody>
-      </p:sp>
-      <p:sp>
-        <p:nvSpPr>
-          <p:cNvPr id="22" name="Rectangle 21"/>
+              <a:t>Изменение политики пополнения: частота, размер партии, кратность</a:t>
+            </a:r>
+          </a:p>
+          <a:p>
+            <a:r>
+              <a:rPr sz="900" b="0"/>
+              <a:t>Изменение лидтаймов и их отклонений</a:t>
+            </a:r>
+          </a:p>
+          <a:p>
+            <a:r>
+              <a:rPr sz="900" b="0"/>
+              <a:t>Ограничение по мощностям хранения</a:t>
+            </a:r>
+          </a:p>
+          <a:p>
+            <a:r>
+              <a:rPr sz="900" b="0"/>
+              <a:t>Ограничение по бюджету запаса</a:t>
+            </a:r>
+          </a:p>
+        </p:txBody>
+      </p:sp>
+      <p:sp>
+        <p:nvSpPr>
+          <p:cNvPr id="22" name="Rounded Rectangle 21"/>
           <p:cNvSpPr/>
           <p:nvPr/>
         </p:nvSpPr>
         <p:spPr>
           <a:xfrm>
-            <a:off x="7090000" y="4628000"/>
+            <a:off x="7090000" y="5468000"/>
+            <a:ext cx="2425000" cy="620000"/>
+          </a:xfrm>
+          <a:prstGeom prst="roundRect">
+            <a:avLst/>
+          </a:prstGeom>
+          <a:solidFill>
+            <a:schemeClr val="accent1"/>
+          </a:solidFill>
+        </p:spPr>
+        <p:style>
+          <a:lnRef idx="1">
+            <a:schemeClr val="accent1"/>
+          </a:lnRef>
+          <a:fillRef idx="3">
+            <a:schemeClr val="accent1"/>
+          </a:fillRef>
+          <a:effectRef idx="2">
+            <a:schemeClr val="accent1"/>
+          </a:effectRef>
+          <a:fontRef idx="minor">
+            <a:schemeClr val="lt1"/>
+          </a:fontRef>
+        </p:style>
+        <p:txBody>
+          <a:bodyPr rtlCol="0" anchor="ctr" wrap="square"/>
+          <a:lstStyle/>
+          <a:p>
+            <a:pPr algn="ctr"/>
+            <a:r>
+              <a:rPr sz="1000"/>
+              <a:t>Анализ предупреждений расчёта</a:t>
+            </a:r>
+          </a:p>
+        </p:txBody>
+      </p:sp>
+      <p:sp>
+        <p:nvSpPr>
+          <p:cNvPr id="23" name="TextBox 22"/>
+          <p:cNvSpPr txBox="1"/>
+          <p:nvPr/>
+        </p:nvSpPr>
+        <p:spPr>
+          <a:xfrm>
+            <a:off x="7090000" y="6188000"/>
+            <a:ext cx="2425000" cy="1344000"/>
+          </a:xfrm>
+          <a:prstGeom prst="rect">
+            <a:avLst/>
+          </a:prstGeom>
+          <a:noFill/>
+        </p:spPr>
+        <p:txBody>
+          <a:bodyPr wrap="square">
+            <a:spAutoFit/>
+          </a:bodyPr>
+          <a:lstStyle/>
+          <a:p>
+            <a:r>
+              <a:rPr sz="900" b="0"/>
+              <a:t>Предупреждение: покрытие превышает остаточный срок годности</a:t>
+            </a:r>
+          </a:p>
+          <a:p>
+            <a:r>
+              <a:rPr sz="900" b="0"/>
+              <a:t>Предупреждение: рекомендованный уровень ниже минимальной партии</a:t>
+            </a:r>
+          </a:p>
+          <a:p>
+            <a:r>
+              <a:rPr sz="900" b="0"/>
+              <a:t>Предупреждение: целевой запас не помещается в мощности хранения</a:t>
+            </a:r>
+          </a:p>
+          <a:p>
+            <a:r>
+              <a:rPr sz="900" b="0"/>
+              <a:t>Предупреждение: отклонение от целевого уровня сервиса</a:t>
+            </a:r>
+          </a:p>
+        </p:txBody>
+      </p:sp>
+      <p:sp>
+        <p:nvSpPr>
+          <p:cNvPr id="24" name="Rectangle 23"/>
+          <p:cNvSpPr/>
+          <p:nvPr/>
+        </p:nvSpPr>
+        <p:spPr>
+          <a:xfrm>
+            <a:off x="7090000" y="7682000"/>
             <a:ext cx="2425000" cy="620000"/>
           </a:xfrm>
           <a:prstGeom prst="rect">
@@ -4047,7 +4156,7 @@
       </p:sp>
       <p:sp>
         <p:nvSpPr>
-          <p:cNvPr id="23" name="Rectangle 22"/>
+          <p:cNvPr id="25" name="Rectangle 24"/>
           <p:cNvSpPr/>
           <p:nvPr/>
         </p:nvSpPr>
@@ -4088,7 +4197,7 @@
       </p:sp>
       <p:sp>
         <p:nvSpPr>
-          <p:cNvPr id="24" name="TextBox 23"/>
+          <p:cNvPr id="26" name="TextBox 25"/>
           <p:cNvSpPr txBox="1"/>
           <p:nvPr/>
         </p:nvSpPr>
@@ -4117,7 +4226,7 @@
       </p:sp>
       <p:sp>
         <p:nvSpPr>
-          <p:cNvPr id="25" name="Rounded Rectangle 24"/>
+          <p:cNvPr id="27" name="Rounded Rectangle 26"/>
           <p:cNvSpPr/>
           <p:nvPr/>
         </p:nvSpPr>
@@ -4161,7 +4270,7 @@
       </p:sp>
       <p:sp>
         <p:nvSpPr>
-          <p:cNvPr id="26" name="TextBox 25"/>
+          <p:cNvPr id="28" name="TextBox 27"/>
           <p:cNvSpPr txBox="1"/>
           <p:nvPr/>
         </p:nvSpPr>
@@ -4190,7 +4299,7 @@
       </p:sp>
       <p:sp>
         <p:nvSpPr>
-          <p:cNvPr id="27" name="Rectangle 26"/>
+          <p:cNvPr id="29" name="Rectangle 28"/>
           <p:cNvSpPr/>
           <p:nvPr/>
         </p:nvSpPr>
@@ -4234,7 +4343,7 @@
       </p:sp>
       <p:sp>
         <p:nvSpPr>
-          <p:cNvPr id="28" name="Rectangle 27"/>
+          <p:cNvPr id="30" name="Rectangle 29"/>
           <p:cNvSpPr/>
           <p:nvPr/>
         </p:nvSpPr>
@@ -4278,7 +4387,7 @@
       </p:sp>
       <p:sp>
         <p:nvSpPr>
-          <p:cNvPr id="29" name="Rectangle 28"/>
+          <p:cNvPr id="31" name="Rectangle 30"/>
           <p:cNvSpPr/>
           <p:nvPr/>
         </p:nvSpPr>
@@ -4322,7 +4431,7 @@
       </p:sp>
       <p:sp>
         <p:nvSpPr>
-          <p:cNvPr id="30" name="Rectangle 29"/>
+          <p:cNvPr id="32" name="Rectangle 31"/>
           <p:cNvSpPr/>
           <p:nvPr/>
         </p:nvSpPr>
@@ -4366,7 +4475,7 @@
       </p:sp>
       <p:sp>
         <p:nvSpPr>
-          <p:cNvPr id="31" name="Rectangle 30"/>
+          <p:cNvPr id="33" name="Rectangle 32"/>
           <p:cNvSpPr/>
           <p:nvPr/>
         </p:nvSpPr>
@@ -4410,7 +4519,7 @@
       </p:sp>
       <p:sp>
         <p:nvSpPr>
-          <p:cNvPr id="32" name="Rectangle 31"/>
+          <p:cNvPr id="34" name="Rectangle 33"/>
           <p:cNvSpPr/>
           <p:nvPr/>
         </p:nvSpPr>
@@ -4454,7 +4563,7 @@
       </p:sp>
       <p:cxnSp>
         <p:nvCxnSpPr>
-          <p:cNvPr id="33" name="Connector 32"/>
+          <p:cNvPr id="35" name="Connector 34"/>
           <p:cNvCxnSpPr>
             <a:stCxn id="4" idx="2"/>
             <a:endCxn id="6" idx="0"/>
@@ -4465,78 +4574,6 @@
           <a:xfrm>
             <a:off x="3152500" y="1660000"/>
             <a:ext cx="0" cy="2098000"/>
-          </a:xfrm>
-          <a:prstGeom prst="line">
-            <a:avLst/>
-          </a:prstGeom>
-          <a:ln>
-            <a:tailEnd type="triangle"/>
-          </a:ln>
-        </p:spPr>
-        <p:style>
-          <a:lnRef idx="2">
-            <a:schemeClr val="accent1"/>
-          </a:lnRef>
-          <a:fillRef idx="0">
-            <a:schemeClr val="accent1"/>
-          </a:fillRef>
-          <a:effectRef idx="1">
-            <a:schemeClr val="accent1"/>
-          </a:effectRef>
-          <a:fontRef idx="minor">
-            <a:schemeClr val="tx1"/>
-          </a:fontRef>
-        </p:style>
-      </p:cxnSp>
-      <p:cxnSp>
-        <p:nvCxnSpPr>
-          <p:cNvPr id="34" name="Connector 33"/>
-          <p:cNvCxnSpPr>
-            <a:stCxn id="6" idx="2"/>
-            <a:endCxn id="8" idx="0"/>
-          </p:cNvCxnSpPr>
-          <p:nvPr/>
-        </p:nvCxnSpPr>
-        <p:spPr>
-          <a:xfrm>
-            <a:off x="3152500" y="4378000"/>
-            <a:ext cx="0" cy="1090000"/>
-          </a:xfrm>
-          <a:prstGeom prst="line">
-            <a:avLst/>
-          </a:prstGeom>
-          <a:ln>
-            <a:tailEnd type="triangle"/>
-          </a:ln>
-        </p:spPr>
-        <p:style>
-          <a:lnRef idx="2">
-            <a:schemeClr val="accent1"/>
-          </a:lnRef>
-          <a:fillRef idx="0">
-            <a:schemeClr val="accent1"/>
-          </a:fillRef>
-          <a:effectRef idx="1">
-            <a:schemeClr val="accent1"/>
-          </a:effectRef>
-          <a:fontRef idx="minor">
-            <a:schemeClr val="tx1"/>
-          </a:fontRef>
-        </p:style>
-      </p:cxnSp>
-      <p:cxnSp>
-        <p:nvCxnSpPr>
-          <p:cNvPr id="35" name="Connector 34"/>
-          <p:cNvCxnSpPr>
-            <a:stCxn id="8" idx="0"/>
-            <a:endCxn id="12" idx="2"/>
-          </p:cNvCxnSpPr>
-          <p:nvPr/>
-        </p:nvCxnSpPr>
-        <p:spPr>
-          <a:xfrm flipV="1">
-            <a:off x="3152500" y="1660000"/>
-            <a:ext cx="2575000" cy="3808000"/>
           </a:xfrm>
           <a:prstGeom prst="line">
             <a:avLst/>
@@ -4564,15 +4601,15 @@
         <p:nvCxnSpPr>
           <p:cNvPr id="36" name="Connector 35"/>
           <p:cNvCxnSpPr>
-            <a:stCxn id="12" idx="2"/>
-            <a:endCxn id="14" idx="0"/>
+            <a:stCxn id="6" idx="2"/>
+            <a:endCxn id="8" idx="0"/>
           </p:cNvCxnSpPr>
           <p:nvPr/>
         </p:nvCxnSpPr>
         <p:spPr>
           <a:xfrm>
-            <a:off x="5727500" y="1660000"/>
-            <a:ext cx="0" cy="1930000"/>
+            <a:off x="3152500" y="4378000"/>
+            <a:ext cx="0" cy="1090000"/>
           </a:xfrm>
           <a:prstGeom prst="line">
             <a:avLst/>
@@ -4600,15 +4637,15 @@
         <p:nvCxnSpPr>
           <p:cNvPr id="37" name="Connector 36"/>
           <p:cNvCxnSpPr>
-            <a:stCxn id="14" idx="3"/>
-            <a:endCxn id="18" idx="1"/>
+            <a:stCxn id="8" idx="0"/>
+            <a:endCxn id="12" idx="2"/>
           </p:cNvCxnSpPr>
           <p:nvPr/>
         </p:nvCxnSpPr>
         <p:spPr>
           <a:xfrm flipV="1">
-            <a:off x="6940000" y="1350000"/>
-            <a:ext cx="150000" cy="2550000"/>
+            <a:off x="3152500" y="1660000"/>
+            <a:ext cx="2575000" cy="3808000"/>
           </a:xfrm>
           <a:prstGeom prst="line">
             <a:avLst/>
@@ -4636,15 +4673,15 @@
         <p:nvCxnSpPr>
           <p:cNvPr id="38" name="Connector 37"/>
           <p:cNvCxnSpPr>
-            <a:stCxn id="18" idx="2"/>
-            <a:endCxn id="20" idx="0"/>
+            <a:stCxn id="12" idx="2"/>
+            <a:endCxn id="14" idx="0"/>
           </p:cNvCxnSpPr>
           <p:nvPr/>
         </p:nvCxnSpPr>
         <p:spPr>
           <a:xfrm>
-            <a:off x="8302500" y="1660000"/>
-            <a:ext cx="0" cy="1594000"/>
+            <a:off x="5727500" y="1660000"/>
+            <a:ext cx="0" cy="1930000"/>
           </a:xfrm>
           <a:prstGeom prst="line">
             <a:avLst/>
@@ -4672,15 +4709,15 @@
         <p:nvCxnSpPr>
           <p:cNvPr id="39" name="Connector 38"/>
           <p:cNvCxnSpPr>
-            <a:stCxn id="20" idx="3"/>
-            <a:endCxn id="25" idx="1"/>
+            <a:stCxn id="14" idx="3"/>
+            <a:endCxn id="18" idx="1"/>
           </p:cNvCxnSpPr>
           <p:nvPr/>
         </p:nvCxnSpPr>
         <p:spPr>
           <a:xfrm flipV="1">
-            <a:off x="9515000" y="1350000"/>
-            <a:ext cx="150000" cy="2214000"/>
+            <a:off x="6940000" y="1350000"/>
+            <a:ext cx="150000" cy="2550000"/>
           </a:xfrm>
           <a:prstGeom prst="line">
             <a:avLst/>
@@ -4708,15 +4745,15 @@
         <p:nvCxnSpPr>
           <p:cNvPr id="40" name="Connector 39"/>
           <p:cNvCxnSpPr>
-            <a:stCxn id="28" idx="3"/>
-            <a:endCxn id="4" idx="1"/>
+            <a:stCxn id="18" idx="2"/>
+            <a:endCxn id="20" idx="0"/>
           </p:cNvCxnSpPr>
           <p:nvPr/>
         </p:nvCxnSpPr>
         <p:spPr>
           <a:xfrm>
-            <a:off x="1700000" y="1290000"/>
-            <a:ext cx="240000" cy="60000"/>
+            <a:off x="8302500" y="1660000"/>
+            <a:ext cx="0" cy="1594000"/>
           </a:xfrm>
           <a:prstGeom prst="line">
             <a:avLst/>
@@ -4744,17 +4781,17 @@
         <p:nvCxnSpPr>
           <p:cNvPr id="41" name="Connector 40"/>
           <p:cNvCxnSpPr>
-            <a:stCxn id="29" idx="3"/>
-            <a:endCxn id="12" idx="1"/>
+            <a:stCxn id="20" idx="3"/>
+            <a:endCxn id="27" idx="1"/>
           </p:cNvCxnSpPr>
           <p:nvPr/>
         </p:nvCxnSpPr>
         <p:spPr>
           <a:xfrm flipV="1">
-            <a:off x="1700000" y="1350000"/>
-            <a:ext cx="2815000" cy="1160000"/>
-          </a:xfrm>
-          <a:prstGeom prst="bentConnector3">
+            <a:off x="9515000" y="1350000"/>
+            <a:ext cx="150000" cy="2214000"/>
+          </a:xfrm>
+          <a:prstGeom prst="line">
             <a:avLst/>
           </a:prstGeom>
           <a:ln>
@@ -4780,17 +4817,17 @@
         <p:nvCxnSpPr>
           <p:cNvPr id="42" name="Connector 41"/>
           <p:cNvCxnSpPr>
-            <a:stCxn id="30" idx="3"/>
-            <a:endCxn id="12" idx="1"/>
+            <a:stCxn id="20" idx="2"/>
+            <a:endCxn id="22" idx="0"/>
           </p:cNvCxnSpPr>
           <p:nvPr/>
         </p:nvCxnSpPr>
         <p:spPr>
-          <a:xfrm flipV="1">
-            <a:off x="1700000" y="1350000"/>
-            <a:ext cx="2815000" cy="2380000"/>
-          </a:xfrm>
-          <a:prstGeom prst="bentConnector3">
+          <a:xfrm>
+            <a:off x="8302500" y="3874000"/>
+            <a:ext cx="0" cy="1594000"/>
+          </a:xfrm>
+          <a:prstGeom prst="line">
             <a:avLst/>
           </a:prstGeom>
           <a:ln>
@@ -4816,17 +4853,17 @@
         <p:nvCxnSpPr>
           <p:cNvPr id="43" name="Connector 42"/>
           <p:cNvCxnSpPr>
-            <a:stCxn id="31" idx="3"/>
-            <a:endCxn id="12" idx="1"/>
+            <a:stCxn id="30" idx="3"/>
+            <a:endCxn id="4" idx="1"/>
           </p:cNvCxnSpPr>
           <p:nvPr/>
         </p:nvCxnSpPr>
         <p:spPr>
-          <a:xfrm flipV="1">
-            <a:off x="1700000" y="1350000"/>
-            <a:ext cx="2815000" cy="3600000"/>
-          </a:xfrm>
-          <a:prstGeom prst="bentConnector3">
+          <a:xfrm>
+            <a:off x="1700000" y="1290000"/>
+            <a:ext cx="240000" cy="60000"/>
+          </a:xfrm>
+          <a:prstGeom prst="line">
             <a:avLst/>
           </a:prstGeom>
           <a:ln>
@@ -4852,7 +4889,7 @@
         <p:nvCxnSpPr>
           <p:cNvPr id="44" name="Connector 43"/>
           <p:cNvCxnSpPr>
-            <a:stCxn id="32" idx="3"/>
+            <a:stCxn id="31" idx="3"/>
             <a:endCxn id="12" idx="1"/>
           </p:cNvCxnSpPr>
           <p:nvPr/>
@@ -4860,7 +4897,7 @@
         <p:spPr>
           <a:xfrm flipV="1">
             <a:off x="1700000" y="1350000"/>
-            <a:ext cx="2815000" cy="4820000"/>
+            <a:ext cx="2815000" cy="1160000"/>
           </a:xfrm>
           <a:prstGeom prst="bentConnector3">
             <a:avLst/>
@@ -4888,17 +4925,17 @@
         <p:nvCxnSpPr>
           <p:cNvPr id="45" name="Connector 44"/>
           <p:cNvCxnSpPr>
-            <a:stCxn id="18" idx="2"/>
-            <a:endCxn id="22" idx="0"/>
+            <a:stCxn id="32" idx="3"/>
+            <a:endCxn id="12" idx="1"/>
           </p:cNvCxnSpPr>
           <p:nvPr/>
         </p:nvCxnSpPr>
         <p:spPr>
-          <a:xfrm>
-            <a:off x="8302500" y="1660000"/>
-            <a:ext cx="0" cy="2968000"/>
-          </a:xfrm>
-          <a:prstGeom prst="line">
+          <a:xfrm flipV="1">
+            <a:off x="1700000" y="1350000"/>
+            <a:ext cx="2815000" cy="2380000"/>
+          </a:xfrm>
+          <a:prstGeom prst="bentConnector3">
             <a:avLst/>
           </a:prstGeom>
           <a:ln>
@@ -4924,8 +4961,116 @@
         <p:nvCxnSpPr>
           <p:cNvPr id="46" name="Connector 45"/>
           <p:cNvCxnSpPr>
-            <a:stCxn id="25" idx="2"/>
-            <a:endCxn id="27" idx="0"/>
+            <a:stCxn id="33" idx="3"/>
+            <a:endCxn id="12" idx="1"/>
+          </p:cNvCxnSpPr>
+          <p:nvPr/>
+        </p:nvCxnSpPr>
+        <p:spPr>
+          <a:xfrm flipV="1">
+            <a:off x="1700000" y="1350000"/>
+            <a:ext cx="2815000" cy="3600000"/>
+          </a:xfrm>
+          <a:prstGeom prst="bentConnector3">
+            <a:avLst/>
+          </a:prstGeom>
+          <a:ln>
+            <a:tailEnd type="triangle"/>
+          </a:ln>
+        </p:spPr>
+        <p:style>
+          <a:lnRef idx="2">
+            <a:schemeClr val="accent1"/>
+          </a:lnRef>
+          <a:fillRef idx="0">
+            <a:schemeClr val="accent1"/>
+          </a:fillRef>
+          <a:effectRef idx="1">
+            <a:schemeClr val="accent1"/>
+          </a:effectRef>
+          <a:fontRef idx="minor">
+            <a:schemeClr val="tx1"/>
+          </a:fontRef>
+        </p:style>
+      </p:cxnSp>
+      <p:cxnSp>
+        <p:nvCxnSpPr>
+          <p:cNvPr id="47" name="Connector 46"/>
+          <p:cNvCxnSpPr>
+            <a:stCxn id="34" idx="3"/>
+            <a:endCxn id="12" idx="1"/>
+          </p:cNvCxnSpPr>
+          <p:nvPr/>
+        </p:nvCxnSpPr>
+        <p:spPr>
+          <a:xfrm flipV="1">
+            <a:off x="1700000" y="1350000"/>
+            <a:ext cx="2815000" cy="4820000"/>
+          </a:xfrm>
+          <a:prstGeom prst="bentConnector3">
+            <a:avLst/>
+          </a:prstGeom>
+          <a:ln>
+            <a:tailEnd type="triangle"/>
+          </a:ln>
+        </p:spPr>
+        <p:style>
+          <a:lnRef idx="2">
+            <a:schemeClr val="accent1"/>
+          </a:lnRef>
+          <a:fillRef idx="0">
+            <a:schemeClr val="accent1"/>
+          </a:fillRef>
+          <a:effectRef idx="1">
+            <a:schemeClr val="accent1"/>
+          </a:effectRef>
+          <a:fontRef idx="minor">
+            <a:schemeClr val="tx1"/>
+          </a:fontRef>
+        </p:style>
+      </p:cxnSp>
+      <p:cxnSp>
+        <p:nvCxnSpPr>
+          <p:cNvPr id="48" name="Connector 47"/>
+          <p:cNvCxnSpPr>
+            <a:stCxn id="18" idx="2"/>
+            <a:endCxn id="24" idx="0"/>
+          </p:cNvCxnSpPr>
+          <p:nvPr/>
+        </p:nvCxnSpPr>
+        <p:spPr>
+          <a:xfrm>
+            <a:off x="8302500" y="1660000"/>
+            <a:ext cx="0" cy="6022000"/>
+          </a:xfrm>
+          <a:prstGeom prst="line">
+            <a:avLst/>
+          </a:prstGeom>
+          <a:ln>
+            <a:tailEnd type="triangle"/>
+          </a:ln>
+        </p:spPr>
+        <p:style>
+          <a:lnRef idx="2">
+            <a:schemeClr val="accent1"/>
+          </a:lnRef>
+          <a:fillRef idx="0">
+            <a:schemeClr val="accent1"/>
+          </a:fillRef>
+          <a:effectRef idx="1">
+            <a:schemeClr val="accent1"/>
+          </a:effectRef>
+          <a:fontRef idx="minor">
+            <a:schemeClr val="tx1"/>
+          </a:fontRef>
+        </p:style>
+      </p:cxnSp>
+      <p:cxnSp>
+        <p:nvCxnSpPr>
+          <p:cNvPr id="49" name="Connector 48"/>
+          <p:cNvCxnSpPr>
+            <a:stCxn id="27" idx="2"/>
+            <a:endCxn id="29" idx="0"/>
           </p:cNvCxnSpPr>
           <p:nvPr/>
         </p:nvCxnSpPr>

--- a/In.Plan MEIO process 06-09-2026.pptx
+++ b/In.Plan MEIO process 06-09-2026.pptx
@@ -3969,7 +3969,7 @@
         <p:spPr>
           <a:xfrm>
             <a:off x="7090000" y="3974000"/>
-            <a:ext cx="2425000" cy="1344000"/>
+            <a:ext cx="2425000" cy="1848000"/>
           </a:xfrm>
           <a:prstGeom prst="rect">
             <a:avLst/>
@@ -3984,37 +3984,49 @@
           <a:p>
             <a:r>
               <a:rPr sz="900" b="0"/>
+              <a:t>База (as is): текущие политики и параметры</a:t>
+            </a:r>
+          </a:p>
+          <a:p>
+            <a:r>
+              <a:rPr sz="900" b="0"/>
               <a:t>Пересчёт по фильтрам: склад, канал, категория, сегмент</a:t>
             </a:r>
           </a:p>
           <a:p>
             <a:r>
               <a:rPr sz="900" b="0"/>
-              <a:t>Изменение целевого уровня сервиса</a:t>
+              <a:t>Сервис 98% по федеральным сетям</a:t>
             </a:r>
           </a:p>
           <a:p>
             <a:r>
               <a:rPr sz="900" b="0"/>
-              <a:t>Изменение политики пополнения: частота, размер партии, кратность</a:t>
+              <a:t>Учащённое пополнение охлаждённой продукции</a:t>
             </a:r>
           </a:p>
           <a:p>
             <a:r>
               <a:rPr sz="900" b="0"/>
-              <a:t>Изменение лидтаймов и их отклонений</a:t>
+              <a:t>Сокращение лидтайма и его разброса</a:t>
             </a:r>
           </a:p>
           <a:p>
             <a:r>
               <a:rPr sz="900" b="0"/>
-              <a:t>Ограничение по мощностям хранения</a:t>
+              <a:t>Ограничение по мощностям холода</a:t>
             </a:r>
           </a:p>
           <a:p>
             <a:r>
               <a:rPr sz="900" b="0"/>
-              <a:t>Ограничение по бюджету запаса</a:t>
+              <a:t>Бюджет запаса −15%</a:t>
+            </a:r>
+          </a:p>
+          <a:p>
+            <a:r>
+              <a:rPr sz="900" b="0"/>
+              <a:t>Сезонный пик: май–сентябрь</a:t>
             </a:r>
           </a:p>
         </p:txBody>
@@ -4027,7 +4039,7 @@
         </p:nvSpPr>
         <p:spPr>
           <a:xfrm>
-            <a:off x="7090000" y="5468000"/>
+            <a:off x="7090000" y="5972000"/>
             <a:ext cx="2425000" cy="620000"/>
           </a:xfrm>
           <a:prstGeom prst="roundRect">
@@ -4071,7 +4083,7 @@
         </p:nvSpPr>
         <p:spPr>
           <a:xfrm>
-            <a:off x="7090000" y="6188000"/>
+            <a:off x="7090000" y="6692000"/>
             <a:ext cx="2425000" cy="1344000"/>
           </a:xfrm>
           <a:prstGeom prst="rect">
@@ -4118,7 +4130,7 @@
         </p:nvSpPr>
         <p:spPr>
           <a:xfrm>
-            <a:off x="7090000" y="7682000"/>
+            <a:off x="7090000" y="8186000"/>
             <a:ext cx="2425000" cy="620000"/>
           </a:xfrm>
           <a:prstGeom prst="rect">
@@ -4825,7 +4837,7 @@
         <p:spPr>
           <a:xfrm>
             <a:off x="8302500" y="3874000"/>
-            <a:ext cx="0" cy="1594000"/>
+            <a:ext cx="0" cy="2098000"/>
           </a:xfrm>
           <a:prstGeom prst="line">
             <a:avLst/>
@@ -5041,7 +5053,7 @@
         <p:spPr>
           <a:xfrm>
             <a:off x="8302500" y="1660000"/>
-            <a:ext cx="0" cy="6022000"/>
+            <a:ext cx="0" cy="6526000"/>
           </a:xfrm>
           <a:prstGeom prst="line">
             <a:avLst/>

--- a/In.Plan MEIO process 06-09-2026.pptx
+++ b/In.Plan MEIO process 06-09-2026.pptx
@@ -7,7 +7,7 @@
   <p:sldIdLst>
     <p:sldId id="256" r:id="rId7"/>
   </p:sldIdLst>
-  <p:sldSz cx="12192000" cy="6858000" type="screen4x3"/>
+  <p:sldSz cx="12192000" cy="12080000" type="screen4x3"/>
   <p:notesSz cx="6858000" cy="9144000"/>
   <p:defaultTextStyle>
     <a:defPPr>
@@ -3097,7 +3097,7 @@
         <p:spPr>
           <a:xfrm>
             <a:off x="1880000" y="980000"/>
-            <a:ext cx="2545000" cy="5500000"/>
+            <a:ext cx="2545000" cy="11000000"/>
           </a:xfrm>
           <a:prstGeom prst="rect">
             <a:avLst/>
@@ -3464,7 +3464,7 @@
         <p:spPr>
           <a:xfrm>
             <a:off x="4455000" y="980000"/>
-            <a:ext cx="2545000" cy="5500000"/>
+            <a:ext cx="2545000" cy="11000000"/>
           </a:xfrm>
           <a:prstGeom prst="rect">
             <a:avLst/>
@@ -3564,7 +3564,7 @@
             <a:pPr algn="ctr"/>
             <a:r>
               <a:rPr sz="1000"/>
-              <a:t>Настройка параметров для расчёта уровней запасов</a:t>
+              <a:t>Настройка параметров расчёта</a:t>
             </a:r>
           </a:p>
         </p:txBody>
@@ -3578,7 +3578,7 @@
         <p:spPr>
           <a:xfrm>
             <a:off x="4515000" y="1760000"/>
-            <a:ext cx="2425000" cy="1680000"/>
+            <a:ext cx="2425000" cy="1176000"/>
           </a:xfrm>
           <a:prstGeom prst="rect">
             <a:avLst/>
@@ -3599,19 +3599,7 @@
           <a:p>
             <a:r>
               <a:rPr sz="900" b="0"/>
-              <a:t>Квоты</a:t>
-            </a:r>
-          </a:p>
-          <a:p>
-            <a:r>
-              <a:rPr sz="900" b="0"/>
-              <a:t>База неопределённости: расчёт в модуле или ошибка прогноза из DP</a:t>
-            </a:r>
-          </a:p>
-          <a:p>
-            <a:r>
-              <a:rPr sz="900" b="0"/>
-              <a:t>Спрос и волатильность</a:t>
+              <a:t>Квоты и приоритеты источников</a:t>
             </a:r>
           </a:p>
           <a:p>
@@ -3648,7 +3636,7 @@
         </p:nvSpPr>
         <p:spPr>
           <a:xfrm>
-            <a:off x="4515000" y="3590000"/>
+            <a:off x="4515000" y="3086000"/>
             <a:ext cx="2425000" cy="620000"/>
           </a:xfrm>
           <a:prstGeom prst="roundRect">
@@ -3679,7 +3667,7 @@
             <a:pPr algn="ctr"/>
             <a:r>
               <a:rPr sz="1000"/>
-              <a:t>Сегментация</a:t>
+              <a:t>Расчёт волатильности спроса</a:t>
             </a:r>
           </a:p>
         </p:txBody>
@@ -3692,8 +3680,8 @@
         </p:nvSpPr>
         <p:spPr>
           <a:xfrm>
-            <a:off x="4515000" y="4310000"/>
-            <a:ext cx="2425000" cy="840000"/>
+            <a:off x="4515000" y="3806000"/>
+            <a:ext cx="2425000" cy="672000"/>
           </a:xfrm>
           <a:prstGeom prst="rect">
             <a:avLst/>
@@ -3708,53 +3696,40 @@
           <a:p>
             <a:r>
               <a:rPr sz="900" b="0"/>
-              <a:t>Lifecycle</a:t>
-            </a:r>
-          </a:p>
-          <a:p>
-            <a:r>
-              <a:rPr sz="900" b="0"/>
-              <a:t>ADI-CV</a:t>
-            </a:r>
-          </a:p>
-          <a:p>
-            <a:r>
-              <a:rPr sz="900" b="0"/>
-              <a:t>ABC</a:t>
-            </a:r>
-          </a:p>
-          <a:p>
-            <a:r>
-              <a:rPr sz="900" b="0"/>
-              <a:t>FMR</a:t>
-            </a:r>
-          </a:p>
-          <a:p>
-            <a:r>
-              <a:rPr sz="900" b="0"/>
-              <a:t>XYZ</a:t>
-            </a:r>
-          </a:p>
-        </p:txBody>
-      </p:sp>
-      <p:sp>
-        <p:nvSpPr>
-          <p:cNvPr id="16" name="Rectangle 15"/>
+              <a:t>История отгрузок за период</a:t>
+            </a:r>
+          </a:p>
+          <a:p>
+            <a:r>
+              <a:rPr sz="900" b="0"/>
+              <a:t>Незакрытый спрос и списания</a:t>
+            </a:r>
+          </a:p>
+          <a:p>
+            <a:r>
+              <a:rPr sz="900" b="0"/>
+              <a:t>База неопределённости: расчёт в модуле или ошибка прогноза из DP</a:t>
+            </a:r>
+          </a:p>
+        </p:txBody>
+      </p:sp>
+      <p:sp>
+        <p:nvSpPr>
+          <p:cNvPr id="16" name="Rounded Rectangle 15"/>
           <p:cNvSpPr/>
           <p:nvPr/>
         </p:nvSpPr>
         <p:spPr>
           <a:xfrm>
-            <a:off x="7030000" y="980000"/>
-            <a:ext cx="2545000" cy="5500000"/>
-          </a:xfrm>
-          <a:prstGeom prst="rect">
-            <a:avLst/>
-          </a:prstGeom>
-          <a:noFill/>
-          <a:ln>
-            <a:noFill/>
-          </a:ln>
+            <a:off x="4515000" y="4628000"/>
+            <a:ext cx="2425000" cy="620000"/>
+          </a:xfrm>
+          <a:prstGeom prst="roundRect">
+            <a:avLst/>
+          </a:prstGeom>
+          <a:solidFill>
+            <a:schemeClr val="accent1"/>
+          </a:solidFill>
         </p:spPr>
         <p:style>
           <a:lnRef idx="1">
@@ -3775,6 +3750,10 @@
           <a:lstStyle/>
           <a:p>
             <a:pPr algn="ctr"/>
+            <a:r>
+              <a:rPr sz="1000"/>
+              <a:t>Расчёт CV длительности поставок</a:t>
+            </a:r>
           </a:p>
         </p:txBody>
       </p:sp>
@@ -3786,8 +3765,8 @@
         </p:nvSpPr>
         <p:spPr>
           <a:xfrm>
-            <a:off x="7030000" y="500000"/>
-            <a:ext cx="2545000" cy="380000"/>
+            <a:off x="4515000" y="5348000"/>
+            <a:ext cx="2425000" cy="504000"/>
           </a:xfrm>
           <a:prstGeom prst="rect">
             <a:avLst/>
@@ -3801,8 +3780,14 @@
           <a:lstStyle/>
           <a:p>
             <a:r>
-              <a:rPr sz="1100" b="1"/>
-              <a:t>Расчёт и анализ</a:t>
+              <a:rPr sz="900" b="0"/>
+              <a:t>Плановые и фактические длительности поставок</a:t>
+            </a:r>
+          </a:p>
+          <a:p>
+            <a:r>
+              <a:rPr sz="900" b="0"/>
+              <a:t>Отклонения по дугам сети</a:t>
             </a:r>
           </a:p>
         </p:txBody>
@@ -3815,7 +3800,7 @@
         </p:nvSpPr>
         <p:spPr>
           <a:xfrm>
-            <a:off x="7090000" y="1040000"/>
+            <a:off x="4515000" y="6002000"/>
             <a:ext cx="2425000" cy="620000"/>
           </a:xfrm>
           <a:prstGeom prst="roundRect">
@@ -3846,7 +3831,7 @@
             <a:pPr algn="ctr"/>
             <a:r>
               <a:rPr sz="1000"/>
-              <a:t>Расчёт рекомендаций по уровням запасов</a:t>
+              <a:t>Расчёт CV длительности производства</a:t>
             </a:r>
           </a:p>
         </p:txBody>
@@ -3859,8 +3844,8 @@
         </p:nvSpPr>
         <p:spPr>
           <a:xfrm>
-            <a:off x="7090000" y="1760000"/>
-            <a:ext cx="2425000" cy="1344000"/>
+            <a:off x="4515000" y="6722000"/>
+            <a:ext cx="2425000" cy="504000"/>
           </a:xfrm>
           <a:prstGeom prst="rect">
             <a:avLst/>
@@ -3875,43 +3860,13 @@
           <a:p>
             <a:r>
               <a:rPr sz="900" b="0"/>
-              <a:t>Параметры оптимизации</a:t>
-            </a:r>
-          </a:p>
-          <a:p>
-            <a:r>
-              <a:rPr sz="900" b="0"/>
-              <a:t>Ограничения</a:t>
-            </a:r>
-          </a:p>
-          <a:p>
-            <a:r>
-              <a:rPr sz="900" b="0"/>
-              <a:t>Страховой, целевой, циклический запас</a:t>
-            </a:r>
-          </a:p>
-          <a:p>
-            <a:r>
-              <a:rPr sz="900" b="0"/>
-              <a:t>Точка заказа</a:t>
-            </a:r>
-          </a:p>
-          <a:p>
-            <a:r>
-              <a:rPr sz="900" b="0"/>
-              <a:t>Рекомендованный уровень сервиса</a:t>
-            </a:r>
-          </a:p>
-          <a:p>
-            <a:r>
-              <a:rPr sz="900" b="0"/>
-              <a:t>Ограничение: покрытие ≤ остаточного срока годности</a:t>
-            </a:r>
-          </a:p>
-          <a:p>
-            <a:r>
-              <a:rPr sz="900" b="0"/>
-              <a:t>Стоимость списаний и уценки</a:t>
+              <a:t>Плановые и фактические длительности производства</a:t>
+            </a:r>
+          </a:p>
+          <a:p>
+            <a:r>
+              <a:rPr sz="900" b="0"/>
+              <a:t>Отклонения по производственным заказам</a:t>
             </a:r>
           </a:p>
         </p:txBody>
@@ -3924,7 +3879,7 @@
         </p:nvSpPr>
         <p:spPr>
           <a:xfrm>
-            <a:off x="7090000" y="3254000"/>
+            <a:off x="4515000" y="7376000"/>
             <a:ext cx="2425000" cy="620000"/>
           </a:xfrm>
           <a:prstGeom prst="roundRect">
@@ -3955,7 +3910,7 @@
             <a:pPr algn="ctr"/>
             <a:r>
               <a:rPr sz="1000"/>
-              <a:t>Анализ полученных значений</a:t>
+              <a:t>Корректировка CV</a:t>
             </a:r>
           </a:p>
         </p:txBody>
@@ -3968,8 +3923,8 @@
         </p:nvSpPr>
         <p:spPr>
           <a:xfrm>
-            <a:off x="7090000" y="3974000"/>
-            <a:ext cx="2425000" cy="1848000"/>
+            <a:off x="4515000" y="8096000"/>
+            <a:ext cx="2425000" cy="672000"/>
           </a:xfrm>
           <a:prstGeom prst="rect">
             <a:avLst/>
@@ -3984,49 +3939,25 @@
           <a:p>
             <a:r>
               <a:rPr sz="900" b="0"/>
-              <a:t>База (as is): текущие политики и параметры</a:t>
-            </a:r>
-          </a:p>
-          <a:p>
-            <a:r>
-              <a:rPr sz="900" b="0"/>
-              <a:t>Пересчёт по фильтрам: склад, канал, категория, сегмент</a:t>
-            </a:r>
-          </a:p>
-          <a:p>
-            <a:r>
-              <a:rPr sz="900" b="0"/>
-              <a:t>Сервис 98% по федеральным сетям</a:t>
-            </a:r>
-          </a:p>
-          <a:p>
-            <a:r>
-              <a:rPr sz="900" b="0"/>
-              <a:t>Учащённое пополнение охлаждённой продукции</a:t>
-            </a:r>
-          </a:p>
-          <a:p>
-            <a:r>
-              <a:rPr sz="900" b="0"/>
-              <a:t>Сокращение лидтайма и его разброса</a:t>
-            </a:r>
-          </a:p>
-          <a:p>
-            <a:r>
-              <a:rPr sz="900" b="0"/>
-              <a:t>Ограничение по мощностям холода</a:t>
-            </a:r>
-          </a:p>
-          <a:p>
-            <a:r>
-              <a:rPr sz="900" b="0"/>
-              <a:t>Бюджет запаса −15%</a:t>
-            </a:r>
-          </a:p>
-          <a:p>
-            <a:r>
-              <a:rPr sz="900" b="0"/>
-              <a:t>Сезонный пик: май–сентябрь</a:t>
+              <a:t>CV спроса</a:t>
+            </a:r>
+          </a:p>
+          <a:p>
+            <a:r>
+              <a:rPr sz="900" b="0"/>
+              <a:t>CV длительности поставок</a:t>
+            </a:r>
+          </a:p>
+          <a:p>
+            <a:r>
+              <a:rPr sz="900" b="0"/>
+              <a:t>CV длительности производства</a:t>
+            </a:r>
+          </a:p>
+          <a:p>
+            <a:r>
+              <a:rPr sz="900" b="0"/>
+              <a:t>Экспертная правка по сегментам</a:t>
             </a:r>
           </a:p>
         </p:txBody>
@@ -4039,7 +3970,7 @@
         </p:nvSpPr>
         <p:spPr>
           <a:xfrm>
-            <a:off x="7090000" y="5972000"/>
+            <a:off x="4515000" y="8918000"/>
             <a:ext cx="2425000" cy="620000"/>
           </a:xfrm>
           <a:prstGeom prst="roundRect">
@@ -4070,7 +4001,7 @@
             <a:pPr algn="ctr"/>
             <a:r>
               <a:rPr sz="1000"/>
-              <a:t>Анализ предупреждений расчёта</a:t>
+              <a:t>ABC-классификация</a:t>
             </a:r>
           </a:p>
         </p:txBody>
@@ -4083,8 +4014,8 @@
         </p:nvSpPr>
         <p:spPr>
           <a:xfrm>
-            <a:off x="7090000" y="6692000"/>
-            <a:ext cx="2425000" cy="1344000"/>
+            <a:off x="4515000" y="9638000"/>
+            <a:ext cx="2425000" cy="504000"/>
           </a:xfrm>
           <a:prstGeom prst="rect">
             <a:avLst/>
@@ -4099,45 +4030,39 @@
           <a:p>
             <a:r>
               <a:rPr sz="900" b="0"/>
-              <a:t>Предупреждение: покрытие превышает остаточный срок годности</a:t>
-            </a:r>
-          </a:p>
-          <a:p>
-            <a:r>
-              <a:rPr sz="900" b="0"/>
-              <a:t>Предупреждение: рекомендованный уровень ниже минимальной партии</a:t>
-            </a:r>
-          </a:p>
-          <a:p>
-            <a:r>
-              <a:rPr sz="900" b="0"/>
-              <a:t>Предупреждение: целевой запас не помещается в мощности хранения</a:t>
-            </a:r>
-          </a:p>
-          <a:p>
-            <a:r>
-              <a:rPr sz="900" b="0"/>
-              <a:t>Предупреждение: отклонение от целевого уровня сервиса</a:t>
-            </a:r>
-          </a:p>
-        </p:txBody>
-      </p:sp>
-      <p:sp>
-        <p:nvSpPr>
-          <p:cNvPr id="24" name="Rectangle 23"/>
+              <a:t>Вклад в оборот</a:t>
+            </a:r>
+          </a:p>
+          <a:p>
+            <a:r>
+              <a:rPr sz="900" b="0"/>
+              <a:t>Вклад в объём</a:t>
+            </a:r>
+          </a:p>
+          <a:p>
+            <a:r>
+              <a:rPr sz="900" b="0"/>
+              <a:t>Пороги классов</a:t>
+            </a:r>
+          </a:p>
+        </p:txBody>
+      </p:sp>
+      <p:sp>
+        <p:nvSpPr>
+          <p:cNvPr id="24" name="Rounded Rectangle 23"/>
           <p:cNvSpPr/>
           <p:nvPr/>
         </p:nvSpPr>
         <p:spPr>
           <a:xfrm>
-            <a:off x="7090000" y="8186000"/>
+            <a:off x="4515000" y="10292000"/>
             <a:ext cx="2425000" cy="620000"/>
           </a:xfrm>
-          <a:prstGeom prst="rect">
+          <a:prstGeom prst="roundRect">
             <a:avLst/>
           </a:prstGeom>
           <a:solidFill>
-            <a:schemeClr val="accent2"/>
+            <a:schemeClr val="accent1"/>
           </a:solidFill>
         </p:spPr>
         <p:style>
@@ -4160,22 +4085,75 @@
           <a:p>
             <a:pPr algn="ctr"/>
             <a:r>
-              <a:rPr sz="900"/>
-              <a:t>Уровни запасов в SNP/PS и MRP</a:t>
-            </a:r>
-          </a:p>
-        </p:txBody>
-      </p:sp>
-      <p:sp>
-        <p:nvSpPr>
-          <p:cNvPr id="25" name="Rectangle 24"/>
+              <a:rPr sz="1000"/>
+              <a:t>Сегментация</a:t>
+            </a:r>
+          </a:p>
+        </p:txBody>
+      </p:sp>
+      <p:sp>
+        <p:nvSpPr>
+          <p:cNvPr id="25" name="TextBox 24"/>
+          <p:cNvSpPr txBox="1"/>
+          <p:nvPr/>
+        </p:nvSpPr>
+        <p:spPr>
+          <a:xfrm>
+            <a:off x="4515000" y="11012000"/>
+            <a:ext cx="2425000" cy="840000"/>
+          </a:xfrm>
+          <a:prstGeom prst="rect">
+            <a:avLst/>
+          </a:prstGeom>
+          <a:noFill/>
+        </p:spPr>
+        <p:txBody>
+          <a:bodyPr wrap="square">
+            <a:spAutoFit/>
+          </a:bodyPr>
+          <a:lstStyle/>
+          <a:p>
+            <a:r>
+              <a:rPr sz="900" b="0"/>
+              <a:t>Lifecycle</a:t>
+            </a:r>
+          </a:p>
+          <a:p>
+            <a:r>
+              <a:rPr sz="900" b="0"/>
+              <a:t>ADI-CV</a:t>
+            </a:r>
+          </a:p>
+          <a:p>
+            <a:r>
+              <a:rPr sz="900" b="0"/>
+              <a:t>ABC</a:t>
+            </a:r>
+          </a:p>
+          <a:p>
+            <a:r>
+              <a:rPr sz="900" b="0"/>
+              <a:t>FMR</a:t>
+            </a:r>
+          </a:p>
+          <a:p>
+            <a:r>
+              <a:rPr sz="900" b="0"/>
+              <a:t>XYZ</a:t>
+            </a:r>
+          </a:p>
+        </p:txBody>
+      </p:sp>
+      <p:sp>
+        <p:nvSpPr>
+          <p:cNvPr id="26" name="Rectangle 25"/>
           <p:cNvSpPr/>
           <p:nvPr/>
         </p:nvSpPr>
         <p:spPr>
           <a:xfrm>
-            <a:off x="9605000" y="980000"/>
-            <a:ext cx="2545000" cy="5500000"/>
+            <a:off x="7030000" y="980000"/>
+            <a:ext cx="2545000" cy="11000000"/>
           </a:xfrm>
           <a:prstGeom prst="rect">
             <a:avLst/>
@@ -4209,13 +4187,13 @@
       </p:sp>
       <p:sp>
         <p:nvSpPr>
-          <p:cNvPr id="26" name="TextBox 25"/>
+          <p:cNvPr id="27" name="TextBox 26"/>
           <p:cNvSpPr txBox="1"/>
           <p:nvPr/>
         </p:nvSpPr>
         <p:spPr>
           <a:xfrm>
-            <a:off x="9605000" y="500000"/>
+            <a:off x="7030000" y="500000"/>
             <a:ext cx="2545000" cy="380000"/>
           </a:xfrm>
           <a:prstGeom prst="rect">
@@ -4231,20 +4209,20 @@
           <a:p>
             <a:r>
               <a:rPr sz="1100" b="1"/>
-              <a:t>Оценка эффектов</a:t>
-            </a:r>
-          </a:p>
-        </p:txBody>
-      </p:sp>
-      <p:sp>
-        <p:nvSpPr>
-          <p:cNvPr id="27" name="Rounded Rectangle 26"/>
+              <a:t>Расчёт и анализ</a:t>
+            </a:r>
+          </a:p>
+        </p:txBody>
+      </p:sp>
+      <p:sp>
+        <p:nvSpPr>
+          <p:cNvPr id="28" name="Rounded Rectangle 27"/>
           <p:cNvSpPr/>
           <p:nvPr/>
         </p:nvSpPr>
         <p:spPr>
           <a:xfrm>
-            <a:off x="9665000" y="1040000"/>
+            <a:off x="7090000" y="1040000"/>
             <a:ext cx="2425000" cy="620000"/>
           </a:xfrm>
           <a:prstGeom prst="roundRect">
@@ -4275,21 +4253,21 @@
             <a:pPr algn="ctr"/>
             <a:r>
               <a:rPr sz="1000"/>
-              <a:t>Оценка эффектов</a:t>
-            </a:r>
-          </a:p>
-        </p:txBody>
-      </p:sp>
-      <p:sp>
-        <p:nvSpPr>
-          <p:cNvPr id="28" name="TextBox 27"/>
+              <a:t>Определение стратегии MTS-MTO</a:t>
+            </a:r>
+          </a:p>
+        </p:txBody>
+      </p:sp>
+      <p:sp>
+        <p:nvSpPr>
+          <p:cNvPr id="29" name="TextBox 28"/>
           <p:cNvSpPr txBox="1"/>
           <p:nvPr/>
         </p:nvSpPr>
         <p:spPr>
           <a:xfrm>
-            <a:off x="9665000" y="1760000"/>
-            <a:ext cx="2425000" cy="336000"/>
+            <a:off x="7090000" y="1760000"/>
+            <a:ext cx="2425000" cy="672000"/>
           </a:xfrm>
           <a:prstGeom prst="rect">
             <a:avLst/>
@@ -4304,27 +4282,39 @@
           <a:p>
             <a:r>
               <a:rPr sz="900" b="0"/>
-              <a:t>Оценка эффектов и формирование рекомендаций</a:t>
-            </a:r>
-          </a:p>
-        </p:txBody>
-      </p:sp>
-      <p:sp>
-        <p:nvSpPr>
-          <p:cNvPr id="29" name="Rectangle 28"/>
+              <a:t>Сегментация по пяти признакам</a:t>
+            </a:r>
+          </a:p>
+          <a:p>
+            <a:r>
+              <a:rPr sz="900" b="0"/>
+              <a:t>Длительность цикла против срока ожидания клиента</a:t>
+            </a:r>
+          </a:p>
+          <a:p>
+            <a:r>
+              <a:rPr sz="900" b="0"/>
+              <a:t>Срок годности позиции</a:t>
+            </a:r>
+          </a:p>
+        </p:txBody>
+      </p:sp>
+      <p:sp>
+        <p:nvSpPr>
+          <p:cNvPr id="30" name="Rounded Rectangle 29"/>
           <p:cNvSpPr/>
           <p:nvPr/>
         </p:nvSpPr>
         <p:spPr>
           <a:xfrm>
-            <a:off x="9665000" y="2246000"/>
+            <a:off x="7090000" y="2582000"/>
             <a:ext cx="2425000" cy="620000"/>
           </a:xfrm>
-          <a:prstGeom prst="rect">
+          <a:prstGeom prst="roundRect">
             <a:avLst/>
           </a:prstGeom>
           <a:solidFill>
-            <a:schemeClr val="accent2"/>
+            <a:schemeClr val="accent1"/>
           </a:solidFill>
         </p:spPr>
         <p:style>
@@ -4347,28 +4337,75 @@
           <a:p>
             <a:pPr algn="ctr"/>
             <a:r>
-              <a:rPr sz="900"/>
-              <a:t>Оценка эффектов и рекомендации</a:t>
-            </a:r>
-          </a:p>
-        </p:txBody>
-      </p:sp>
-      <p:sp>
-        <p:nvSpPr>
-          <p:cNvPr id="30" name="Rectangle 29"/>
+              <a:rPr sz="1000"/>
+              <a:t>Выбор политики пополнения</a:t>
+            </a:r>
+          </a:p>
+        </p:txBody>
+      </p:sp>
+      <p:sp>
+        <p:nvSpPr>
+          <p:cNvPr id="31" name="TextBox 30"/>
+          <p:cNvSpPr txBox="1"/>
+          <p:nvPr/>
+        </p:nvSpPr>
+        <p:spPr>
+          <a:xfrm>
+            <a:off x="7090000" y="3302000"/>
+            <a:ext cx="2425000" cy="672000"/>
+          </a:xfrm>
+          <a:prstGeom prst="rect">
+            <a:avLst/>
+          </a:prstGeom>
+          <a:noFill/>
+        </p:spPr>
+        <p:txBody>
+          <a:bodyPr wrap="square">
+            <a:spAutoFit/>
+          </a:bodyPr>
+          <a:lstStyle/>
+          <a:p>
+            <a:r>
+              <a:rPr sz="900" b="0"/>
+              <a:t>Стратегия MTS или MTO по позиции</a:t>
+            </a:r>
+          </a:p>
+          <a:p>
+            <a:r>
+              <a:rPr sz="900" b="0"/>
+              <a:t>Сегментация по пяти признакам</a:t>
+            </a:r>
+          </a:p>
+          <a:p>
+            <a:r>
+              <a:rPr sz="900" b="0"/>
+              <a:t>Календари пополнения</a:t>
+            </a:r>
+          </a:p>
+          <a:p>
+            <a:r>
+              <a:rPr sz="900" b="0"/>
+              <a:t>Минимальный размер партии и кратность</a:t>
+            </a:r>
+          </a:p>
+        </p:txBody>
+      </p:sp>
+      <p:sp>
+        <p:nvSpPr>
+          <p:cNvPr id="32" name="Rounded Rectangle 31"/>
           <p:cNvSpPr/>
           <p:nvPr/>
         </p:nvSpPr>
         <p:spPr>
           <a:xfrm>
-            <a:off x="100000" y="980000"/>
-            <a:ext cx="1600000" cy="620000"/>
-          </a:xfrm>
-          <a:prstGeom prst="rect">
+            <a:off x="7090000" y="4124000"/>
+            <a:ext cx="2425000" cy="620000"/>
+          </a:xfrm>
+          <a:prstGeom prst="roundRect">
             <a:avLst/>
           </a:prstGeom>
           <a:solidFill>
-            <a:schemeClr val="accent2"/>
+            <a:schemeClr val="accent1"/>
           </a:solidFill>
         </p:spPr>
         <p:style>
@@ -4391,28 +4428,75 @@
           <a:p>
             <a:pPr algn="ctr"/>
             <a:r>
-              <a:rPr sz="900"/>
-              <a:t>Структура текущих запасов и фактические отгрузки из ERP</a:t>
-            </a:r>
-          </a:p>
-        </p:txBody>
-      </p:sp>
-      <p:sp>
-        <p:nvSpPr>
-          <p:cNvPr id="31" name="Rectangle 30"/>
+              <a:rPr sz="1000"/>
+              <a:t>Мультиэшелонная оптимизация</a:t>
+            </a:r>
+          </a:p>
+        </p:txBody>
+      </p:sp>
+      <p:sp>
+        <p:nvSpPr>
+          <p:cNvPr id="33" name="TextBox 32"/>
+          <p:cNvSpPr txBox="1"/>
+          <p:nvPr/>
+        </p:nvSpPr>
+        <p:spPr>
+          <a:xfrm>
+            <a:off x="7090000" y="4844000"/>
+            <a:ext cx="2425000" cy="840000"/>
+          </a:xfrm>
+          <a:prstGeom prst="rect">
+            <a:avLst/>
+          </a:prstGeom>
+          <a:noFill/>
+        </p:spPr>
+        <p:txBody>
+          <a:bodyPr wrap="square">
+            <a:spAutoFit/>
+          </a:bodyPr>
+          <a:lstStyle/>
+          <a:p>
+            <a:r>
+              <a:rPr sz="900" b="0"/>
+              <a:t>Настроенные параметры расчёта</a:t>
+            </a:r>
+          </a:p>
+          <a:p>
+            <a:r>
+              <a:rPr sz="900" b="0"/>
+              <a:t>Скорректированный CV</a:t>
+            </a:r>
+          </a:p>
+          <a:p>
+            <a:r>
+              <a:rPr sz="900" b="0"/>
+              <a:t>Политика пополнения по позиции</a:t>
+            </a:r>
+          </a:p>
+          <a:p>
+            <a:r>
+              <a:rPr sz="900" b="0"/>
+              <a:t>Ограничения: мощности, бюджет, срок годности</a:t>
+            </a:r>
+          </a:p>
+        </p:txBody>
+      </p:sp>
+      <p:sp>
+        <p:nvSpPr>
+          <p:cNvPr id="34" name="Rounded Rectangle 33"/>
           <p:cNvSpPr/>
           <p:nvPr/>
         </p:nvSpPr>
         <p:spPr>
           <a:xfrm>
-            <a:off x="100000" y="2200000"/>
-            <a:ext cx="1600000" cy="620000"/>
-          </a:xfrm>
-          <a:prstGeom prst="rect">
+            <a:off x="7090000" y="5834000"/>
+            <a:ext cx="2425000" cy="620000"/>
+          </a:xfrm>
+          <a:prstGeom prst="roundRect">
             <a:avLst/>
           </a:prstGeom>
           <a:solidFill>
-            <a:schemeClr val="accent2"/>
+            <a:schemeClr val="accent1"/>
           </a:solidFill>
         </p:spPr>
         <p:style>
@@ -4435,28 +4519,69 @@
           <a:p>
             <a:pPr algn="ctr"/>
             <a:r>
-              <a:rPr sz="900"/>
-              <a:t>Спрос и волатильность из DP</a:t>
-            </a:r>
-          </a:p>
-        </p:txBody>
-      </p:sp>
-      <p:sp>
-        <p:nvSpPr>
-          <p:cNvPr id="32" name="Rectangle 31"/>
+              <a:rPr sz="1000"/>
+              <a:t>Изолированная оптимизация</a:t>
+            </a:r>
+          </a:p>
+        </p:txBody>
+      </p:sp>
+      <p:sp>
+        <p:nvSpPr>
+          <p:cNvPr id="35" name="TextBox 34"/>
+          <p:cNvSpPr txBox="1"/>
+          <p:nvPr/>
+        </p:nvSpPr>
+        <p:spPr>
+          <a:xfrm>
+            <a:off x="7090000" y="6554000"/>
+            <a:ext cx="2425000" cy="504000"/>
+          </a:xfrm>
+          <a:prstGeom prst="rect">
+            <a:avLst/>
+          </a:prstGeom>
+          <a:noFill/>
+        </p:spPr>
+        <p:txBody>
+          <a:bodyPr wrap="square">
+            <a:spAutoFit/>
+          </a:bodyPr>
+          <a:lstStyle/>
+          <a:p>
+            <a:r>
+              <a:rPr sz="900" b="0"/>
+              <a:t>Настроенные параметры расчёта</a:t>
+            </a:r>
+          </a:p>
+          <a:p>
+            <a:r>
+              <a:rPr sz="900" b="0"/>
+              <a:t>Скорректированный CV</a:t>
+            </a:r>
+          </a:p>
+          <a:p>
+            <a:r>
+              <a:rPr sz="900" b="0"/>
+              <a:t>Политика пополнения по позиции</a:t>
+            </a:r>
+          </a:p>
+        </p:txBody>
+      </p:sp>
+      <p:sp>
+        <p:nvSpPr>
+          <p:cNvPr id="36" name="Rounded Rectangle 35"/>
           <p:cNvSpPr/>
           <p:nvPr/>
         </p:nvSpPr>
         <p:spPr>
           <a:xfrm>
-            <a:off x="100000" y="3420000"/>
-            <a:ext cx="1600000" cy="620000"/>
-          </a:xfrm>
-          <a:prstGeom prst="rect">
+            <a:off x="7090000" y="7208000"/>
+            <a:ext cx="2425000" cy="620000"/>
+          </a:xfrm>
+          <a:prstGeom prst="roundRect">
             <a:avLst/>
           </a:prstGeom>
           <a:solidFill>
-            <a:schemeClr val="accent2"/>
+            <a:schemeClr val="accent1"/>
           </a:solidFill>
         </p:spPr>
         <p:style>
@@ -4479,28 +4604,99 @@
           <a:p>
             <a:pPr algn="ctr"/>
             <a:r>
-              <a:rPr sz="900"/>
-              <a:t>Параметры цепочки из ERP</a:t>
-            </a:r>
-          </a:p>
-        </p:txBody>
-      </p:sp>
-      <p:sp>
-        <p:nvSpPr>
-          <p:cNvPr id="33" name="Rectangle 32"/>
+              <a:rPr sz="1000"/>
+              <a:t>Сценарное моделирование</a:t>
+            </a:r>
+          </a:p>
+        </p:txBody>
+      </p:sp>
+      <p:sp>
+        <p:nvSpPr>
+          <p:cNvPr id="37" name="TextBox 36"/>
+          <p:cNvSpPr txBox="1"/>
+          <p:nvPr/>
+        </p:nvSpPr>
+        <p:spPr>
+          <a:xfrm>
+            <a:off x="7090000" y="7928000"/>
+            <a:ext cx="2425000" cy="1848000"/>
+          </a:xfrm>
+          <a:prstGeom prst="rect">
+            <a:avLst/>
+          </a:prstGeom>
+          <a:noFill/>
+        </p:spPr>
+        <p:txBody>
+          <a:bodyPr wrap="square">
+            <a:spAutoFit/>
+          </a:bodyPr>
+          <a:lstStyle/>
+          <a:p>
+            <a:r>
+              <a:rPr sz="900" b="0"/>
+              <a:t>База (as is): текущие политики и параметры</a:t>
+            </a:r>
+          </a:p>
+          <a:p>
+            <a:r>
+              <a:rPr sz="900" b="0"/>
+              <a:t>Пересчёт по фильтрам: склад, канал, категория, сегмент</a:t>
+            </a:r>
+          </a:p>
+          <a:p>
+            <a:r>
+              <a:rPr sz="900" b="0"/>
+              <a:t>Сервис 98% по федеральным сетям</a:t>
+            </a:r>
+          </a:p>
+          <a:p>
+            <a:r>
+              <a:rPr sz="900" b="0"/>
+              <a:t>Учащённое пополнение охлаждённой продукции</a:t>
+            </a:r>
+          </a:p>
+          <a:p>
+            <a:r>
+              <a:rPr sz="900" b="0"/>
+              <a:t>Сокращение лидтайма и его разброса</a:t>
+            </a:r>
+          </a:p>
+          <a:p>
+            <a:r>
+              <a:rPr sz="900" b="0"/>
+              <a:t>Ограничение по мощностям холода</a:t>
+            </a:r>
+          </a:p>
+          <a:p>
+            <a:r>
+              <a:rPr sz="900" b="0"/>
+              <a:t>Бюджет запаса −15%</a:t>
+            </a:r>
+          </a:p>
+          <a:p>
+            <a:r>
+              <a:rPr sz="900" b="0"/>
+              <a:t>Сезонный пик: май–сентябрь</a:t>
+            </a:r>
+          </a:p>
+        </p:txBody>
+      </p:sp>
+      <p:sp>
+        <p:nvSpPr>
+          <p:cNvPr id="38" name="Rounded Rectangle 37"/>
           <p:cNvSpPr/>
           <p:nvPr/>
         </p:nvSpPr>
         <p:spPr>
           <a:xfrm>
-            <a:off x="100000" y="4640000"/>
-            <a:ext cx="1600000" cy="620000"/>
-          </a:xfrm>
-          <a:prstGeom prst="rect">
+            <a:off x="7090000" y="9926000"/>
+            <a:ext cx="2425000" cy="620000"/>
+          </a:xfrm>
+          <a:prstGeom prst="roundRect">
             <a:avLst/>
           </a:prstGeom>
           <a:solidFill>
-            <a:schemeClr val="accent2"/>
+            <a:schemeClr val="accent1"/>
           </a:solidFill>
         </p:spPr>
         <p:style>
@@ -4523,28 +4719,69 @@
           <a:p>
             <a:pPr algn="ctr"/>
             <a:r>
-              <a:rPr sz="900"/>
-              <a:t>Сроки годности и требования сетей к остаточному сроку из ERP</a:t>
-            </a:r>
-          </a:p>
-        </p:txBody>
-      </p:sp>
-      <p:sp>
-        <p:nvSpPr>
-          <p:cNvPr id="34" name="Rectangle 33"/>
+              <a:rPr sz="1000"/>
+              <a:t>Сравнение со страховыми запасами</a:t>
+            </a:r>
+          </a:p>
+        </p:txBody>
+      </p:sp>
+      <p:sp>
+        <p:nvSpPr>
+          <p:cNvPr id="39" name="TextBox 38"/>
+          <p:cNvSpPr txBox="1"/>
+          <p:nvPr/>
+        </p:nvSpPr>
+        <p:spPr>
+          <a:xfrm>
+            <a:off x="7090000" y="10646000"/>
+            <a:ext cx="2425000" cy="672000"/>
+          </a:xfrm>
+          <a:prstGeom prst="rect">
+            <a:avLst/>
+          </a:prstGeom>
+          <a:noFill/>
+        </p:spPr>
+        <p:txBody>
+          <a:bodyPr wrap="square">
+            <a:spAutoFit/>
+          </a:bodyPr>
+          <a:lstStyle/>
+          <a:p>
+            <a:r>
+              <a:rPr sz="900" b="0"/>
+              <a:t>Рекомендованные уровни запасов по эшелонам</a:t>
+            </a:r>
+          </a:p>
+          <a:p>
+            <a:r>
+              <a:rPr sz="900" b="0"/>
+              <a:t>Действующие страховые запасы</a:t>
+            </a:r>
+          </a:p>
+          <a:p>
+            <a:r>
+              <a:rPr sz="900" b="0"/>
+              <a:t>Уровни запасов по узлам без учёта сети</a:t>
+            </a:r>
+          </a:p>
+        </p:txBody>
+      </p:sp>
+      <p:sp>
+        <p:nvSpPr>
+          <p:cNvPr id="40" name="Rounded Rectangle 39"/>
           <p:cNvSpPr/>
           <p:nvPr/>
         </p:nvSpPr>
         <p:spPr>
           <a:xfrm>
-            <a:off x="100000" y="5860000"/>
-            <a:ext cx="1600000" cy="620000"/>
-          </a:xfrm>
-          <a:prstGeom prst="rect">
+            <a:off x="7090000" y="11468000"/>
+            <a:ext cx="2425000" cy="620000"/>
+          </a:xfrm>
+          <a:prstGeom prst="roundRect">
             <a:avLst/>
           </a:prstGeom>
           <a:solidFill>
-            <a:schemeClr val="accent2"/>
+            <a:schemeClr val="accent1"/>
           </a:solidFill>
         </p:spPr>
         <p:style>
@@ -4567,15 +4804,768 @@
           <a:p>
             <a:pPr algn="ctr"/>
             <a:r>
+              <a:rPr sz="1000"/>
+              <a:t>Анализ предупреждений расчёта</a:t>
+            </a:r>
+          </a:p>
+        </p:txBody>
+      </p:sp>
+      <p:sp>
+        <p:nvSpPr>
+          <p:cNvPr id="41" name="TextBox 40"/>
+          <p:cNvSpPr txBox="1"/>
+          <p:nvPr/>
+        </p:nvSpPr>
+        <p:spPr>
+          <a:xfrm>
+            <a:off x="7090000" y="12188000"/>
+            <a:ext cx="2425000" cy="1344000"/>
+          </a:xfrm>
+          <a:prstGeom prst="rect">
+            <a:avLst/>
+          </a:prstGeom>
+          <a:noFill/>
+        </p:spPr>
+        <p:txBody>
+          <a:bodyPr wrap="square">
+            <a:spAutoFit/>
+          </a:bodyPr>
+          <a:lstStyle/>
+          <a:p>
+            <a:r>
+              <a:rPr sz="900" b="0"/>
+              <a:t>Предупреждение: покрытие превышает остаточный срок годности</a:t>
+            </a:r>
+          </a:p>
+          <a:p>
+            <a:r>
+              <a:rPr sz="900" b="0"/>
+              <a:t>Предупреждение: рекомендованный уровень ниже минимальной партии</a:t>
+            </a:r>
+          </a:p>
+          <a:p>
+            <a:r>
+              <a:rPr sz="900" b="0"/>
+              <a:t>Предупреждение: целевой запас не помещается в мощности хранения</a:t>
+            </a:r>
+          </a:p>
+          <a:p>
+            <a:r>
+              <a:rPr sz="900" b="0"/>
+              <a:t>Предупреждение: отклонение от целевого уровня сервиса</a:t>
+            </a:r>
+          </a:p>
+        </p:txBody>
+      </p:sp>
+      <p:sp>
+        <p:nvSpPr>
+          <p:cNvPr id="42" name="Rectangle 41"/>
+          <p:cNvSpPr/>
+          <p:nvPr/>
+        </p:nvSpPr>
+        <p:spPr>
+          <a:xfrm>
+            <a:off x="7090000" y="13682000"/>
+            <a:ext cx="2425000" cy="620000"/>
+          </a:xfrm>
+          <a:prstGeom prst="rect">
+            <a:avLst/>
+          </a:prstGeom>
+          <a:solidFill>
+            <a:schemeClr val="accent2"/>
+          </a:solidFill>
+        </p:spPr>
+        <p:style>
+          <a:lnRef idx="1">
+            <a:schemeClr val="accent1"/>
+          </a:lnRef>
+          <a:fillRef idx="3">
+            <a:schemeClr val="accent1"/>
+          </a:fillRef>
+          <a:effectRef idx="2">
+            <a:schemeClr val="accent1"/>
+          </a:effectRef>
+          <a:fontRef idx="minor">
+            <a:schemeClr val="lt1"/>
+          </a:fontRef>
+        </p:style>
+        <p:txBody>
+          <a:bodyPr rtlCol="0" anchor="ctr" wrap="square"/>
+          <a:lstStyle/>
+          <a:p>
+            <a:pPr algn="ctr"/>
+            <a:r>
+              <a:rPr sz="900"/>
+              <a:t>Уровни запасов в SNP/PS и MRP</a:t>
+            </a:r>
+          </a:p>
+        </p:txBody>
+      </p:sp>
+      <p:sp>
+        <p:nvSpPr>
+          <p:cNvPr id="43" name="Rectangle 42"/>
+          <p:cNvSpPr/>
+          <p:nvPr/>
+        </p:nvSpPr>
+        <p:spPr>
+          <a:xfrm>
+            <a:off x="9605000" y="980000"/>
+            <a:ext cx="2545000" cy="11000000"/>
+          </a:xfrm>
+          <a:prstGeom prst="rect">
+            <a:avLst/>
+          </a:prstGeom>
+          <a:noFill/>
+          <a:ln>
+            <a:noFill/>
+          </a:ln>
+        </p:spPr>
+        <p:style>
+          <a:lnRef idx="1">
+            <a:schemeClr val="accent1"/>
+          </a:lnRef>
+          <a:fillRef idx="3">
+            <a:schemeClr val="accent1"/>
+          </a:fillRef>
+          <a:effectRef idx="2">
+            <a:schemeClr val="accent1"/>
+          </a:effectRef>
+          <a:fontRef idx="minor">
+            <a:schemeClr val="lt1"/>
+          </a:fontRef>
+        </p:style>
+        <p:txBody>
+          <a:bodyPr rtlCol="0" anchor="ctr" wrap="square"/>
+          <a:lstStyle/>
+          <a:p>
+            <a:pPr algn="ctr"/>
+          </a:p>
+        </p:txBody>
+      </p:sp>
+      <p:sp>
+        <p:nvSpPr>
+          <p:cNvPr id="44" name="TextBox 43"/>
+          <p:cNvSpPr txBox="1"/>
+          <p:nvPr/>
+        </p:nvSpPr>
+        <p:spPr>
+          <a:xfrm>
+            <a:off x="9605000" y="500000"/>
+            <a:ext cx="2545000" cy="380000"/>
+          </a:xfrm>
+          <a:prstGeom prst="rect">
+            <a:avLst/>
+          </a:prstGeom>
+          <a:noFill/>
+        </p:spPr>
+        <p:txBody>
+          <a:bodyPr wrap="square">
+            <a:spAutoFit/>
+          </a:bodyPr>
+          <a:lstStyle/>
+          <a:p>
+            <a:r>
+              <a:rPr sz="1100" b="1"/>
+              <a:t>Оценка эффектов</a:t>
+            </a:r>
+          </a:p>
+        </p:txBody>
+      </p:sp>
+      <p:sp>
+        <p:nvSpPr>
+          <p:cNvPr id="45" name="Rounded Rectangle 44"/>
+          <p:cNvSpPr/>
+          <p:nvPr/>
+        </p:nvSpPr>
+        <p:spPr>
+          <a:xfrm>
+            <a:off x="9665000" y="1040000"/>
+            <a:ext cx="2425000" cy="620000"/>
+          </a:xfrm>
+          <a:prstGeom prst="roundRect">
+            <a:avLst/>
+          </a:prstGeom>
+          <a:solidFill>
+            <a:schemeClr val="accent1"/>
+          </a:solidFill>
+        </p:spPr>
+        <p:style>
+          <a:lnRef idx="1">
+            <a:schemeClr val="accent1"/>
+          </a:lnRef>
+          <a:fillRef idx="3">
+            <a:schemeClr val="accent1"/>
+          </a:fillRef>
+          <a:effectRef idx="2">
+            <a:schemeClr val="accent1"/>
+          </a:effectRef>
+          <a:fontRef idx="minor">
+            <a:schemeClr val="lt1"/>
+          </a:fontRef>
+        </p:style>
+        <p:txBody>
+          <a:bodyPr rtlCol="0" anchor="ctr" wrap="square"/>
+          <a:lstStyle/>
+          <a:p>
+            <a:pPr algn="ctr"/>
+            <a:r>
+              <a:rPr sz="1000"/>
+              <a:t>Отчёт по ошибке прогноза</a:t>
+            </a:r>
+          </a:p>
+        </p:txBody>
+      </p:sp>
+      <p:sp>
+        <p:nvSpPr>
+          <p:cNvPr id="46" name="TextBox 45"/>
+          <p:cNvSpPr txBox="1"/>
+          <p:nvPr/>
+        </p:nvSpPr>
+        <p:spPr>
+          <a:xfrm>
+            <a:off x="9665000" y="1760000"/>
+            <a:ext cx="2425000" cy="336000"/>
+          </a:xfrm>
+          <a:prstGeom prst="rect">
+            <a:avLst/>
+          </a:prstGeom>
+          <a:noFill/>
+        </p:spPr>
+        <p:txBody>
+          <a:bodyPr wrap="square">
+            <a:spAutoFit/>
+          </a:bodyPr>
+          <a:lstStyle/>
+          <a:p>
+            <a:r>
+              <a:rPr sz="900" b="0"/>
+              <a:t>Прогноз спроса из DP</a:t>
+            </a:r>
+          </a:p>
+          <a:p>
+            <a:r>
+              <a:rPr sz="900" b="0"/>
+              <a:t>Фактические отгрузки за период</a:t>
+            </a:r>
+          </a:p>
+        </p:txBody>
+      </p:sp>
+      <p:sp>
+        <p:nvSpPr>
+          <p:cNvPr id="47" name="Rounded Rectangle 46"/>
+          <p:cNvSpPr/>
+          <p:nvPr/>
+        </p:nvSpPr>
+        <p:spPr>
+          <a:xfrm>
+            <a:off x="9665000" y="2246000"/>
+            <a:ext cx="2425000" cy="620000"/>
+          </a:xfrm>
+          <a:prstGeom prst="roundRect">
+            <a:avLst/>
+          </a:prstGeom>
+          <a:solidFill>
+            <a:schemeClr val="accent1"/>
+          </a:solidFill>
+        </p:spPr>
+        <p:style>
+          <a:lnRef idx="1">
+            <a:schemeClr val="accent1"/>
+          </a:lnRef>
+          <a:fillRef idx="3">
+            <a:schemeClr val="accent1"/>
+          </a:fillRef>
+          <a:effectRef idx="2">
+            <a:schemeClr val="accent1"/>
+          </a:effectRef>
+          <a:fontRef idx="minor">
+            <a:schemeClr val="lt1"/>
+          </a:fontRef>
+        </p:style>
+        <p:txBody>
+          <a:bodyPr rtlCol="0" anchor="ctr" wrap="square"/>
+          <a:lstStyle/>
+          <a:p>
+            <a:pPr algn="ctr"/>
+            <a:r>
+              <a:rPr sz="1000"/>
+              <a:t>Отчёт по сегментации</a:t>
+            </a:r>
+          </a:p>
+        </p:txBody>
+      </p:sp>
+      <p:sp>
+        <p:nvSpPr>
+          <p:cNvPr id="48" name="TextBox 47"/>
+          <p:cNvSpPr txBox="1"/>
+          <p:nvPr/>
+        </p:nvSpPr>
+        <p:spPr>
+          <a:xfrm>
+            <a:off x="9665000" y="2966000"/>
+            <a:ext cx="2425000" cy="336000"/>
+          </a:xfrm>
+          <a:prstGeom prst="rect">
+            <a:avLst/>
+          </a:prstGeom>
+          <a:noFill/>
+        </p:spPr>
+        <p:txBody>
+          <a:bodyPr wrap="square">
+            <a:spAutoFit/>
+          </a:bodyPr>
+          <a:lstStyle/>
+          <a:p>
+            <a:r>
+              <a:rPr sz="900" b="0"/>
+              <a:t>Сегментация по пяти признакам</a:t>
+            </a:r>
+          </a:p>
+          <a:p>
+            <a:r>
+              <a:rPr sz="900" b="0"/>
+              <a:t>Классы ABC</a:t>
+            </a:r>
+          </a:p>
+        </p:txBody>
+      </p:sp>
+      <p:sp>
+        <p:nvSpPr>
+          <p:cNvPr id="49" name="Rounded Rectangle 48"/>
+          <p:cNvSpPr/>
+          <p:nvPr/>
+        </p:nvSpPr>
+        <p:spPr>
+          <a:xfrm>
+            <a:off x="9665000" y="3452000"/>
+            <a:ext cx="2425000" cy="620000"/>
+          </a:xfrm>
+          <a:prstGeom prst="roundRect">
+            <a:avLst/>
+          </a:prstGeom>
+          <a:solidFill>
+            <a:schemeClr val="accent1"/>
+          </a:solidFill>
+        </p:spPr>
+        <p:style>
+          <a:lnRef idx="1">
+            <a:schemeClr val="accent1"/>
+          </a:lnRef>
+          <a:fillRef idx="3">
+            <a:schemeClr val="accent1"/>
+          </a:fillRef>
+          <a:effectRef idx="2">
+            <a:schemeClr val="accent1"/>
+          </a:effectRef>
+          <a:fontRef idx="minor">
+            <a:schemeClr val="lt1"/>
+          </a:fontRef>
+        </p:style>
+        <p:txBody>
+          <a:bodyPr rtlCol="0" anchor="ctr" wrap="square"/>
+          <a:lstStyle/>
+          <a:p>
+            <a:pPr algn="ctr"/>
+            <a:r>
+              <a:rPr sz="1000"/>
+              <a:t>Отчёт по страховым запасам</a:t>
+            </a:r>
+          </a:p>
+        </p:txBody>
+      </p:sp>
+      <p:sp>
+        <p:nvSpPr>
+          <p:cNvPr id="50" name="TextBox 49"/>
+          <p:cNvSpPr txBox="1"/>
+          <p:nvPr/>
+        </p:nvSpPr>
+        <p:spPr>
+          <a:xfrm>
+            <a:off x="9665000" y="4172000"/>
+            <a:ext cx="2425000" cy="504000"/>
+          </a:xfrm>
+          <a:prstGeom prst="rect">
+            <a:avLst/>
+          </a:prstGeom>
+          <a:noFill/>
+        </p:spPr>
+        <p:txBody>
+          <a:bodyPr wrap="square">
+            <a:spAutoFit/>
+          </a:bodyPr>
+          <a:lstStyle/>
+          <a:p>
+            <a:r>
+              <a:rPr sz="900" b="0"/>
+              <a:t>Рекомендованные уровни запасов по эшелонам</a:t>
+            </a:r>
+          </a:p>
+          <a:p>
+            <a:r>
+              <a:rPr sz="900" b="0"/>
+              <a:t>Три сценария</a:t>
+            </a:r>
+          </a:p>
+        </p:txBody>
+      </p:sp>
+      <p:sp>
+        <p:nvSpPr>
+          <p:cNvPr id="51" name="Rounded Rectangle 50"/>
+          <p:cNvSpPr/>
+          <p:nvPr/>
+        </p:nvSpPr>
+        <p:spPr>
+          <a:xfrm>
+            <a:off x="9665000" y="4826000"/>
+            <a:ext cx="2425000" cy="620000"/>
+          </a:xfrm>
+          <a:prstGeom prst="roundRect">
+            <a:avLst/>
+          </a:prstGeom>
+          <a:solidFill>
+            <a:schemeClr val="accent1"/>
+          </a:solidFill>
+        </p:spPr>
+        <p:style>
+          <a:lnRef idx="1">
+            <a:schemeClr val="accent1"/>
+          </a:lnRef>
+          <a:fillRef idx="3">
+            <a:schemeClr val="accent1"/>
+          </a:fillRef>
+          <a:effectRef idx="2">
+            <a:schemeClr val="accent1"/>
+          </a:effectRef>
+          <a:fontRef idx="minor">
+            <a:schemeClr val="lt1"/>
+          </a:fontRef>
+        </p:style>
+        <p:txBody>
+          <a:bodyPr rtlCol="0" anchor="ctr" wrap="square"/>
+          <a:lstStyle/>
+          <a:p>
+            <a:pPr algn="ctr"/>
+            <a:r>
+              <a:rPr sz="1000"/>
+              <a:t>Оценка эффектов</a:t>
+            </a:r>
+          </a:p>
+        </p:txBody>
+      </p:sp>
+      <p:sp>
+        <p:nvSpPr>
+          <p:cNvPr id="52" name="TextBox 51"/>
+          <p:cNvSpPr txBox="1"/>
+          <p:nvPr/>
+        </p:nvSpPr>
+        <p:spPr>
+          <a:xfrm>
+            <a:off x="9665000" y="5546000"/>
+            <a:ext cx="2425000" cy="672000"/>
+          </a:xfrm>
+          <a:prstGeom prst="rect">
+            <a:avLst/>
+          </a:prstGeom>
+          <a:noFill/>
+        </p:spPr>
+        <p:txBody>
+          <a:bodyPr wrap="square">
+            <a:spAutoFit/>
+          </a:bodyPr>
+          <a:lstStyle/>
+          <a:p>
+            <a:r>
+              <a:rPr sz="900" b="0"/>
+              <a:t>Ошибка прогноза по горизонту</a:t>
+            </a:r>
+          </a:p>
+          <a:p>
+            <a:r>
+              <a:rPr sz="900" b="0"/>
+              <a:t>Отчёт по сегментации</a:t>
+            </a:r>
+          </a:p>
+          <a:p>
+            <a:r>
+              <a:rPr sz="900" b="0"/>
+              <a:t>Отчёт по страховым запасам</a:t>
+            </a:r>
+          </a:p>
+          <a:p>
+            <a:r>
+              <a:rPr sz="900" b="0"/>
+              <a:t>Сравнение сценариев по эффектам</a:t>
+            </a:r>
+          </a:p>
+        </p:txBody>
+      </p:sp>
+      <p:sp>
+        <p:nvSpPr>
+          <p:cNvPr id="53" name="Rectangle 52"/>
+          <p:cNvSpPr/>
+          <p:nvPr/>
+        </p:nvSpPr>
+        <p:spPr>
+          <a:xfrm>
+            <a:off x="9665000" y="6368000"/>
+            <a:ext cx="2425000" cy="620000"/>
+          </a:xfrm>
+          <a:prstGeom prst="rect">
+            <a:avLst/>
+          </a:prstGeom>
+          <a:solidFill>
+            <a:schemeClr val="accent2"/>
+          </a:solidFill>
+        </p:spPr>
+        <p:style>
+          <a:lnRef idx="1">
+            <a:schemeClr val="accent1"/>
+          </a:lnRef>
+          <a:fillRef idx="3">
+            <a:schemeClr val="accent1"/>
+          </a:fillRef>
+          <a:effectRef idx="2">
+            <a:schemeClr val="accent1"/>
+          </a:effectRef>
+          <a:fontRef idx="minor">
+            <a:schemeClr val="lt1"/>
+          </a:fontRef>
+        </p:style>
+        <p:txBody>
+          <a:bodyPr rtlCol="0" anchor="ctr" wrap="square"/>
+          <a:lstStyle/>
+          <a:p>
+            <a:pPr algn="ctr"/>
+            <a:r>
+              <a:rPr sz="900"/>
+              <a:t>Оценка эффектов и рекомендации</a:t>
+            </a:r>
+          </a:p>
+        </p:txBody>
+      </p:sp>
+      <p:sp>
+        <p:nvSpPr>
+          <p:cNvPr id="54" name="Rectangle 53"/>
+          <p:cNvSpPr/>
+          <p:nvPr/>
+        </p:nvSpPr>
+        <p:spPr>
+          <a:xfrm>
+            <a:off x="100000" y="980000"/>
+            <a:ext cx="1600000" cy="620000"/>
+          </a:xfrm>
+          <a:prstGeom prst="rect">
+            <a:avLst/>
+          </a:prstGeom>
+          <a:solidFill>
+            <a:schemeClr val="accent2"/>
+          </a:solidFill>
+        </p:spPr>
+        <p:style>
+          <a:lnRef idx="1">
+            <a:schemeClr val="accent1"/>
+          </a:lnRef>
+          <a:fillRef idx="3">
+            <a:schemeClr val="accent1"/>
+          </a:fillRef>
+          <a:effectRef idx="2">
+            <a:schemeClr val="accent1"/>
+          </a:effectRef>
+          <a:fontRef idx="minor">
+            <a:schemeClr val="lt1"/>
+          </a:fontRef>
+        </p:style>
+        <p:txBody>
+          <a:bodyPr rtlCol="0" anchor="ctr" wrap="square"/>
+          <a:lstStyle/>
+          <a:p>
+            <a:pPr algn="ctr"/>
+            <a:r>
+              <a:rPr sz="900"/>
+              <a:t>Структура текущих запасов и фактические отгрузки из ERP</a:t>
+            </a:r>
+          </a:p>
+        </p:txBody>
+      </p:sp>
+      <p:sp>
+        <p:nvSpPr>
+          <p:cNvPr id="55" name="Rectangle 54"/>
+          <p:cNvSpPr/>
+          <p:nvPr/>
+        </p:nvSpPr>
+        <p:spPr>
+          <a:xfrm>
+            <a:off x="100000" y="2200000"/>
+            <a:ext cx="1600000" cy="620000"/>
+          </a:xfrm>
+          <a:prstGeom prst="rect">
+            <a:avLst/>
+          </a:prstGeom>
+          <a:solidFill>
+            <a:schemeClr val="accent2"/>
+          </a:solidFill>
+        </p:spPr>
+        <p:style>
+          <a:lnRef idx="1">
+            <a:schemeClr val="accent1"/>
+          </a:lnRef>
+          <a:fillRef idx="3">
+            <a:schemeClr val="accent1"/>
+          </a:fillRef>
+          <a:effectRef idx="2">
+            <a:schemeClr val="accent1"/>
+          </a:effectRef>
+          <a:fontRef idx="minor">
+            <a:schemeClr val="lt1"/>
+          </a:fontRef>
+        </p:style>
+        <p:txBody>
+          <a:bodyPr rtlCol="0" anchor="ctr" wrap="square"/>
+          <a:lstStyle/>
+          <a:p>
+            <a:pPr algn="ctr"/>
+            <a:r>
+              <a:rPr sz="900"/>
+              <a:t>Спрос и волатильность из DP</a:t>
+            </a:r>
+          </a:p>
+        </p:txBody>
+      </p:sp>
+      <p:sp>
+        <p:nvSpPr>
+          <p:cNvPr id="56" name="Rectangle 55"/>
+          <p:cNvSpPr/>
+          <p:nvPr/>
+        </p:nvSpPr>
+        <p:spPr>
+          <a:xfrm>
+            <a:off x="100000" y="3420000"/>
+            <a:ext cx="1600000" cy="620000"/>
+          </a:xfrm>
+          <a:prstGeom prst="rect">
+            <a:avLst/>
+          </a:prstGeom>
+          <a:solidFill>
+            <a:schemeClr val="accent2"/>
+          </a:solidFill>
+        </p:spPr>
+        <p:style>
+          <a:lnRef idx="1">
+            <a:schemeClr val="accent1"/>
+          </a:lnRef>
+          <a:fillRef idx="3">
+            <a:schemeClr val="accent1"/>
+          </a:fillRef>
+          <a:effectRef idx="2">
+            <a:schemeClr val="accent1"/>
+          </a:effectRef>
+          <a:fontRef idx="minor">
+            <a:schemeClr val="lt1"/>
+          </a:fontRef>
+        </p:style>
+        <p:txBody>
+          <a:bodyPr rtlCol="0" anchor="ctr" wrap="square"/>
+          <a:lstStyle/>
+          <a:p>
+            <a:pPr algn="ctr"/>
+            <a:r>
               <a:rPr sz="900"/>
               <a:t>Ошибка прогноза по горизонту из DP</a:t>
             </a:r>
           </a:p>
         </p:txBody>
       </p:sp>
+      <p:sp>
+        <p:nvSpPr>
+          <p:cNvPr id="57" name="Rectangle 56"/>
+          <p:cNvSpPr/>
+          <p:nvPr/>
+        </p:nvSpPr>
+        <p:spPr>
+          <a:xfrm>
+            <a:off x="100000" y="4640000"/>
+            <a:ext cx="1600000" cy="620000"/>
+          </a:xfrm>
+          <a:prstGeom prst="rect">
+            <a:avLst/>
+          </a:prstGeom>
+          <a:solidFill>
+            <a:schemeClr val="accent2"/>
+          </a:solidFill>
+        </p:spPr>
+        <p:style>
+          <a:lnRef idx="1">
+            <a:schemeClr val="accent1"/>
+          </a:lnRef>
+          <a:fillRef idx="3">
+            <a:schemeClr val="accent1"/>
+          </a:fillRef>
+          <a:effectRef idx="2">
+            <a:schemeClr val="accent1"/>
+          </a:effectRef>
+          <a:fontRef idx="minor">
+            <a:schemeClr val="lt1"/>
+          </a:fontRef>
+        </p:style>
+        <p:txBody>
+          <a:bodyPr rtlCol="0" anchor="ctr" wrap="square"/>
+          <a:lstStyle/>
+          <a:p>
+            <a:pPr algn="ctr"/>
+            <a:r>
+              <a:rPr sz="900"/>
+              <a:t>Параметры цепочки из ERP</a:t>
+            </a:r>
+          </a:p>
+        </p:txBody>
+      </p:sp>
+      <p:sp>
+        <p:nvSpPr>
+          <p:cNvPr id="58" name="Rectangle 57"/>
+          <p:cNvSpPr/>
+          <p:nvPr/>
+        </p:nvSpPr>
+        <p:spPr>
+          <a:xfrm>
+            <a:off x="100000" y="5860000"/>
+            <a:ext cx="1600000" cy="620000"/>
+          </a:xfrm>
+          <a:prstGeom prst="rect">
+            <a:avLst/>
+          </a:prstGeom>
+          <a:solidFill>
+            <a:schemeClr val="accent2"/>
+          </a:solidFill>
+        </p:spPr>
+        <p:style>
+          <a:lnRef idx="1">
+            <a:schemeClr val="accent1"/>
+          </a:lnRef>
+          <a:fillRef idx="3">
+            <a:schemeClr val="accent1"/>
+          </a:fillRef>
+          <a:effectRef idx="2">
+            <a:schemeClr val="accent1"/>
+          </a:effectRef>
+          <a:fontRef idx="minor">
+            <a:schemeClr val="lt1"/>
+          </a:fontRef>
+        </p:style>
+        <p:txBody>
+          <a:bodyPr rtlCol="0" anchor="ctr" wrap="square"/>
+          <a:lstStyle/>
+          <a:p>
+            <a:pPr algn="ctr"/>
+            <a:r>
+              <a:rPr sz="900"/>
+              <a:t>Сроки годности и требования сетей к остаточному сроку из ERP</a:t>
+            </a:r>
+          </a:p>
+        </p:txBody>
+      </p:sp>
       <p:cxnSp>
         <p:nvCxnSpPr>
-          <p:cNvPr id="35" name="Connector 34"/>
+          <p:cNvPr id="59" name="Connector 58"/>
           <p:cNvCxnSpPr>
             <a:stCxn id="4" idx="2"/>
             <a:endCxn id="6" idx="0"/>
@@ -4611,7 +5601,7 @@
       </p:cxnSp>
       <p:cxnSp>
         <p:nvCxnSpPr>
-          <p:cNvPr id="36" name="Connector 35"/>
+          <p:cNvPr id="60" name="Connector 59"/>
           <p:cNvCxnSpPr>
             <a:stCxn id="6" idx="2"/>
             <a:endCxn id="8" idx="0"/>
@@ -4647,7 +5637,7 @@
       </p:cxnSp>
       <p:cxnSp>
         <p:nvCxnSpPr>
-          <p:cNvPr id="37" name="Connector 36"/>
+          <p:cNvPr id="61" name="Connector 60"/>
           <p:cNvCxnSpPr>
             <a:stCxn id="8" idx="0"/>
             <a:endCxn id="12" idx="2"/>
@@ -4683,7 +5673,7 @@
       </p:cxnSp>
       <p:cxnSp>
         <p:nvCxnSpPr>
-          <p:cNvPr id="38" name="Connector 37"/>
+          <p:cNvPr id="62" name="Connector 61"/>
           <p:cNvCxnSpPr>
             <a:stCxn id="12" idx="2"/>
             <a:endCxn id="14" idx="0"/>
@@ -4693,7 +5683,7 @@
         <p:spPr>
           <a:xfrm>
             <a:off x="5727500" y="1660000"/>
-            <a:ext cx="0" cy="1930000"/>
+            <a:ext cx="0" cy="1426000"/>
           </a:xfrm>
           <a:prstGeom prst="line">
             <a:avLst/>
@@ -4719,17 +5709,17 @@
       </p:cxnSp>
       <p:cxnSp>
         <p:nvCxnSpPr>
-          <p:cNvPr id="39" name="Connector 38"/>
+          <p:cNvPr id="63" name="Connector 62"/>
           <p:cNvCxnSpPr>
-            <a:stCxn id="14" idx="3"/>
-            <a:endCxn id="18" idx="1"/>
+            <a:stCxn id="12" idx="2"/>
+            <a:endCxn id="16" idx="0"/>
           </p:cNvCxnSpPr>
           <p:nvPr/>
         </p:nvCxnSpPr>
         <p:spPr>
-          <a:xfrm flipV="1">
-            <a:off x="6940000" y="1350000"/>
-            <a:ext cx="150000" cy="2550000"/>
+          <a:xfrm>
+            <a:off x="5727500" y="1660000"/>
+            <a:ext cx="0" cy="2968000"/>
           </a:xfrm>
           <a:prstGeom prst="line">
             <a:avLst/>
@@ -4755,17 +5745,17 @@
       </p:cxnSp>
       <p:cxnSp>
         <p:nvCxnSpPr>
-          <p:cNvPr id="40" name="Connector 39"/>
+          <p:cNvPr id="64" name="Connector 63"/>
           <p:cNvCxnSpPr>
-            <a:stCxn id="18" idx="2"/>
-            <a:endCxn id="20" idx="0"/>
+            <a:stCxn id="12" idx="2"/>
+            <a:endCxn id="18" idx="0"/>
           </p:cNvCxnSpPr>
           <p:nvPr/>
         </p:nvCxnSpPr>
         <p:spPr>
           <a:xfrm>
-            <a:off x="8302500" y="1660000"/>
-            <a:ext cx="0" cy="1594000"/>
+            <a:off x="5727500" y="1660000"/>
+            <a:ext cx="0" cy="4342000"/>
           </a:xfrm>
           <a:prstGeom prst="line">
             <a:avLst/>
@@ -4791,17 +5781,17 @@
       </p:cxnSp>
       <p:cxnSp>
         <p:nvCxnSpPr>
-          <p:cNvPr id="41" name="Connector 40"/>
+          <p:cNvPr id="65" name="Connector 64"/>
           <p:cNvCxnSpPr>
-            <a:stCxn id="20" idx="3"/>
-            <a:endCxn id="27" idx="1"/>
+            <a:stCxn id="14" idx="2"/>
+            <a:endCxn id="20" idx="0"/>
           </p:cNvCxnSpPr>
           <p:nvPr/>
         </p:nvCxnSpPr>
         <p:spPr>
-          <a:xfrm flipV="1">
-            <a:off x="9515000" y="1350000"/>
-            <a:ext cx="150000" cy="2214000"/>
+          <a:xfrm>
+            <a:off x="5727500" y="3706000"/>
+            <a:ext cx="0" cy="3670000"/>
           </a:xfrm>
           <a:prstGeom prst="line">
             <a:avLst/>
@@ -4827,17 +5817,17 @@
       </p:cxnSp>
       <p:cxnSp>
         <p:nvCxnSpPr>
-          <p:cNvPr id="42" name="Connector 41"/>
+          <p:cNvPr id="66" name="Connector 65"/>
           <p:cNvCxnSpPr>
-            <a:stCxn id="20" idx="2"/>
-            <a:endCxn id="22" idx="0"/>
+            <a:stCxn id="16" idx="2"/>
+            <a:endCxn id="20" idx="0"/>
           </p:cNvCxnSpPr>
           <p:nvPr/>
         </p:nvCxnSpPr>
         <p:spPr>
           <a:xfrm>
-            <a:off x="8302500" y="3874000"/>
-            <a:ext cx="0" cy="2098000"/>
+            <a:off x="5727500" y="5248000"/>
+            <a:ext cx="0" cy="2128000"/>
           </a:xfrm>
           <a:prstGeom prst="line">
             <a:avLst/>
@@ -4863,17 +5853,17 @@
       </p:cxnSp>
       <p:cxnSp>
         <p:nvCxnSpPr>
-          <p:cNvPr id="43" name="Connector 42"/>
+          <p:cNvPr id="67" name="Connector 66"/>
           <p:cNvCxnSpPr>
-            <a:stCxn id="30" idx="3"/>
-            <a:endCxn id="4" idx="1"/>
+            <a:stCxn id="18" idx="2"/>
+            <a:endCxn id="20" idx="0"/>
           </p:cNvCxnSpPr>
           <p:nvPr/>
         </p:nvCxnSpPr>
         <p:spPr>
           <a:xfrm>
-            <a:off x="1700000" y="1290000"/>
-            <a:ext cx="240000" cy="60000"/>
+            <a:off x="5727500" y="6622000"/>
+            <a:ext cx="0" cy="754000"/>
           </a:xfrm>
           <a:prstGeom prst="line">
             <a:avLst/>
@@ -4899,19 +5889,19 @@
       </p:cxnSp>
       <p:cxnSp>
         <p:nvCxnSpPr>
-          <p:cNvPr id="44" name="Connector 43"/>
+          <p:cNvPr id="68" name="Connector 67"/>
           <p:cNvCxnSpPr>
-            <a:stCxn id="31" idx="3"/>
-            <a:endCxn id="12" idx="1"/>
+            <a:stCxn id="20" idx="2"/>
+            <a:endCxn id="22" idx="0"/>
           </p:cNvCxnSpPr>
           <p:nvPr/>
         </p:nvCxnSpPr>
         <p:spPr>
-          <a:xfrm flipV="1">
-            <a:off x="1700000" y="1350000"/>
-            <a:ext cx="2815000" cy="1160000"/>
-          </a:xfrm>
-          <a:prstGeom prst="bentConnector3">
+          <a:xfrm>
+            <a:off x="5727500" y="7996000"/>
+            <a:ext cx="0" cy="922000"/>
+          </a:xfrm>
+          <a:prstGeom prst="line">
             <a:avLst/>
           </a:prstGeom>
           <a:ln>
@@ -4935,19 +5925,19 @@
       </p:cxnSp>
       <p:cxnSp>
         <p:nvCxnSpPr>
-          <p:cNvPr id="45" name="Connector 44"/>
+          <p:cNvPr id="69" name="Connector 68"/>
           <p:cNvCxnSpPr>
-            <a:stCxn id="32" idx="3"/>
-            <a:endCxn id="12" idx="1"/>
+            <a:stCxn id="22" idx="2"/>
+            <a:endCxn id="24" idx="0"/>
           </p:cNvCxnSpPr>
           <p:nvPr/>
         </p:nvCxnSpPr>
         <p:spPr>
-          <a:xfrm flipV="1">
-            <a:off x="1700000" y="1350000"/>
-            <a:ext cx="2815000" cy="2380000"/>
-          </a:xfrm>
-          <a:prstGeom prst="bentConnector3">
+          <a:xfrm>
+            <a:off x="5727500" y="9538000"/>
+            <a:ext cx="0" cy="754000"/>
+          </a:xfrm>
+          <a:prstGeom prst="line">
             <a:avLst/>
           </a:prstGeom>
           <a:ln>
@@ -4971,19 +5961,19 @@
       </p:cxnSp>
       <p:cxnSp>
         <p:nvCxnSpPr>
-          <p:cNvPr id="46" name="Connector 45"/>
+          <p:cNvPr id="70" name="Connector 69"/>
           <p:cNvCxnSpPr>
-            <a:stCxn id="33" idx="3"/>
-            <a:endCxn id="12" idx="1"/>
+            <a:stCxn id="24" idx="0"/>
+            <a:endCxn id="28" idx="2"/>
           </p:cNvCxnSpPr>
           <p:nvPr/>
         </p:nvCxnSpPr>
         <p:spPr>
           <a:xfrm flipV="1">
-            <a:off x="1700000" y="1350000"/>
-            <a:ext cx="2815000" cy="3600000"/>
-          </a:xfrm>
-          <a:prstGeom prst="bentConnector3">
+            <a:off x="5727500" y="1660000"/>
+            <a:ext cx="2575000" cy="8632000"/>
+          </a:xfrm>
+          <a:prstGeom prst="line">
             <a:avLst/>
           </a:prstGeom>
           <a:ln>
@@ -5007,19 +5997,19 @@
       </p:cxnSp>
       <p:cxnSp>
         <p:nvCxnSpPr>
-          <p:cNvPr id="47" name="Connector 46"/>
+          <p:cNvPr id="71" name="Connector 70"/>
           <p:cNvCxnSpPr>
-            <a:stCxn id="34" idx="3"/>
-            <a:endCxn id="12" idx="1"/>
+            <a:stCxn id="28" idx="2"/>
+            <a:endCxn id="30" idx="0"/>
           </p:cNvCxnSpPr>
           <p:nvPr/>
         </p:nvCxnSpPr>
         <p:spPr>
-          <a:xfrm flipV="1">
-            <a:off x="1700000" y="1350000"/>
-            <a:ext cx="2815000" cy="4820000"/>
-          </a:xfrm>
-          <a:prstGeom prst="bentConnector3">
+          <a:xfrm>
+            <a:off x="8302500" y="1660000"/>
+            <a:ext cx="0" cy="922000"/>
+          </a:xfrm>
+          <a:prstGeom prst="line">
             <a:avLst/>
           </a:prstGeom>
           <a:ln>
@@ -5043,17 +6033,17 @@
       </p:cxnSp>
       <p:cxnSp>
         <p:nvCxnSpPr>
-          <p:cNvPr id="48" name="Connector 47"/>
+          <p:cNvPr id="72" name="Connector 71"/>
           <p:cNvCxnSpPr>
-            <a:stCxn id="18" idx="2"/>
-            <a:endCxn id="24" idx="0"/>
+            <a:stCxn id="30" idx="2"/>
+            <a:endCxn id="32" idx="0"/>
           </p:cNvCxnSpPr>
           <p:nvPr/>
         </p:nvCxnSpPr>
         <p:spPr>
           <a:xfrm>
-            <a:off x="8302500" y="1660000"/>
-            <a:ext cx="0" cy="6526000"/>
+            <a:off x="8302500" y="3202000"/>
+            <a:ext cx="0" cy="922000"/>
           </a:xfrm>
           <a:prstGeom prst="line">
             <a:avLst/>
@@ -5079,17 +6069,629 @@
       </p:cxnSp>
       <p:cxnSp>
         <p:nvCxnSpPr>
-          <p:cNvPr id="49" name="Connector 48"/>
+          <p:cNvPr id="73" name="Connector 72"/>
           <p:cNvCxnSpPr>
-            <a:stCxn id="27" idx="2"/>
-            <a:endCxn id="29" idx="0"/>
+            <a:stCxn id="30" idx="2"/>
+            <a:endCxn id="34" idx="0"/>
           </p:cNvCxnSpPr>
           <p:nvPr/>
         </p:nvCxnSpPr>
         <p:spPr>
           <a:xfrm>
+            <a:off x="8302500" y="3202000"/>
+            <a:ext cx="0" cy="2632000"/>
+          </a:xfrm>
+          <a:prstGeom prst="line">
+            <a:avLst/>
+          </a:prstGeom>
+          <a:ln>
+            <a:tailEnd type="triangle"/>
+          </a:ln>
+        </p:spPr>
+        <p:style>
+          <a:lnRef idx="2">
+            <a:schemeClr val="accent1"/>
+          </a:lnRef>
+          <a:fillRef idx="0">
+            <a:schemeClr val="accent1"/>
+          </a:fillRef>
+          <a:effectRef idx="1">
+            <a:schemeClr val="accent1"/>
+          </a:effectRef>
+          <a:fontRef idx="minor">
+            <a:schemeClr val="tx1"/>
+          </a:fontRef>
+        </p:style>
+      </p:cxnSp>
+      <p:cxnSp>
+        <p:nvCxnSpPr>
+          <p:cNvPr id="74" name="Connector 73"/>
+          <p:cNvCxnSpPr>
+            <a:stCxn id="32" idx="2"/>
+            <a:endCxn id="36" idx="0"/>
+          </p:cNvCxnSpPr>
+          <p:nvPr/>
+        </p:nvCxnSpPr>
+        <p:spPr>
+          <a:xfrm>
+            <a:off x="8302500" y="4744000"/>
+            <a:ext cx="0" cy="2464000"/>
+          </a:xfrm>
+          <a:prstGeom prst="line">
+            <a:avLst/>
+          </a:prstGeom>
+          <a:ln>
+            <a:tailEnd type="triangle"/>
+          </a:ln>
+        </p:spPr>
+        <p:style>
+          <a:lnRef idx="2">
+            <a:schemeClr val="accent1"/>
+          </a:lnRef>
+          <a:fillRef idx="0">
+            <a:schemeClr val="accent1"/>
+          </a:fillRef>
+          <a:effectRef idx="1">
+            <a:schemeClr val="accent1"/>
+          </a:effectRef>
+          <a:fontRef idx="minor">
+            <a:schemeClr val="tx1"/>
+          </a:fontRef>
+        </p:style>
+      </p:cxnSp>
+      <p:cxnSp>
+        <p:nvCxnSpPr>
+          <p:cNvPr id="75" name="Connector 74"/>
+          <p:cNvCxnSpPr>
+            <a:stCxn id="34" idx="2"/>
+            <a:endCxn id="38" idx="0"/>
+          </p:cNvCxnSpPr>
+          <p:nvPr/>
+        </p:nvCxnSpPr>
+        <p:spPr>
+          <a:xfrm>
+            <a:off x="8302500" y="6454000"/>
+            <a:ext cx="0" cy="3472000"/>
+          </a:xfrm>
+          <a:prstGeom prst="line">
+            <a:avLst/>
+          </a:prstGeom>
+          <a:ln>
+            <a:tailEnd type="triangle"/>
+          </a:ln>
+        </p:spPr>
+        <p:style>
+          <a:lnRef idx="2">
+            <a:schemeClr val="accent1"/>
+          </a:lnRef>
+          <a:fillRef idx="0">
+            <a:schemeClr val="accent1"/>
+          </a:fillRef>
+          <a:effectRef idx="1">
+            <a:schemeClr val="accent1"/>
+          </a:effectRef>
+          <a:fontRef idx="minor">
+            <a:schemeClr val="tx1"/>
+          </a:fontRef>
+        </p:style>
+      </p:cxnSp>
+      <p:cxnSp>
+        <p:nvCxnSpPr>
+          <p:cNvPr id="76" name="Connector 75"/>
+          <p:cNvCxnSpPr>
+            <a:stCxn id="36" idx="2"/>
+            <a:endCxn id="38" idx="0"/>
+          </p:cNvCxnSpPr>
+          <p:nvPr/>
+        </p:nvCxnSpPr>
+        <p:spPr>
+          <a:xfrm>
+            <a:off x="8302500" y="7828000"/>
+            <a:ext cx="0" cy="2098000"/>
+          </a:xfrm>
+          <a:prstGeom prst="line">
+            <a:avLst/>
+          </a:prstGeom>
+          <a:ln>
+            <a:tailEnd type="triangle"/>
+          </a:ln>
+        </p:spPr>
+        <p:style>
+          <a:lnRef idx="2">
+            <a:schemeClr val="accent1"/>
+          </a:lnRef>
+          <a:fillRef idx="0">
+            <a:schemeClr val="accent1"/>
+          </a:fillRef>
+          <a:effectRef idx="1">
+            <a:schemeClr val="accent1"/>
+          </a:effectRef>
+          <a:fontRef idx="minor">
+            <a:schemeClr val="tx1"/>
+          </a:fontRef>
+        </p:style>
+      </p:cxnSp>
+      <p:cxnSp>
+        <p:nvCxnSpPr>
+          <p:cNvPr id="77" name="Connector 76"/>
+          <p:cNvCxnSpPr>
+            <a:stCxn id="36" idx="2"/>
+            <a:endCxn id="40" idx="0"/>
+          </p:cNvCxnSpPr>
+          <p:nvPr/>
+        </p:nvCxnSpPr>
+        <p:spPr>
+          <a:xfrm>
+            <a:off x="8302500" y="7828000"/>
+            <a:ext cx="0" cy="3640000"/>
+          </a:xfrm>
+          <a:prstGeom prst="line">
+            <a:avLst/>
+          </a:prstGeom>
+          <a:ln>
+            <a:tailEnd type="triangle"/>
+          </a:ln>
+        </p:spPr>
+        <p:style>
+          <a:lnRef idx="2">
+            <a:schemeClr val="accent1"/>
+          </a:lnRef>
+          <a:fillRef idx="0">
+            <a:schemeClr val="accent1"/>
+          </a:fillRef>
+          <a:effectRef idx="1">
+            <a:schemeClr val="accent1"/>
+          </a:effectRef>
+          <a:fontRef idx="minor">
+            <a:schemeClr val="tx1"/>
+          </a:fontRef>
+        </p:style>
+      </p:cxnSp>
+      <p:cxnSp>
+        <p:nvCxnSpPr>
+          <p:cNvPr id="78" name="Connector 77"/>
+          <p:cNvCxnSpPr>
+            <a:stCxn id="38" idx="0"/>
+            <a:endCxn id="49" idx="2"/>
+          </p:cNvCxnSpPr>
+          <p:nvPr/>
+        </p:nvCxnSpPr>
+        <p:spPr>
+          <a:xfrm flipV="1">
+            <a:off x="8302500" y="4072000"/>
+            <a:ext cx="2575000" cy="5854000"/>
+          </a:xfrm>
+          <a:prstGeom prst="line">
+            <a:avLst/>
+          </a:prstGeom>
+          <a:ln>
+            <a:tailEnd type="triangle"/>
+          </a:ln>
+        </p:spPr>
+        <p:style>
+          <a:lnRef idx="2">
+            <a:schemeClr val="accent1"/>
+          </a:lnRef>
+          <a:fillRef idx="0">
+            <a:schemeClr val="accent1"/>
+          </a:fillRef>
+          <a:effectRef idx="1">
+            <a:schemeClr val="accent1"/>
+          </a:effectRef>
+          <a:fontRef idx="minor">
+            <a:schemeClr val="tx1"/>
+          </a:fontRef>
+        </p:style>
+      </p:cxnSp>
+      <p:cxnSp>
+        <p:nvCxnSpPr>
+          <p:cNvPr id="79" name="Connector 78"/>
+          <p:cNvCxnSpPr>
+            <a:stCxn id="36" idx="0"/>
+            <a:endCxn id="45" idx="2"/>
+          </p:cNvCxnSpPr>
+          <p:nvPr/>
+        </p:nvCxnSpPr>
+        <p:spPr>
+          <a:xfrm flipV="1">
+            <a:off x="8302500" y="1660000"/>
+            <a:ext cx="2575000" cy="5548000"/>
+          </a:xfrm>
+          <a:prstGeom prst="line">
+            <a:avLst/>
+          </a:prstGeom>
+          <a:ln>
+            <a:tailEnd type="triangle"/>
+          </a:ln>
+        </p:spPr>
+        <p:style>
+          <a:lnRef idx="2">
+            <a:schemeClr val="accent1"/>
+          </a:lnRef>
+          <a:fillRef idx="0">
+            <a:schemeClr val="accent1"/>
+          </a:fillRef>
+          <a:effectRef idx="1">
+            <a:schemeClr val="accent1"/>
+          </a:effectRef>
+          <a:fontRef idx="minor">
+            <a:schemeClr val="tx1"/>
+          </a:fontRef>
+        </p:style>
+      </p:cxnSp>
+      <p:cxnSp>
+        <p:nvCxnSpPr>
+          <p:cNvPr id="80" name="Connector 79"/>
+          <p:cNvCxnSpPr>
+            <a:stCxn id="36" idx="0"/>
+            <a:endCxn id="47" idx="2"/>
+          </p:cNvCxnSpPr>
+          <p:nvPr/>
+        </p:nvCxnSpPr>
+        <p:spPr>
+          <a:xfrm flipV="1">
+            <a:off x="8302500" y="2866000"/>
+            <a:ext cx="2575000" cy="4342000"/>
+          </a:xfrm>
+          <a:prstGeom prst="line">
+            <a:avLst/>
+          </a:prstGeom>
+          <a:ln>
+            <a:tailEnd type="triangle"/>
+          </a:ln>
+        </p:spPr>
+        <p:style>
+          <a:lnRef idx="2">
+            <a:schemeClr val="accent1"/>
+          </a:lnRef>
+          <a:fillRef idx="0">
+            <a:schemeClr val="accent1"/>
+          </a:fillRef>
+          <a:effectRef idx="1">
+            <a:schemeClr val="accent1"/>
+          </a:effectRef>
+          <a:fontRef idx="minor">
+            <a:schemeClr val="tx1"/>
+          </a:fontRef>
+        </p:style>
+      </p:cxnSp>
+      <p:cxnSp>
+        <p:nvCxnSpPr>
+          <p:cNvPr id="81" name="Connector 80"/>
+          <p:cNvCxnSpPr>
+            <a:stCxn id="45" idx="2"/>
+            <a:endCxn id="51" idx="0"/>
+          </p:cNvCxnSpPr>
+          <p:nvPr/>
+        </p:nvCxnSpPr>
+        <p:spPr>
+          <a:xfrm>
             <a:off x="10877500" y="1660000"/>
-            <a:ext cx="0" cy="586000"/>
+            <a:ext cx="0" cy="3166000"/>
+          </a:xfrm>
+          <a:prstGeom prst="line">
+            <a:avLst/>
+          </a:prstGeom>
+          <a:ln>
+            <a:tailEnd type="triangle"/>
+          </a:ln>
+        </p:spPr>
+        <p:style>
+          <a:lnRef idx="2">
+            <a:schemeClr val="accent1"/>
+          </a:lnRef>
+          <a:fillRef idx="0">
+            <a:schemeClr val="accent1"/>
+          </a:fillRef>
+          <a:effectRef idx="1">
+            <a:schemeClr val="accent1"/>
+          </a:effectRef>
+          <a:fontRef idx="minor">
+            <a:schemeClr val="tx1"/>
+          </a:fontRef>
+        </p:style>
+      </p:cxnSp>
+      <p:cxnSp>
+        <p:nvCxnSpPr>
+          <p:cNvPr id="82" name="Connector 81"/>
+          <p:cNvCxnSpPr>
+            <a:stCxn id="47" idx="2"/>
+            <a:endCxn id="51" idx="0"/>
+          </p:cNvCxnSpPr>
+          <p:nvPr/>
+        </p:nvCxnSpPr>
+        <p:spPr>
+          <a:xfrm>
+            <a:off x="10877500" y="2866000"/>
+            <a:ext cx="0" cy="1960000"/>
+          </a:xfrm>
+          <a:prstGeom prst="line">
+            <a:avLst/>
+          </a:prstGeom>
+          <a:ln>
+            <a:tailEnd type="triangle"/>
+          </a:ln>
+        </p:spPr>
+        <p:style>
+          <a:lnRef idx="2">
+            <a:schemeClr val="accent1"/>
+          </a:lnRef>
+          <a:fillRef idx="0">
+            <a:schemeClr val="accent1"/>
+          </a:fillRef>
+          <a:effectRef idx="1">
+            <a:schemeClr val="accent1"/>
+          </a:effectRef>
+          <a:fontRef idx="minor">
+            <a:schemeClr val="tx1"/>
+          </a:fontRef>
+        </p:style>
+      </p:cxnSp>
+      <p:cxnSp>
+        <p:nvCxnSpPr>
+          <p:cNvPr id="83" name="Connector 82"/>
+          <p:cNvCxnSpPr>
+            <a:stCxn id="49" idx="2"/>
+            <a:endCxn id="51" idx="0"/>
+          </p:cNvCxnSpPr>
+          <p:nvPr/>
+        </p:nvCxnSpPr>
+        <p:spPr>
+          <a:xfrm>
+            <a:off x="10877500" y="4072000"/>
+            <a:ext cx="0" cy="754000"/>
+          </a:xfrm>
+          <a:prstGeom prst="line">
+            <a:avLst/>
+          </a:prstGeom>
+          <a:ln>
+            <a:tailEnd type="triangle"/>
+          </a:ln>
+        </p:spPr>
+        <p:style>
+          <a:lnRef idx="2">
+            <a:schemeClr val="accent1"/>
+          </a:lnRef>
+          <a:fillRef idx="0">
+            <a:schemeClr val="accent1"/>
+          </a:fillRef>
+          <a:effectRef idx="1">
+            <a:schemeClr val="accent1"/>
+          </a:effectRef>
+          <a:fontRef idx="minor">
+            <a:schemeClr val="tx1"/>
+          </a:fontRef>
+        </p:style>
+      </p:cxnSp>
+      <p:cxnSp>
+        <p:nvCxnSpPr>
+          <p:cNvPr id="84" name="Connector 83"/>
+          <p:cNvCxnSpPr>
+            <a:stCxn id="54" idx="3"/>
+            <a:endCxn id="4" idx="1"/>
+          </p:cNvCxnSpPr>
+          <p:nvPr/>
+        </p:nvCxnSpPr>
+        <p:spPr>
+          <a:xfrm>
+            <a:off x="1700000" y="1290000"/>
+            <a:ext cx="240000" cy="60000"/>
+          </a:xfrm>
+          <a:prstGeom prst="line">
+            <a:avLst/>
+          </a:prstGeom>
+          <a:ln>
+            <a:tailEnd type="triangle"/>
+          </a:ln>
+        </p:spPr>
+        <p:style>
+          <a:lnRef idx="2">
+            <a:schemeClr val="accent1"/>
+          </a:lnRef>
+          <a:fillRef idx="0">
+            <a:schemeClr val="accent1"/>
+          </a:fillRef>
+          <a:effectRef idx="1">
+            <a:schemeClr val="accent1"/>
+          </a:effectRef>
+          <a:fontRef idx="minor">
+            <a:schemeClr val="tx1"/>
+          </a:fontRef>
+        </p:style>
+      </p:cxnSp>
+      <p:cxnSp>
+        <p:nvCxnSpPr>
+          <p:cNvPr id="85" name="Connector 84"/>
+          <p:cNvCxnSpPr>
+            <a:stCxn id="55" idx="3"/>
+            <a:endCxn id="14" idx="1"/>
+          </p:cNvCxnSpPr>
+          <p:nvPr/>
+        </p:nvCxnSpPr>
+        <p:spPr>
+          <a:xfrm>
+            <a:off x="1700000" y="2510000"/>
+            <a:ext cx="2815000" cy="886000"/>
+          </a:xfrm>
+          <a:prstGeom prst="bentConnector3">
+            <a:avLst/>
+          </a:prstGeom>
+          <a:ln>
+            <a:tailEnd type="triangle"/>
+          </a:ln>
+        </p:spPr>
+        <p:style>
+          <a:lnRef idx="2">
+            <a:schemeClr val="accent1"/>
+          </a:lnRef>
+          <a:fillRef idx="0">
+            <a:schemeClr val="accent1"/>
+          </a:fillRef>
+          <a:effectRef idx="1">
+            <a:schemeClr val="accent1"/>
+          </a:effectRef>
+          <a:fontRef idx="minor">
+            <a:schemeClr val="tx1"/>
+          </a:fontRef>
+        </p:style>
+      </p:cxnSp>
+      <p:cxnSp>
+        <p:nvCxnSpPr>
+          <p:cNvPr id="86" name="Connector 85"/>
+          <p:cNvCxnSpPr>
+            <a:stCxn id="56" idx="3"/>
+            <a:endCxn id="14" idx="1"/>
+          </p:cNvCxnSpPr>
+          <p:nvPr/>
+        </p:nvCxnSpPr>
+        <p:spPr>
+          <a:xfrm flipV="1">
+            <a:off x="1700000" y="3396000"/>
+            <a:ext cx="2815000" cy="334000"/>
+          </a:xfrm>
+          <a:prstGeom prst="bentConnector3">
+            <a:avLst/>
+          </a:prstGeom>
+          <a:ln>
+            <a:tailEnd type="triangle"/>
+          </a:ln>
+        </p:spPr>
+        <p:style>
+          <a:lnRef idx="2">
+            <a:schemeClr val="accent1"/>
+          </a:lnRef>
+          <a:fillRef idx="0">
+            <a:schemeClr val="accent1"/>
+          </a:fillRef>
+          <a:effectRef idx="1">
+            <a:schemeClr val="accent1"/>
+          </a:effectRef>
+          <a:fontRef idx="minor">
+            <a:schemeClr val="tx1"/>
+          </a:fontRef>
+        </p:style>
+      </p:cxnSp>
+      <p:cxnSp>
+        <p:nvCxnSpPr>
+          <p:cNvPr id="87" name="Connector 86"/>
+          <p:cNvCxnSpPr>
+            <a:stCxn id="57" idx="3"/>
+            <a:endCxn id="12" idx="1"/>
+          </p:cNvCxnSpPr>
+          <p:nvPr/>
+        </p:nvCxnSpPr>
+        <p:spPr>
+          <a:xfrm flipV="1">
+            <a:off x="1700000" y="1350000"/>
+            <a:ext cx="2815000" cy="3600000"/>
+          </a:xfrm>
+          <a:prstGeom prst="bentConnector3">
+            <a:avLst/>
+          </a:prstGeom>
+          <a:ln>
+            <a:tailEnd type="triangle"/>
+          </a:ln>
+        </p:spPr>
+        <p:style>
+          <a:lnRef idx="2">
+            <a:schemeClr val="accent1"/>
+          </a:lnRef>
+          <a:fillRef idx="0">
+            <a:schemeClr val="accent1"/>
+          </a:fillRef>
+          <a:effectRef idx="1">
+            <a:schemeClr val="accent1"/>
+          </a:effectRef>
+          <a:fontRef idx="minor">
+            <a:schemeClr val="tx1"/>
+          </a:fontRef>
+        </p:style>
+      </p:cxnSp>
+      <p:cxnSp>
+        <p:nvCxnSpPr>
+          <p:cNvPr id="88" name="Connector 87"/>
+          <p:cNvCxnSpPr>
+            <a:stCxn id="58" idx="3"/>
+            <a:endCxn id="12" idx="1"/>
+          </p:cNvCxnSpPr>
+          <p:nvPr/>
+        </p:nvCxnSpPr>
+        <p:spPr>
+          <a:xfrm flipV="1">
+            <a:off x="1700000" y="1350000"/>
+            <a:ext cx="2815000" cy="4820000"/>
+          </a:xfrm>
+          <a:prstGeom prst="bentConnector3">
+            <a:avLst/>
+          </a:prstGeom>
+          <a:ln>
+            <a:tailEnd type="triangle"/>
+          </a:ln>
+        </p:spPr>
+        <p:style>
+          <a:lnRef idx="2">
+            <a:schemeClr val="accent1"/>
+          </a:lnRef>
+          <a:fillRef idx="0">
+            <a:schemeClr val="accent1"/>
+          </a:fillRef>
+          <a:effectRef idx="1">
+            <a:schemeClr val="accent1"/>
+          </a:effectRef>
+          <a:fontRef idx="minor">
+            <a:schemeClr val="tx1"/>
+          </a:fontRef>
+        </p:style>
+      </p:cxnSp>
+      <p:cxnSp>
+        <p:nvCxnSpPr>
+          <p:cNvPr id="89" name="Connector 88"/>
+          <p:cNvCxnSpPr>
+            <a:stCxn id="32" idx="2"/>
+            <a:endCxn id="42" idx="0"/>
+          </p:cNvCxnSpPr>
+          <p:nvPr/>
+        </p:nvCxnSpPr>
+        <p:spPr>
+          <a:xfrm>
+            <a:off x="8302500" y="4744000"/>
+            <a:ext cx="0" cy="8938000"/>
+          </a:xfrm>
+          <a:prstGeom prst="line">
+            <a:avLst/>
+          </a:prstGeom>
+          <a:ln>
+            <a:tailEnd type="triangle"/>
+          </a:ln>
+        </p:spPr>
+        <p:style>
+          <a:lnRef idx="2">
+            <a:schemeClr val="accent1"/>
+          </a:lnRef>
+          <a:fillRef idx="0">
+            <a:schemeClr val="accent1"/>
+          </a:fillRef>
+          <a:effectRef idx="1">
+            <a:schemeClr val="accent1"/>
+          </a:effectRef>
+          <a:fontRef idx="minor">
+            <a:schemeClr val="tx1"/>
+          </a:fontRef>
+        </p:style>
+      </p:cxnSp>
+      <p:cxnSp>
+        <p:nvCxnSpPr>
+          <p:cNvPr id="90" name="Connector 89"/>
+          <p:cNvCxnSpPr>
+            <a:stCxn id="51" idx="2"/>
+            <a:endCxn id="53" idx="0"/>
+          </p:cNvCxnSpPr>
+          <p:nvPr/>
+        </p:nvCxnSpPr>
+        <p:spPr>
+          <a:xfrm>
+            <a:off x="10877500" y="5446000"/>
+            <a:ext cx="0" cy="922000"/>
           </a:xfrm>
           <a:prstGeom prst="line">
             <a:avLst/>

--- a/In.Plan MEIO process 06-09-2026.pptx
+++ b/In.Plan MEIO process 06-09-2026.pptx
@@ -3708,7 +3708,7 @@
           <a:p>
             <a:r>
               <a:rPr sz="900" b="0"/>
-              <a:t>База неопределённости: расчёт в модуле или ошибка прогноза из DP</a:t>
+              <a:t>База неопределённости: ошибка прогноза из DP, при её отсутствии — расчёт в модуле</a:t>
             </a:r>
           </a:p>
         </p:txBody>

--- a/In.Plan MEIO process 06-09-2026.pptx
+++ b/In.Plan MEIO process 06-09-2026.pptx
@@ -7,7 +7,7 @@
   <p:sldIdLst>
     <p:sldId id="256" r:id="rId7"/>
   </p:sldIdLst>
-  <p:sldSz cx="12192000" cy="12080000" type="screen4x3"/>
+  <p:sldSz cx="12192000" cy="14080000" type="screen4x3"/>
   <p:notesSz cx="6858000" cy="9144000"/>
   <p:defaultTextStyle>
     <a:defPPr>
@@ -3097,7 +3097,7 @@
         <p:spPr>
           <a:xfrm>
             <a:off x="1880000" y="980000"/>
-            <a:ext cx="2545000" cy="11000000"/>
+            <a:ext cx="2030000" cy="13000000"/>
           </a:xfrm>
           <a:prstGeom prst="rect">
             <a:avLst/>
@@ -3138,7 +3138,7 @@
         <p:spPr>
           <a:xfrm>
             <a:off x="1880000" y="500000"/>
-            <a:ext cx="2545000" cy="380000"/>
+            <a:ext cx="2030000" cy="380000"/>
           </a:xfrm>
           <a:prstGeom prst="rect">
             <a:avLst/>
@@ -3167,7 +3167,7 @@
         <p:spPr>
           <a:xfrm>
             <a:off x="1940000" y="1040000"/>
-            <a:ext cx="2425000" cy="620000"/>
+            <a:ext cx="1910000" cy="620000"/>
           </a:xfrm>
           <a:prstGeom prst="roundRect">
             <a:avLst/>
@@ -3211,7 +3211,7 @@
         <p:spPr>
           <a:xfrm>
             <a:off x="1940000" y="1760000"/>
-            <a:ext cx="2425000" cy="1848000"/>
+            <a:ext cx="1910000" cy="2520000"/>
           </a:xfrm>
           <a:prstGeom prst="rect">
             <a:avLst/>
@@ -3281,8 +3281,8 @@
         </p:nvSpPr>
         <p:spPr>
           <a:xfrm>
-            <a:off x="1940000" y="3758000"/>
-            <a:ext cx="2425000" cy="620000"/>
+            <a:off x="1940000" y="4430000"/>
+            <a:ext cx="1910000" cy="620000"/>
           </a:xfrm>
           <a:prstGeom prst="roundRect">
             <a:avLst/>
@@ -3325,8 +3325,8 @@
         </p:nvSpPr>
         <p:spPr>
           <a:xfrm>
-            <a:off x="1940000" y="4478000"/>
-            <a:ext cx="2425000" cy="840000"/>
+            <a:off x="1940000" y="5150000"/>
+            <a:ext cx="1910000" cy="1008000"/>
           </a:xfrm>
           <a:prstGeom prst="rect">
             <a:avLst/>
@@ -3372,8 +3372,8 @@
         </p:nvSpPr>
         <p:spPr>
           <a:xfrm>
-            <a:off x="1940000" y="5468000"/>
-            <a:ext cx="2425000" cy="620000"/>
+            <a:off x="1940000" y="6308000"/>
+            <a:ext cx="1910000" cy="620000"/>
           </a:xfrm>
           <a:prstGeom prst="roundRect">
             <a:avLst/>
@@ -3416,8 +3416,8 @@
         </p:nvSpPr>
         <p:spPr>
           <a:xfrm>
-            <a:off x="1940000" y="6188000"/>
-            <a:ext cx="2425000" cy="840000"/>
+            <a:off x="1940000" y="7028000"/>
+            <a:ext cx="1910000" cy="1176000"/>
           </a:xfrm>
           <a:prstGeom prst="rect">
             <a:avLst/>
@@ -3463,8 +3463,8 @@
         </p:nvSpPr>
         <p:spPr>
           <a:xfrm>
-            <a:off x="4455000" y="980000"/>
-            <a:ext cx="2545000" cy="11000000"/>
+            <a:off x="3940000" y="980000"/>
+            <a:ext cx="2030000" cy="13000000"/>
           </a:xfrm>
           <a:prstGeom prst="rect">
             <a:avLst/>
@@ -3504,8 +3504,8 @@
         </p:nvSpPr>
         <p:spPr>
           <a:xfrm>
-            <a:off x="4455000" y="500000"/>
-            <a:ext cx="2545000" cy="380000"/>
+            <a:off x="3940000" y="500000"/>
+            <a:ext cx="2030000" cy="380000"/>
           </a:xfrm>
           <a:prstGeom prst="rect">
             <a:avLst/>
@@ -3533,8 +3533,8 @@
         </p:nvSpPr>
         <p:spPr>
           <a:xfrm>
-            <a:off x="4515000" y="1040000"/>
-            <a:ext cx="2425000" cy="620000"/>
+            <a:off x="4000000" y="1040000"/>
+            <a:ext cx="1910000" cy="620000"/>
           </a:xfrm>
           <a:prstGeom prst="roundRect">
             <a:avLst/>
@@ -3577,8 +3577,8 @@
         </p:nvSpPr>
         <p:spPr>
           <a:xfrm>
-            <a:off x="4515000" y="1760000"/>
-            <a:ext cx="2425000" cy="1176000"/>
+            <a:off x="4000000" y="1760000"/>
+            <a:ext cx="1910000" cy="1344000"/>
           </a:xfrm>
           <a:prstGeom prst="rect">
             <a:avLst/>
@@ -3636,8 +3636,8 @@
         </p:nvSpPr>
         <p:spPr>
           <a:xfrm>
-            <a:off x="4515000" y="3086000"/>
-            <a:ext cx="2425000" cy="620000"/>
+            <a:off x="4000000" y="3254000"/>
+            <a:ext cx="1910000" cy="620000"/>
           </a:xfrm>
           <a:prstGeom prst="roundRect">
             <a:avLst/>
@@ -3680,8 +3680,8 @@
         </p:nvSpPr>
         <p:spPr>
           <a:xfrm>
-            <a:off x="4515000" y="3806000"/>
-            <a:ext cx="2425000" cy="672000"/>
+            <a:off x="4000000" y="3974000"/>
+            <a:ext cx="1910000" cy="1008000"/>
           </a:xfrm>
           <a:prstGeom prst="rect">
             <a:avLst/>
@@ -3708,7 +3708,13 @@
           <a:p>
             <a:r>
               <a:rPr sz="900" b="0"/>
-              <a:t>База неопределённости: ошибка прогноза из DP, при её отсутствии — расчёт в модуле</a:t>
+              <a:t>Ошибка прогноза по горизонту из DP</a:t>
+            </a:r>
+          </a:p>
+          <a:p>
+            <a:r>
+              <a:rPr sz="900" b="0"/>
+              <a:t>Собственная история прогноза и факта</a:t>
             </a:r>
           </a:p>
         </p:txBody>
@@ -3721,8 +3727,8 @@
         </p:nvSpPr>
         <p:spPr>
           <a:xfrm>
-            <a:off x="4515000" y="4628000"/>
-            <a:ext cx="2425000" cy="620000"/>
+            <a:off x="4000000" y="5132000"/>
+            <a:ext cx="1910000" cy="620000"/>
           </a:xfrm>
           <a:prstGeom prst="roundRect">
             <a:avLst/>
@@ -3752,7 +3758,7 @@
             <a:pPr algn="ctr"/>
             <a:r>
               <a:rPr sz="1000"/>
-              <a:t>Расчёт CV длительности поставок</a:t>
+              <a:t>Корректировка CV спроса</a:t>
             </a:r>
           </a:p>
         </p:txBody>
@@ -3765,8 +3771,8 @@
         </p:nvSpPr>
         <p:spPr>
           <a:xfrm>
-            <a:off x="4515000" y="5348000"/>
-            <a:ext cx="2425000" cy="504000"/>
+            <a:off x="4000000" y="5852000"/>
+            <a:ext cx="1910000" cy="840000"/>
           </a:xfrm>
           <a:prstGeom prst="rect">
             <a:avLst/>
@@ -3781,13 +3787,25 @@
           <a:p>
             <a:r>
               <a:rPr sz="900" b="0"/>
-              <a:t>Плановые и фактические длительности поставок</a:t>
-            </a:r>
-          </a:p>
-          <a:p>
-            <a:r>
-              <a:rPr sz="900" b="0"/>
-              <a:t>Отклонения по дугам сети</a:t>
+              <a:t>CV спроса</a:t>
+            </a:r>
+          </a:p>
+          <a:p>
+            <a:r>
+              <a:rPr sz="900" b="0"/>
+              <a:t>Новинки без истории</a:t>
+            </a:r>
+          </a:p>
+          <a:p>
+            <a:r>
+              <a:rPr sz="900" b="0"/>
+              <a:t>Позиции со сменой режима поставки</a:t>
+            </a:r>
+          </a:p>
+          <a:p>
+            <a:r>
+              <a:rPr sz="900" b="0"/>
+              <a:t>Экспертная правка по сегментам</a:t>
             </a:r>
           </a:p>
         </p:txBody>
@@ -3800,8 +3818,8 @@
         </p:nvSpPr>
         <p:spPr>
           <a:xfrm>
-            <a:off x="4515000" y="6002000"/>
-            <a:ext cx="2425000" cy="620000"/>
+            <a:off x="4000000" y="6842000"/>
+            <a:ext cx="1910000" cy="620000"/>
           </a:xfrm>
           <a:prstGeom prst="roundRect">
             <a:avLst/>
@@ -3831,7 +3849,7 @@
             <a:pPr algn="ctr"/>
             <a:r>
               <a:rPr sz="1000"/>
-              <a:t>Расчёт CV длительности производства</a:t>
+              <a:t>Расчёт CV длительности поставок</a:t>
             </a:r>
           </a:p>
         </p:txBody>
@@ -3844,8 +3862,8 @@
         </p:nvSpPr>
         <p:spPr>
           <a:xfrm>
-            <a:off x="4515000" y="6722000"/>
-            <a:ext cx="2425000" cy="504000"/>
+            <a:off x="4000000" y="7562000"/>
+            <a:ext cx="1910000" cy="504000"/>
           </a:xfrm>
           <a:prstGeom prst="rect">
             <a:avLst/>
@@ -3860,13 +3878,13 @@
           <a:p>
             <a:r>
               <a:rPr sz="900" b="0"/>
-              <a:t>Плановые и фактические длительности производства</a:t>
-            </a:r>
-          </a:p>
-          <a:p>
-            <a:r>
-              <a:rPr sz="900" b="0"/>
-              <a:t>Отклонения по производственным заказам</a:t>
+              <a:t>Плановые и фактические длительности поставок</a:t>
+            </a:r>
+          </a:p>
+          <a:p>
+            <a:r>
+              <a:rPr sz="900" b="0"/>
+              <a:t>Отклонения по дугам сети</a:t>
             </a:r>
           </a:p>
         </p:txBody>
@@ -3879,8 +3897,8 @@
         </p:nvSpPr>
         <p:spPr>
           <a:xfrm>
-            <a:off x="4515000" y="7376000"/>
-            <a:ext cx="2425000" cy="620000"/>
+            <a:off x="4000000" y="8216000"/>
+            <a:ext cx="1910000" cy="620000"/>
           </a:xfrm>
           <a:prstGeom prst="roundRect">
             <a:avLst/>
@@ -3910,7 +3928,7 @@
             <a:pPr algn="ctr"/>
             <a:r>
               <a:rPr sz="1000"/>
-              <a:t>Корректировка CV</a:t>
+              <a:t>Корректировка CV длительности поставок</a:t>
             </a:r>
           </a:p>
         </p:txBody>
@@ -3923,8 +3941,8 @@
         </p:nvSpPr>
         <p:spPr>
           <a:xfrm>
-            <a:off x="4515000" y="8096000"/>
-            <a:ext cx="2425000" cy="672000"/>
+            <a:off x="4000000" y="8936000"/>
+            <a:ext cx="1910000" cy="840000"/>
           </a:xfrm>
           <a:prstGeom prst="rect">
             <a:avLst/>
@@ -3939,25 +3957,19 @@
           <a:p>
             <a:r>
               <a:rPr sz="900" b="0"/>
-              <a:t>CV спроса</a:t>
-            </a:r>
-          </a:p>
-          <a:p>
-            <a:r>
-              <a:rPr sz="900" b="0"/>
               <a:t>CV длительности поставок</a:t>
             </a:r>
           </a:p>
           <a:p>
             <a:r>
               <a:rPr sz="900" b="0"/>
-              <a:t>CV длительности производства</a:t>
-            </a:r>
-          </a:p>
-          <a:p>
-            <a:r>
-              <a:rPr sz="900" b="0"/>
-              <a:t>Экспертная правка по сегментам</a:t>
+              <a:t>Новые поставщики и маршруты без истории</a:t>
+            </a:r>
+          </a:p>
+          <a:p>
+            <a:r>
+              <a:rPr sz="900" b="0"/>
+              <a:t>Согласованные изменения условий поставки</a:t>
             </a:r>
           </a:p>
         </p:txBody>
@@ -3970,8 +3982,8 @@
         </p:nvSpPr>
         <p:spPr>
           <a:xfrm>
-            <a:off x="4515000" y="8918000"/>
-            <a:ext cx="2425000" cy="620000"/>
+            <a:off x="4000000" y="9926000"/>
+            <a:ext cx="1910000" cy="620000"/>
           </a:xfrm>
           <a:prstGeom prst="roundRect">
             <a:avLst/>
@@ -4001,7 +4013,7 @@
             <a:pPr algn="ctr"/>
             <a:r>
               <a:rPr sz="1000"/>
-              <a:t>ABC-классификация</a:t>
+              <a:t>Расчёт CV длительности производства</a:t>
             </a:r>
           </a:p>
         </p:txBody>
@@ -4014,8 +4026,8 @@
         </p:nvSpPr>
         <p:spPr>
           <a:xfrm>
-            <a:off x="4515000" y="9638000"/>
-            <a:ext cx="2425000" cy="504000"/>
+            <a:off x="4000000" y="10646000"/>
+            <a:ext cx="1910000" cy="672000"/>
           </a:xfrm>
           <a:prstGeom prst="rect">
             <a:avLst/>
@@ -4030,19 +4042,13 @@
           <a:p>
             <a:r>
               <a:rPr sz="900" b="0"/>
-              <a:t>Вклад в оборот</a:t>
-            </a:r>
-          </a:p>
-          <a:p>
-            <a:r>
-              <a:rPr sz="900" b="0"/>
-              <a:t>Вклад в объём</a:t>
-            </a:r>
-          </a:p>
-          <a:p>
-            <a:r>
-              <a:rPr sz="900" b="0"/>
-              <a:t>Пороги классов</a:t>
+              <a:t>Плановые и фактические длительности производства</a:t>
+            </a:r>
+          </a:p>
+          <a:p>
+            <a:r>
+              <a:rPr sz="900" b="0"/>
+              <a:t>Отклонения по производственным заказам</a:t>
             </a:r>
           </a:p>
         </p:txBody>
@@ -4055,8 +4061,8 @@
         </p:nvSpPr>
         <p:spPr>
           <a:xfrm>
-            <a:off x="4515000" y="10292000"/>
-            <a:ext cx="2425000" cy="620000"/>
+            <a:off x="4000000" y="11468000"/>
+            <a:ext cx="1910000" cy="620000"/>
           </a:xfrm>
           <a:prstGeom prst="roundRect">
             <a:avLst/>
@@ -4086,7 +4092,7 @@
             <a:pPr algn="ctr"/>
             <a:r>
               <a:rPr sz="1000"/>
-              <a:t>Сегментация</a:t>
+              <a:t>Корректировка CV длительности производства</a:t>
             </a:r>
           </a:p>
         </p:txBody>
@@ -4099,8 +4105,8 @@
         </p:nvSpPr>
         <p:spPr>
           <a:xfrm>
-            <a:off x="4515000" y="11012000"/>
-            <a:ext cx="2425000" cy="840000"/>
+            <a:off x="4000000" y="12188000"/>
+            <a:ext cx="1910000" cy="672000"/>
           </a:xfrm>
           <a:prstGeom prst="rect">
             <a:avLst/>
@@ -4115,31 +4121,19 @@
           <a:p>
             <a:r>
               <a:rPr sz="900" b="0"/>
-              <a:t>Lifecycle</a:t>
-            </a:r>
-          </a:p>
-          <a:p>
-            <a:r>
-              <a:rPr sz="900" b="0"/>
-              <a:t>ADI-CV</a:t>
-            </a:r>
-          </a:p>
-          <a:p>
-            <a:r>
-              <a:rPr sz="900" b="0"/>
-              <a:t>ABC</a:t>
-            </a:r>
-          </a:p>
-          <a:p>
-            <a:r>
-              <a:rPr sz="900" b="0"/>
-              <a:t>FMR</a:t>
-            </a:r>
-          </a:p>
-          <a:p>
-            <a:r>
-              <a:rPr sz="900" b="0"/>
-              <a:t>XYZ</a:t>
+              <a:t>CV длительности производства</a:t>
+            </a:r>
+          </a:p>
+          <a:p>
+            <a:r>
+              <a:rPr sz="900" b="0"/>
+              <a:t>Плановые остановки и ремонты</a:t>
+            </a:r>
+          </a:p>
+          <a:p>
+            <a:r>
+              <a:rPr sz="900" b="0"/>
+              <a:t>Изменения схемы разделки и глубины переработки</a:t>
             </a:r>
           </a:p>
         </p:txBody>
@@ -4152,8 +4146,8 @@
         </p:nvSpPr>
         <p:spPr>
           <a:xfrm>
-            <a:off x="7030000" y="980000"/>
-            <a:ext cx="2545000" cy="11000000"/>
+            <a:off x="6000000" y="980000"/>
+            <a:ext cx="2030000" cy="13000000"/>
           </a:xfrm>
           <a:prstGeom prst="rect">
             <a:avLst/>
@@ -4193,8 +4187,8 @@
         </p:nvSpPr>
         <p:spPr>
           <a:xfrm>
-            <a:off x="7030000" y="500000"/>
-            <a:ext cx="2545000" cy="380000"/>
+            <a:off x="6000000" y="500000"/>
+            <a:ext cx="2030000" cy="380000"/>
           </a:xfrm>
           <a:prstGeom prst="rect">
             <a:avLst/>
@@ -4209,7 +4203,7 @@
           <a:p>
             <a:r>
               <a:rPr sz="1100" b="1"/>
-              <a:t>Расчёт и анализ</a:t>
+              <a:t>Сегментация</a:t>
             </a:r>
           </a:p>
         </p:txBody>
@@ -4222,8 +4216,8 @@
         </p:nvSpPr>
         <p:spPr>
           <a:xfrm>
-            <a:off x="7090000" y="1040000"/>
-            <a:ext cx="2425000" cy="620000"/>
+            <a:off x="6060000" y="1040000"/>
+            <a:ext cx="1910000" cy="620000"/>
           </a:xfrm>
           <a:prstGeom prst="roundRect">
             <a:avLst/>
@@ -4253,7 +4247,7 @@
             <a:pPr algn="ctr"/>
             <a:r>
               <a:rPr sz="1000"/>
-              <a:t>Определение стратегии MTS-MTO</a:t>
+              <a:t>ABC-классификация</a:t>
             </a:r>
           </a:p>
         </p:txBody>
@@ -4266,8 +4260,8 @@
         </p:nvSpPr>
         <p:spPr>
           <a:xfrm>
-            <a:off x="7090000" y="1760000"/>
-            <a:ext cx="2425000" cy="672000"/>
+            <a:off x="6060000" y="1760000"/>
+            <a:ext cx="1910000" cy="504000"/>
           </a:xfrm>
           <a:prstGeom prst="rect">
             <a:avLst/>
@@ -4282,19 +4276,19 @@
           <a:p>
             <a:r>
               <a:rPr sz="900" b="0"/>
-              <a:t>Сегментация по пяти признакам</a:t>
-            </a:r>
-          </a:p>
-          <a:p>
-            <a:r>
-              <a:rPr sz="900" b="0"/>
-              <a:t>Длительность цикла против срока ожидания клиента</a:t>
-            </a:r>
-          </a:p>
-          <a:p>
-            <a:r>
-              <a:rPr sz="900" b="0"/>
-              <a:t>Срок годности позиции</a:t>
+              <a:t>Вклад в оборот</a:t>
+            </a:r>
+          </a:p>
+          <a:p>
+            <a:r>
+              <a:rPr sz="900" b="0"/>
+              <a:t>Вклад в объём</a:t>
+            </a:r>
+          </a:p>
+          <a:p>
+            <a:r>
+              <a:rPr sz="900" b="0"/>
+              <a:t>Пороги классов</a:t>
             </a:r>
           </a:p>
         </p:txBody>
@@ -4307,8 +4301,8 @@
         </p:nvSpPr>
         <p:spPr>
           <a:xfrm>
-            <a:off x="7090000" y="2582000"/>
-            <a:ext cx="2425000" cy="620000"/>
+            <a:off x="6060000" y="2414000"/>
+            <a:ext cx="1910000" cy="620000"/>
           </a:xfrm>
           <a:prstGeom prst="roundRect">
             <a:avLst/>
@@ -4338,7 +4332,7 @@
             <a:pPr algn="ctr"/>
             <a:r>
               <a:rPr sz="1000"/>
-              <a:t>Выбор политики пополнения</a:t>
+              <a:t>Сегментация</a:t>
             </a:r>
           </a:p>
         </p:txBody>
@@ -4351,8 +4345,8 @@
         </p:nvSpPr>
         <p:spPr>
           <a:xfrm>
-            <a:off x="7090000" y="3302000"/>
-            <a:ext cx="2425000" cy="672000"/>
+            <a:off x="6060000" y="3134000"/>
+            <a:ext cx="1910000" cy="1008000"/>
           </a:xfrm>
           <a:prstGeom prst="rect">
             <a:avLst/>
@@ -4367,46 +4361,53 @@
           <a:p>
             <a:r>
               <a:rPr sz="900" b="0"/>
-              <a:t>Стратегия MTS или MTO по позиции</a:t>
-            </a:r>
-          </a:p>
-          <a:p>
-            <a:r>
-              <a:rPr sz="900" b="0"/>
-              <a:t>Сегментация по пяти признакам</a:t>
-            </a:r>
-          </a:p>
-          <a:p>
-            <a:r>
-              <a:rPr sz="900" b="0"/>
-              <a:t>Календари пополнения</a:t>
-            </a:r>
-          </a:p>
-          <a:p>
-            <a:r>
-              <a:rPr sz="900" b="0"/>
-              <a:t>Минимальный размер партии и кратность</a:t>
-            </a:r>
-          </a:p>
-        </p:txBody>
-      </p:sp>
-      <p:sp>
-        <p:nvSpPr>
-          <p:cNvPr id="32" name="Rounded Rectangle 31"/>
+              <a:t>Lifecycle: стадия жизненного цикла</a:t>
+            </a:r>
+          </a:p>
+          <a:p>
+            <a:r>
+              <a:rPr sz="900" b="0"/>
+              <a:t>ADI-CV: характер спроса</a:t>
+            </a:r>
+          </a:p>
+          <a:p>
+            <a:r>
+              <a:rPr sz="900" b="0"/>
+              <a:t>ABC: вклад в оборот</a:t>
+            </a:r>
+          </a:p>
+          <a:p>
+            <a:r>
+              <a:rPr sz="900" b="0"/>
+              <a:t>FMR: частота обращения</a:t>
+            </a:r>
+          </a:p>
+          <a:p>
+            <a:r>
+              <a:rPr sz="900" b="0"/>
+              <a:t>XYZ: стабильность потребления</a:t>
+            </a:r>
+          </a:p>
+        </p:txBody>
+      </p:sp>
+      <p:sp>
+        <p:nvSpPr>
+          <p:cNvPr id="32" name="Rectangle 31"/>
           <p:cNvSpPr/>
           <p:nvPr/>
         </p:nvSpPr>
         <p:spPr>
           <a:xfrm>
-            <a:off x="7090000" y="4124000"/>
-            <a:ext cx="2425000" cy="620000"/>
-          </a:xfrm>
-          <a:prstGeom prst="roundRect">
-            <a:avLst/>
-          </a:prstGeom>
-          <a:solidFill>
-            <a:schemeClr val="accent1"/>
-          </a:solidFill>
+            <a:off x="8060000" y="980000"/>
+            <a:ext cx="2030000" cy="13000000"/>
+          </a:xfrm>
+          <a:prstGeom prst="rect">
+            <a:avLst/>
+          </a:prstGeom>
+          <a:noFill/>
+          <a:ln>
+            <a:noFill/>
+          </a:ln>
         </p:spPr>
         <p:style>
           <a:lnRef idx="1">
@@ -4427,10 +4428,6 @@
           <a:lstStyle/>
           <a:p>
             <a:pPr algn="ctr"/>
-            <a:r>
-              <a:rPr sz="1000"/>
-              <a:t>Мультиэшелонная оптимизация</a:t>
-            </a:r>
           </a:p>
         </p:txBody>
       </p:sp>
@@ -4442,8 +4439,8 @@
         </p:nvSpPr>
         <p:spPr>
           <a:xfrm>
-            <a:off x="7090000" y="4844000"/>
-            <a:ext cx="2425000" cy="840000"/>
+            <a:off x="8060000" y="500000"/>
+            <a:ext cx="2030000" cy="380000"/>
           </a:xfrm>
           <a:prstGeom prst="rect">
             <a:avLst/>
@@ -4457,26 +4454,8 @@
           <a:lstStyle/>
           <a:p>
             <a:r>
-              <a:rPr sz="900" b="0"/>
-              <a:t>Настроенные параметры расчёта</a:t>
-            </a:r>
-          </a:p>
-          <a:p>
-            <a:r>
-              <a:rPr sz="900" b="0"/>
-              <a:t>Скорректированный CV</a:t>
-            </a:r>
-          </a:p>
-          <a:p>
-            <a:r>
-              <a:rPr sz="900" b="0"/>
-              <a:t>Политика пополнения по позиции</a:t>
-            </a:r>
-          </a:p>
-          <a:p>
-            <a:r>
-              <a:rPr sz="900" b="0"/>
-              <a:t>Ограничения: мощности, бюджет, срок годности</a:t>
+              <a:rPr sz="1100" b="1"/>
+              <a:t>Расчёт и анализ</a:t>
             </a:r>
           </a:p>
         </p:txBody>
@@ -4489,8 +4468,8 @@
         </p:nvSpPr>
         <p:spPr>
           <a:xfrm>
-            <a:off x="7090000" y="5834000"/>
-            <a:ext cx="2425000" cy="620000"/>
+            <a:off x="8120000" y="1040000"/>
+            <a:ext cx="1910000" cy="620000"/>
           </a:xfrm>
           <a:prstGeom prst="roundRect">
             <a:avLst/>
@@ -4520,7 +4499,7 @@
             <a:pPr algn="ctr"/>
             <a:r>
               <a:rPr sz="1000"/>
-              <a:t>Изолированная оптимизация</a:t>
+              <a:t>Определение стратегии MTS-MTO</a:t>
             </a:r>
           </a:p>
         </p:txBody>
@@ -4533,8 +4512,8 @@
         </p:nvSpPr>
         <p:spPr>
           <a:xfrm>
-            <a:off x="7090000" y="6554000"/>
-            <a:ext cx="2425000" cy="504000"/>
+            <a:off x="8120000" y="1760000"/>
+            <a:ext cx="1910000" cy="672000"/>
           </a:xfrm>
           <a:prstGeom prst="rect">
             <a:avLst/>
@@ -4549,19 +4528,19 @@
           <a:p>
             <a:r>
               <a:rPr sz="900" b="0"/>
-              <a:t>Настроенные параметры расчёта</a:t>
-            </a:r>
-          </a:p>
-          <a:p>
-            <a:r>
-              <a:rPr sz="900" b="0"/>
-              <a:t>Скорректированный CV</a:t>
-            </a:r>
-          </a:p>
-          <a:p>
-            <a:r>
-              <a:rPr sz="900" b="0"/>
-              <a:t>Политика пополнения по позиции</a:t>
+              <a:t>Сегментация по пяти признакам</a:t>
+            </a:r>
+          </a:p>
+          <a:p>
+            <a:r>
+              <a:rPr sz="900" b="0"/>
+              <a:t>Длительность цикла против срока ожидания клиента</a:t>
+            </a:r>
+          </a:p>
+          <a:p>
+            <a:r>
+              <a:rPr sz="900" b="0"/>
+              <a:t>Срок годности позиции</a:t>
             </a:r>
           </a:p>
         </p:txBody>
@@ -4574,8 +4553,8 @@
         </p:nvSpPr>
         <p:spPr>
           <a:xfrm>
-            <a:off x="7090000" y="7208000"/>
-            <a:ext cx="2425000" cy="620000"/>
+            <a:off x="8120000" y="2582000"/>
+            <a:ext cx="1910000" cy="620000"/>
           </a:xfrm>
           <a:prstGeom prst="roundRect">
             <a:avLst/>
@@ -4605,7 +4584,7 @@
             <a:pPr algn="ctr"/>
             <a:r>
               <a:rPr sz="1000"/>
-              <a:t>Сценарное моделирование</a:t>
+              <a:t>Выбор политики пополнения</a:t>
             </a:r>
           </a:p>
         </p:txBody>
@@ -4618,8 +4597,8 @@
         </p:nvSpPr>
         <p:spPr>
           <a:xfrm>
-            <a:off x="7090000" y="7928000"/>
-            <a:ext cx="2425000" cy="1848000"/>
+            <a:off x="8120000" y="3302000"/>
+            <a:ext cx="1910000" cy="840000"/>
           </a:xfrm>
           <a:prstGeom prst="rect">
             <a:avLst/>
@@ -4634,49 +4613,25 @@
           <a:p>
             <a:r>
               <a:rPr sz="900" b="0"/>
-              <a:t>База (as is): текущие политики и параметры</a:t>
-            </a:r>
-          </a:p>
-          <a:p>
-            <a:r>
-              <a:rPr sz="900" b="0"/>
-              <a:t>Пересчёт по фильтрам: склад, канал, категория, сегмент</a:t>
-            </a:r>
-          </a:p>
-          <a:p>
-            <a:r>
-              <a:rPr sz="900" b="0"/>
-              <a:t>Сервис 98% по федеральным сетям</a:t>
-            </a:r>
-          </a:p>
-          <a:p>
-            <a:r>
-              <a:rPr sz="900" b="0"/>
-              <a:t>Учащённое пополнение охлаждённой продукции</a:t>
-            </a:r>
-          </a:p>
-          <a:p>
-            <a:r>
-              <a:rPr sz="900" b="0"/>
-              <a:t>Сокращение лидтайма и его разброса</a:t>
-            </a:r>
-          </a:p>
-          <a:p>
-            <a:r>
-              <a:rPr sz="900" b="0"/>
-              <a:t>Ограничение по мощностям холода</a:t>
-            </a:r>
-          </a:p>
-          <a:p>
-            <a:r>
-              <a:rPr sz="900" b="0"/>
-              <a:t>Бюджет запаса −15%</a:t>
-            </a:r>
-          </a:p>
-          <a:p>
-            <a:r>
-              <a:rPr sz="900" b="0"/>
-              <a:t>Сезонный пик: май–сентябрь</a:t>
+              <a:t>Стратегия MTS или MTO по позиции</a:t>
+            </a:r>
+          </a:p>
+          <a:p>
+            <a:r>
+              <a:rPr sz="900" b="0"/>
+              <a:t>Сегментация по пяти признакам</a:t>
+            </a:r>
+          </a:p>
+          <a:p>
+            <a:r>
+              <a:rPr sz="900" b="0"/>
+              <a:t>Календари пополнения</a:t>
+            </a:r>
+          </a:p>
+          <a:p>
+            <a:r>
+              <a:rPr sz="900" b="0"/>
+              <a:t>Минимальный размер партии и кратность</a:t>
             </a:r>
           </a:p>
         </p:txBody>
@@ -4689,8 +4644,8 @@
         </p:nvSpPr>
         <p:spPr>
           <a:xfrm>
-            <a:off x="7090000" y="9926000"/>
-            <a:ext cx="2425000" cy="620000"/>
+            <a:off x="8120000" y="4292000"/>
+            <a:ext cx="1910000" cy="620000"/>
           </a:xfrm>
           <a:prstGeom prst="roundRect">
             <a:avLst/>
@@ -4720,7 +4675,7 @@
             <a:pPr algn="ctr"/>
             <a:r>
               <a:rPr sz="1000"/>
-              <a:t>Сравнение со страховыми запасами</a:t>
+              <a:t>Мультиэшелонная оптимизация</a:t>
             </a:r>
           </a:p>
         </p:txBody>
@@ -4733,8 +4688,8 @@
         </p:nvSpPr>
         <p:spPr>
           <a:xfrm>
-            <a:off x="7090000" y="10646000"/>
-            <a:ext cx="2425000" cy="672000"/>
+            <a:off x="8120000" y="5012000"/>
+            <a:ext cx="1910000" cy="1512000"/>
           </a:xfrm>
           <a:prstGeom prst="rect">
             <a:avLst/>
@@ -4749,19 +4704,37 @@
           <a:p>
             <a:r>
               <a:rPr sz="900" b="0"/>
-              <a:t>Рекомендованные уровни запасов по эшелонам</a:t>
-            </a:r>
-          </a:p>
-          <a:p>
-            <a:r>
-              <a:rPr sz="900" b="0"/>
-              <a:t>Действующие страховые запасы</a:t>
-            </a:r>
-          </a:p>
-          <a:p>
-            <a:r>
-              <a:rPr sz="900" b="0"/>
-              <a:t>Уровни запасов по узлам без учёта сети</a:t>
+              <a:t>Настроенные параметры расчёта</a:t>
+            </a:r>
+          </a:p>
+          <a:p>
+            <a:r>
+              <a:rPr sz="900" b="0"/>
+              <a:t>Скорректированный CV спроса</a:t>
+            </a:r>
+          </a:p>
+          <a:p>
+            <a:r>
+              <a:rPr sz="900" b="0"/>
+              <a:t>Скорректированный CV длительности поставок</a:t>
+            </a:r>
+          </a:p>
+          <a:p>
+            <a:r>
+              <a:rPr sz="900" b="0"/>
+              <a:t>Скорректированный CV длительности производства</a:t>
+            </a:r>
+          </a:p>
+          <a:p>
+            <a:r>
+              <a:rPr sz="900" b="0"/>
+              <a:t>Политика пополнения по позиции</a:t>
+            </a:r>
+          </a:p>
+          <a:p>
+            <a:r>
+              <a:rPr sz="900" b="0"/>
+              <a:t>Ограничения: мощности, бюджет, срок годности</a:t>
             </a:r>
           </a:p>
         </p:txBody>
@@ -4774,8 +4747,8 @@
         </p:nvSpPr>
         <p:spPr>
           <a:xfrm>
-            <a:off x="7090000" y="11468000"/>
-            <a:ext cx="2425000" cy="620000"/>
+            <a:off x="8120000" y="6674000"/>
+            <a:ext cx="1910000" cy="620000"/>
           </a:xfrm>
           <a:prstGeom prst="roundRect">
             <a:avLst/>
@@ -4805,7 +4778,7 @@
             <a:pPr algn="ctr"/>
             <a:r>
               <a:rPr sz="1000"/>
-              <a:t>Анализ предупреждений расчёта</a:t>
+              <a:t>Изолированная оптимизация</a:t>
             </a:r>
           </a:p>
         </p:txBody>
@@ -4818,8 +4791,8 @@
         </p:nvSpPr>
         <p:spPr>
           <a:xfrm>
-            <a:off x="7090000" y="12188000"/>
-            <a:ext cx="2425000" cy="1344000"/>
+            <a:off x="8120000" y="7394000"/>
+            <a:ext cx="1910000" cy="1176000"/>
           </a:xfrm>
           <a:prstGeom prst="rect">
             <a:avLst/>
@@ -4834,45 +4807,51 @@
           <a:p>
             <a:r>
               <a:rPr sz="900" b="0"/>
-              <a:t>Предупреждение: покрытие превышает остаточный срок годности</a:t>
-            </a:r>
-          </a:p>
-          <a:p>
-            <a:r>
-              <a:rPr sz="900" b="0"/>
-              <a:t>Предупреждение: рекомендованный уровень ниже минимальной партии</a:t>
-            </a:r>
-          </a:p>
-          <a:p>
-            <a:r>
-              <a:rPr sz="900" b="0"/>
-              <a:t>Предупреждение: целевой запас не помещается в мощности хранения</a:t>
-            </a:r>
-          </a:p>
-          <a:p>
-            <a:r>
-              <a:rPr sz="900" b="0"/>
-              <a:t>Предупреждение: отклонение от целевого уровня сервиса</a:t>
-            </a:r>
-          </a:p>
-        </p:txBody>
-      </p:sp>
-      <p:sp>
-        <p:nvSpPr>
-          <p:cNvPr id="42" name="Rectangle 41"/>
+              <a:t>Настроенные параметры расчёта</a:t>
+            </a:r>
+          </a:p>
+          <a:p>
+            <a:r>
+              <a:rPr sz="900" b="0"/>
+              <a:t>Скорректированный CV спроса</a:t>
+            </a:r>
+          </a:p>
+          <a:p>
+            <a:r>
+              <a:rPr sz="900" b="0"/>
+              <a:t>Скорректированный CV длительности поставок</a:t>
+            </a:r>
+          </a:p>
+          <a:p>
+            <a:r>
+              <a:rPr sz="900" b="0"/>
+              <a:t>Скорректированный CV длительности производства</a:t>
+            </a:r>
+          </a:p>
+          <a:p>
+            <a:r>
+              <a:rPr sz="900" b="0"/>
+              <a:t>Политика пополнения по позиции</a:t>
+            </a:r>
+          </a:p>
+        </p:txBody>
+      </p:sp>
+      <p:sp>
+        <p:nvSpPr>
+          <p:cNvPr id="42" name="Rounded Rectangle 41"/>
           <p:cNvSpPr/>
           <p:nvPr/>
         </p:nvSpPr>
         <p:spPr>
           <a:xfrm>
-            <a:off x="7090000" y="13682000"/>
-            <a:ext cx="2425000" cy="620000"/>
-          </a:xfrm>
-          <a:prstGeom prst="rect">
+            <a:off x="8120000" y="8720000"/>
+            <a:ext cx="1910000" cy="620000"/>
+          </a:xfrm>
+          <a:prstGeom prst="roundRect">
             <a:avLst/>
           </a:prstGeom>
           <a:solidFill>
-            <a:schemeClr val="accent2"/>
+            <a:schemeClr val="accent1"/>
           </a:solidFill>
         </p:spPr>
         <p:style>
@@ -4895,30 +4874,100 @@
           <a:p>
             <a:pPr algn="ctr"/>
             <a:r>
-              <a:rPr sz="900"/>
-              <a:t>Уровни запасов в SNP/PS и MRP</a:t>
-            </a:r>
-          </a:p>
-        </p:txBody>
-      </p:sp>
-      <p:sp>
-        <p:nvSpPr>
-          <p:cNvPr id="43" name="Rectangle 42"/>
+              <a:rPr sz="1000"/>
+              <a:t>Сценарное моделирование</a:t>
+            </a:r>
+          </a:p>
+        </p:txBody>
+      </p:sp>
+      <p:sp>
+        <p:nvSpPr>
+          <p:cNvPr id="43" name="TextBox 42"/>
+          <p:cNvSpPr txBox="1"/>
+          <p:nvPr/>
+        </p:nvSpPr>
+        <p:spPr>
+          <a:xfrm>
+            <a:off x="8120000" y="9440000"/>
+            <a:ext cx="1910000" cy="2016000"/>
+          </a:xfrm>
+          <a:prstGeom prst="rect">
+            <a:avLst/>
+          </a:prstGeom>
+          <a:noFill/>
+        </p:spPr>
+        <p:txBody>
+          <a:bodyPr wrap="square">
+            <a:spAutoFit/>
+          </a:bodyPr>
+          <a:lstStyle/>
+          <a:p>
+            <a:r>
+              <a:rPr sz="900" b="0"/>
+              <a:t>База (as is): текущие политики и параметры</a:t>
+            </a:r>
+          </a:p>
+          <a:p>
+            <a:r>
+              <a:rPr sz="900" b="0"/>
+              <a:t>Пересчёт по фильтрам: склад, канал, категория, сегмент</a:t>
+            </a:r>
+          </a:p>
+          <a:p>
+            <a:r>
+              <a:rPr sz="900" b="0"/>
+              <a:t>Сервис 98% по федеральным сетям</a:t>
+            </a:r>
+          </a:p>
+          <a:p>
+            <a:r>
+              <a:rPr sz="900" b="0"/>
+              <a:t>Учащённое пополнение охлаждённой продукции</a:t>
+            </a:r>
+          </a:p>
+          <a:p>
+            <a:r>
+              <a:rPr sz="900" b="0"/>
+              <a:t>Сокращение лидтайма и его разброса</a:t>
+            </a:r>
+          </a:p>
+          <a:p>
+            <a:r>
+              <a:rPr sz="900" b="0"/>
+              <a:t>Ограничение по мощностям холода</a:t>
+            </a:r>
+          </a:p>
+          <a:p>
+            <a:r>
+              <a:rPr sz="900" b="0"/>
+              <a:t>Бюджет запаса −15%</a:t>
+            </a:r>
+          </a:p>
+          <a:p>
+            <a:r>
+              <a:rPr sz="900" b="0"/>
+              <a:t>Сезонный пик: май–сентябрь</a:t>
+            </a:r>
+          </a:p>
+        </p:txBody>
+      </p:sp>
+      <p:sp>
+        <p:nvSpPr>
+          <p:cNvPr id="44" name="Rounded Rectangle 43"/>
           <p:cNvSpPr/>
           <p:nvPr/>
         </p:nvSpPr>
         <p:spPr>
           <a:xfrm>
-            <a:off x="9605000" y="980000"/>
-            <a:ext cx="2545000" cy="11000000"/>
-          </a:xfrm>
-          <a:prstGeom prst="rect">
-            <a:avLst/>
-          </a:prstGeom>
-          <a:noFill/>
-          <a:ln>
-            <a:noFill/>
-          </a:ln>
+            <a:off x="8120000" y="11606000"/>
+            <a:ext cx="1910000" cy="620000"/>
+          </a:xfrm>
+          <a:prstGeom prst="roundRect">
+            <a:avLst/>
+          </a:prstGeom>
+          <a:solidFill>
+            <a:schemeClr val="accent1"/>
+          </a:solidFill>
         </p:spPr>
         <p:style>
           <a:lnRef idx="1">
@@ -4939,19 +4988,23 @@
           <a:lstStyle/>
           <a:p>
             <a:pPr algn="ctr"/>
-          </a:p>
-        </p:txBody>
-      </p:sp>
-      <p:sp>
-        <p:nvSpPr>
-          <p:cNvPr id="44" name="TextBox 43"/>
+            <a:r>
+              <a:rPr sz="1000"/>
+              <a:t>Сравнение со страховыми запасами</a:t>
+            </a:r>
+          </a:p>
+        </p:txBody>
+      </p:sp>
+      <p:sp>
+        <p:nvSpPr>
+          <p:cNvPr id="45" name="TextBox 44"/>
           <p:cNvSpPr txBox="1"/>
           <p:nvPr/>
         </p:nvSpPr>
         <p:spPr>
           <a:xfrm>
-            <a:off x="9605000" y="500000"/>
-            <a:ext cx="2545000" cy="380000"/>
+            <a:off x="8120000" y="12326000"/>
+            <a:ext cx="1910000" cy="840000"/>
           </a:xfrm>
           <a:prstGeom prst="rect">
             <a:avLst/>
@@ -4965,22 +5018,34 @@
           <a:lstStyle/>
           <a:p>
             <a:r>
-              <a:rPr sz="1100" b="1"/>
-              <a:t>Оценка эффектов</a:t>
-            </a:r>
-          </a:p>
-        </p:txBody>
-      </p:sp>
-      <p:sp>
-        <p:nvSpPr>
-          <p:cNvPr id="45" name="Rounded Rectangle 44"/>
+              <a:rPr sz="900" b="0"/>
+              <a:t>Рекомендованные уровни запасов по эшелонам</a:t>
+            </a:r>
+          </a:p>
+          <a:p>
+            <a:r>
+              <a:rPr sz="900" b="0"/>
+              <a:t>Действующие страховые запасы</a:t>
+            </a:r>
+          </a:p>
+          <a:p>
+            <a:r>
+              <a:rPr sz="900" b="0"/>
+              <a:t>Уровни запасов по узлам без учёта сети</a:t>
+            </a:r>
+          </a:p>
+        </p:txBody>
+      </p:sp>
+      <p:sp>
+        <p:nvSpPr>
+          <p:cNvPr id="46" name="Rounded Rectangle 45"/>
           <p:cNvSpPr/>
           <p:nvPr/>
         </p:nvSpPr>
         <p:spPr>
           <a:xfrm>
-            <a:off x="9665000" y="1040000"/>
-            <a:ext cx="2425000" cy="620000"/>
+            <a:off x="8120000" y="13316000"/>
+            <a:ext cx="1910000" cy="620000"/>
           </a:xfrm>
           <a:prstGeom prst="roundRect">
             <a:avLst/>
@@ -5010,21 +5075,21 @@
             <a:pPr algn="ctr"/>
             <a:r>
               <a:rPr sz="1000"/>
-              <a:t>Отчёт по ошибке прогноза</a:t>
-            </a:r>
-          </a:p>
-        </p:txBody>
-      </p:sp>
-      <p:sp>
-        <p:nvSpPr>
-          <p:cNvPr id="46" name="TextBox 45"/>
+              <a:t>Анализ предупреждений расчёта</a:t>
+            </a:r>
+          </a:p>
+        </p:txBody>
+      </p:sp>
+      <p:sp>
+        <p:nvSpPr>
+          <p:cNvPr id="47" name="TextBox 46"/>
           <p:cNvSpPr txBox="1"/>
           <p:nvPr/>
         </p:nvSpPr>
         <p:spPr>
           <a:xfrm>
-            <a:off x="9665000" y="1760000"/>
-            <a:ext cx="2425000" cy="336000"/>
+            <a:off x="8120000" y="14036000"/>
+            <a:ext cx="1910000" cy="1344000"/>
           </a:xfrm>
           <a:prstGeom prst="rect">
             <a:avLst/>
@@ -5039,33 +5104,45 @@
           <a:p>
             <a:r>
               <a:rPr sz="900" b="0"/>
-              <a:t>Прогноз спроса из DP</a:t>
-            </a:r>
-          </a:p>
-          <a:p>
-            <a:r>
-              <a:rPr sz="900" b="0"/>
-              <a:t>Фактические отгрузки за период</a:t>
-            </a:r>
-          </a:p>
-        </p:txBody>
-      </p:sp>
-      <p:sp>
-        <p:nvSpPr>
-          <p:cNvPr id="47" name="Rounded Rectangle 46"/>
+              <a:t>Предупреждение: покрытие превышает остаточный срок годности</a:t>
+            </a:r>
+          </a:p>
+          <a:p>
+            <a:r>
+              <a:rPr sz="900" b="0"/>
+              <a:t>Предупреждение: рекомендованный уровень ниже минимальной партии</a:t>
+            </a:r>
+          </a:p>
+          <a:p>
+            <a:r>
+              <a:rPr sz="900" b="0"/>
+              <a:t>Предупреждение: целевой запас не помещается в мощности хранения</a:t>
+            </a:r>
+          </a:p>
+          <a:p>
+            <a:r>
+              <a:rPr sz="900" b="0"/>
+              <a:t>Предупреждение: отклонение от целевого уровня сервиса</a:t>
+            </a:r>
+          </a:p>
+        </p:txBody>
+      </p:sp>
+      <p:sp>
+        <p:nvSpPr>
+          <p:cNvPr id="48" name="Rectangle 47"/>
           <p:cNvSpPr/>
           <p:nvPr/>
         </p:nvSpPr>
         <p:spPr>
           <a:xfrm>
-            <a:off x="9665000" y="2246000"/>
-            <a:ext cx="2425000" cy="620000"/>
-          </a:xfrm>
-          <a:prstGeom prst="roundRect">
+            <a:off x="8120000" y="15530000"/>
+            <a:ext cx="1910000" cy="620000"/>
+          </a:xfrm>
+          <a:prstGeom prst="rect">
             <a:avLst/>
           </a:prstGeom>
           <a:solidFill>
-            <a:schemeClr val="accent1"/>
+            <a:schemeClr val="accent2"/>
           </a:solidFill>
         </p:spPr>
         <p:style>
@@ -5088,64 +5165,30 @@
           <a:p>
             <a:pPr algn="ctr"/>
             <a:r>
-              <a:rPr sz="1000"/>
-              <a:t>Отчёт по сегментации</a:t>
-            </a:r>
-          </a:p>
-        </p:txBody>
-      </p:sp>
-      <p:sp>
-        <p:nvSpPr>
-          <p:cNvPr id="48" name="TextBox 47"/>
-          <p:cNvSpPr txBox="1"/>
-          <p:nvPr/>
-        </p:nvSpPr>
-        <p:spPr>
-          <a:xfrm>
-            <a:off x="9665000" y="2966000"/>
-            <a:ext cx="2425000" cy="336000"/>
+              <a:rPr sz="900"/>
+              <a:t>Уровни запасов в SNP/PS и MRP</a:t>
+            </a:r>
+          </a:p>
+        </p:txBody>
+      </p:sp>
+      <p:sp>
+        <p:nvSpPr>
+          <p:cNvPr id="49" name="Rectangle 48"/>
+          <p:cNvSpPr/>
+          <p:nvPr/>
+        </p:nvSpPr>
+        <p:spPr>
+          <a:xfrm>
+            <a:off x="10120000" y="980000"/>
+            <a:ext cx="2030000" cy="13000000"/>
           </a:xfrm>
           <a:prstGeom prst="rect">
             <a:avLst/>
           </a:prstGeom>
           <a:noFill/>
-        </p:spPr>
-        <p:txBody>
-          <a:bodyPr wrap="square">
-            <a:spAutoFit/>
-          </a:bodyPr>
-          <a:lstStyle/>
-          <a:p>
-            <a:r>
-              <a:rPr sz="900" b="0"/>
-              <a:t>Сегментация по пяти признакам</a:t>
-            </a:r>
-          </a:p>
-          <a:p>
-            <a:r>
-              <a:rPr sz="900" b="0"/>
-              <a:t>Классы ABC</a:t>
-            </a:r>
-          </a:p>
-        </p:txBody>
-      </p:sp>
-      <p:sp>
-        <p:nvSpPr>
-          <p:cNvPr id="49" name="Rounded Rectangle 48"/>
-          <p:cNvSpPr/>
-          <p:nvPr/>
-        </p:nvSpPr>
-        <p:spPr>
-          <a:xfrm>
-            <a:off x="9665000" y="3452000"/>
-            <a:ext cx="2425000" cy="620000"/>
-          </a:xfrm>
-          <a:prstGeom prst="roundRect">
-            <a:avLst/>
-          </a:prstGeom>
-          <a:solidFill>
-            <a:schemeClr val="accent1"/>
-          </a:solidFill>
+          <a:ln>
+            <a:noFill/>
+          </a:ln>
         </p:spPr>
         <p:style>
           <a:lnRef idx="1">
@@ -5166,10 +5209,6 @@
           <a:lstStyle/>
           <a:p>
             <a:pPr algn="ctr"/>
-            <a:r>
-              <a:rPr sz="1000"/>
-              <a:t>Отчёт по страховым запасам</a:t>
-            </a:r>
           </a:p>
         </p:txBody>
       </p:sp>
@@ -5181,8 +5220,8 @@
         </p:nvSpPr>
         <p:spPr>
           <a:xfrm>
-            <a:off x="9665000" y="4172000"/>
-            <a:ext cx="2425000" cy="504000"/>
+            <a:off x="10120000" y="500000"/>
+            <a:ext cx="2030000" cy="380000"/>
           </a:xfrm>
           <a:prstGeom prst="rect">
             <a:avLst/>
@@ -5196,14 +5235,8 @@
           <a:lstStyle/>
           <a:p>
             <a:r>
-              <a:rPr sz="900" b="0"/>
-              <a:t>Рекомендованные уровни запасов по эшелонам</a:t>
-            </a:r>
-          </a:p>
-          <a:p>
-            <a:r>
-              <a:rPr sz="900" b="0"/>
-              <a:t>Три сценария</a:t>
+              <a:rPr sz="1100" b="1"/>
+              <a:t>Оценка эффектов</a:t>
             </a:r>
           </a:p>
         </p:txBody>
@@ -5216,8 +5249,8 @@
         </p:nvSpPr>
         <p:spPr>
           <a:xfrm>
-            <a:off x="9665000" y="4826000"/>
-            <a:ext cx="2425000" cy="620000"/>
+            <a:off x="10180000" y="1040000"/>
+            <a:ext cx="1910000" cy="620000"/>
           </a:xfrm>
           <a:prstGeom prst="roundRect">
             <a:avLst/>
@@ -5247,7 +5280,7 @@
             <a:pPr algn="ctr"/>
             <a:r>
               <a:rPr sz="1000"/>
-              <a:t>Оценка эффектов</a:t>
+              <a:t>Отчёт по ошибке прогноза</a:t>
             </a:r>
           </a:p>
         </p:txBody>
@@ -5260,8 +5293,8 @@
         </p:nvSpPr>
         <p:spPr>
           <a:xfrm>
-            <a:off x="9665000" y="5546000"/>
-            <a:ext cx="2425000" cy="672000"/>
+            <a:off x="10180000" y="1760000"/>
+            <a:ext cx="1910000" cy="336000"/>
           </a:xfrm>
           <a:prstGeom prst="rect">
             <a:avLst/>
@@ -5276,45 +5309,33 @@
           <a:p>
             <a:r>
               <a:rPr sz="900" b="0"/>
-              <a:t>Ошибка прогноза по горизонту</a:t>
-            </a:r>
-          </a:p>
-          <a:p>
-            <a:r>
-              <a:rPr sz="900" b="0"/>
-              <a:t>Отчёт по сегментации</a:t>
-            </a:r>
-          </a:p>
-          <a:p>
-            <a:r>
-              <a:rPr sz="900" b="0"/>
-              <a:t>Отчёт по страховым запасам</a:t>
-            </a:r>
-          </a:p>
-          <a:p>
-            <a:r>
-              <a:rPr sz="900" b="0"/>
-              <a:t>Сравнение сценариев по эффектам</a:t>
-            </a:r>
-          </a:p>
-        </p:txBody>
-      </p:sp>
-      <p:sp>
-        <p:nvSpPr>
-          <p:cNvPr id="53" name="Rectangle 52"/>
+              <a:t>Прогноз спроса из DP</a:t>
+            </a:r>
+          </a:p>
+          <a:p>
+            <a:r>
+              <a:rPr sz="900" b="0"/>
+              <a:t>Фактические отгрузки за период</a:t>
+            </a:r>
+          </a:p>
+        </p:txBody>
+      </p:sp>
+      <p:sp>
+        <p:nvSpPr>
+          <p:cNvPr id="53" name="Rounded Rectangle 52"/>
           <p:cNvSpPr/>
           <p:nvPr/>
         </p:nvSpPr>
         <p:spPr>
           <a:xfrm>
-            <a:off x="9665000" y="6368000"/>
-            <a:ext cx="2425000" cy="620000"/>
-          </a:xfrm>
-          <a:prstGeom prst="rect">
+            <a:off x="10180000" y="2246000"/>
+            <a:ext cx="1910000" cy="620000"/>
+          </a:xfrm>
+          <a:prstGeom prst="roundRect">
             <a:avLst/>
           </a:prstGeom>
           <a:solidFill>
-            <a:schemeClr val="accent2"/>
+            <a:schemeClr val="accent1"/>
           </a:solidFill>
         </p:spPr>
         <p:style>
@@ -5337,28 +5358,63 @@
           <a:p>
             <a:pPr algn="ctr"/>
             <a:r>
-              <a:rPr sz="900"/>
-              <a:t>Оценка эффектов и рекомендации</a:t>
-            </a:r>
-          </a:p>
-        </p:txBody>
-      </p:sp>
-      <p:sp>
-        <p:nvSpPr>
-          <p:cNvPr id="54" name="Rectangle 53"/>
+              <a:rPr sz="1000"/>
+              <a:t>Отчёт по сегментации</a:t>
+            </a:r>
+          </a:p>
+        </p:txBody>
+      </p:sp>
+      <p:sp>
+        <p:nvSpPr>
+          <p:cNvPr id="54" name="TextBox 53"/>
+          <p:cNvSpPr txBox="1"/>
+          <p:nvPr/>
+        </p:nvSpPr>
+        <p:spPr>
+          <a:xfrm>
+            <a:off x="10180000" y="2966000"/>
+            <a:ext cx="1910000" cy="336000"/>
+          </a:xfrm>
+          <a:prstGeom prst="rect">
+            <a:avLst/>
+          </a:prstGeom>
+          <a:noFill/>
+        </p:spPr>
+        <p:txBody>
+          <a:bodyPr wrap="square">
+            <a:spAutoFit/>
+          </a:bodyPr>
+          <a:lstStyle/>
+          <a:p>
+            <a:r>
+              <a:rPr sz="900" b="0"/>
+              <a:t>Сегментация по пяти признакам</a:t>
+            </a:r>
+          </a:p>
+          <a:p>
+            <a:r>
+              <a:rPr sz="900" b="0"/>
+              <a:t>Классы ABC</a:t>
+            </a:r>
+          </a:p>
+        </p:txBody>
+      </p:sp>
+      <p:sp>
+        <p:nvSpPr>
+          <p:cNvPr id="55" name="Rounded Rectangle 54"/>
           <p:cNvSpPr/>
           <p:nvPr/>
         </p:nvSpPr>
         <p:spPr>
           <a:xfrm>
-            <a:off x="100000" y="980000"/>
-            <a:ext cx="1600000" cy="620000"/>
-          </a:xfrm>
-          <a:prstGeom prst="rect">
+            <a:off x="10180000" y="3452000"/>
+            <a:ext cx="1910000" cy="620000"/>
+          </a:xfrm>
+          <a:prstGeom prst="roundRect">
             <a:avLst/>
           </a:prstGeom>
           <a:solidFill>
-            <a:schemeClr val="accent2"/>
+            <a:schemeClr val="accent1"/>
           </a:solidFill>
         </p:spPr>
         <p:style>
@@ -5381,28 +5437,63 @@
           <a:p>
             <a:pPr algn="ctr"/>
             <a:r>
-              <a:rPr sz="900"/>
-              <a:t>Структура текущих запасов и фактические отгрузки из ERP</a:t>
-            </a:r>
-          </a:p>
-        </p:txBody>
-      </p:sp>
-      <p:sp>
-        <p:nvSpPr>
-          <p:cNvPr id="55" name="Rectangle 54"/>
+              <a:rPr sz="1000"/>
+              <a:t>Отчёт по страховым запасам</a:t>
+            </a:r>
+          </a:p>
+        </p:txBody>
+      </p:sp>
+      <p:sp>
+        <p:nvSpPr>
+          <p:cNvPr id="56" name="TextBox 55"/>
+          <p:cNvSpPr txBox="1"/>
+          <p:nvPr/>
+        </p:nvSpPr>
+        <p:spPr>
+          <a:xfrm>
+            <a:off x="10180000" y="4172000"/>
+            <a:ext cx="1910000" cy="504000"/>
+          </a:xfrm>
+          <a:prstGeom prst="rect">
+            <a:avLst/>
+          </a:prstGeom>
+          <a:noFill/>
+        </p:spPr>
+        <p:txBody>
+          <a:bodyPr wrap="square">
+            <a:spAutoFit/>
+          </a:bodyPr>
+          <a:lstStyle/>
+          <a:p>
+            <a:r>
+              <a:rPr sz="900" b="0"/>
+              <a:t>Рекомендованные уровни запасов по эшелонам</a:t>
+            </a:r>
+          </a:p>
+          <a:p>
+            <a:r>
+              <a:rPr sz="900" b="0"/>
+              <a:t>Три сценария</a:t>
+            </a:r>
+          </a:p>
+        </p:txBody>
+      </p:sp>
+      <p:sp>
+        <p:nvSpPr>
+          <p:cNvPr id="57" name="Rounded Rectangle 56"/>
           <p:cNvSpPr/>
           <p:nvPr/>
         </p:nvSpPr>
         <p:spPr>
           <a:xfrm>
-            <a:off x="100000" y="2200000"/>
-            <a:ext cx="1600000" cy="620000"/>
-          </a:xfrm>
-          <a:prstGeom prst="rect">
+            <a:off x="10180000" y="4826000"/>
+            <a:ext cx="1910000" cy="620000"/>
+          </a:xfrm>
+          <a:prstGeom prst="roundRect">
             <a:avLst/>
           </a:prstGeom>
           <a:solidFill>
-            <a:schemeClr val="accent2"/>
+            <a:schemeClr val="accent1"/>
           </a:solidFill>
         </p:spPr>
         <p:style>
@@ -5425,22 +5516,69 @@
           <a:p>
             <a:pPr algn="ctr"/>
             <a:r>
-              <a:rPr sz="900"/>
-              <a:t>Спрос и волатильность из DP</a:t>
-            </a:r>
-          </a:p>
-        </p:txBody>
-      </p:sp>
-      <p:sp>
-        <p:nvSpPr>
-          <p:cNvPr id="56" name="Rectangle 55"/>
+              <a:rPr sz="1000"/>
+              <a:t>Оценка эффектов</a:t>
+            </a:r>
+          </a:p>
+        </p:txBody>
+      </p:sp>
+      <p:sp>
+        <p:nvSpPr>
+          <p:cNvPr id="58" name="TextBox 57"/>
+          <p:cNvSpPr txBox="1"/>
+          <p:nvPr/>
+        </p:nvSpPr>
+        <p:spPr>
+          <a:xfrm>
+            <a:off x="10180000" y="5546000"/>
+            <a:ext cx="1910000" cy="672000"/>
+          </a:xfrm>
+          <a:prstGeom prst="rect">
+            <a:avLst/>
+          </a:prstGeom>
+          <a:noFill/>
+        </p:spPr>
+        <p:txBody>
+          <a:bodyPr wrap="square">
+            <a:spAutoFit/>
+          </a:bodyPr>
+          <a:lstStyle/>
+          <a:p>
+            <a:r>
+              <a:rPr sz="900" b="0"/>
+              <a:t>Ошибка прогноза по горизонту</a:t>
+            </a:r>
+          </a:p>
+          <a:p>
+            <a:r>
+              <a:rPr sz="900" b="0"/>
+              <a:t>Отчёт по сегментации</a:t>
+            </a:r>
+          </a:p>
+          <a:p>
+            <a:r>
+              <a:rPr sz="900" b="0"/>
+              <a:t>Отчёт по страховым запасам</a:t>
+            </a:r>
+          </a:p>
+          <a:p>
+            <a:r>
+              <a:rPr sz="900" b="0"/>
+              <a:t>Сравнение сценариев по эффектам</a:t>
+            </a:r>
+          </a:p>
+        </p:txBody>
+      </p:sp>
+      <p:sp>
+        <p:nvSpPr>
+          <p:cNvPr id="59" name="Rectangle 58"/>
           <p:cNvSpPr/>
           <p:nvPr/>
         </p:nvSpPr>
         <p:spPr>
           <a:xfrm>
-            <a:off x="100000" y="3420000"/>
-            <a:ext cx="1600000" cy="620000"/>
+            <a:off x="10180000" y="6368000"/>
+            <a:ext cx="1910000" cy="620000"/>
           </a:xfrm>
           <a:prstGeom prst="rect">
             <a:avLst/>
@@ -5470,20 +5608,20 @@
             <a:pPr algn="ctr"/>
             <a:r>
               <a:rPr sz="900"/>
-              <a:t>Ошибка прогноза по горизонту из DP</a:t>
-            </a:r>
-          </a:p>
-        </p:txBody>
-      </p:sp>
-      <p:sp>
-        <p:nvSpPr>
-          <p:cNvPr id="57" name="Rectangle 56"/>
+              <a:t>Оценка эффектов и рекомендации</a:t>
+            </a:r>
+          </a:p>
+        </p:txBody>
+      </p:sp>
+      <p:sp>
+        <p:nvSpPr>
+          <p:cNvPr id="60" name="Rectangle 59"/>
           <p:cNvSpPr/>
           <p:nvPr/>
         </p:nvSpPr>
         <p:spPr>
           <a:xfrm>
-            <a:off x="100000" y="4640000"/>
+            <a:off x="100000" y="980000"/>
             <a:ext cx="1600000" cy="620000"/>
           </a:xfrm>
           <a:prstGeom prst="rect">
@@ -5514,20 +5652,20 @@
             <a:pPr algn="ctr"/>
             <a:r>
               <a:rPr sz="900"/>
-              <a:t>Параметры цепочки из ERP</a:t>
-            </a:r>
-          </a:p>
-        </p:txBody>
-      </p:sp>
-      <p:sp>
-        <p:nvSpPr>
-          <p:cNvPr id="58" name="Rectangle 57"/>
+              <a:t>Структура текущих запасов и фактические отгрузки из ERP</a:t>
+            </a:r>
+          </a:p>
+        </p:txBody>
+      </p:sp>
+      <p:sp>
+        <p:nvSpPr>
+          <p:cNvPr id="61" name="Rectangle 60"/>
           <p:cNvSpPr/>
           <p:nvPr/>
         </p:nvSpPr>
         <p:spPr>
           <a:xfrm>
-            <a:off x="100000" y="5860000"/>
+            <a:off x="100000" y="1956000"/>
             <a:ext cx="1600000" cy="620000"/>
           </a:xfrm>
           <a:prstGeom prst="rect">
@@ -5558,14 +5696,190 @@
             <a:pPr algn="ctr"/>
             <a:r>
               <a:rPr sz="900"/>
+              <a:t>Спрос и волатильность из DP</a:t>
+            </a:r>
+          </a:p>
+        </p:txBody>
+      </p:sp>
+      <p:sp>
+        <p:nvSpPr>
+          <p:cNvPr id="62" name="Rectangle 61"/>
+          <p:cNvSpPr/>
+          <p:nvPr/>
+        </p:nvSpPr>
+        <p:spPr>
+          <a:xfrm>
+            <a:off x="100000" y="2932000"/>
+            <a:ext cx="1600000" cy="620000"/>
+          </a:xfrm>
+          <a:prstGeom prst="rect">
+            <a:avLst/>
+          </a:prstGeom>
+          <a:solidFill>
+            <a:schemeClr val="accent2"/>
+          </a:solidFill>
+        </p:spPr>
+        <p:style>
+          <a:lnRef idx="1">
+            <a:schemeClr val="accent1"/>
+          </a:lnRef>
+          <a:fillRef idx="3">
+            <a:schemeClr val="accent1"/>
+          </a:fillRef>
+          <a:effectRef idx="2">
+            <a:schemeClr val="accent1"/>
+          </a:effectRef>
+          <a:fontRef idx="minor">
+            <a:schemeClr val="lt1"/>
+          </a:fontRef>
+        </p:style>
+        <p:txBody>
+          <a:bodyPr rtlCol="0" anchor="ctr" wrap="square"/>
+          <a:lstStyle/>
+          <a:p>
+            <a:pPr algn="ctr"/>
+            <a:r>
+              <a:rPr sz="900"/>
+              <a:t>Ошибка прогноза по горизонту из DP</a:t>
+            </a:r>
+          </a:p>
+        </p:txBody>
+      </p:sp>
+      <p:sp>
+        <p:nvSpPr>
+          <p:cNvPr id="63" name="Rectangle 62"/>
+          <p:cNvSpPr/>
+          <p:nvPr/>
+        </p:nvSpPr>
+        <p:spPr>
+          <a:xfrm>
+            <a:off x="100000" y="3908000"/>
+            <a:ext cx="1600000" cy="620000"/>
+          </a:xfrm>
+          <a:prstGeom prst="rect">
+            <a:avLst/>
+          </a:prstGeom>
+          <a:solidFill>
+            <a:schemeClr val="accent2"/>
+          </a:solidFill>
+        </p:spPr>
+        <p:style>
+          <a:lnRef idx="1">
+            <a:schemeClr val="accent1"/>
+          </a:lnRef>
+          <a:fillRef idx="3">
+            <a:schemeClr val="accent1"/>
+          </a:fillRef>
+          <a:effectRef idx="2">
+            <a:schemeClr val="accent1"/>
+          </a:effectRef>
+          <a:fontRef idx="minor">
+            <a:schemeClr val="lt1"/>
+          </a:fontRef>
+        </p:style>
+        <p:txBody>
+          <a:bodyPr rtlCol="0" anchor="ctr" wrap="square"/>
+          <a:lstStyle/>
+          <a:p>
+            <a:pPr algn="ctr"/>
+            <a:r>
+              <a:rPr sz="900"/>
+              <a:t>Параметры цепочки из ERP</a:t>
+            </a:r>
+          </a:p>
+        </p:txBody>
+      </p:sp>
+      <p:sp>
+        <p:nvSpPr>
+          <p:cNvPr id="64" name="Rectangle 63"/>
+          <p:cNvSpPr/>
+          <p:nvPr/>
+        </p:nvSpPr>
+        <p:spPr>
+          <a:xfrm>
+            <a:off x="100000" y="4884000"/>
+            <a:ext cx="1600000" cy="620000"/>
+          </a:xfrm>
+          <a:prstGeom prst="rect">
+            <a:avLst/>
+          </a:prstGeom>
+          <a:solidFill>
+            <a:schemeClr val="accent2"/>
+          </a:solidFill>
+        </p:spPr>
+        <p:style>
+          <a:lnRef idx="1">
+            <a:schemeClr val="accent1"/>
+          </a:lnRef>
+          <a:fillRef idx="3">
+            <a:schemeClr val="accent1"/>
+          </a:fillRef>
+          <a:effectRef idx="2">
+            <a:schemeClr val="accent1"/>
+          </a:effectRef>
+          <a:fontRef idx="minor">
+            <a:schemeClr val="lt1"/>
+          </a:fontRef>
+        </p:style>
+        <p:txBody>
+          <a:bodyPr rtlCol="0" anchor="ctr" wrap="square"/>
+          <a:lstStyle/>
+          <a:p>
+            <a:pPr algn="ctr"/>
+            <a:r>
+              <a:rPr sz="900"/>
               <a:t>Сроки годности и требования сетей к остаточному сроку из ERP</a:t>
+            </a:r>
+          </a:p>
+        </p:txBody>
+      </p:sp>
+      <p:sp>
+        <p:nvSpPr>
+          <p:cNvPr id="65" name="Rectangle 64"/>
+          <p:cNvSpPr/>
+          <p:nvPr/>
+        </p:nvSpPr>
+        <p:spPr>
+          <a:xfrm>
+            <a:off x="100000" y="5860000"/>
+            <a:ext cx="1600000" cy="620000"/>
+          </a:xfrm>
+          <a:prstGeom prst="rect">
+            <a:avLst/>
+          </a:prstGeom>
+          <a:solidFill>
+            <a:schemeClr val="accent2"/>
+          </a:solidFill>
+        </p:spPr>
+        <p:style>
+          <a:lnRef idx="1">
+            <a:schemeClr val="accent1"/>
+          </a:lnRef>
+          <a:fillRef idx="3">
+            <a:schemeClr val="accent1"/>
+          </a:fillRef>
+          <a:effectRef idx="2">
+            <a:schemeClr val="accent1"/>
+          </a:effectRef>
+          <a:fontRef idx="minor">
+            <a:schemeClr val="lt1"/>
+          </a:fontRef>
+        </p:style>
+        <p:txBody>
+          <a:bodyPr rtlCol="0" anchor="ctr" wrap="square"/>
+          <a:lstStyle/>
+          <a:p>
+            <a:pPr algn="ctr"/>
+            <a:r>
+              <a:rPr sz="900"/>
+              <a:t>Мастер-данные номенклатуры из ERP</a:t>
             </a:r>
           </a:p>
         </p:txBody>
       </p:sp>
       <p:cxnSp>
         <p:nvCxnSpPr>
-          <p:cNvPr id="59" name="Connector 58"/>
+          <p:cNvPr id="66" name="Connector 65"/>
           <p:cNvCxnSpPr>
             <a:stCxn id="4" idx="2"/>
             <a:endCxn id="6" idx="0"/>
@@ -5574,260 +5888,8 @@
         </p:nvCxnSpPr>
         <p:spPr>
           <a:xfrm>
-            <a:off x="3152500" y="1660000"/>
-            <a:ext cx="0" cy="2098000"/>
-          </a:xfrm>
-          <a:prstGeom prst="line">
-            <a:avLst/>
-          </a:prstGeom>
-          <a:ln>
-            <a:tailEnd type="triangle"/>
-          </a:ln>
-        </p:spPr>
-        <p:style>
-          <a:lnRef idx="2">
-            <a:schemeClr val="accent1"/>
-          </a:lnRef>
-          <a:fillRef idx="0">
-            <a:schemeClr val="accent1"/>
-          </a:fillRef>
-          <a:effectRef idx="1">
-            <a:schemeClr val="accent1"/>
-          </a:effectRef>
-          <a:fontRef idx="minor">
-            <a:schemeClr val="tx1"/>
-          </a:fontRef>
-        </p:style>
-      </p:cxnSp>
-      <p:cxnSp>
-        <p:nvCxnSpPr>
-          <p:cNvPr id="60" name="Connector 59"/>
-          <p:cNvCxnSpPr>
-            <a:stCxn id="6" idx="2"/>
-            <a:endCxn id="8" idx="0"/>
-          </p:cNvCxnSpPr>
-          <p:nvPr/>
-        </p:nvCxnSpPr>
-        <p:spPr>
-          <a:xfrm>
-            <a:off x="3152500" y="4378000"/>
-            <a:ext cx="0" cy="1090000"/>
-          </a:xfrm>
-          <a:prstGeom prst="line">
-            <a:avLst/>
-          </a:prstGeom>
-          <a:ln>
-            <a:tailEnd type="triangle"/>
-          </a:ln>
-        </p:spPr>
-        <p:style>
-          <a:lnRef idx="2">
-            <a:schemeClr val="accent1"/>
-          </a:lnRef>
-          <a:fillRef idx="0">
-            <a:schemeClr val="accent1"/>
-          </a:fillRef>
-          <a:effectRef idx="1">
-            <a:schemeClr val="accent1"/>
-          </a:effectRef>
-          <a:fontRef idx="minor">
-            <a:schemeClr val="tx1"/>
-          </a:fontRef>
-        </p:style>
-      </p:cxnSp>
-      <p:cxnSp>
-        <p:nvCxnSpPr>
-          <p:cNvPr id="61" name="Connector 60"/>
-          <p:cNvCxnSpPr>
-            <a:stCxn id="8" idx="0"/>
-            <a:endCxn id="12" idx="2"/>
-          </p:cNvCxnSpPr>
-          <p:nvPr/>
-        </p:nvCxnSpPr>
-        <p:spPr>
-          <a:xfrm flipV="1">
-            <a:off x="3152500" y="1660000"/>
-            <a:ext cx="2575000" cy="3808000"/>
-          </a:xfrm>
-          <a:prstGeom prst="line">
-            <a:avLst/>
-          </a:prstGeom>
-          <a:ln>
-            <a:tailEnd type="triangle"/>
-          </a:ln>
-        </p:spPr>
-        <p:style>
-          <a:lnRef idx="2">
-            <a:schemeClr val="accent1"/>
-          </a:lnRef>
-          <a:fillRef idx="0">
-            <a:schemeClr val="accent1"/>
-          </a:fillRef>
-          <a:effectRef idx="1">
-            <a:schemeClr val="accent1"/>
-          </a:effectRef>
-          <a:fontRef idx="minor">
-            <a:schemeClr val="tx1"/>
-          </a:fontRef>
-        </p:style>
-      </p:cxnSp>
-      <p:cxnSp>
-        <p:nvCxnSpPr>
-          <p:cNvPr id="62" name="Connector 61"/>
-          <p:cNvCxnSpPr>
-            <a:stCxn id="12" idx="2"/>
-            <a:endCxn id="14" idx="0"/>
-          </p:cNvCxnSpPr>
-          <p:nvPr/>
-        </p:nvCxnSpPr>
-        <p:spPr>
-          <a:xfrm>
-            <a:off x="5727500" y="1660000"/>
-            <a:ext cx="0" cy="1426000"/>
-          </a:xfrm>
-          <a:prstGeom prst="line">
-            <a:avLst/>
-          </a:prstGeom>
-          <a:ln>
-            <a:tailEnd type="triangle"/>
-          </a:ln>
-        </p:spPr>
-        <p:style>
-          <a:lnRef idx="2">
-            <a:schemeClr val="accent1"/>
-          </a:lnRef>
-          <a:fillRef idx="0">
-            <a:schemeClr val="accent1"/>
-          </a:fillRef>
-          <a:effectRef idx="1">
-            <a:schemeClr val="accent1"/>
-          </a:effectRef>
-          <a:fontRef idx="minor">
-            <a:schemeClr val="tx1"/>
-          </a:fontRef>
-        </p:style>
-      </p:cxnSp>
-      <p:cxnSp>
-        <p:nvCxnSpPr>
-          <p:cNvPr id="63" name="Connector 62"/>
-          <p:cNvCxnSpPr>
-            <a:stCxn id="12" idx="2"/>
-            <a:endCxn id="16" idx="0"/>
-          </p:cNvCxnSpPr>
-          <p:nvPr/>
-        </p:nvCxnSpPr>
-        <p:spPr>
-          <a:xfrm>
-            <a:off x="5727500" y="1660000"/>
-            <a:ext cx="0" cy="2968000"/>
-          </a:xfrm>
-          <a:prstGeom prst="line">
-            <a:avLst/>
-          </a:prstGeom>
-          <a:ln>
-            <a:tailEnd type="triangle"/>
-          </a:ln>
-        </p:spPr>
-        <p:style>
-          <a:lnRef idx="2">
-            <a:schemeClr val="accent1"/>
-          </a:lnRef>
-          <a:fillRef idx="0">
-            <a:schemeClr val="accent1"/>
-          </a:fillRef>
-          <a:effectRef idx="1">
-            <a:schemeClr val="accent1"/>
-          </a:effectRef>
-          <a:fontRef idx="minor">
-            <a:schemeClr val="tx1"/>
-          </a:fontRef>
-        </p:style>
-      </p:cxnSp>
-      <p:cxnSp>
-        <p:nvCxnSpPr>
-          <p:cNvPr id="64" name="Connector 63"/>
-          <p:cNvCxnSpPr>
-            <a:stCxn id="12" idx="2"/>
-            <a:endCxn id="18" idx="0"/>
-          </p:cNvCxnSpPr>
-          <p:nvPr/>
-        </p:nvCxnSpPr>
-        <p:spPr>
-          <a:xfrm>
-            <a:off x="5727500" y="1660000"/>
-            <a:ext cx="0" cy="4342000"/>
-          </a:xfrm>
-          <a:prstGeom prst="line">
-            <a:avLst/>
-          </a:prstGeom>
-          <a:ln>
-            <a:tailEnd type="triangle"/>
-          </a:ln>
-        </p:spPr>
-        <p:style>
-          <a:lnRef idx="2">
-            <a:schemeClr val="accent1"/>
-          </a:lnRef>
-          <a:fillRef idx="0">
-            <a:schemeClr val="accent1"/>
-          </a:fillRef>
-          <a:effectRef idx="1">
-            <a:schemeClr val="accent1"/>
-          </a:effectRef>
-          <a:fontRef idx="minor">
-            <a:schemeClr val="tx1"/>
-          </a:fontRef>
-        </p:style>
-      </p:cxnSp>
-      <p:cxnSp>
-        <p:nvCxnSpPr>
-          <p:cNvPr id="65" name="Connector 64"/>
-          <p:cNvCxnSpPr>
-            <a:stCxn id="14" idx="2"/>
-            <a:endCxn id="20" idx="0"/>
-          </p:cNvCxnSpPr>
-          <p:nvPr/>
-        </p:nvCxnSpPr>
-        <p:spPr>
-          <a:xfrm>
-            <a:off x="5727500" y="3706000"/>
-            <a:ext cx="0" cy="3670000"/>
-          </a:xfrm>
-          <a:prstGeom prst="line">
-            <a:avLst/>
-          </a:prstGeom>
-          <a:ln>
-            <a:tailEnd type="triangle"/>
-          </a:ln>
-        </p:spPr>
-        <p:style>
-          <a:lnRef idx="2">
-            <a:schemeClr val="accent1"/>
-          </a:lnRef>
-          <a:fillRef idx="0">
-            <a:schemeClr val="accent1"/>
-          </a:fillRef>
-          <a:effectRef idx="1">
-            <a:schemeClr val="accent1"/>
-          </a:effectRef>
-          <a:fontRef idx="minor">
-            <a:schemeClr val="tx1"/>
-          </a:fontRef>
-        </p:style>
-      </p:cxnSp>
-      <p:cxnSp>
-        <p:nvCxnSpPr>
-          <p:cNvPr id="66" name="Connector 65"/>
-          <p:cNvCxnSpPr>
-            <a:stCxn id="16" idx="2"/>
-            <a:endCxn id="20" idx="0"/>
-          </p:cNvCxnSpPr>
-          <p:nvPr/>
-        </p:nvCxnSpPr>
-        <p:spPr>
-          <a:xfrm>
-            <a:off x="5727500" y="5248000"/>
-            <a:ext cx="0" cy="2128000"/>
+            <a:off x="2895000" y="1660000"/>
+            <a:ext cx="0" cy="2770000"/>
           </a:xfrm>
           <a:prstGeom prst="line">
             <a:avLst/>
@@ -5855,15 +5917,15 @@
         <p:nvCxnSpPr>
           <p:cNvPr id="67" name="Connector 66"/>
           <p:cNvCxnSpPr>
-            <a:stCxn id="18" idx="2"/>
-            <a:endCxn id="20" idx="0"/>
+            <a:stCxn id="6" idx="2"/>
+            <a:endCxn id="8" idx="0"/>
           </p:cNvCxnSpPr>
           <p:nvPr/>
         </p:nvCxnSpPr>
         <p:spPr>
           <a:xfrm>
-            <a:off x="5727500" y="6622000"/>
-            <a:ext cx="0" cy="754000"/>
+            <a:off x="2895000" y="5050000"/>
+            <a:ext cx="0" cy="1258000"/>
           </a:xfrm>
           <a:prstGeom prst="line">
             <a:avLst/>
@@ -5891,15 +5953,15 @@
         <p:nvCxnSpPr>
           <p:cNvPr id="68" name="Connector 67"/>
           <p:cNvCxnSpPr>
-            <a:stCxn id="20" idx="2"/>
-            <a:endCxn id="22" idx="0"/>
+            <a:stCxn id="8" idx="0"/>
+            <a:endCxn id="12" idx="2"/>
           </p:cNvCxnSpPr>
           <p:nvPr/>
         </p:nvCxnSpPr>
         <p:spPr>
-          <a:xfrm>
-            <a:off x="5727500" y="7996000"/>
-            <a:ext cx="0" cy="922000"/>
+          <a:xfrm flipV="1">
+            <a:off x="2895000" y="1660000"/>
+            <a:ext cx="2060000" cy="4648000"/>
           </a:xfrm>
           <a:prstGeom prst="line">
             <a:avLst/>
@@ -5927,15 +5989,15 @@
         <p:nvCxnSpPr>
           <p:cNvPr id="69" name="Connector 68"/>
           <p:cNvCxnSpPr>
-            <a:stCxn id="22" idx="2"/>
-            <a:endCxn id="24" idx="0"/>
+            <a:stCxn id="12" idx="2"/>
+            <a:endCxn id="14" idx="0"/>
           </p:cNvCxnSpPr>
           <p:nvPr/>
         </p:nvCxnSpPr>
         <p:spPr>
           <a:xfrm>
-            <a:off x="5727500" y="9538000"/>
-            <a:ext cx="0" cy="754000"/>
+            <a:off x="4955000" y="1660000"/>
+            <a:ext cx="0" cy="1594000"/>
           </a:xfrm>
           <a:prstGeom prst="line">
             <a:avLst/>
@@ -5963,15 +6025,15 @@
         <p:nvCxnSpPr>
           <p:cNvPr id="70" name="Connector 69"/>
           <p:cNvCxnSpPr>
-            <a:stCxn id="24" idx="0"/>
-            <a:endCxn id="28" idx="2"/>
+            <a:stCxn id="12" idx="2"/>
+            <a:endCxn id="18" idx="0"/>
           </p:cNvCxnSpPr>
           <p:nvPr/>
         </p:nvCxnSpPr>
         <p:spPr>
-          <a:xfrm flipV="1">
-            <a:off x="5727500" y="1660000"/>
-            <a:ext cx="2575000" cy="8632000"/>
+          <a:xfrm>
+            <a:off x="4955000" y="1660000"/>
+            <a:ext cx="0" cy="5182000"/>
           </a:xfrm>
           <a:prstGeom prst="line">
             <a:avLst/>
@@ -5999,15 +6061,15 @@
         <p:nvCxnSpPr>
           <p:cNvPr id="71" name="Connector 70"/>
           <p:cNvCxnSpPr>
-            <a:stCxn id="28" idx="2"/>
-            <a:endCxn id="30" idx="0"/>
+            <a:stCxn id="12" idx="2"/>
+            <a:endCxn id="22" idx="0"/>
           </p:cNvCxnSpPr>
           <p:nvPr/>
         </p:nvCxnSpPr>
         <p:spPr>
           <a:xfrm>
-            <a:off x="8302500" y="1660000"/>
-            <a:ext cx="0" cy="922000"/>
+            <a:off x="4955000" y="1660000"/>
+            <a:ext cx="0" cy="8266000"/>
           </a:xfrm>
           <a:prstGeom prst="line">
             <a:avLst/>
@@ -6035,15 +6097,15 @@
         <p:nvCxnSpPr>
           <p:cNvPr id="72" name="Connector 71"/>
           <p:cNvCxnSpPr>
-            <a:stCxn id="30" idx="2"/>
-            <a:endCxn id="32" idx="0"/>
+            <a:stCxn id="14" idx="2"/>
+            <a:endCxn id="16" idx="0"/>
           </p:cNvCxnSpPr>
           <p:nvPr/>
         </p:nvCxnSpPr>
         <p:spPr>
           <a:xfrm>
-            <a:off x="8302500" y="3202000"/>
-            <a:ext cx="0" cy="922000"/>
+            <a:off x="4955000" y="3874000"/>
+            <a:ext cx="0" cy="1258000"/>
           </a:xfrm>
           <a:prstGeom prst="line">
             <a:avLst/>
@@ -6071,15 +6133,15 @@
         <p:nvCxnSpPr>
           <p:cNvPr id="73" name="Connector 72"/>
           <p:cNvCxnSpPr>
-            <a:stCxn id="30" idx="2"/>
-            <a:endCxn id="34" idx="0"/>
+            <a:stCxn id="18" idx="2"/>
+            <a:endCxn id="20" idx="0"/>
           </p:cNvCxnSpPr>
           <p:nvPr/>
         </p:nvCxnSpPr>
         <p:spPr>
           <a:xfrm>
-            <a:off x="8302500" y="3202000"/>
-            <a:ext cx="0" cy="2632000"/>
+            <a:off x="4955000" y="7462000"/>
+            <a:ext cx="0" cy="754000"/>
           </a:xfrm>
           <a:prstGeom prst="line">
             <a:avLst/>
@@ -6107,15 +6169,15 @@
         <p:nvCxnSpPr>
           <p:cNvPr id="74" name="Connector 73"/>
           <p:cNvCxnSpPr>
-            <a:stCxn id="32" idx="2"/>
-            <a:endCxn id="36" idx="0"/>
+            <a:stCxn id="22" idx="2"/>
+            <a:endCxn id="24" idx="0"/>
           </p:cNvCxnSpPr>
           <p:nvPr/>
         </p:nvCxnSpPr>
         <p:spPr>
           <a:xfrm>
-            <a:off x="8302500" y="4744000"/>
-            <a:ext cx="0" cy="2464000"/>
+            <a:off x="4955000" y="10546000"/>
+            <a:ext cx="0" cy="922000"/>
           </a:xfrm>
           <a:prstGeom prst="line">
             <a:avLst/>
@@ -6143,15 +6205,15 @@
         <p:nvCxnSpPr>
           <p:cNvPr id="75" name="Connector 74"/>
           <p:cNvCxnSpPr>
-            <a:stCxn id="34" idx="2"/>
-            <a:endCxn id="38" idx="0"/>
+            <a:stCxn id="16" idx="0"/>
+            <a:endCxn id="28" idx="2"/>
           </p:cNvCxnSpPr>
           <p:nvPr/>
         </p:nvCxnSpPr>
         <p:spPr>
-          <a:xfrm>
-            <a:off x="8302500" y="6454000"/>
-            <a:ext cx="0" cy="3472000"/>
+          <a:xfrm flipV="1">
+            <a:off x="4955000" y="1660000"/>
+            <a:ext cx="2060000" cy="3472000"/>
           </a:xfrm>
           <a:prstGeom prst="line">
             <a:avLst/>
@@ -6179,15 +6241,15 @@
         <p:nvCxnSpPr>
           <p:cNvPr id="76" name="Connector 75"/>
           <p:cNvCxnSpPr>
-            <a:stCxn id="36" idx="2"/>
-            <a:endCxn id="38" idx="0"/>
+            <a:stCxn id="28" idx="2"/>
+            <a:endCxn id="30" idx="0"/>
           </p:cNvCxnSpPr>
           <p:nvPr/>
         </p:nvCxnSpPr>
         <p:spPr>
           <a:xfrm>
-            <a:off x="8302500" y="7828000"/>
-            <a:ext cx="0" cy="2098000"/>
+            <a:off x="7015000" y="1660000"/>
+            <a:ext cx="0" cy="754000"/>
           </a:xfrm>
           <a:prstGeom prst="line">
             <a:avLst/>
@@ -6215,15 +6277,15 @@
         <p:nvCxnSpPr>
           <p:cNvPr id="77" name="Connector 76"/>
           <p:cNvCxnSpPr>
-            <a:stCxn id="36" idx="2"/>
-            <a:endCxn id="40" idx="0"/>
+            <a:stCxn id="30" idx="3"/>
+            <a:endCxn id="34" idx="1"/>
           </p:cNvCxnSpPr>
           <p:nvPr/>
         </p:nvCxnSpPr>
         <p:spPr>
-          <a:xfrm>
-            <a:off x="8302500" y="7828000"/>
-            <a:ext cx="0" cy="3640000"/>
+          <a:xfrm flipV="1">
+            <a:off x="7970000" y="1350000"/>
+            <a:ext cx="150000" cy="1374000"/>
           </a:xfrm>
           <a:prstGeom prst="line">
             <a:avLst/>
@@ -6251,15 +6313,15 @@
         <p:nvCxnSpPr>
           <p:cNvPr id="78" name="Connector 77"/>
           <p:cNvCxnSpPr>
-            <a:stCxn id="38" idx="0"/>
-            <a:endCxn id="49" idx="2"/>
+            <a:stCxn id="34" idx="2"/>
+            <a:endCxn id="36" idx="0"/>
           </p:cNvCxnSpPr>
           <p:nvPr/>
         </p:nvCxnSpPr>
         <p:spPr>
-          <a:xfrm flipV="1">
-            <a:off x="8302500" y="4072000"/>
-            <a:ext cx="2575000" cy="5854000"/>
+          <a:xfrm>
+            <a:off x="9075000" y="1660000"/>
+            <a:ext cx="0" cy="922000"/>
           </a:xfrm>
           <a:prstGeom prst="line">
             <a:avLst/>
@@ -6287,15 +6349,15 @@
         <p:nvCxnSpPr>
           <p:cNvPr id="79" name="Connector 78"/>
           <p:cNvCxnSpPr>
-            <a:stCxn id="36" idx="0"/>
-            <a:endCxn id="45" idx="2"/>
+            <a:stCxn id="36" idx="2"/>
+            <a:endCxn id="38" idx="0"/>
           </p:cNvCxnSpPr>
           <p:nvPr/>
         </p:nvCxnSpPr>
         <p:spPr>
-          <a:xfrm flipV="1">
-            <a:off x="8302500" y="1660000"/>
-            <a:ext cx="2575000" cy="5548000"/>
+          <a:xfrm>
+            <a:off x="9075000" y="3202000"/>
+            <a:ext cx="0" cy="1090000"/>
           </a:xfrm>
           <a:prstGeom prst="line">
             <a:avLst/>
@@ -6323,15 +6385,15 @@
         <p:nvCxnSpPr>
           <p:cNvPr id="80" name="Connector 79"/>
           <p:cNvCxnSpPr>
-            <a:stCxn id="36" idx="0"/>
-            <a:endCxn id="47" idx="2"/>
+            <a:stCxn id="36" idx="2"/>
+            <a:endCxn id="40" idx="0"/>
           </p:cNvCxnSpPr>
           <p:nvPr/>
         </p:nvCxnSpPr>
         <p:spPr>
-          <a:xfrm flipV="1">
-            <a:off x="8302500" y="2866000"/>
-            <a:ext cx="2575000" cy="4342000"/>
+          <a:xfrm>
+            <a:off x="9075000" y="3202000"/>
+            <a:ext cx="0" cy="3472000"/>
           </a:xfrm>
           <a:prstGeom prst="line">
             <a:avLst/>
@@ -6359,15 +6421,15 @@
         <p:nvCxnSpPr>
           <p:cNvPr id="81" name="Connector 80"/>
           <p:cNvCxnSpPr>
-            <a:stCxn id="45" idx="2"/>
-            <a:endCxn id="51" idx="0"/>
+            <a:stCxn id="38" idx="2"/>
+            <a:endCxn id="42" idx="0"/>
           </p:cNvCxnSpPr>
           <p:nvPr/>
         </p:nvCxnSpPr>
         <p:spPr>
           <a:xfrm>
-            <a:off x="10877500" y="1660000"/>
-            <a:ext cx="0" cy="3166000"/>
+            <a:off x="9075000" y="4912000"/>
+            <a:ext cx="0" cy="3808000"/>
           </a:xfrm>
           <a:prstGeom prst="line">
             <a:avLst/>
@@ -6395,15 +6457,15 @@
         <p:nvCxnSpPr>
           <p:cNvPr id="82" name="Connector 81"/>
           <p:cNvCxnSpPr>
-            <a:stCxn id="47" idx="2"/>
-            <a:endCxn id="51" idx="0"/>
+            <a:stCxn id="40" idx="2"/>
+            <a:endCxn id="44" idx="0"/>
           </p:cNvCxnSpPr>
           <p:nvPr/>
         </p:nvCxnSpPr>
         <p:spPr>
           <a:xfrm>
-            <a:off x="10877500" y="2866000"/>
-            <a:ext cx="0" cy="1960000"/>
+            <a:off x="9075000" y="7294000"/>
+            <a:ext cx="0" cy="4312000"/>
           </a:xfrm>
           <a:prstGeom prst="line">
             <a:avLst/>
@@ -6431,15 +6493,15 @@
         <p:nvCxnSpPr>
           <p:cNvPr id="83" name="Connector 82"/>
           <p:cNvCxnSpPr>
-            <a:stCxn id="49" idx="2"/>
-            <a:endCxn id="51" idx="0"/>
+            <a:stCxn id="42" idx="2"/>
+            <a:endCxn id="44" idx="0"/>
           </p:cNvCxnSpPr>
           <p:nvPr/>
         </p:nvCxnSpPr>
         <p:spPr>
           <a:xfrm>
-            <a:off x="10877500" y="4072000"/>
-            <a:ext cx="0" cy="754000"/>
+            <a:off x="9075000" y="9340000"/>
+            <a:ext cx="0" cy="2266000"/>
           </a:xfrm>
           <a:prstGeom prst="line">
             <a:avLst/>
@@ -6467,15 +6529,15 @@
         <p:nvCxnSpPr>
           <p:cNvPr id="84" name="Connector 83"/>
           <p:cNvCxnSpPr>
-            <a:stCxn id="54" idx="3"/>
-            <a:endCxn id="4" idx="1"/>
+            <a:stCxn id="42" idx="2"/>
+            <a:endCxn id="46" idx="0"/>
           </p:cNvCxnSpPr>
           <p:nvPr/>
         </p:nvCxnSpPr>
         <p:spPr>
           <a:xfrm>
-            <a:off x="1700000" y="1290000"/>
-            <a:ext cx="240000" cy="60000"/>
+            <a:off x="9075000" y="9340000"/>
+            <a:ext cx="0" cy="3976000"/>
           </a:xfrm>
           <a:prstGeom prst="line">
             <a:avLst/>
@@ -6503,17 +6565,17 @@
         <p:nvCxnSpPr>
           <p:cNvPr id="85" name="Connector 84"/>
           <p:cNvCxnSpPr>
-            <a:stCxn id="55" idx="3"/>
-            <a:endCxn id="14" idx="1"/>
+            <a:stCxn id="44" idx="0"/>
+            <a:endCxn id="55" idx="2"/>
           </p:cNvCxnSpPr>
           <p:nvPr/>
         </p:nvCxnSpPr>
         <p:spPr>
-          <a:xfrm>
-            <a:off x="1700000" y="2510000"/>
-            <a:ext cx="2815000" cy="886000"/>
-          </a:xfrm>
-          <a:prstGeom prst="bentConnector3">
+          <a:xfrm flipV="1">
+            <a:off x="9075000" y="4072000"/>
+            <a:ext cx="2060000" cy="7534000"/>
+          </a:xfrm>
+          <a:prstGeom prst="line">
             <a:avLst/>
           </a:prstGeom>
           <a:ln>
@@ -6539,17 +6601,17 @@
         <p:nvCxnSpPr>
           <p:cNvPr id="86" name="Connector 85"/>
           <p:cNvCxnSpPr>
-            <a:stCxn id="56" idx="3"/>
-            <a:endCxn id="14" idx="1"/>
+            <a:stCxn id="42" idx="0"/>
+            <a:endCxn id="51" idx="2"/>
           </p:cNvCxnSpPr>
           <p:nvPr/>
         </p:nvCxnSpPr>
         <p:spPr>
           <a:xfrm flipV="1">
-            <a:off x="1700000" y="3396000"/>
-            <a:ext cx="2815000" cy="334000"/>
-          </a:xfrm>
-          <a:prstGeom prst="bentConnector3">
+            <a:off x="9075000" y="1660000"/>
+            <a:ext cx="2060000" cy="7060000"/>
+          </a:xfrm>
+          <a:prstGeom prst="line">
             <a:avLst/>
           </a:prstGeom>
           <a:ln>
@@ -6575,17 +6637,17 @@
         <p:nvCxnSpPr>
           <p:cNvPr id="87" name="Connector 86"/>
           <p:cNvCxnSpPr>
-            <a:stCxn id="57" idx="3"/>
-            <a:endCxn id="12" idx="1"/>
+            <a:stCxn id="42" idx="0"/>
+            <a:endCxn id="53" idx="2"/>
           </p:cNvCxnSpPr>
           <p:nvPr/>
         </p:nvCxnSpPr>
         <p:spPr>
           <a:xfrm flipV="1">
-            <a:off x="1700000" y="1350000"/>
-            <a:ext cx="2815000" cy="3600000"/>
-          </a:xfrm>
-          <a:prstGeom prst="bentConnector3">
+            <a:off x="9075000" y="2866000"/>
+            <a:ext cx="2060000" cy="5854000"/>
+          </a:xfrm>
+          <a:prstGeom prst="line">
             <a:avLst/>
           </a:prstGeom>
           <a:ln>
@@ -6611,17 +6673,17 @@
         <p:nvCxnSpPr>
           <p:cNvPr id="88" name="Connector 87"/>
           <p:cNvCxnSpPr>
-            <a:stCxn id="58" idx="3"/>
-            <a:endCxn id="12" idx="1"/>
+            <a:stCxn id="51" idx="2"/>
+            <a:endCxn id="57" idx="0"/>
           </p:cNvCxnSpPr>
           <p:nvPr/>
         </p:nvCxnSpPr>
         <p:spPr>
-          <a:xfrm flipV="1">
-            <a:off x="1700000" y="1350000"/>
-            <a:ext cx="2815000" cy="4820000"/>
-          </a:xfrm>
-          <a:prstGeom prst="bentConnector3">
+          <a:xfrm>
+            <a:off x="11135000" y="1660000"/>
+            <a:ext cx="0" cy="3166000"/>
+          </a:xfrm>
+          <a:prstGeom prst="line">
             <a:avLst/>
           </a:prstGeom>
           <a:ln>
@@ -6647,15 +6709,15 @@
         <p:nvCxnSpPr>
           <p:cNvPr id="89" name="Connector 88"/>
           <p:cNvCxnSpPr>
-            <a:stCxn id="32" idx="2"/>
-            <a:endCxn id="42" idx="0"/>
+            <a:stCxn id="53" idx="2"/>
+            <a:endCxn id="57" idx="0"/>
           </p:cNvCxnSpPr>
           <p:nvPr/>
         </p:nvCxnSpPr>
         <p:spPr>
           <a:xfrm>
-            <a:off x="8302500" y="4744000"/>
-            <a:ext cx="0" cy="8938000"/>
+            <a:off x="11135000" y="2866000"/>
+            <a:ext cx="0" cy="1960000"/>
           </a:xfrm>
           <a:prstGeom prst="line">
             <a:avLst/>
@@ -6683,14 +6745,302 @@
         <p:nvCxnSpPr>
           <p:cNvPr id="90" name="Connector 89"/>
           <p:cNvCxnSpPr>
-            <a:stCxn id="51" idx="2"/>
-            <a:endCxn id="53" idx="0"/>
+            <a:stCxn id="55" idx="2"/>
+            <a:endCxn id="57" idx="0"/>
           </p:cNvCxnSpPr>
           <p:nvPr/>
         </p:nvCxnSpPr>
         <p:spPr>
           <a:xfrm>
-            <a:off x="10877500" y="5446000"/>
+            <a:off x="11135000" y="4072000"/>
+            <a:ext cx="0" cy="754000"/>
+          </a:xfrm>
+          <a:prstGeom prst="line">
+            <a:avLst/>
+          </a:prstGeom>
+          <a:ln>
+            <a:tailEnd type="triangle"/>
+          </a:ln>
+        </p:spPr>
+        <p:style>
+          <a:lnRef idx="2">
+            <a:schemeClr val="accent1"/>
+          </a:lnRef>
+          <a:fillRef idx="0">
+            <a:schemeClr val="accent1"/>
+          </a:fillRef>
+          <a:effectRef idx="1">
+            <a:schemeClr val="accent1"/>
+          </a:effectRef>
+          <a:fontRef idx="minor">
+            <a:schemeClr val="tx1"/>
+          </a:fontRef>
+        </p:style>
+      </p:cxnSp>
+      <p:cxnSp>
+        <p:nvCxnSpPr>
+          <p:cNvPr id="91" name="Connector 90"/>
+          <p:cNvCxnSpPr>
+            <a:stCxn id="60" idx="3"/>
+            <a:endCxn id="4" idx="1"/>
+          </p:cNvCxnSpPr>
+          <p:nvPr/>
+        </p:nvCxnSpPr>
+        <p:spPr>
+          <a:xfrm>
+            <a:off x="1700000" y="1290000"/>
+            <a:ext cx="240000" cy="60000"/>
+          </a:xfrm>
+          <a:prstGeom prst="line">
+            <a:avLst/>
+          </a:prstGeom>
+          <a:ln>
+            <a:tailEnd type="triangle"/>
+          </a:ln>
+        </p:spPr>
+        <p:style>
+          <a:lnRef idx="2">
+            <a:schemeClr val="accent1"/>
+          </a:lnRef>
+          <a:fillRef idx="0">
+            <a:schemeClr val="accent1"/>
+          </a:fillRef>
+          <a:effectRef idx="1">
+            <a:schemeClr val="accent1"/>
+          </a:effectRef>
+          <a:fontRef idx="minor">
+            <a:schemeClr val="tx1"/>
+          </a:fontRef>
+        </p:style>
+      </p:cxnSp>
+      <p:cxnSp>
+        <p:nvCxnSpPr>
+          <p:cNvPr id="92" name="Connector 91"/>
+          <p:cNvCxnSpPr>
+            <a:stCxn id="61" idx="3"/>
+            <a:endCxn id="14" idx="1"/>
+          </p:cNvCxnSpPr>
+          <p:nvPr/>
+        </p:nvCxnSpPr>
+        <p:spPr>
+          <a:xfrm>
+            <a:off x="1700000" y="2266000"/>
+            <a:ext cx="2300000" cy="1298000"/>
+          </a:xfrm>
+          <a:prstGeom prst="bentConnector3">
+            <a:avLst/>
+          </a:prstGeom>
+          <a:ln>
+            <a:tailEnd type="triangle"/>
+          </a:ln>
+        </p:spPr>
+        <p:style>
+          <a:lnRef idx="2">
+            <a:schemeClr val="accent1"/>
+          </a:lnRef>
+          <a:fillRef idx="0">
+            <a:schemeClr val="accent1"/>
+          </a:fillRef>
+          <a:effectRef idx="1">
+            <a:schemeClr val="accent1"/>
+          </a:effectRef>
+          <a:fontRef idx="minor">
+            <a:schemeClr val="tx1"/>
+          </a:fontRef>
+        </p:style>
+      </p:cxnSp>
+      <p:cxnSp>
+        <p:nvCxnSpPr>
+          <p:cNvPr id="93" name="Connector 92"/>
+          <p:cNvCxnSpPr>
+            <a:stCxn id="62" idx="3"/>
+            <a:endCxn id="14" idx="1"/>
+          </p:cNvCxnSpPr>
+          <p:nvPr/>
+        </p:nvCxnSpPr>
+        <p:spPr>
+          <a:xfrm>
+            <a:off x="1700000" y="3242000"/>
+            <a:ext cx="2300000" cy="322000"/>
+          </a:xfrm>
+          <a:prstGeom prst="bentConnector3">
+            <a:avLst/>
+          </a:prstGeom>
+          <a:ln>
+            <a:tailEnd type="triangle"/>
+          </a:ln>
+        </p:spPr>
+        <p:style>
+          <a:lnRef idx="2">
+            <a:schemeClr val="accent1"/>
+          </a:lnRef>
+          <a:fillRef idx="0">
+            <a:schemeClr val="accent1"/>
+          </a:fillRef>
+          <a:effectRef idx="1">
+            <a:schemeClr val="accent1"/>
+          </a:effectRef>
+          <a:fontRef idx="minor">
+            <a:schemeClr val="tx1"/>
+          </a:fontRef>
+        </p:style>
+      </p:cxnSp>
+      <p:cxnSp>
+        <p:nvCxnSpPr>
+          <p:cNvPr id="94" name="Connector 93"/>
+          <p:cNvCxnSpPr>
+            <a:stCxn id="63" idx="3"/>
+            <a:endCxn id="12" idx="1"/>
+          </p:cNvCxnSpPr>
+          <p:nvPr/>
+        </p:nvCxnSpPr>
+        <p:spPr>
+          <a:xfrm flipV="1">
+            <a:off x="1700000" y="1350000"/>
+            <a:ext cx="2300000" cy="2868000"/>
+          </a:xfrm>
+          <a:prstGeom prst="bentConnector3">
+            <a:avLst/>
+          </a:prstGeom>
+          <a:ln>
+            <a:tailEnd type="triangle"/>
+          </a:ln>
+        </p:spPr>
+        <p:style>
+          <a:lnRef idx="2">
+            <a:schemeClr val="accent1"/>
+          </a:lnRef>
+          <a:fillRef idx="0">
+            <a:schemeClr val="accent1"/>
+          </a:fillRef>
+          <a:effectRef idx="1">
+            <a:schemeClr val="accent1"/>
+          </a:effectRef>
+          <a:fontRef idx="minor">
+            <a:schemeClr val="tx1"/>
+          </a:fontRef>
+        </p:style>
+      </p:cxnSp>
+      <p:cxnSp>
+        <p:nvCxnSpPr>
+          <p:cNvPr id="95" name="Connector 94"/>
+          <p:cNvCxnSpPr>
+            <a:stCxn id="64" idx="3"/>
+            <a:endCxn id="12" idx="1"/>
+          </p:cNvCxnSpPr>
+          <p:nvPr/>
+        </p:nvCxnSpPr>
+        <p:spPr>
+          <a:xfrm flipV="1">
+            <a:off x="1700000" y="1350000"/>
+            <a:ext cx="2300000" cy="3844000"/>
+          </a:xfrm>
+          <a:prstGeom prst="bentConnector3">
+            <a:avLst/>
+          </a:prstGeom>
+          <a:ln>
+            <a:tailEnd type="triangle"/>
+          </a:ln>
+        </p:spPr>
+        <p:style>
+          <a:lnRef idx="2">
+            <a:schemeClr val="accent1"/>
+          </a:lnRef>
+          <a:fillRef idx="0">
+            <a:schemeClr val="accent1"/>
+          </a:fillRef>
+          <a:effectRef idx="1">
+            <a:schemeClr val="accent1"/>
+          </a:effectRef>
+          <a:fontRef idx="minor">
+            <a:schemeClr val="tx1"/>
+          </a:fontRef>
+        </p:style>
+      </p:cxnSp>
+      <p:cxnSp>
+        <p:nvCxnSpPr>
+          <p:cNvPr id="96" name="Connector 95"/>
+          <p:cNvCxnSpPr>
+            <a:stCxn id="65" idx="3"/>
+            <a:endCxn id="28" idx="1"/>
+          </p:cNvCxnSpPr>
+          <p:nvPr/>
+        </p:nvCxnSpPr>
+        <p:spPr>
+          <a:xfrm flipV="1">
+            <a:off x="1700000" y="1350000"/>
+            <a:ext cx="4360000" cy="4820000"/>
+          </a:xfrm>
+          <a:prstGeom prst="bentConnector3">
+            <a:avLst/>
+          </a:prstGeom>
+          <a:ln>
+            <a:tailEnd type="triangle"/>
+          </a:ln>
+        </p:spPr>
+        <p:style>
+          <a:lnRef idx="2">
+            <a:schemeClr val="accent1"/>
+          </a:lnRef>
+          <a:fillRef idx="0">
+            <a:schemeClr val="accent1"/>
+          </a:fillRef>
+          <a:effectRef idx="1">
+            <a:schemeClr val="accent1"/>
+          </a:effectRef>
+          <a:fontRef idx="minor">
+            <a:schemeClr val="tx1"/>
+          </a:fontRef>
+        </p:style>
+      </p:cxnSp>
+      <p:cxnSp>
+        <p:nvCxnSpPr>
+          <p:cNvPr id="97" name="Connector 96"/>
+          <p:cNvCxnSpPr>
+            <a:stCxn id="38" idx="2"/>
+            <a:endCxn id="48" idx="0"/>
+          </p:cNvCxnSpPr>
+          <p:nvPr/>
+        </p:nvCxnSpPr>
+        <p:spPr>
+          <a:xfrm>
+            <a:off x="9075000" y="4912000"/>
+            <a:ext cx="0" cy="10618000"/>
+          </a:xfrm>
+          <a:prstGeom prst="line">
+            <a:avLst/>
+          </a:prstGeom>
+          <a:ln>
+            <a:tailEnd type="triangle"/>
+          </a:ln>
+        </p:spPr>
+        <p:style>
+          <a:lnRef idx="2">
+            <a:schemeClr val="accent1"/>
+          </a:lnRef>
+          <a:fillRef idx="0">
+            <a:schemeClr val="accent1"/>
+          </a:fillRef>
+          <a:effectRef idx="1">
+            <a:schemeClr val="accent1"/>
+          </a:effectRef>
+          <a:fontRef idx="minor">
+            <a:schemeClr val="tx1"/>
+          </a:fontRef>
+        </p:style>
+      </p:cxnSp>
+      <p:cxnSp>
+        <p:nvCxnSpPr>
+          <p:cNvPr id="98" name="Connector 97"/>
+          <p:cNvCxnSpPr>
+            <a:stCxn id="57" idx="2"/>
+            <a:endCxn id="59" idx="0"/>
+          </p:cNvCxnSpPr>
+          <p:nvPr/>
+        </p:nvCxnSpPr>
+        <p:spPr>
+          <a:xfrm>
+            <a:off x="11135000" y="5446000"/>
             <a:ext cx="0" cy="922000"/>
           </a:xfrm>
           <a:prstGeom prst="line">

--- a/In.Plan MEIO process 06-09-2026.pptx
+++ b/In.Plan MEIO process 06-09-2026.pptx
@@ -5571,7 +5571,7 @@
       </p:sp>
       <p:sp>
         <p:nvSpPr>
-          <p:cNvPr id="59" name="Rectangle 58"/>
+          <p:cNvPr id="59" name="Rounded Rectangle 58"/>
           <p:cNvSpPr/>
           <p:nvPr/>
         </p:nvSpPr>
@@ -5580,11 +5580,11 @@
             <a:off x="10180000" y="6368000"/>
             <a:ext cx="1910000" cy="620000"/>
           </a:xfrm>
-          <a:prstGeom prst="rect">
+          <a:prstGeom prst="roundRect">
             <a:avLst/>
           </a:prstGeom>
           <a:solidFill>
-            <a:schemeClr val="accent2"/>
+            <a:schemeClr val="accent1"/>
           </a:solidFill>
         </p:spPr>
         <p:style>
@@ -5607,22 +5607,63 @@
           <a:p>
             <a:pPr algn="ctr"/>
             <a:r>
-              <a:rPr sz="900"/>
-              <a:t>Оценка эффектов и рекомендации</a:t>
-            </a:r>
-          </a:p>
-        </p:txBody>
-      </p:sp>
-      <p:sp>
-        <p:nvSpPr>
-          <p:cNvPr id="60" name="Rectangle 59"/>
+              <a:rPr sz="1000"/>
+              <a:t>Передача нормативов по запасам в SNP</a:t>
+            </a:r>
+          </a:p>
+        </p:txBody>
+      </p:sp>
+      <p:sp>
+        <p:nvSpPr>
+          <p:cNvPr id="60" name="TextBox 59"/>
+          <p:cNvSpPr txBox="1"/>
+          <p:nvPr/>
+        </p:nvSpPr>
+        <p:spPr>
+          <a:xfrm>
+            <a:off x="10180000" y="7088000"/>
+            <a:ext cx="1910000" cy="1008000"/>
+          </a:xfrm>
+          <a:prstGeom prst="rect">
+            <a:avLst/>
+          </a:prstGeom>
+          <a:noFill/>
+        </p:spPr>
+        <p:txBody>
+          <a:bodyPr wrap="square">
+            <a:spAutoFit/>
+          </a:bodyPr>
+          <a:lstStyle/>
+          <a:p>
+            <a:r>
+              <a:rPr sz="900" b="0"/>
+              <a:t>Утверждённые уровни запасов по эшелонам</a:t>
+            </a:r>
+          </a:p>
+          <a:p>
+            <a:r>
+              <a:rPr sz="900" b="0"/>
+              <a:t>Точка заказа и рекомендованный уровень сервиса</a:t>
+            </a:r>
+          </a:p>
+          <a:p>
+            <a:r>
+              <a:rPr sz="900" b="0"/>
+              <a:t>Горизонт и дата вступления в силу</a:t>
+            </a:r>
+          </a:p>
+        </p:txBody>
+      </p:sp>
+      <p:sp>
+        <p:nvSpPr>
+          <p:cNvPr id="61" name="Rectangle 60"/>
           <p:cNvSpPr/>
           <p:nvPr/>
         </p:nvSpPr>
         <p:spPr>
           <a:xfrm>
-            <a:off x="100000" y="980000"/>
-            <a:ext cx="1600000" cy="620000"/>
+            <a:off x="10180000" y="8246000"/>
+            <a:ext cx="1910000" cy="620000"/>
           </a:xfrm>
           <a:prstGeom prst="rect">
             <a:avLst/>
@@ -5652,21 +5693,21 @@
             <a:pPr algn="ctr"/>
             <a:r>
               <a:rPr sz="900"/>
-              <a:t>Структура текущих запасов и фактические отгрузки из ERP</a:t>
-            </a:r>
-          </a:p>
-        </p:txBody>
-      </p:sp>
-      <p:sp>
-        <p:nvSpPr>
-          <p:cNvPr id="61" name="Rectangle 60"/>
+              <a:t>Оценка эффектов и рекомендации</a:t>
+            </a:r>
+          </a:p>
+        </p:txBody>
+      </p:sp>
+      <p:sp>
+        <p:nvSpPr>
+          <p:cNvPr id="62" name="Rectangle 61"/>
           <p:cNvSpPr/>
           <p:nvPr/>
         </p:nvSpPr>
         <p:spPr>
           <a:xfrm>
-            <a:off x="100000" y="1956000"/>
-            <a:ext cx="1600000" cy="620000"/>
+            <a:off x="10180000" y="9016000"/>
+            <a:ext cx="1910000" cy="620000"/>
           </a:xfrm>
           <a:prstGeom prst="rect">
             <a:avLst/>
@@ -5696,20 +5737,20 @@
             <a:pPr algn="ctr"/>
             <a:r>
               <a:rPr sz="900"/>
-              <a:t>Спрос и волатильность из DP</a:t>
-            </a:r>
-          </a:p>
-        </p:txBody>
-      </p:sp>
-      <p:sp>
-        <p:nvSpPr>
-          <p:cNvPr id="62" name="Rectangle 61"/>
+              <a:t>Нормативы запасов в SNP</a:t>
+            </a:r>
+          </a:p>
+        </p:txBody>
+      </p:sp>
+      <p:sp>
+        <p:nvSpPr>
+          <p:cNvPr id="63" name="Rectangle 62"/>
           <p:cNvSpPr/>
           <p:nvPr/>
         </p:nvSpPr>
         <p:spPr>
           <a:xfrm>
-            <a:off x="100000" y="2932000"/>
+            <a:off x="100000" y="980000"/>
             <a:ext cx="1600000" cy="620000"/>
           </a:xfrm>
           <a:prstGeom prst="rect">
@@ -5740,20 +5781,20 @@
             <a:pPr algn="ctr"/>
             <a:r>
               <a:rPr sz="900"/>
-              <a:t>Ошибка прогноза по горизонту из DP</a:t>
-            </a:r>
-          </a:p>
-        </p:txBody>
-      </p:sp>
-      <p:sp>
-        <p:nvSpPr>
-          <p:cNvPr id="63" name="Rectangle 62"/>
+              <a:t>Структура текущих запасов и фактические отгрузки из ERP</a:t>
+            </a:r>
+          </a:p>
+        </p:txBody>
+      </p:sp>
+      <p:sp>
+        <p:nvSpPr>
+          <p:cNvPr id="64" name="Rectangle 63"/>
           <p:cNvSpPr/>
           <p:nvPr/>
         </p:nvSpPr>
         <p:spPr>
           <a:xfrm>
-            <a:off x="100000" y="3908000"/>
+            <a:off x="100000" y="1956000"/>
             <a:ext cx="1600000" cy="620000"/>
           </a:xfrm>
           <a:prstGeom prst="rect">
@@ -5784,20 +5825,20 @@
             <a:pPr algn="ctr"/>
             <a:r>
               <a:rPr sz="900"/>
-              <a:t>Параметры цепочки из ERP</a:t>
-            </a:r>
-          </a:p>
-        </p:txBody>
-      </p:sp>
-      <p:sp>
-        <p:nvSpPr>
-          <p:cNvPr id="64" name="Rectangle 63"/>
+              <a:t>Спрос и волатильность из DP</a:t>
+            </a:r>
+          </a:p>
+        </p:txBody>
+      </p:sp>
+      <p:sp>
+        <p:nvSpPr>
+          <p:cNvPr id="65" name="Rectangle 64"/>
           <p:cNvSpPr/>
           <p:nvPr/>
         </p:nvSpPr>
         <p:spPr>
           <a:xfrm>
-            <a:off x="100000" y="4884000"/>
+            <a:off x="100000" y="2932000"/>
             <a:ext cx="1600000" cy="620000"/>
           </a:xfrm>
           <a:prstGeom prst="rect">
@@ -5828,20 +5869,20 @@
             <a:pPr algn="ctr"/>
             <a:r>
               <a:rPr sz="900"/>
-              <a:t>Сроки годности и требования сетей к остаточному сроку из ERP</a:t>
-            </a:r>
-          </a:p>
-        </p:txBody>
-      </p:sp>
-      <p:sp>
-        <p:nvSpPr>
-          <p:cNvPr id="65" name="Rectangle 64"/>
+              <a:t>Ошибка прогноза по горизонту из DP</a:t>
+            </a:r>
+          </a:p>
+        </p:txBody>
+      </p:sp>
+      <p:sp>
+        <p:nvSpPr>
+          <p:cNvPr id="66" name="Rectangle 65"/>
           <p:cNvSpPr/>
           <p:nvPr/>
         </p:nvSpPr>
         <p:spPr>
           <a:xfrm>
-            <a:off x="100000" y="5860000"/>
+            <a:off x="100000" y="3908000"/>
             <a:ext cx="1600000" cy="620000"/>
           </a:xfrm>
           <a:prstGeom prst="rect">
@@ -5872,6 +5913,94 @@
             <a:pPr algn="ctr"/>
             <a:r>
               <a:rPr sz="900"/>
+              <a:t>Параметры цепочки из ERP</a:t>
+            </a:r>
+          </a:p>
+        </p:txBody>
+      </p:sp>
+      <p:sp>
+        <p:nvSpPr>
+          <p:cNvPr id="67" name="Rectangle 66"/>
+          <p:cNvSpPr/>
+          <p:nvPr/>
+        </p:nvSpPr>
+        <p:spPr>
+          <a:xfrm>
+            <a:off x="100000" y="4884000"/>
+            <a:ext cx="1600000" cy="620000"/>
+          </a:xfrm>
+          <a:prstGeom prst="rect">
+            <a:avLst/>
+          </a:prstGeom>
+          <a:solidFill>
+            <a:schemeClr val="accent2"/>
+          </a:solidFill>
+        </p:spPr>
+        <p:style>
+          <a:lnRef idx="1">
+            <a:schemeClr val="accent1"/>
+          </a:lnRef>
+          <a:fillRef idx="3">
+            <a:schemeClr val="accent1"/>
+          </a:fillRef>
+          <a:effectRef idx="2">
+            <a:schemeClr val="accent1"/>
+          </a:effectRef>
+          <a:fontRef idx="minor">
+            <a:schemeClr val="lt1"/>
+          </a:fontRef>
+        </p:style>
+        <p:txBody>
+          <a:bodyPr rtlCol="0" anchor="ctr" wrap="square"/>
+          <a:lstStyle/>
+          <a:p>
+            <a:pPr algn="ctr"/>
+            <a:r>
+              <a:rPr sz="900"/>
+              <a:t>Сроки годности и требования сетей к остаточному сроку из ERP</a:t>
+            </a:r>
+          </a:p>
+        </p:txBody>
+      </p:sp>
+      <p:sp>
+        <p:nvSpPr>
+          <p:cNvPr id="68" name="Rectangle 67"/>
+          <p:cNvSpPr/>
+          <p:nvPr/>
+        </p:nvSpPr>
+        <p:spPr>
+          <a:xfrm>
+            <a:off x="100000" y="5860000"/>
+            <a:ext cx="1600000" cy="620000"/>
+          </a:xfrm>
+          <a:prstGeom prst="rect">
+            <a:avLst/>
+          </a:prstGeom>
+          <a:solidFill>
+            <a:schemeClr val="accent2"/>
+          </a:solidFill>
+        </p:spPr>
+        <p:style>
+          <a:lnRef idx="1">
+            <a:schemeClr val="accent1"/>
+          </a:lnRef>
+          <a:fillRef idx="3">
+            <a:schemeClr val="accent1"/>
+          </a:fillRef>
+          <a:effectRef idx="2">
+            <a:schemeClr val="accent1"/>
+          </a:effectRef>
+          <a:fontRef idx="minor">
+            <a:schemeClr val="lt1"/>
+          </a:fontRef>
+        </p:style>
+        <p:txBody>
+          <a:bodyPr rtlCol="0" anchor="ctr" wrap="square"/>
+          <a:lstStyle/>
+          <a:p>
+            <a:pPr algn="ctr"/>
+            <a:r>
+              <a:rPr sz="900"/>
               <a:t>Мастер-данные номенклатуры из ERP</a:t>
             </a:r>
           </a:p>
@@ -5879,7 +6008,7 @@
       </p:sp>
       <p:cxnSp>
         <p:nvCxnSpPr>
-          <p:cNvPr id="66" name="Connector 65"/>
+          <p:cNvPr id="69" name="Connector 68"/>
           <p:cNvCxnSpPr>
             <a:stCxn id="4" idx="2"/>
             <a:endCxn id="6" idx="0"/>
@@ -5890,114 +6019,6 @@
           <a:xfrm>
             <a:off x="2895000" y="1660000"/>
             <a:ext cx="0" cy="2770000"/>
-          </a:xfrm>
-          <a:prstGeom prst="line">
-            <a:avLst/>
-          </a:prstGeom>
-          <a:ln>
-            <a:tailEnd type="triangle"/>
-          </a:ln>
-        </p:spPr>
-        <p:style>
-          <a:lnRef idx="2">
-            <a:schemeClr val="accent1"/>
-          </a:lnRef>
-          <a:fillRef idx="0">
-            <a:schemeClr val="accent1"/>
-          </a:fillRef>
-          <a:effectRef idx="1">
-            <a:schemeClr val="accent1"/>
-          </a:effectRef>
-          <a:fontRef idx="minor">
-            <a:schemeClr val="tx1"/>
-          </a:fontRef>
-        </p:style>
-      </p:cxnSp>
-      <p:cxnSp>
-        <p:nvCxnSpPr>
-          <p:cNvPr id="67" name="Connector 66"/>
-          <p:cNvCxnSpPr>
-            <a:stCxn id="6" idx="2"/>
-            <a:endCxn id="8" idx="0"/>
-          </p:cNvCxnSpPr>
-          <p:nvPr/>
-        </p:nvCxnSpPr>
-        <p:spPr>
-          <a:xfrm>
-            <a:off x="2895000" y="5050000"/>
-            <a:ext cx="0" cy="1258000"/>
-          </a:xfrm>
-          <a:prstGeom prst="line">
-            <a:avLst/>
-          </a:prstGeom>
-          <a:ln>
-            <a:tailEnd type="triangle"/>
-          </a:ln>
-        </p:spPr>
-        <p:style>
-          <a:lnRef idx="2">
-            <a:schemeClr val="accent1"/>
-          </a:lnRef>
-          <a:fillRef idx="0">
-            <a:schemeClr val="accent1"/>
-          </a:fillRef>
-          <a:effectRef idx="1">
-            <a:schemeClr val="accent1"/>
-          </a:effectRef>
-          <a:fontRef idx="minor">
-            <a:schemeClr val="tx1"/>
-          </a:fontRef>
-        </p:style>
-      </p:cxnSp>
-      <p:cxnSp>
-        <p:nvCxnSpPr>
-          <p:cNvPr id="68" name="Connector 67"/>
-          <p:cNvCxnSpPr>
-            <a:stCxn id="8" idx="0"/>
-            <a:endCxn id="12" idx="2"/>
-          </p:cNvCxnSpPr>
-          <p:nvPr/>
-        </p:nvCxnSpPr>
-        <p:spPr>
-          <a:xfrm flipV="1">
-            <a:off x="2895000" y="1660000"/>
-            <a:ext cx="2060000" cy="4648000"/>
-          </a:xfrm>
-          <a:prstGeom prst="line">
-            <a:avLst/>
-          </a:prstGeom>
-          <a:ln>
-            <a:tailEnd type="triangle"/>
-          </a:ln>
-        </p:spPr>
-        <p:style>
-          <a:lnRef idx="2">
-            <a:schemeClr val="accent1"/>
-          </a:lnRef>
-          <a:fillRef idx="0">
-            <a:schemeClr val="accent1"/>
-          </a:fillRef>
-          <a:effectRef idx="1">
-            <a:schemeClr val="accent1"/>
-          </a:effectRef>
-          <a:fontRef idx="minor">
-            <a:schemeClr val="tx1"/>
-          </a:fontRef>
-        </p:style>
-      </p:cxnSp>
-      <p:cxnSp>
-        <p:nvCxnSpPr>
-          <p:cNvPr id="69" name="Connector 68"/>
-          <p:cNvCxnSpPr>
-            <a:stCxn id="12" idx="2"/>
-            <a:endCxn id="14" idx="0"/>
-          </p:cNvCxnSpPr>
-          <p:nvPr/>
-        </p:nvCxnSpPr>
-        <p:spPr>
-          <a:xfrm>
-            <a:off x="4955000" y="1660000"/>
-            <a:ext cx="0" cy="1594000"/>
           </a:xfrm>
           <a:prstGeom prst="line">
             <a:avLst/>
@@ -6025,15 +6046,15 @@
         <p:nvCxnSpPr>
           <p:cNvPr id="70" name="Connector 69"/>
           <p:cNvCxnSpPr>
-            <a:stCxn id="12" idx="2"/>
-            <a:endCxn id="18" idx="0"/>
+            <a:stCxn id="6" idx="2"/>
+            <a:endCxn id="8" idx="0"/>
           </p:cNvCxnSpPr>
           <p:nvPr/>
         </p:nvCxnSpPr>
         <p:spPr>
           <a:xfrm>
-            <a:off x="4955000" y="1660000"/>
-            <a:ext cx="0" cy="5182000"/>
+            <a:off x="2895000" y="5050000"/>
+            <a:ext cx="0" cy="1258000"/>
           </a:xfrm>
           <a:prstGeom prst="line">
             <a:avLst/>
@@ -6061,15 +6082,15 @@
         <p:nvCxnSpPr>
           <p:cNvPr id="71" name="Connector 70"/>
           <p:cNvCxnSpPr>
-            <a:stCxn id="12" idx="2"/>
-            <a:endCxn id="22" idx="0"/>
+            <a:stCxn id="8" idx="0"/>
+            <a:endCxn id="12" idx="2"/>
           </p:cNvCxnSpPr>
           <p:nvPr/>
         </p:nvCxnSpPr>
         <p:spPr>
-          <a:xfrm>
-            <a:off x="4955000" y="1660000"/>
-            <a:ext cx="0" cy="8266000"/>
+          <a:xfrm flipV="1">
+            <a:off x="2895000" y="1660000"/>
+            <a:ext cx="2060000" cy="4648000"/>
           </a:xfrm>
           <a:prstGeom prst="line">
             <a:avLst/>
@@ -6097,15 +6118,15 @@
         <p:nvCxnSpPr>
           <p:cNvPr id="72" name="Connector 71"/>
           <p:cNvCxnSpPr>
-            <a:stCxn id="14" idx="2"/>
-            <a:endCxn id="16" idx="0"/>
+            <a:stCxn id="12" idx="2"/>
+            <a:endCxn id="14" idx="0"/>
           </p:cNvCxnSpPr>
           <p:nvPr/>
         </p:nvCxnSpPr>
         <p:spPr>
           <a:xfrm>
-            <a:off x="4955000" y="3874000"/>
-            <a:ext cx="0" cy="1258000"/>
+            <a:off x="4955000" y="1660000"/>
+            <a:ext cx="0" cy="1594000"/>
           </a:xfrm>
           <a:prstGeom prst="line">
             <a:avLst/>
@@ -6133,15 +6154,15 @@
         <p:nvCxnSpPr>
           <p:cNvPr id="73" name="Connector 72"/>
           <p:cNvCxnSpPr>
-            <a:stCxn id="18" idx="2"/>
-            <a:endCxn id="20" idx="0"/>
+            <a:stCxn id="12" idx="2"/>
+            <a:endCxn id="18" idx="0"/>
           </p:cNvCxnSpPr>
           <p:nvPr/>
         </p:nvCxnSpPr>
         <p:spPr>
           <a:xfrm>
-            <a:off x="4955000" y="7462000"/>
-            <a:ext cx="0" cy="754000"/>
+            <a:off x="4955000" y="1660000"/>
+            <a:ext cx="0" cy="5182000"/>
           </a:xfrm>
           <a:prstGeom prst="line">
             <a:avLst/>
@@ -6169,15 +6190,15 @@
         <p:nvCxnSpPr>
           <p:cNvPr id="74" name="Connector 73"/>
           <p:cNvCxnSpPr>
-            <a:stCxn id="22" idx="2"/>
-            <a:endCxn id="24" idx="0"/>
+            <a:stCxn id="12" idx="2"/>
+            <a:endCxn id="22" idx="0"/>
           </p:cNvCxnSpPr>
           <p:nvPr/>
         </p:nvCxnSpPr>
         <p:spPr>
           <a:xfrm>
-            <a:off x="4955000" y="10546000"/>
-            <a:ext cx="0" cy="922000"/>
+            <a:off x="4955000" y="1660000"/>
+            <a:ext cx="0" cy="8266000"/>
           </a:xfrm>
           <a:prstGeom prst="line">
             <a:avLst/>
@@ -6205,15 +6226,15 @@
         <p:nvCxnSpPr>
           <p:cNvPr id="75" name="Connector 74"/>
           <p:cNvCxnSpPr>
-            <a:stCxn id="16" idx="0"/>
-            <a:endCxn id="28" idx="2"/>
+            <a:stCxn id="14" idx="2"/>
+            <a:endCxn id="16" idx="0"/>
           </p:cNvCxnSpPr>
           <p:nvPr/>
         </p:nvCxnSpPr>
         <p:spPr>
-          <a:xfrm flipV="1">
-            <a:off x="4955000" y="1660000"/>
-            <a:ext cx="2060000" cy="3472000"/>
+          <a:xfrm>
+            <a:off x="4955000" y="3874000"/>
+            <a:ext cx="0" cy="1258000"/>
           </a:xfrm>
           <a:prstGeom prst="line">
             <a:avLst/>
@@ -6241,14 +6262,14 @@
         <p:nvCxnSpPr>
           <p:cNvPr id="76" name="Connector 75"/>
           <p:cNvCxnSpPr>
-            <a:stCxn id="28" idx="2"/>
-            <a:endCxn id="30" idx="0"/>
+            <a:stCxn id="18" idx="2"/>
+            <a:endCxn id="20" idx="0"/>
           </p:cNvCxnSpPr>
           <p:nvPr/>
         </p:nvCxnSpPr>
         <p:spPr>
           <a:xfrm>
-            <a:off x="7015000" y="1660000"/>
+            <a:off x="4955000" y="7462000"/>
             <a:ext cx="0" cy="754000"/>
           </a:xfrm>
           <a:prstGeom prst="line">
@@ -6277,15 +6298,15 @@
         <p:nvCxnSpPr>
           <p:cNvPr id="77" name="Connector 76"/>
           <p:cNvCxnSpPr>
-            <a:stCxn id="30" idx="3"/>
-            <a:endCxn id="34" idx="1"/>
+            <a:stCxn id="22" idx="2"/>
+            <a:endCxn id="24" idx="0"/>
           </p:cNvCxnSpPr>
           <p:nvPr/>
         </p:nvCxnSpPr>
         <p:spPr>
-          <a:xfrm flipV="1">
-            <a:off x="7970000" y="1350000"/>
-            <a:ext cx="150000" cy="1374000"/>
+          <a:xfrm>
+            <a:off x="4955000" y="10546000"/>
+            <a:ext cx="0" cy="922000"/>
           </a:xfrm>
           <a:prstGeom prst="line">
             <a:avLst/>
@@ -6313,15 +6334,15 @@
         <p:nvCxnSpPr>
           <p:cNvPr id="78" name="Connector 77"/>
           <p:cNvCxnSpPr>
-            <a:stCxn id="34" idx="2"/>
-            <a:endCxn id="36" idx="0"/>
+            <a:stCxn id="16" idx="0"/>
+            <a:endCxn id="28" idx="2"/>
           </p:cNvCxnSpPr>
           <p:nvPr/>
         </p:nvCxnSpPr>
         <p:spPr>
-          <a:xfrm>
-            <a:off x="9075000" y="1660000"/>
-            <a:ext cx="0" cy="922000"/>
+          <a:xfrm flipV="1">
+            <a:off x="4955000" y="1660000"/>
+            <a:ext cx="2060000" cy="3472000"/>
           </a:xfrm>
           <a:prstGeom prst="line">
             <a:avLst/>
@@ -6349,15 +6370,15 @@
         <p:nvCxnSpPr>
           <p:cNvPr id="79" name="Connector 78"/>
           <p:cNvCxnSpPr>
-            <a:stCxn id="36" idx="2"/>
-            <a:endCxn id="38" idx="0"/>
+            <a:stCxn id="28" idx="2"/>
+            <a:endCxn id="30" idx="0"/>
           </p:cNvCxnSpPr>
           <p:nvPr/>
         </p:nvCxnSpPr>
         <p:spPr>
           <a:xfrm>
-            <a:off x="9075000" y="3202000"/>
-            <a:ext cx="0" cy="1090000"/>
+            <a:off x="7015000" y="1660000"/>
+            <a:ext cx="0" cy="754000"/>
           </a:xfrm>
           <a:prstGeom prst="line">
             <a:avLst/>
@@ -6385,15 +6406,15 @@
         <p:nvCxnSpPr>
           <p:cNvPr id="80" name="Connector 79"/>
           <p:cNvCxnSpPr>
-            <a:stCxn id="36" idx="2"/>
-            <a:endCxn id="40" idx="0"/>
+            <a:stCxn id="30" idx="3"/>
+            <a:endCxn id="34" idx="1"/>
           </p:cNvCxnSpPr>
           <p:nvPr/>
         </p:nvCxnSpPr>
         <p:spPr>
-          <a:xfrm>
-            <a:off x="9075000" y="3202000"/>
-            <a:ext cx="0" cy="3472000"/>
+          <a:xfrm flipV="1">
+            <a:off x="7970000" y="1350000"/>
+            <a:ext cx="150000" cy="1374000"/>
           </a:xfrm>
           <a:prstGeom prst="line">
             <a:avLst/>
@@ -6421,15 +6442,15 @@
         <p:nvCxnSpPr>
           <p:cNvPr id="81" name="Connector 80"/>
           <p:cNvCxnSpPr>
-            <a:stCxn id="38" idx="2"/>
-            <a:endCxn id="42" idx="0"/>
+            <a:stCxn id="34" idx="2"/>
+            <a:endCxn id="36" idx="0"/>
           </p:cNvCxnSpPr>
           <p:nvPr/>
         </p:nvCxnSpPr>
         <p:spPr>
           <a:xfrm>
-            <a:off x="9075000" y="4912000"/>
-            <a:ext cx="0" cy="3808000"/>
+            <a:off x="9075000" y="1660000"/>
+            <a:ext cx="0" cy="922000"/>
           </a:xfrm>
           <a:prstGeom prst="line">
             <a:avLst/>
@@ -6457,15 +6478,15 @@
         <p:nvCxnSpPr>
           <p:cNvPr id="82" name="Connector 81"/>
           <p:cNvCxnSpPr>
-            <a:stCxn id="40" idx="2"/>
-            <a:endCxn id="44" idx="0"/>
+            <a:stCxn id="36" idx="2"/>
+            <a:endCxn id="38" idx="0"/>
           </p:cNvCxnSpPr>
           <p:nvPr/>
         </p:nvCxnSpPr>
         <p:spPr>
           <a:xfrm>
-            <a:off x="9075000" y="7294000"/>
-            <a:ext cx="0" cy="4312000"/>
+            <a:off x="9075000" y="3202000"/>
+            <a:ext cx="0" cy="1090000"/>
           </a:xfrm>
           <a:prstGeom prst="line">
             <a:avLst/>
@@ -6493,15 +6514,15 @@
         <p:nvCxnSpPr>
           <p:cNvPr id="83" name="Connector 82"/>
           <p:cNvCxnSpPr>
-            <a:stCxn id="42" idx="2"/>
-            <a:endCxn id="44" idx="0"/>
+            <a:stCxn id="36" idx="2"/>
+            <a:endCxn id="40" idx="0"/>
           </p:cNvCxnSpPr>
           <p:nvPr/>
         </p:nvCxnSpPr>
         <p:spPr>
           <a:xfrm>
-            <a:off x="9075000" y="9340000"/>
-            <a:ext cx="0" cy="2266000"/>
+            <a:off x="9075000" y="3202000"/>
+            <a:ext cx="0" cy="3472000"/>
           </a:xfrm>
           <a:prstGeom prst="line">
             <a:avLst/>
@@ -6529,15 +6550,15 @@
         <p:nvCxnSpPr>
           <p:cNvPr id="84" name="Connector 83"/>
           <p:cNvCxnSpPr>
-            <a:stCxn id="42" idx="2"/>
-            <a:endCxn id="46" idx="0"/>
+            <a:stCxn id="38" idx="2"/>
+            <a:endCxn id="42" idx="0"/>
           </p:cNvCxnSpPr>
           <p:nvPr/>
         </p:nvCxnSpPr>
         <p:spPr>
           <a:xfrm>
-            <a:off x="9075000" y="9340000"/>
-            <a:ext cx="0" cy="3976000"/>
+            <a:off x="9075000" y="4912000"/>
+            <a:ext cx="0" cy="3808000"/>
           </a:xfrm>
           <a:prstGeom prst="line">
             <a:avLst/>
@@ -6565,15 +6586,15 @@
         <p:nvCxnSpPr>
           <p:cNvPr id="85" name="Connector 84"/>
           <p:cNvCxnSpPr>
-            <a:stCxn id="44" idx="0"/>
-            <a:endCxn id="55" idx="2"/>
+            <a:stCxn id="40" idx="2"/>
+            <a:endCxn id="44" idx="0"/>
           </p:cNvCxnSpPr>
           <p:nvPr/>
         </p:nvCxnSpPr>
         <p:spPr>
-          <a:xfrm flipV="1">
-            <a:off x="9075000" y="4072000"/>
-            <a:ext cx="2060000" cy="7534000"/>
+          <a:xfrm>
+            <a:off x="9075000" y="7294000"/>
+            <a:ext cx="0" cy="4312000"/>
           </a:xfrm>
           <a:prstGeom prst="line">
             <a:avLst/>
@@ -6601,15 +6622,15 @@
         <p:nvCxnSpPr>
           <p:cNvPr id="86" name="Connector 85"/>
           <p:cNvCxnSpPr>
-            <a:stCxn id="42" idx="0"/>
-            <a:endCxn id="51" idx="2"/>
+            <a:stCxn id="42" idx="2"/>
+            <a:endCxn id="44" idx="0"/>
           </p:cNvCxnSpPr>
           <p:nvPr/>
         </p:nvCxnSpPr>
         <p:spPr>
-          <a:xfrm flipV="1">
-            <a:off x="9075000" y="1660000"/>
-            <a:ext cx="2060000" cy="7060000"/>
+          <a:xfrm>
+            <a:off x="9075000" y="9340000"/>
+            <a:ext cx="0" cy="2266000"/>
           </a:xfrm>
           <a:prstGeom prst="line">
             <a:avLst/>
@@ -6637,15 +6658,15 @@
         <p:nvCxnSpPr>
           <p:cNvPr id="87" name="Connector 86"/>
           <p:cNvCxnSpPr>
-            <a:stCxn id="42" idx="0"/>
-            <a:endCxn id="53" idx="2"/>
+            <a:stCxn id="42" idx="2"/>
+            <a:endCxn id="46" idx="0"/>
           </p:cNvCxnSpPr>
           <p:nvPr/>
         </p:nvCxnSpPr>
         <p:spPr>
-          <a:xfrm flipV="1">
-            <a:off x="9075000" y="2866000"/>
-            <a:ext cx="2060000" cy="5854000"/>
+          <a:xfrm>
+            <a:off x="9075000" y="9340000"/>
+            <a:ext cx="0" cy="3976000"/>
           </a:xfrm>
           <a:prstGeom prst="line">
             <a:avLst/>
@@ -6673,15 +6694,15 @@
         <p:nvCxnSpPr>
           <p:cNvPr id="88" name="Connector 87"/>
           <p:cNvCxnSpPr>
-            <a:stCxn id="51" idx="2"/>
-            <a:endCxn id="57" idx="0"/>
+            <a:stCxn id="44" idx="0"/>
+            <a:endCxn id="55" idx="2"/>
           </p:cNvCxnSpPr>
           <p:nvPr/>
         </p:nvCxnSpPr>
         <p:spPr>
-          <a:xfrm>
-            <a:off x="11135000" y="1660000"/>
-            <a:ext cx="0" cy="3166000"/>
+          <a:xfrm flipV="1">
+            <a:off x="9075000" y="4072000"/>
+            <a:ext cx="2060000" cy="7534000"/>
           </a:xfrm>
           <a:prstGeom prst="line">
             <a:avLst/>
@@ -6709,15 +6730,15 @@
         <p:nvCxnSpPr>
           <p:cNvPr id="89" name="Connector 88"/>
           <p:cNvCxnSpPr>
-            <a:stCxn id="53" idx="2"/>
-            <a:endCxn id="57" idx="0"/>
+            <a:stCxn id="42" idx="0"/>
+            <a:endCxn id="51" idx="2"/>
           </p:cNvCxnSpPr>
           <p:nvPr/>
         </p:nvCxnSpPr>
         <p:spPr>
-          <a:xfrm>
-            <a:off x="11135000" y="2866000"/>
-            <a:ext cx="0" cy="1960000"/>
+          <a:xfrm flipV="1">
+            <a:off x="9075000" y="1660000"/>
+            <a:ext cx="2060000" cy="7060000"/>
           </a:xfrm>
           <a:prstGeom prst="line">
             <a:avLst/>
@@ -6745,15 +6766,15 @@
         <p:nvCxnSpPr>
           <p:cNvPr id="90" name="Connector 89"/>
           <p:cNvCxnSpPr>
-            <a:stCxn id="55" idx="2"/>
-            <a:endCxn id="57" idx="0"/>
+            <a:stCxn id="42" idx="0"/>
+            <a:endCxn id="53" idx="2"/>
           </p:cNvCxnSpPr>
           <p:nvPr/>
         </p:nvCxnSpPr>
         <p:spPr>
-          <a:xfrm>
-            <a:off x="11135000" y="4072000"/>
-            <a:ext cx="0" cy="754000"/>
+          <a:xfrm flipV="1">
+            <a:off x="9075000" y="2866000"/>
+            <a:ext cx="2060000" cy="5854000"/>
           </a:xfrm>
           <a:prstGeom prst="line">
             <a:avLst/>
@@ -6781,15 +6802,15 @@
         <p:nvCxnSpPr>
           <p:cNvPr id="91" name="Connector 90"/>
           <p:cNvCxnSpPr>
-            <a:stCxn id="60" idx="3"/>
-            <a:endCxn id="4" idx="1"/>
+            <a:stCxn id="51" idx="2"/>
+            <a:endCxn id="57" idx="0"/>
           </p:cNvCxnSpPr>
           <p:nvPr/>
         </p:nvCxnSpPr>
         <p:spPr>
           <a:xfrm>
-            <a:off x="1700000" y="1290000"/>
-            <a:ext cx="240000" cy="60000"/>
+            <a:off x="11135000" y="1660000"/>
+            <a:ext cx="0" cy="3166000"/>
           </a:xfrm>
           <a:prstGeom prst="line">
             <a:avLst/>
@@ -6817,17 +6838,17 @@
         <p:nvCxnSpPr>
           <p:cNvPr id="92" name="Connector 91"/>
           <p:cNvCxnSpPr>
-            <a:stCxn id="61" idx="3"/>
-            <a:endCxn id="14" idx="1"/>
+            <a:stCxn id="53" idx="2"/>
+            <a:endCxn id="57" idx="0"/>
           </p:cNvCxnSpPr>
           <p:nvPr/>
         </p:nvCxnSpPr>
         <p:spPr>
           <a:xfrm>
-            <a:off x="1700000" y="2266000"/>
-            <a:ext cx="2300000" cy="1298000"/>
-          </a:xfrm>
-          <a:prstGeom prst="bentConnector3">
+            <a:off x="11135000" y="2866000"/>
+            <a:ext cx="0" cy="1960000"/>
+          </a:xfrm>
+          <a:prstGeom prst="line">
             <a:avLst/>
           </a:prstGeom>
           <a:ln>
@@ -6853,17 +6874,17 @@
         <p:nvCxnSpPr>
           <p:cNvPr id="93" name="Connector 92"/>
           <p:cNvCxnSpPr>
-            <a:stCxn id="62" idx="3"/>
-            <a:endCxn id="14" idx="1"/>
+            <a:stCxn id="55" idx="2"/>
+            <a:endCxn id="57" idx="0"/>
           </p:cNvCxnSpPr>
           <p:nvPr/>
         </p:nvCxnSpPr>
         <p:spPr>
           <a:xfrm>
-            <a:off x="1700000" y="3242000"/>
-            <a:ext cx="2300000" cy="322000"/>
-          </a:xfrm>
-          <a:prstGeom prst="bentConnector3">
+            <a:off x="11135000" y="4072000"/>
+            <a:ext cx="0" cy="754000"/>
+          </a:xfrm>
+          <a:prstGeom prst="line">
             <a:avLst/>
           </a:prstGeom>
           <a:ln>
@@ -6889,17 +6910,17 @@
         <p:nvCxnSpPr>
           <p:cNvPr id="94" name="Connector 93"/>
           <p:cNvCxnSpPr>
-            <a:stCxn id="63" idx="3"/>
-            <a:endCxn id="12" idx="1"/>
+            <a:stCxn id="57" idx="2"/>
+            <a:endCxn id="59" idx="0"/>
           </p:cNvCxnSpPr>
           <p:nvPr/>
         </p:nvCxnSpPr>
         <p:spPr>
-          <a:xfrm flipV="1">
-            <a:off x="1700000" y="1350000"/>
-            <a:ext cx="2300000" cy="2868000"/>
-          </a:xfrm>
-          <a:prstGeom prst="bentConnector3">
+          <a:xfrm>
+            <a:off x="11135000" y="5446000"/>
+            <a:ext cx="0" cy="922000"/>
+          </a:xfrm>
+          <a:prstGeom prst="line">
             <a:avLst/>
           </a:prstGeom>
           <a:ln>
@@ -6925,17 +6946,17 @@
         <p:nvCxnSpPr>
           <p:cNvPr id="95" name="Connector 94"/>
           <p:cNvCxnSpPr>
-            <a:stCxn id="64" idx="3"/>
-            <a:endCxn id="12" idx="1"/>
+            <a:stCxn id="63" idx="3"/>
+            <a:endCxn id="4" idx="1"/>
           </p:cNvCxnSpPr>
           <p:nvPr/>
         </p:nvCxnSpPr>
         <p:spPr>
-          <a:xfrm flipV="1">
-            <a:off x="1700000" y="1350000"/>
-            <a:ext cx="2300000" cy="3844000"/>
-          </a:xfrm>
-          <a:prstGeom prst="bentConnector3">
+          <a:xfrm>
+            <a:off x="1700000" y="1290000"/>
+            <a:ext cx="240000" cy="60000"/>
+          </a:xfrm>
+          <a:prstGeom prst="line">
             <a:avLst/>
           </a:prstGeom>
           <a:ln>
@@ -6961,15 +6982,15 @@
         <p:nvCxnSpPr>
           <p:cNvPr id="96" name="Connector 95"/>
           <p:cNvCxnSpPr>
-            <a:stCxn id="65" idx="3"/>
-            <a:endCxn id="28" idx="1"/>
+            <a:stCxn id="64" idx="3"/>
+            <a:endCxn id="14" idx="1"/>
           </p:cNvCxnSpPr>
           <p:nvPr/>
         </p:nvCxnSpPr>
         <p:spPr>
-          <a:xfrm flipV="1">
-            <a:off x="1700000" y="1350000"/>
-            <a:ext cx="4360000" cy="4820000"/>
+          <a:xfrm>
+            <a:off x="1700000" y="2266000"/>
+            <a:ext cx="2300000" cy="1298000"/>
           </a:xfrm>
           <a:prstGeom prst="bentConnector3">
             <a:avLst/>
@@ -6997,17 +7018,17 @@
         <p:nvCxnSpPr>
           <p:cNvPr id="97" name="Connector 96"/>
           <p:cNvCxnSpPr>
-            <a:stCxn id="38" idx="2"/>
-            <a:endCxn id="48" idx="0"/>
+            <a:stCxn id="65" idx="3"/>
+            <a:endCxn id="14" idx="1"/>
           </p:cNvCxnSpPr>
           <p:nvPr/>
         </p:nvCxnSpPr>
         <p:spPr>
           <a:xfrm>
-            <a:off x="9075000" y="4912000"/>
-            <a:ext cx="0" cy="10618000"/>
-          </a:xfrm>
-          <a:prstGeom prst="line">
+            <a:off x="1700000" y="3242000"/>
+            <a:ext cx="2300000" cy="322000"/>
+          </a:xfrm>
+          <a:prstGeom prst="bentConnector3">
             <a:avLst/>
           </a:prstGeom>
           <a:ln>
@@ -7033,15 +7054,195 @@
         <p:nvCxnSpPr>
           <p:cNvPr id="98" name="Connector 97"/>
           <p:cNvCxnSpPr>
+            <a:stCxn id="66" idx="3"/>
+            <a:endCxn id="12" idx="1"/>
+          </p:cNvCxnSpPr>
+          <p:nvPr/>
+        </p:nvCxnSpPr>
+        <p:spPr>
+          <a:xfrm flipV="1">
+            <a:off x="1700000" y="1350000"/>
+            <a:ext cx="2300000" cy="2868000"/>
+          </a:xfrm>
+          <a:prstGeom prst="bentConnector3">
+            <a:avLst/>
+          </a:prstGeom>
+          <a:ln>
+            <a:tailEnd type="triangle"/>
+          </a:ln>
+        </p:spPr>
+        <p:style>
+          <a:lnRef idx="2">
+            <a:schemeClr val="accent1"/>
+          </a:lnRef>
+          <a:fillRef idx="0">
+            <a:schemeClr val="accent1"/>
+          </a:fillRef>
+          <a:effectRef idx="1">
+            <a:schemeClr val="accent1"/>
+          </a:effectRef>
+          <a:fontRef idx="minor">
+            <a:schemeClr val="tx1"/>
+          </a:fontRef>
+        </p:style>
+      </p:cxnSp>
+      <p:cxnSp>
+        <p:nvCxnSpPr>
+          <p:cNvPr id="99" name="Connector 98"/>
+          <p:cNvCxnSpPr>
+            <a:stCxn id="67" idx="3"/>
+            <a:endCxn id="12" idx="1"/>
+          </p:cNvCxnSpPr>
+          <p:nvPr/>
+        </p:nvCxnSpPr>
+        <p:spPr>
+          <a:xfrm flipV="1">
+            <a:off x="1700000" y="1350000"/>
+            <a:ext cx="2300000" cy="3844000"/>
+          </a:xfrm>
+          <a:prstGeom prst="bentConnector3">
+            <a:avLst/>
+          </a:prstGeom>
+          <a:ln>
+            <a:tailEnd type="triangle"/>
+          </a:ln>
+        </p:spPr>
+        <p:style>
+          <a:lnRef idx="2">
+            <a:schemeClr val="accent1"/>
+          </a:lnRef>
+          <a:fillRef idx="0">
+            <a:schemeClr val="accent1"/>
+          </a:fillRef>
+          <a:effectRef idx="1">
+            <a:schemeClr val="accent1"/>
+          </a:effectRef>
+          <a:fontRef idx="minor">
+            <a:schemeClr val="tx1"/>
+          </a:fontRef>
+        </p:style>
+      </p:cxnSp>
+      <p:cxnSp>
+        <p:nvCxnSpPr>
+          <p:cNvPr id="100" name="Connector 99"/>
+          <p:cNvCxnSpPr>
+            <a:stCxn id="68" idx="3"/>
+            <a:endCxn id="28" idx="1"/>
+          </p:cNvCxnSpPr>
+          <p:nvPr/>
+        </p:nvCxnSpPr>
+        <p:spPr>
+          <a:xfrm flipV="1">
+            <a:off x="1700000" y="1350000"/>
+            <a:ext cx="4360000" cy="4820000"/>
+          </a:xfrm>
+          <a:prstGeom prst="bentConnector3">
+            <a:avLst/>
+          </a:prstGeom>
+          <a:ln>
+            <a:tailEnd type="triangle"/>
+          </a:ln>
+        </p:spPr>
+        <p:style>
+          <a:lnRef idx="2">
+            <a:schemeClr val="accent1"/>
+          </a:lnRef>
+          <a:fillRef idx="0">
+            <a:schemeClr val="accent1"/>
+          </a:fillRef>
+          <a:effectRef idx="1">
+            <a:schemeClr val="accent1"/>
+          </a:effectRef>
+          <a:fontRef idx="minor">
+            <a:schemeClr val="tx1"/>
+          </a:fontRef>
+        </p:style>
+      </p:cxnSp>
+      <p:cxnSp>
+        <p:nvCxnSpPr>
+          <p:cNvPr id="101" name="Connector 100"/>
+          <p:cNvCxnSpPr>
+            <a:stCxn id="38" idx="2"/>
+            <a:endCxn id="48" idx="0"/>
+          </p:cNvCxnSpPr>
+          <p:nvPr/>
+        </p:nvCxnSpPr>
+        <p:spPr>
+          <a:xfrm>
+            <a:off x="9075000" y="4912000"/>
+            <a:ext cx="0" cy="10618000"/>
+          </a:xfrm>
+          <a:prstGeom prst="line">
+            <a:avLst/>
+          </a:prstGeom>
+          <a:ln>
+            <a:tailEnd type="triangle"/>
+          </a:ln>
+        </p:spPr>
+        <p:style>
+          <a:lnRef idx="2">
+            <a:schemeClr val="accent1"/>
+          </a:lnRef>
+          <a:fillRef idx="0">
+            <a:schemeClr val="accent1"/>
+          </a:fillRef>
+          <a:effectRef idx="1">
+            <a:schemeClr val="accent1"/>
+          </a:effectRef>
+          <a:fontRef idx="minor">
+            <a:schemeClr val="tx1"/>
+          </a:fontRef>
+        </p:style>
+      </p:cxnSp>
+      <p:cxnSp>
+        <p:nvCxnSpPr>
+          <p:cNvPr id="102" name="Connector 101"/>
+          <p:cNvCxnSpPr>
             <a:stCxn id="57" idx="2"/>
-            <a:endCxn id="59" idx="0"/>
+            <a:endCxn id="61" idx="0"/>
           </p:cNvCxnSpPr>
           <p:nvPr/>
         </p:nvCxnSpPr>
         <p:spPr>
           <a:xfrm>
             <a:off x="11135000" y="5446000"/>
-            <a:ext cx="0" cy="922000"/>
+            <a:ext cx="0" cy="2800000"/>
+          </a:xfrm>
+          <a:prstGeom prst="line">
+            <a:avLst/>
+          </a:prstGeom>
+          <a:ln>
+            <a:tailEnd type="triangle"/>
+          </a:ln>
+        </p:spPr>
+        <p:style>
+          <a:lnRef idx="2">
+            <a:schemeClr val="accent1"/>
+          </a:lnRef>
+          <a:fillRef idx="0">
+            <a:schemeClr val="accent1"/>
+          </a:fillRef>
+          <a:effectRef idx="1">
+            <a:schemeClr val="accent1"/>
+          </a:effectRef>
+          <a:fontRef idx="minor">
+            <a:schemeClr val="tx1"/>
+          </a:fontRef>
+        </p:style>
+      </p:cxnSp>
+      <p:cxnSp>
+        <p:nvCxnSpPr>
+          <p:cNvPr id="103" name="Connector 102"/>
+          <p:cNvCxnSpPr>
+            <a:stCxn id="59" idx="2"/>
+            <a:endCxn id="62" idx="0"/>
+          </p:cNvCxnSpPr>
+          <p:nvPr/>
+        </p:nvCxnSpPr>
+        <p:spPr>
+          <a:xfrm>
+            <a:off x="11135000" y="6988000"/>
+            <a:ext cx="0" cy="2028000"/>
           </a:xfrm>
           <a:prstGeom prst="line">
             <a:avLst/>

--- a/In.Plan MEIO process 06-09-2026.pptx
+++ b/In.Plan MEIO process 06-09-2026.pptx
@@ -5517,7 +5517,7 @@
             <a:pPr algn="ctr"/>
             <a:r>
               <a:rPr sz="1000"/>
-              <a:t>Оценка эффектов</a:t>
+              <a:t>Отчёт по OTIF</a:t>
             </a:r>
           </a:p>
         </p:txBody>
@@ -5531,7 +5531,7 @@
         <p:spPr>
           <a:xfrm>
             <a:off x="10180000" y="5546000"/>
-            <a:ext cx="1910000" cy="672000"/>
+            <a:ext cx="1910000" cy="1176000"/>
           </a:xfrm>
           <a:prstGeom prst="rect">
             <a:avLst/>
@@ -5546,25 +5546,25 @@
           <a:p>
             <a:r>
               <a:rPr sz="900" b="0"/>
-              <a:t>Ошибка прогноза по горизонту</a:t>
-            </a:r>
-          </a:p>
-          <a:p>
-            <a:r>
-              <a:rPr sz="900" b="0"/>
-              <a:t>Отчёт по сегментации</a:t>
-            </a:r>
-          </a:p>
-          <a:p>
-            <a:r>
-              <a:rPr sz="900" b="0"/>
-              <a:t>Отчёт по страховым запасам</a:t>
-            </a:r>
-          </a:p>
-          <a:p>
-            <a:r>
-              <a:rPr sz="900" b="0"/>
-              <a:t>Сравнение сценариев по эффектам</a:t>
+              <a:t>Заказы клиентов: даты и количества</a:t>
+            </a:r>
+          </a:p>
+          <a:p>
+            <a:r>
+              <a:rPr sz="900" b="0"/>
+              <a:t>Фактические отгрузки: даты и количества</a:t>
+            </a:r>
+          </a:p>
+          <a:p>
+            <a:r>
+              <a:rPr sz="900" b="0"/>
+              <a:t>Целевой OTIF по каналам и сетям</a:t>
+            </a:r>
+          </a:p>
+          <a:p>
+            <a:r>
+              <a:rPr sz="900" b="0"/>
+              <a:t>Опубликованные нормативы прошлого цикла</a:t>
             </a:r>
           </a:p>
         </p:txBody>
@@ -5577,7 +5577,7 @@
         </p:nvSpPr>
         <p:spPr>
           <a:xfrm>
-            <a:off x="10180000" y="6368000"/>
+            <a:off x="10180000" y="6872000"/>
             <a:ext cx="1910000" cy="620000"/>
           </a:xfrm>
           <a:prstGeom prst="roundRect">
@@ -5608,7 +5608,7 @@
             <a:pPr algn="ctr"/>
             <a:r>
               <a:rPr sz="1000"/>
-              <a:t>Передача нормативов по запасам в SNP</a:t>
+              <a:t>Оценка эффектов</a:t>
             </a:r>
           </a:p>
         </p:txBody>
@@ -5621,8 +5621,8 @@
         </p:nvSpPr>
         <p:spPr>
           <a:xfrm>
-            <a:off x="10180000" y="7088000"/>
-            <a:ext cx="1910000" cy="1008000"/>
+            <a:off x="10180000" y="7592000"/>
+            <a:ext cx="1910000" cy="672000"/>
           </a:xfrm>
           <a:prstGeom prst="rect">
             <a:avLst/>
@@ -5637,39 +5637,45 @@
           <a:p>
             <a:r>
               <a:rPr sz="900" b="0"/>
-              <a:t>Утверждённые уровни запасов по эшелонам</a:t>
-            </a:r>
-          </a:p>
-          <a:p>
-            <a:r>
-              <a:rPr sz="900" b="0"/>
-              <a:t>Точка заказа и рекомендованный уровень сервиса</a:t>
-            </a:r>
-          </a:p>
-          <a:p>
-            <a:r>
-              <a:rPr sz="900" b="0"/>
-              <a:t>Горизонт и дата вступления в силу</a:t>
-            </a:r>
-          </a:p>
-        </p:txBody>
-      </p:sp>
-      <p:sp>
-        <p:nvSpPr>
-          <p:cNvPr id="61" name="Rectangle 60"/>
+              <a:t>Ошибка прогноза по горизонту</a:t>
+            </a:r>
+          </a:p>
+          <a:p>
+            <a:r>
+              <a:rPr sz="900" b="0"/>
+              <a:t>Отчёт по сегментации</a:t>
+            </a:r>
+          </a:p>
+          <a:p>
+            <a:r>
+              <a:rPr sz="900" b="0"/>
+              <a:t>Отчёт по страховым запасам</a:t>
+            </a:r>
+          </a:p>
+          <a:p>
+            <a:r>
+              <a:rPr sz="900" b="0"/>
+              <a:t>Сравнение сценариев по эффектам</a:t>
+            </a:r>
+          </a:p>
+        </p:txBody>
+      </p:sp>
+      <p:sp>
+        <p:nvSpPr>
+          <p:cNvPr id="61" name="Rounded Rectangle 60"/>
           <p:cNvSpPr/>
           <p:nvPr/>
         </p:nvSpPr>
         <p:spPr>
           <a:xfrm>
-            <a:off x="10180000" y="8246000"/>
+            <a:off x="10180000" y="8414000"/>
             <a:ext cx="1910000" cy="620000"/>
           </a:xfrm>
-          <a:prstGeom prst="rect">
+          <a:prstGeom prst="roundRect">
             <a:avLst/>
           </a:prstGeom>
           <a:solidFill>
-            <a:schemeClr val="accent2"/>
+            <a:schemeClr val="accent1"/>
           </a:solidFill>
         </p:spPr>
         <p:style>
@@ -5692,21 +5698,62 @@
           <a:p>
             <a:pPr algn="ctr"/>
             <a:r>
-              <a:rPr sz="900"/>
-              <a:t>Оценка эффектов и рекомендации</a:t>
-            </a:r>
-          </a:p>
-        </p:txBody>
-      </p:sp>
-      <p:sp>
-        <p:nvSpPr>
-          <p:cNvPr id="62" name="Rectangle 61"/>
+              <a:rPr sz="1000"/>
+              <a:t>Передача нормативов по запасам в SNP</a:t>
+            </a:r>
+          </a:p>
+        </p:txBody>
+      </p:sp>
+      <p:sp>
+        <p:nvSpPr>
+          <p:cNvPr id="62" name="TextBox 61"/>
+          <p:cNvSpPr txBox="1"/>
+          <p:nvPr/>
+        </p:nvSpPr>
+        <p:spPr>
+          <a:xfrm>
+            <a:off x="10180000" y="9134000"/>
+            <a:ext cx="1910000" cy="1008000"/>
+          </a:xfrm>
+          <a:prstGeom prst="rect">
+            <a:avLst/>
+          </a:prstGeom>
+          <a:noFill/>
+        </p:spPr>
+        <p:txBody>
+          <a:bodyPr wrap="square">
+            <a:spAutoFit/>
+          </a:bodyPr>
+          <a:lstStyle/>
+          <a:p>
+            <a:r>
+              <a:rPr sz="900" b="0"/>
+              <a:t>Утверждённые уровни запасов по эшелонам</a:t>
+            </a:r>
+          </a:p>
+          <a:p>
+            <a:r>
+              <a:rPr sz="900" b="0"/>
+              <a:t>Точка заказа и рекомендованный уровень сервиса</a:t>
+            </a:r>
+          </a:p>
+          <a:p>
+            <a:r>
+              <a:rPr sz="900" b="0"/>
+              <a:t>Горизонт и дата вступления в силу</a:t>
+            </a:r>
+          </a:p>
+        </p:txBody>
+      </p:sp>
+      <p:sp>
+        <p:nvSpPr>
+          <p:cNvPr id="63" name="Rectangle 62"/>
           <p:cNvSpPr/>
           <p:nvPr/>
         </p:nvSpPr>
         <p:spPr>
           <a:xfrm>
-            <a:off x="10180000" y="9016000"/>
+            <a:off x="10180000" y="10292000"/>
             <a:ext cx="1910000" cy="620000"/>
           </a:xfrm>
           <a:prstGeom prst="rect">
@@ -5737,21 +5784,21 @@
             <a:pPr algn="ctr"/>
             <a:r>
               <a:rPr sz="900"/>
-              <a:t>Нормативы запасов в SNP</a:t>
-            </a:r>
-          </a:p>
-        </p:txBody>
-      </p:sp>
-      <p:sp>
-        <p:nvSpPr>
-          <p:cNvPr id="63" name="Rectangle 62"/>
+              <a:t>Оценка эффектов и рекомендации</a:t>
+            </a:r>
+          </a:p>
+        </p:txBody>
+      </p:sp>
+      <p:sp>
+        <p:nvSpPr>
+          <p:cNvPr id="64" name="Rectangle 63"/>
           <p:cNvSpPr/>
           <p:nvPr/>
         </p:nvSpPr>
         <p:spPr>
           <a:xfrm>
-            <a:off x="100000" y="980000"/>
-            <a:ext cx="1600000" cy="620000"/>
+            <a:off x="10180000" y="11062000"/>
+            <a:ext cx="1910000" cy="620000"/>
           </a:xfrm>
           <a:prstGeom prst="rect">
             <a:avLst/>
@@ -5781,20 +5828,20 @@
             <a:pPr algn="ctr"/>
             <a:r>
               <a:rPr sz="900"/>
-              <a:t>Структура текущих запасов и фактические отгрузки из ERP</a:t>
-            </a:r>
-          </a:p>
-        </p:txBody>
-      </p:sp>
-      <p:sp>
-        <p:nvSpPr>
-          <p:cNvPr id="64" name="Rectangle 63"/>
+              <a:t>Нормативы запасов в SNP</a:t>
+            </a:r>
+          </a:p>
+        </p:txBody>
+      </p:sp>
+      <p:sp>
+        <p:nvSpPr>
+          <p:cNvPr id="65" name="Rectangle 64"/>
           <p:cNvSpPr/>
           <p:nvPr/>
         </p:nvSpPr>
         <p:spPr>
           <a:xfrm>
-            <a:off x="100000" y="1956000"/>
+            <a:off x="100000" y="980000"/>
             <a:ext cx="1600000" cy="620000"/>
           </a:xfrm>
           <a:prstGeom prst="rect">
@@ -5825,20 +5872,20 @@
             <a:pPr algn="ctr"/>
             <a:r>
               <a:rPr sz="900"/>
-              <a:t>Спрос и волатильность из DP</a:t>
-            </a:r>
-          </a:p>
-        </p:txBody>
-      </p:sp>
-      <p:sp>
-        <p:nvSpPr>
-          <p:cNvPr id="65" name="Rectangle 64"/>
+              <a:t>Структура текущих запасов и фактические отгрузки из ERP</a:t>
+            </a:r>
+          </a:p>
+        </p:txBody>
+      </p:sp>
+      <p:sp>
+        <p:nvSpPr>
+          <p:cNvPr id="66" name="Rectangle 65"/>
           <p:cNvSpPr/>
           <p:nvPr/>
         </p:nvSpPr>
         <p:spPr>
           <a:xfrm>
-            <a:off x="100000" y="2932000"/>
+            <a:off x="100000" y="1956000"/>
             <a:ext cx="1600000" cy="620000"/>
           </a:xfrm>
           <a:prstGeom prst="rect">
@@ -5869,20 +5916,20 @@
             <a:pPr algn="ctr"/>
             <a:r>
               <a:rPr sz="900"/>
-              <a:t>Ошибка прогноза по горизонту из DP</a:t>
-            </a:r>
-          </a:p>
-        </p:txBody>
-      </p:sp>
-      <p:sp>
-        <p:nvSpPr>
-          <p:cNvPr id="66" name="Rectangle 65"/>
+              <a:t>Спрос и волатильность из DP</a:t>
+            </a:r>
+          </a:p>
+        </p:txBody>
+      </p:sp>
+      <p:sp>
+        <p:nvSpPr>
+          <p:cNvPr id="67" name="Rectangle 66"/>
           <p:cNvSpPr/>
           <p:nvPr/>
         </p:nvSpPr>
         <p:spPr>
           <a:xfrm>
-            <a:off x="100000" y="3908000"/>
+            <a:off x="100000" y="2932000"/>
             <a:ext cx="1600000" cy="620000"/>
           </a:xfrm>
           <a:prstGeom prst="rect">
@@ -5913,20 +5960,20 @@
             <a:pPr algn="ctr"/>
             <a:r>
               <a:rPr sz="900"/>
-              <a:t>Параметры цепочки из ERP</a:t>
-            </a:r>
-          </a:p>
-        </p:txBody>
-      </p:sp>
-      <p:sp>
-        <p:nvSpPr>
-          <p:cNvPr id="67" name="Rectangle 66"/>
+              <a:t>Ошибка прогноза по горизонту из DP</a:t>
+            </a:r>
+          </a:p>
+        </p:txBody>
+      </p:sp>
+      <p:sp>
+        <p:nvSpPr>
+          <p:cNvPr id="68" name="Rectangle 67"/>
           <p:cNvSpPr/>
           <p:nvPr/>
         </p:nvSpPr>
         <p:spPr>
           <a:xfrm>
-            <a:off x="100000" y="4884000"/>
+            <a:off x="100000" y="3908000"/>
             <a:ext cx="1600000" cy="620000"/>
           </a:xfrm>
           <a:prstGeom prst="rect">
@@ -5957,20 +6004,20 @@
             <a:pPr algn="ctr"/>
             <a:r>
               <a:rPr sz="900"/>
-              <a:t>Сроки годности и требования сетей к остаточному сроку из ERP</a:t>
-            </a:r>
-          </a:p>
-        </p:txBody>
-      </p:sp>
-      <p:sp>
-        <p:nvSpPr>
-          <p:cNvPr id="68" name="Rectangle 67"/>
+              <a:t>Параметры цепочки из ERP</a:t>
+            </a:r>
+          </a:p>
+        </p:txBody>
+      </p:sp>
+      <p:sp>
+        <p:nvSpPr>
+          <p:cNvPr id="69" name="Rectangle 68"/>
           <p:cNvSpPr/>
           <p:nvPr/>
         </p:nvSpPr>
         <p:spPr>
           <a:xfrm>
-            <a:off x="100000" y="5860000"/>
+            <a:off x="100000" y="4884000"/>
             <a:ext cx="1600000" cy="620000"/>
           </a:xfrm>
           <a:prstGeom prst="rect">
@@ -6001,6 +6048,50 @@
             <a:pPr algn="ctr"/>
             <a:r>
               <a:rPr sz="900"/>
+              <a:t>Сроки годности и требования сетей к остаточному сроку из ERP</a:t>
+            </a:r>
+          </a:p>
+        </p:txBody>
+      </p:sp>
+      <p:sp>
+        <p:nvSpPr>
+          <p:cNvPr id="70" name="Rectangle 69"/>
+          <p:cNvSpPr/>
+          <p:nvPr/>
+        </p:nvSpPr>
+        <p:spPr>
+          <a:xfrm>
+            <a:off x="100000" y="5860000"/>
+            <a:ext cx="1600000" cy="620000"/>
+          </a:xfrm>
+          <a:prstGeom prst="rect">
+            <a:avLst/>
+          </a:prstGeom>
+          <a:solidFill>
+            <a:schemeClr val="accent2"/>
+          </a:solidFill>
+        </p:spPr>
+        <p:style>
+          <a:lnRef idx="1">
+            <a:schemeClr val="accent1"/>
+          </a:lnRef>
+          <a:fillRef idx="3">
+            <a:schemeClr val="accent1"/>
+          </a:fillRef>
+          <a:effectRef idx="2">
+            <a:schemeClr val="accent1"/>
+          </a:effectRef>
+          <a:fontRef idx="minor">
+            <a:schemeClr val="lt1"/>
+          </a:fontRef>
+        </p:style>
+        <p:txBody>
+          <a:bodyPr rtlCol="0" anchor="ctr" wrap="square"/>
+          <a:lstStyle/>
+          <a:p>
+            <a:pPr algn="ctr"/>
+            <a:r>
+              <a:rPr sz="900"/>
               <a:t>Мастер-данные номенклатуры из ERP</a:t>
             </a:r>
           </a:p>
@@ -6008,7 +6099,7 @@
       </p:sp>
       <p:cxnSp>
         <p:nvCxnSpPr>
-          <p:cNvPr id="69" name="Connector 68"/>
+          <p:cNvPr id="71" name="Connector 70"/>
           <p:cNvCxnSpPr>
             <a:stCxn id="4" idx="2"/>
             <a:endCxn id="6" idx="0"/>
@@ -6019,78 +6110,6 @@
           <a:xfrm>
             <a:off x="2895000" y="1660000"/>
             <a:ext cx="0" cy="2770000"/>
-          </a:xfrm>
-          <a:prstGeom prst="line">
-            <a:avLst/>
-          </a:prstGeom>
-          <a:ln>
-            <a:tailEnd type="triangle"/>
-          </a:ln>
-        </p:spPr>
-        <p:style>
-          <a:lnRef idx="2">
-            <a:schemeClr val="accent1"/>
-          </a:lnRef>
-          <a:fillRef idx="0">
-            <a:schemeClr val="accent1"/>
-          </a:fillRef>
-          <a:effectRef idx="1">
-            <a:schemeClr val="accent1"/>
-          </a:effectRef>
-          <a:fontRef idx="minor">
-            <a:schemeClr val="tx1"/>
-          </a:fontRef>
-        </p:style>
-      </p:cxnSp>
-      <p:cxnSp>
-        <p:nvCxnSpPr>
-          <p:cNvPr id="70" name="Connector 69"/>
-          <p:cNvCxnSpPr>
-            <a:stCxn id="6" idx="2"/>
-            <a:endCxn id="8" idx="0"/>
-          </p:cNvCxnSpPr>
-          <p:nvPr/>
-        </p:nvCxnSpPr>
-        <p:spPr>
-          <a:xfrm>
-            <a:off x="2895000" y="5050000"/>
-            <a:ext cx="0" cy="1258000"/>
-          </a:xfrm>
-          <a:prstGeom prst="line">
-            <a:avLst/>
-          </a:prstGeom>
-          <a:ln>
-            <a:tailEnd type="triangle"/>
-          </a:ln>
-        </p:spPr>
-        <p:style>
-          <a:lnRef idx="2">
-            <a:schemeClr val="accent1"/>
-          </a:lnRef>
-          <a:fillRef idx="0">
-            <a:schemeClr val="accent1"/>
-          </a:fillRef>
-          <a:effectRef idx="1">
-            <a:schemeClr val="accent1"/>
-          </a:effectRef>
-          <a:fontRef idx="minor">
-            <a:schemeClr val="tx1"/>
-          </a:fontRef>
-        </p:style>
-      </p:cxnSp>
-      <p:cxnSp>
-        <p:nvCxnSpPr>
-          <p:cNvPr id="71" name="Connector 70"/>
-          <p:cNvCxnSpPr>
-            <a:stCxn id="8" idx="0"/>
-            <a:endCxn id="12" idx="2"/>
-          </p:cNvCxnSpPr>
-          <p:nvPr/>
-        </p:nvCxnSpPr>
-        <p:spPr>
-          <a:xfrm flipV="1">
-            <a:off x="2895000" y="1660000"/>
-            <a:ext cx="2060000" cy="4648000"/>
           </a:xfrm>
           <a:prstGeom prst="line">
             <a:avLst/>
@@ -6118,15 +6137,15 @@
         <p:nvCxnSpPr>
           <p:cNvPr id="72" name="Connector 71"/>
           <p:cNvCxnSpPr>
-            <a:stCxn id="12" idx="2"/>
-            <a:endCxn id="14" idx="0"/>
+            <a:stCxn id="6" idx="2"/>
+            <a:endCxn id="8" idx="0"/>
           </p:cNvCxnSpPr>
           <p:nvPr/>
         </p:nvCxnSpPr>
         <p:spPr>
           <a:xfrm>
-            <a:off x="4955000" y="1660000"/>
-            <a:ext cx="0" cy="1594000"/>
+            <a:off x="2895000" y="5050000"/>
+            <a:ext cx="0" cy="1258000"/>
           </a:xfrm>
           <a:prstGeom prst="line">
             <a:avLst/>
@@ -6154,15 +6173,15 @@
         <p:nvCxnSpPr>
           <p:cNvPr id="73" name="Connector 72"/>
           <p:cNvCxnSpPr>
-            <a:stCxn id="12" idx="2"/>
-            <a:endCxn id="18" idx="0"/>
+            <a:stCxn id="8" idx="0"/>
+            <a:endCxn id="12" idx="2"/>
           </p:cNvCxnSpPr>
           <p:nvPr/>
         </p:nvCxnSpPr>
         <p:spPr>
-          <a:xfrm>
-            <a:off x="4955000" y="1660000"/>
-            <a:ext cx="0" cy="5182000"/>
+          <a:xfrm flipV="1">
+            <a:off x="2895000" y="1660000"/>
+            <a:ext cx="2060000" cy="4648000"/>
           </a:xfrm>
           <a:prstGeom prst="line">
             <a:avLst/>
@@ -6191,14 +6210,14 @@
           <p:cNvPr id="74" name="Connector 73"/>
           <p:cNvCxnSpPr>
             <a:stCxn id="12" idx="2"/>
-            <a:endCxn id="22" idx="0"/>
+            <a:endCxn id="14" idx="0"/>
           </p:cNvCxnSpPr>
           <p:nvPr/>
         </p:nvCxnSpPr>
         <p:spPr>
           <a:xfrm>
             <a:off x="4955000" y="1660000"/>
-            <a:ext cx="0" cy="8266000"/>
+            <a:ext cx="0" cy="1594000"/>
           </a:xfrm>
           <a:prstGeom prst="line">
             <a:avLst/>
@@ -6226,15 +6245,15 @@
         <p:nvCxnSpPr>
           <p:cNvPr id="75" name="Connector 74"/>
           <p:cNvCxnSpPr>
-            <a:stCxn id="14" idx="2"/>
-            <a:endCxn id="16" idx="0"/>
+            <a:stCxn id="12" idx="2"/>
+            <a:endCxn id="18" idx="0"/>
           </p:cNvCxnSpPr>
           <p:nvPr/>
         </p:nvCxnSpPr>
         <p:spPr>
           <a:xfrm>
-            <a:off x="4955000" y="3874000"/>
-            <a:ext cx="0" cy="1258000"/>
+            <a:off x="4955000" y="1660000"/>
+            <a:ext cx="0" cy="5182000"/>
           </a:xfrm>
           <a:prstGeom prst="line">
             <a:avLst/>
@@ -6262,15 +6281,15 @@
         <p:nvCxnSpPr>
           <p:cNvPr id="76" name="Connector 75"/>
           <p:cNvCxnSpPr>
-            <a:stCxn id="18" idx="2"/>
-            <a:endCxn id="20" idx="0"/>
+            <a:stCxn id="12" idx="2"/>
+            <a:endCxn id="22" idx="0"/>
           </p:cNvCxnSpPr>
           <p:nvPr/>
         </p:nvCxnSpPr>
         <p:spPr>
           <a:xfrm>
-            <a:off x="4955000" y="7462000"/>
-            <a:ext cx="0" cy="754000"/>
+            <a:off x="4955000" y="1660000"/>
+            <a:ext cx="0" cy="8266000"/>
           </a:xfrm>
           <a:prstGeom prst="line">
             <a:avLst/>
@@ -6298,15 +6317,15 @@
         <p:nvCxnSpPr>
           <p:cNvPr id="77" name="Connector 76"/>
           <p:cNvCxnSpPr>
-            <a:stCxn id="22" idx="2"/>
-            <a:endCxn id="24" idx="0"/>
+            <a:stCxn id="14" idx="2"/>
+            <a:endCxn id="16" idx="0"/>
           </p:cNvCxnSpPr>
           <p:nvPr/>
         </p:nvCxnSpPr>
         <p:spPr>
           <a:xfrm>
-            <a:off x="4955000" y="10546000"/>
-            <a:ext cx="0" cy="922000"/>
+            <a:off x="4955000" y="3874000"/>
+            <a:ext cx="0" cy="1258000"/>
           </a:xfrm>
           <a:prstGeom prst="line">
             <a:avLst/>
@@ -6334,15 +6353,15 @@
         <p:nvCxnSpPr>
           <p:cNvPr id="78" name="Connector 77"/>
           <p:cNvCxnSpPr>
-            <a:stCxn id="16" idx="0"/>
-            <a:endCxn id="28" idx="2"/>
+            <a:stCxn id="18" idx="2"/>
+            <a:endCxn id="20" idx="0"/>
           </p:cNvCxnSpPr>
           <p:nvPr/>
         </p:nvCxnSpPr>
         <p:spPr>
-          <a:xfrm flipV="1">
-            <a:off x="4955000" y="1660000"/>
-            <a:ext cx="2060000" cy="3472000"/>
+          <a:xfrm>
+            <a:off x="4955000" y="7462000"/>
+            <a:ext cx="0" cy="754000"/>
           </a:xfrm>
           <a:prstGeom prst="line">
             <a:avLst/>
@@ -6370,15 +6389,15 @@
         <p:nvCxnSpPr>
           <p:cNvPr id="79" name="Connector 78"/>
           <p:cNvCxnSpPr>
-            <a:stCxn id="28" idx="2"/>
-            <a:endCxn id="30" idx="0"/>
+            <a:stCxn id="22" idx="2"/>
+            <a:endCxn id="24" idx="0"/>
           </p:cNvCxnSpPr>
           <p:nvPr/>
         </p:nvCxnSpPr>
         <p:spPr>
           <a:xfrm>
-            <a:off x="7015000" y="1660000"/>
-            <a:ext cx="0" cy="754000"/>
+            <a:off x="4955000" y="10546000"/>
+            <a:ext cx="0" cy="922000"/>
           </a:xfrm>
           <a:prstGeom prst="line">
             <a:avLst/>
@@ -6406,15 +6425,15 @@
         <p:nvCxnSpPr>
           <p:cNvPr id="80" name="Connector 79"/>
           <p:cNvCxnSpPr>
-            <a:stCxn id="30" idx="3"/>
-            <a:endCxn id="34" idx="1"/>
+            <a:stCxn id="16" idx="0"/>
+            <a:endCxn id="28" idx="2"/>
           </p:cNvCxnSpPr>
           <p:nvPr/>
         </p:nvCxnSpPr>
         <p:spPr>
           <a:xfrm flipV="1">
-            <a:off x="7970000" y="1350000"/>
-            <a:ext cx="150000" cy="1374000"/>
+            <a:off x="4955000" y="1660000"/>
+            <a:ext cx="2060000" cy="3472000"/>
           </a:xfrm>
           <a:prstGeom prst="line">
             <a:avLst/>
@@ -6442,15 +6461,15 @@
         <p:nvCxnSpPr>
           <p:cNvPr id="81" name="Connector 80"/>
           <p:cNvCxnSpPr>
-            <a:stCxn id="34" idx="2"/>
-            <a:endCxn id="36" idx="0"/>
+            <a:stCxn id="28" idx="2"/>
+            <a:endCxn id="30" idx="0"/>
           </p:cNvCxnSpPr>
           <p:nvPr/>
         </p:nvCxnSpPr>
         <p:spPr>
           <a:xfrm>
-            <a:off x="9075000" y="1660000"/>
-            <a:ext cx="0" cy="922000"/>
+            <a:off x="7015000" y="1660000"/>
+            <a:ext cx="0" cy="754000"/>
           </a:xfrm>
           <a:prstGeom prst="line">
             <a:avLst/>
@@ -6478,15 +6497,15 @@
         <p:nvCxnSpPr>
           <p:cNvPr id="82" name="Connector 81"/>
           <p:cNvCxnSpPr>
-            <a:stCxn id="36" idx="2"/>
-            <a:endCxn id="38" idx="0"/>
+            <a:stCxn id="30" idx="3"/>
+            <a:endCxn id="34" idx="1"/>
           </p:cNvCxnSpPr>
           <p:nvPr/>
         </p:nvCxnSpPr>
         <p:spPr>
-          <a:xfrm>
-            <a:off x="9075000" y="3202000"/>
-            <a:ext cx="0" cy="1090000"/>
+          <a:xfrm flipV="1">
+            <a:off x="7970000" y="1350000"/>
+            <a:ext cx="150000" cy="1374000"/>
           </a:xfrm>
           <a:prstGeom prst="line">
             <a:avLst/>
@@ -6514,15 +6533,15 @@
         <p:nvCxnSpPr>
           <p:cNvPr id="83" name="Connector 82"/>
           <p:cNvCxnSpPr>
-            <a:stCxn id="36" idx="2"/>
-            <a:endCxn id="40" idx="0"/>
+            <a:stCxn id="34" idx="2"/>
+            <a:endCxn id="36" idx="0"/>
           </p:cNvCxnSpPr>
           <p:nvPr/>
         </p:nvCxnSpPr>
         <p:spPr>
           <a:xfrm>
-            <a:off x="9075000" y="3202000"/>
-            <a:ext cx="0" cy="3472000"/>
+            <a:off x="9075000" y="1660000"/>
+            <a:ext cx="0" cy="922000"/>
           </a:xfrm>
           <a:prstGeom prst="line">
             <a:avLst/>
@@ -6550,15 +6569,15 @@
         <p:nvCxnSpPr>
           <p:cNvPr id="84" name="Connector 83"/>
           <p:cNvCxnSpPr>
-            <a:stCxn id="38" idx="2"/>
-            <a:endCxn id="42" idx="0"/>
+            <a:stCxn id="36" idx="2"/>
+            <a:endCxn id="38" idx="0"/>
           </p:cNvCxnSpPr>
           <p:nvPr/>
         </p:nvCxnSpPr>
         <p:spPr>
           <a:xfrm>
-            <a:off x="9075000" y="4912000"/>
-            <a:ext cx="0" cy="3808000"/>
+            <a:off x="9075000" y="3202000"/>
+            <a:ext cx="0" cy="1090000"/>
           </a:xfrm>
           <a:prstGeom prst="line">
             <a:avLst/>
@@ -6586,15 +6605,15 @@
         <p:nvCxnSpPr>
           <p:cNvPr id="85" name="Connector 84"/>
           <p:cNvCxnSpPr>
-            <a:stCxn id="40" idx="2"/>
-            <a:endCxn id="44" idx="0"/>
+            <a:stCxn id="36" idx="2"/>
+            <a:endCxn id="40" idx="0"/>
           </p:cNvCxnSpPr>
           <p:nvPr/>
         </p:nvCxnSpPr>
         <p:spPr>
           <a:xfrm>
-            <a:off x="9075000" y="7294000"/>
-            <a:ext cx="0" cy="4312000"/>
+            <a:off x="9075000" y="3202000"/>
+            <a:ext cx="0" cy="3472000"/>
           </a:xfrm>
           <a:prstGeom prst="line">
             <a:avLst/>
@@ -6622,15 +6641,15 @@
         <p:nvCxnSpPr>
           <p:cNvPr id="86" name="Connector 85"/>
           <p:cNvCxnSpPr>
-            <a:stCxn id="42" idx="2"/>
-            <a:endCxn id="44" idx="0"/>
+            <a:stCxn id="38" idx="2"/>
+            <a:endCxn id="42" idx="0"/>
           </p:cNvCxnSpPr>
           <p:nvPr/>
         </p:nvCxnSpPr>
         <p:spPr>
           <a:xfrm>
-            <a:off x="9075000" y="9340000"/>
-            <a:ext cx="0" cy="2266000"/>
+            <a:off x="9075000" y="4912000"/>
+            <a:ext cx="0" cy="3808000"/>
           </a:xfrm>
           <a:prstGeom prst="line">
             <a:avLst/>
@@ -6658,15 +6677,15 @@
         <p:nvCxnSpPr>
           <p:cNvPr id="87" name="Connector 86"/>
           <p:cNvCxnSpPr>
-            <a:stCxn id="42" idx="2"/>
-            <a:endCxn id="46" idx="0"/>
+            <a:stCxn id="40" idx="2"/>
+            <a:endCxn id="44" idx="0"/>
           </p:cNvCxnSpPr>
           <p:nvPr/>
         </p:nvCxnSpPr>
         <p:spPr>
           <a:xfrm>
-            <a:off x="9075000" y="9340000"/>
-            <a:ext cx="0" cy="3976000"/>
+            <a:off x="9075000" y="7294000"/>
+            <a:ext cx="0" cy="4312000"/>
           </a:xfrm>
           <a:prstGeom prst="line">
             <a:avLst/>
@@ -6694,15 +6713,15 @@
         <p:nvCxnSpPr>
           <p:cNvPr id="88" name="Connector 87"/>
           <p:cNvCxnSpPr>
-            <a:stCxn id="44" idx="0"/>
-            <a:endCxn id="55" idx="2"/>
+            <a:stCxn id="42" idx="2"/>
+            <a:endCxn id="44" idx="0"/>
           </p:cNvCxnSpPr>
           <p:nvPr/>
         </p:nvCxnSpPr>
         <p:spPr>
-          <a:xfrm flipV="1">
-            <a:off x="9075000" y="4072000"/>
-            <a:ext cx="2060000" cy="7534000"/>
+          <a:xfrm>
+            <a:off x="9075000" y="9340000"/>
+            <a:ext cx="0" cy="2266000"/>
           </a:xfrm>
           <a:prstGeom prst="line">
             <a:avLst/>
@@ -6730,15 +6749,15 @@
         <p:nvCxnSpPr>
           <p:cNvPr id="89" name="Connector 88"/>
           <p:cNvCxnSpPr>
-            <a:stCxn id="42" idx="0"/>
-            <a:endCxn id="51" idx="2"/>
+            <a:stCxn id="42" idx="2"/>
+            <a:endCxn id="46" idx="0"/>
           </p:cNvCxnSpPr>
           <p:nvPr/>
         </p:nvCxnSpPr>
         <p:spPr>
-          <a:xfrm flipV="1">
-            <a:off x="9075000" y="1660000"/>
-            <a:ext cx="2060000" cy="7060000"/>
+          <a:xfrm>
+            <a:off x="9075000" y="9340000"/>
+            <a:ext cx="0" cy="3976000"/>
           </a:xfrm>
           <a:prstGeom prst="line">
             <a:avLst/>
@@ -6766,15 +6785,15 @@
         <p:nvCxnSpPr>
           <p:cNvPr id="90" name="Connector 89"/>
           <p:cNvCxnSpPr>
-            <a:stCxn id="42" idx="0"/>
-            <a:endCxn id="53" idx="2"/>
+            <a:stCxn id="44" idx="0"/>
+            <a:endCxn id="55" idx="2"/>
           </p:cNvCxnSpPr>
           <p:nvPr/>
         </p:nvCxnSpPr>
         <p:spPr>
           <a:xfrm flipV="1">
-            <a:off x="9075000" y="2866000"/>
-            <a:ext cx="2060000" cy="5854000"/>
+            <a:off x="9075000" y="4072000"/>
+            <a:ext cx="2060000" cy="7534000"/>
           </a:xfrm>
           <a:prstGeom prst="line">
             <a:avLst/>
@@ -6802,15 +6821,15 @@
         <p:nvCxnSpPr>
           <p:cNvPr id="91" name="Connector 90"/>
           <p:cNvCxnSpPr>
-            <a:stCxn id="51" idx="2"/>
-            <a:endCxn id="57" idx="0"/>
+            <a:stCxn id="42" idx="0"/>
+            <a:endCxn id="51" idx="2"/>
           </p:cNvCxnSpPr>
           <p:nvPr/>
         </p:nvCxnSpPr>
         <p:spPr>
-          <a:xfrm>
-            <a:off x="11135000" y="1660000"/>
-            <a:ext cx="0" cy="3166000"/>
+          <a:xfrm flipV="1">
+            <a:off x="9075000" y="1660000"/>
+            <a:ext cx="2060000" cy="7060000"/>
           </a:xfrm>
           <a:prstGeom prst="line">
             <a:avLst/>
@@ -6838,15 +6857,15 @@
         <p:nvCxnSpPr>
           <p:cNvPr id="92" name="Connector 91"/>
           <p:cNvCxnSpPr>
-            <a:stCxn id="53" idx="2"/>
-            <a:endCxn id="57" idx="0"/>
+            <a:stCxn id="42" idx="0"/>
+            <a:endCxn id="53" idx="2"/>
           </p:cNvCxnSpPr>
           <p:nvPr/>
         </p:nvCxnSpPr>
         <p:spPr>
-          <a:xfrm>
-            <a:off x="11135000" y="2866000"/>
-            <a:ext cx="0" cy="1960000"/>
+          <a:xfrm flipV="1">
+            <a:off x="9075000" y="2866000"/>
+            <a:ext cx="2060000" cy="5854000"/>
           </a:xfrm>
           <a:prstGeom prst="line">
             <a:avLst/>
@@ -6874,15 +6893,15 @@
         <p:nvCxnSpPr>
           <p:cNvPr id="93" name="Connector 92"/>
           <p:cNvCxnSpPr>
-            <a:stCxn id="55" idx="2"/>
-            <a:endCxn id="57" idx="0"/>
+            <a:stCxn id="51" idx="2"/>
+            <a:endCxn id="59" idx="0"/>
           </p:cNvCxnSpPr>
           <p:nvPr/>
         </p:nvCxnSpPr>
         <p:spPr>
           <a:xfrm>
-            <a:off x="11135000" y="4072000"/>
-            <a:ext cx="0" cy="754000"/>
+            <a:off x="11135000" y="1660000"/>
+            <a:ext cx="0" cy="5212000"/>
           </a:xfrm>
           <a:prstGeom prst="line">
             <a:avLst/>
@@ -6910,15 +6929,15 @@
         <p:nvCxnSpPr>
           <p:cNvPr id="94" name="Connector 93"/>
           <p:cNvCxnSpPr>
-            <a:stCxn id="57" idx="2"/>
+            <a:stCxn id="53" idx="2"/>
             <a:endCxn id="59" idx="0"/>
           </p:cNvCxnSpPr>
           <p:nvPr/>
         </p:nvCxnSpPr>
         <p:spPr>
           <a:xfrm>
-            <a:off x="11135000" y="5446000"/>
-            <a:ext cx="0" cy="922000"/>
+            <a:off x="11135000" y="2866000"/>
+            <a:ext cx="0" cy="4006000"/>
           </a:xfrm>
           <a:prstGeom prst="line">
             <a:avLst/>
@@ -6946,15 +6965,15 @@
         <p:nvCxnSpPr>
           <p:cNvPr id="95" name="Connector 94"/>
           <p:cNvCxnSpPr>
-            <a:stCxn id="63" idx="3"/>
-            <a:endCxn id="4" idx="1"/>
+            <a:stCxn id="55" idx="2"/>
+            <a:endCxn id="59" idx="0"/>
           </p:cNvCxnSpPr>
           <p:nvPr/>
         </p:nvCxnSpPr>
         <p:spPr>
           <a:xfrm>
-            <a:off x="1700000" y="1290000"/>
-            <a:ext cx="240000" cy="60000"/>
+            <a:off x="11135000" y="4072000"/>
+            <a:ext cx="0" cy="2800000"/>
           </a:xfrm>
           <a:prstGeom prst="line">
             <a:avLst/>
@@ -6982,17 +7001,17 @@
         <p:nvCxnSpPr>
           <p:cNvPr id="96" name="Connector 95"/>
           <p:cNvCxnSpPr>
-            <a:stCxn id="64" idx="3"/>
-            <a:endCxn id="14" idx="1"/>
+            <a:stCxn id="59" idx="2"/>
+            <a:endCxn id="61" idx="0"/>
           </p:cNvCxnSpPr>
           <p:nvPr/>
         </p:nvCxnSpPr>
         <p:spPr>
           <a:xfrm>
-            <a:off x="1700000" y="2266000"/>
-            <a:ext cx="2300000" cy="1298000"/>
-          </a:xfrm>
-          <a:prstGeom prst="bentConnector3">
+            <a:off x="11135000" y="7492000"/>
+            <a:ext cx="0" cy="922000"/>
+          </a:xfrm>
+          <a:prstGeom prst="line">
             <a:avLst/>
           </a:prstGeom>
           <a:ln>
@@ -7018,17 +7037,17 @@
         <p:nvCxnSpPr>
           <p:cNvPr id="97" name="Connector 96"/>
           <p:cNvCxnSpPr>
-            <a:stCxn id="65" idx="3"/>
-            <a:endCxn id="14" idx="1"/>
+            <a:stCxn id="57" idx="2"/>
+            <a:endCxn id="59" idx="0"/>
           </p:cNvCxnSpPr>
           <p:nvPr/>
         </p:nvCxnSpPr>
         <p:spPr>
           <a:xfrm>
-            <a:off x="1700000" y="3242000"/>
-            <a:ext cx="2300000" cy="322000"/>
-          </a:xfrm>
-          <a:prstGeom prst="bentConnector3">
+            <a:off x="11135000" y="5446000"/>
+            <a:ext cx="0" cy="1426000"/>
+          </a:xfrm>
+          <a:prstGeom prst="line">
             <a:avLst/>
           </a:prstGeom>
           <a:ln>
@@ -7054,17 +7073,17 @@
         <p:nvCxnSpPr>
           <p:cNvPr id="98" name="Connector 97"/>
           <p:cNvCxnSpPr>
-            <a:stCxn id="66" idx="3"/>
-            <a:endCxn id="12" idx="1"/>
+            <a:stCxn id="65" idx="3"/>
+            <a:endCxn id="4" idx="1"/>
           </p:cNvCxnSpPr>
           <p:nvPr/>
         </p:nvCxnSpPr>
         <p:spPr>
-          <a:xfrm flipV="1">
-            <a:off x="1700000" y="1350000"/>
-            <a:ext cx="2300000" cy="2868000"/>
-          </a:xfrm>
-          <a:prstGeom prst="bentConnector3">
+          <a:xfrm>
+            <a:off x="1700000" y="1290000"/>
+            <a:ext cx="240000" cy="60000"/>
+          </a:xfrm>
+          <a:prstGeom prst="line">
             <a:avLst/>
           </a:prstGeom>
           <a:ln>
@@ -7090,15 +7109,15 @@
         <p:nvCxnSpPr>
           <p:cNvPr id="99" name="Connector 98"/>
           <p:cNvCxnSpPr>
-            <a:stCxn id="67" idx="3"/>
-            <a:endCxn id="12" idx="1"/>
+            <a:stCxn id="66" idx="3"/>
+            <a:endCxn id="14" idx="1"/>
           </p:cNvCxnSpPr>
           <p:nvPr/>
         </p:nvCxnSpPr>
         <p:spPr>
-          <a:xfrm flipV="1">
-            <a:off x="1700000" y="1350000"/>
-            <a:ext cx="2300000" cy="3844000"/>
+          <a:xfrm>
+            <a:off x="1700000" y="2266000"/>
+            <a:ext cx="2300000" cy="1298000"/>
           </a:xfrm>
           <a:prstGeom prst="bentConnector3">
             <a:avLst/>
@@ -7126,15 +7145,15 @@
         <p:nvCxnSpPr>
           <p:cNvPr id="100" name="Connector 99"/>
           <p:cNvCxnSpPr>
-            <a:stCxn id="68" idx="3"/>
-            <a:endCxn id="28" idx="1"/>
+            <a:stCxn id="67" idx="3"/>
+            <a:endCxn id="14" idx="1"/>
           </p:cNvCxnSpPr>
           <p:nvPr/>
         </p:nvCxnSpPr>
         <p:spPr>
-          <a:xfrm flipV="1">
-            <a:off x="1700000" y="1350000"/>
-            <a:ext cx="4360000" cy="4820000"/>
+          <a:xfrm>
+            <a:off x="1700000" y="3242000"/>
+            <a:ext cx="2300000" cy="322000"/>
           </a:xfrm>
           <a:prstGeom prst="bentConnector3">
             <a:avLst/>
@@ -7162,17 +7181,17 @@
         <p:nvCxnSpPr>
           <p:cNvPr id="101" name="Connector 100"/>
           <p:cNvCxnSpPr>
-            <a:stCxn id="38" idx="2"/>
-            <a:endCxn id="48" idx="0"/>
+            <a:stCxn id="68" idx="3"/>
+            <a:endCxn id="12" idx="1"/>
           </p:cNvCxnSpPr>
           <p:nvPr/>
         </p:nvCxnSpPr>
         <p:spPr>
-          <a:xfrm>
-            <a:off x="9075000" y="4912000"/>
-            <a:ext cx="0" cy="10618000"/>
-          </a:xfrm>
-          <a:prstGeom prst="line">
+          <a:xfrm flipV="1">
+            <a:off x="1700000" y="1350000"/>
+            <a:ext cx="2300000" cy="2868000"/>
+          </a:xfrm>
+          <a:prstGeom prst="bentConnector3">
             <a:avLst/>
           </a:prstGeom>
           <a:ln>
@@ -7198,17 +7217,17 @@
         <p:nvCxnSpPr>
           <p:cNvPr id="102" name="Connector 101"/>
           <p:cNvCxnSpPr>
-            <a:stCxn id="57" idx="2"/>
-            <a:endCxn id="61" idx="0"/>
+            <a:stCxn id="69" idx="3"/>
+            <a:endCxn id="12" idx="1"/>
           </p:cNvCxnSpPr>
           <p:nvPr/>
         </p:nvCxnSpPr>
         <p:spPr>
-          <a:xfrm>
-            <a:off x="11135000" y="5446000"/>
-            <a:ext cx="0" cy="2800000"/>
-          </a:xfrm>
-          <a:prstGeom prst="line">
+          <a:xfrm flipV="1">
+            <a:off x="1700000" y="1350000"/>
+            <a:ext cx="2300000" cy="3844000"/>
+          </a:xfrm>
+          <a:prstGeom prst="bentConnector3">
             <a:avLst/>
           </a:prstGeom>
           <a:ln>
@@ -7234,14 +7253,122 @@
         <p:nvCxnSpPr>
           <p:cNvPr id="103" name="Connector 102"/>
           <p:cNvCxnSpPr>
+            <a:stCxn id="70" idx="3"/>
+            <a:endCxn id="28" idx="1"/>
+          </p:cNvCxnSpPr>
+          <p:nvPr/>
+        </p:nvCxnSpPr>
+        <p:spPr>
+          <a:xfrm flipV="1">
+            <a:off x="1700000" y="1350000"/>
+            <a:ext cx="4360000" cy="4820000"/>
+          </a:xfrm>
+          <a:prstGeom prst="bentConnector3">
+            <a:avLst/>
+          </a:prstGeom>
+          <a:ln>
+            <a:tailEnd type="triangle"/>
+          </a:ln>
+        </p:spPr>
+        <p:style>
+          <a:lnRef idx="2">
+            <a:schemeClr val="accent1"/>
+          </a:lnRef>
+          <a:fillRef idx="0">
+            <a:schemeClr val="accent1"/>
+          </a:fillRef>
+          <a:effectRef idx="1">
+            <a:schemeClr val="accent1"/>
+          </a:effectRef>
+          <a:fontRef idx="minor">
+            <a:schemeClr val="tx1"/>
+          </a:fontRef>
+        </p:style>
+      </p:cxnSp>
+      <p:cxnSp>
+        <p:nvCxnSpPr>
+          <p:cNvPr id="104" name="Connector 103"/>
+          <p:cNvCxnSpPr>
+            <a:stCxn id="38" idx="2"/>
+            <a:endCxn id="48" idx="0"/>
+          </p:cNvCxnSpPr>
+          <p:nvPr/>
+        </p:nvCxnSpPr>
+        <p:spPr>
+          <a:xfrm>
+            <a:off x="9075000" y="4912000"/>
+            <a:ext cx="0" cy="10618000"/>
+          </a:xfrm>
+          <a:prstGeom prst="line">
+            <a:avLst/>
+          </a:prstGeom>
+          <a:ln>
+            <a:tailEnd type="triangle"/>
+          </a:ln>
+        </p:spPr>
+        <p:style>
+          <a:lnRef idx="2">
+            <a:schemeClr val="accent1"/>
+          </a:lnRef>
+          <a:fillRef idx="0">
+            <a:schemeClr val="accent1"/>
+          </a:fillRef>
+          <a:effectRef idx="1">
+            <a:schemeClr val="accent1"/>
+          </a:effectRef>
+          <a:fontRef idx="minor">
+            <a:schemeClr val="tx1"/>
+          </a:fontRef>
+        </p:style>
+      </p:cxnSp>
+      <p:cxnSp>
+        <p:nvCxnSpPr>
+          <p:cNvPr id="105" name="Connector 104"/>
+          <p:cNvCxnSpPr>
             <a:stCxn id="59" idx="2"/>
-            <a:endCxn id="62" idx="0"/>
+            <a:endCxn id="63" idx="0"/>
           </p:cNvCxnSpPr>
           <p:nvPr/>
         </p:nvCxnSpPr>
         <p:spPr>
           <a:xfrm>
-            <a:off x="11135000" y="6988000"/>
+            <a:off x="11135000" y="7492000"/>
+            <a:ext cx="0" cy="2800000"/>
+          </a:xfrm>
+          <a:prstGeom prst="line">
+            <a:avLst/>
+          </a:prstGeom>
+          <a:ln>
+            <a:tailEnd type="triangle"/>
+          </a:ln>
+        </p:spPr>
+        <p:style>
+          <a:lnRef idx="2">
+            <a:schemeClr val="accent1"/>
+          </a:lnRef>
+          <a:fillRef idx="0">
+            <a:schemeClr val="accent1"/>
+          </a:fillRef>
+          <a:effectRef idx="1">
+            <a:schemeClr val="accent1"/>
+          </a:effectRef>
+          <a:fontRef idx="minor">
+            <a:schemeClr val="tx1"/>
+          </a:fontRef>
+        </p:style>
+      </p:cxnSp>
+      <p:cxnSp>
+        <p:nvCxnSpPr>
+          <p:cNvPr id="106" name="Connector 105"/>
+          <p:cNvCxnSpPr>
+            <a:stCxn id="61" idx="2"/>
+            <a:endCxn id="64" idx="0"/>
+          </p:cNvCxnSpPr>
+          <p:nvPr/>
+        </p:nvCxnSpPr>
+        <p:spPr>
+          <a:xfrm>
+            <a:off x="11135000" y="9034000"/>
             <a:ext cx="0" cy="2028000"/>
           </a:xfrm>
           <a:prstGeom prst="line">

--- a/In.Plan MEIO process 06-09-2026.pptx
+++ b/In.Plan MEIO process 06-09-2026.pptx
@@ -3211,7 +3211,7 @@
         <p:spPr>
           <a:xfrm>
             <a:off x="1940000" y="1760000"/>
-            <a:ext cx="1910000" cy="2520000"/>
+            <a:ext cx="1910000" cy="9408000"/>
           </a:xfrm>
           <a:prstGeom prst="rect">
             <a:avLst/>
@@ -3226,49 +3226,241 @@
           <a:p>
             <a:r>
               <a:rPr sz="900" b="0"/>
-              <a:t>Структура текущих запасов по узлам и партиям</a:t>
-            </a:r>
-          </a:p>
-          <a:p>
-            <a:r>
-              <a:rPr sz="900" b="0"/>
-              <a:t>Фактические отгрузки за период</a:t>
-            </a:r>
-          </a:p>
-          <a:p>
-            <a:r>
-              <a:rPr sz="900" b="0"/>
-              <a:t>Остатки на руках, в заказе и в пути</a:t>
-            </a:r>
-          </a:p>
-          <a:p>
-            <a:r>
-              <a:rPr sz="900" b="0"/>
-              <a:t>Связки продукт-локация и эшелоны сети</a:t>
-            </a:r>
-          </a:p>
-          <a:p>
-            <a:r>
-              <a:rPr sz="900" b="0"/>
-              <a:t>Источники поставки, квоты и маршруты</a:t>
-            </a:r>
-          </a:p>
-          <a:p>
-            <a:r>
-              <a:rPr sz="900" b="0"/>
-              <a:t>Календари пополнения и производственные календари</a:t>
-            </a:r>
-          </a:p>
-          <a:p>
-            <a:r>
-              <a:rPr sz="900" b="0"/>
-              <a:t>Мощности хранения по температурным режимам</a:t>
-            </a:r>
-          </a:p>
-          <a:p>
-            <a:r>
-              <a:rPr sz="900" b="0"/>
-              <a:t>Незакрытый спрос и списания за период</a:t>
+              <a:t>Продукт</a:t>
+            </a:r>
+          </a:p>
+          <a:p>
+            <a:r>
+              <a:rPr sz="900" b="0"/>
+              <a:t>Локация</a:t>
+            </a:r>
+          </a:p>
+          <a:p>
+            <a:r>
+              <a:rPr sz="900" b="0"/>
+              <a:t>Продукт-Локация</a:t>
+            </a:r>
+          </a:p>
+          <a:p>
+            <a:r>
+              <a:rPr sz="900" b="0"/>
+              <a:t>Групповой клиент, источники для гр. клиента</a:t>
+            </a:r>
+          </a:p>
+          <a:p>
+            <a:r>
+              <a:rPr sz="900" b="0"/>
+              <a:t>Транспортные отношения</a:t>
+            </a:r>
+          </a:p>
+          <a:p>
+            <a:r>
+              <a:rPr sz="900" b="0"/>
+              <a:t>Производственная спецификация</a:t>
+            </a:r>
+          </a:p>
+          <a:p>
+            <a:r>
+              <a:rPr sz="900" b="0"/>
+              <a:t>Компоненты производственной спецификации</a:t>
+            </a:r>
+          </a:p>
+          <a:p>
+            <a:r>
+              <a:rPr sz="900" b="0"/>
+              <a:t>Поставщик, источники поставщика</a:t>
+            </a:r>
+          </a:p>
+          <a:p>
+            <a:r>
+              <a:rPr sz="900" b="0"/>
+              <a:t>Валюта, курсы обмена</a:t>
+            </a:r>
+          </a:p>
+          <a:p>
+            <a:r>
+              <a:rPr sz="900" b="0"/>
+              <a:t>Единицы измерения, коэффициенты пересчёта</a:t>
+            </a:r>
+          </a:p>
+          <a:p>
+            <a:r>
+              <a:rPr sz="900" b="0"/>
+              <a:t>Целевой уровень сервиса</a:t>
+            </a:r>
+          </a:p>
+          <a:p>
+            <a:r>
+              <a:rPr sz="900" b="0"/>
+              <a:t>Тип уровня сервиса</a:t>
+            </a:r>
+          </a:p>
+          <a:p>
+            <a:r>
+              <a:rPr sz="900" b="0"/>
+              <a:t>История прогноза спроса и история расхода</a:t>
+            </a:r>
+          </a:p>
+          <a:p>
+            <a:r>
+              <a:rPr sz="900" b="0"/>
+              <a:t>Будущий прогноз спроса</a:t>
+            </a:r>
+          </a:p>
+          <a:p>
+            <a:r>
+              <a:rPr sz="900" b="0"/>
+              <a:t>СКО ошибки прогноза</a:t>
+            </a:r>
+          </a:p>
+          <a:p>
+            <a:r>
+              <a:rPr sz="900" b="0"/>
+              <a:t>Замороженный период спроса</a:t>
+            </a:r>
+          </a:p>
+          <a:p>
+            <a:r>
+              <a:rPr sz="900" b="0"/>
+              <a:t>Транспортный лидтайм</a:t>
+            </a:r>
+          </a:p>
+          <a:p>
+            <a:r>
+              <a:rPr sz="900" b="0"/>
+              <a:t>СКО транспортного лидтайма</a:t>
+            </a:r>
+          </a:p>
+          <a:p>
+            <a:r>
+              <a:rPr sz="900" b="0"/>
+              <a:t>Минимальный размер партии транспортировки</a:t>
+            </a:r>
+          </a:p>
+          <a:p>
+            <a:r>
+              <a:rPr sz="900" b="0"/>
+              <a:t>Округление партии транспортировки</a:t>
+            </a:r>
+          </a:p>
+          <a:p>
+            <a:r>
+              <a:rPr sz="900" b="0"/>
+              <a:t>Размер партии транспортировки в днях</a:t>
+            </a:r>
+          </a:p>
+          <a:p>
+            <a:r>
+              <a:rPr sz="900" b="0"/>
+              <a:t>Транспортные квоты</a:t>
+            </a:r>
+          </a:p>
+          <a:p>
+            <a:r>
+              <a:rPr sz="900" b="0"/>
+              <a:t>Замороженный период транспортировки</a:t>
+            </a:r>
+          </a:p>
+          <a:p>
+            <a:r>
+              <a:rPr sz="900" b="0"/>
+              <a:t>Производственный лидтайм</a:t>
+            </a:r>
+          </a:p>
+          <a:p>
+            <a:r>
+              <a:rPr sz="900" b="0"/>
+              <a:t>СКО производственного лидтайма</a:t>
+            </a:r>
+          </a:p>
+          <a:p>
+            <a:r>
+              <a:rPr sz="900" b="0"/>
+              <a:t>Минимальный размер партии выпуска</a:t>
+            </a:r>
+          </a:p>
+          <a:p>
+            <a:r>
+              <a:rPr sz="900" b="0"/>
+              <a:t>Округление партии выпуска</a:t>
+            </a:r>
+          </a:p>
+          <a:p>
+            <a:r>
+              <a:rPr sz="900" b="0"/>
+              <a:t>Размер партии выпуска в днях</a:t>
+            </a:r>
+          </a:p>
+          <a:p>
+            <a:r>
+              <a:rPr sz="900" b="0"/>
+              <a:t>Производственные квоты</a:t>
+            </a:r>
+          </a:p>
+          <a:p>
+            <a:r>
+              <a:rPr sz="900" b="0"/>
+              <a:t>Выходной коэффициент готового продукта</a:t>
+            </a:r>
+          </a:p>
+          <a:p>
+            <a:r>
+              <a:rPr sz="900" b="0"/>
+              <a:t>Коэффициент компонента</a:t>
+            </a:r>
+          </a:p>
+          <a:p>
+            <a:r>
+              <a:rPr sz="900" b="0"/>
+              <a:t>Цикл планирования (DBNR)</a:t>
+            </a:r>
+          </a:p>
+          <a:p>
+            <a:r>
+              <a:rPr sz="900" b="0"/>
+              <a:t>Тип узла (хранимый, не хранимый)</a:t>
+            </a:r>
+          </a:p>
+          <a:p>
+            <a:r>
+              <a:rPr sz="900" b="0"/>
+              <a:t>Политика страхового запаса (гибридные узлы)</a:t>
+            </a:r>
+          </a:p>
+          <a:p>
+            <a:r>
+              <a:rPr sz="900" b="0"/>
+              <a:t>Мин. / макс. внутренний уровень сервиса</a:t>
+            </a:r>
+          </a:p>
+          <a:p>
+            <a:r>
+              <a:rPr sz="900" b="0"/>
+              <a:t>Мин. / макс. страховой запас в днях или ЕИ</a:t>
+            </a:r>
+          </a:p>
+          <a:p>
+            <a:r>
+              <a:rPr sz="900" b="0"/>
+              <a:t>Минимально необходимый запас</a:t>
+            </a:r>
+          </a:p>
+          <a:p>
+            <a:r>
+              <a:rPr sz="900" b="0"/>
+              <a:t>Максимальный доступный запас (On-Hand)</a:t>
+            </a:r>
+          </a:p>
+          <a:p>
+            <a:r>
+              <a:rPr sz="900" b="0"/>
+              <a:t>Штраф за превышение максимального запаса</a:t>
+            </a:r>
+          </a:p>
+          <a:p>
+            <a:r>
+              <a:rPr sz="900" b="0"/>
+              <a:t>Удельные затраты на содержание запаса</a:t>
             </a:r>
           </a:p>
         </p:txBody>
@@ -3281,7 +3473,7 @@
         </p:nvSpPr>
         <p:spPr>
           <a:xfrm>
-            <a:off x="1940000" y="4430000"/>
+            <a:off x="1940000" y="11318000"/>
             <a:ext cx="1910000" cy="620000"/>
           </a:xfrm>
           <a:prstGeom prst="roundRect">
@@ -3325,7 +3517,7 @@
         </p:nvSpPr>
         <p:spPr>
           <a:xfrm>
-            <a:off x="1940000" y="5150000"/>
+            <a:off x="1940000" y="12038000"/>
             <a:ext cx="1910000" cy="1008000"/>
           </a:xfrm>
           <a:prstGeom prst="rect">
@@ -3372,7 +3564,7 @@
         </p:nvSpPr>
         <p:spPr>
           <a:xfrm>
-            <a:off x="1940000" y="6308000"/>
+            <a:off x="1940000" y="13196000"/>
             <a:ext cx="1910000" cy="620000"/>
           </a:xfrm>
           <a:prstGeom prst="roundRect">
@@ -3416,7 +3608,7 @@
         </p:nvSpPr>
         <p:spPr>
           <a:xfrm>
-            <a:off x="1940000" y="7028000"/>
+            <a:off x="1940000" y="13916000"/>
             <a:ext cx="1910000" cy="1176000"/>
           </a:xfrm>
           <a:prstGeom prst="rect">
@@ -6109,7 +6301,7 @@
         <p:spPr>
           <a:xfrm>
             <a:off x="2895000" y="1660000"/>
-            <a:ext cx="0" cy="2770000"/>
+            <a:ext cx="0" cy="9658000"/>
           </a:xfrm>
           <a:prstGeom prst="line">
             <a:avLst/>
@@ -6144,7 +6336,7 @@
         </p:nvCxnSpPr>
         <p:spPr>
           <a:xfrm>
-            <a:off x="2895000" y="5050000"/>
+            <a:off x="2895000" y="11938000"/>
             <a:ext cx="0" cy="1258000"/>
           </a:xfrm>
           <a:prstGeom prst="line">
@@ -6181,7 +6373,7 @@
         <p:spPr>
           <a:xfrm flipV="1">
             <a:off x="2895000" y="1660000"/>
-            <a:ext cx="2060000" cy="4648000"/>
+            <a:ext cx="2060000" cy="11536000"/>
           </a:xfrm>
           <a:prstGeom prst="line">
             <a:avLst/>

--- a/In.Plan MEIO process 06-09-2026.pptx
+++ b/In.Plan MEIO process 06-09-2026.pptx
@@ -7,7 +7,7 @@
   <p:sldIdLst>
     <p:sldId id="256" r:id="rId7"/>
   </p:sldIdLst>
-  <p:sldSz cx="12192000" cy="14080000" type="screen4x3"/>
+  <p:sldSz cx="12192000" cy="19580000" type="screen4x3"/>
   <p:notesSz cx="6858000" cy="9144000"/>
   <p:defaultTextStyle>
     <a:defPPr>
@@ -3097,7 +3097,7 @@
         <p:spPr>
           <a:xfrm>
             <a:off x="1880000" y="980000"/>
-            <a:ext cx="2030000" cy="13000000"/>
+            <a:ext cx="2030000" cy="18500000"/>
           </a:xfrm>
           <a:prstGeom prst="rect">
             <a:avLst/>
@@ -3197,7 +3197,7 @@
             <a:pPr algn="ctr"/>
             <a:r>
               <a:rPr sz="1000"/>
-              <a:t>Подготовка данных</a:t>
+              <a:t>Основные данные</a:t>
             </a:r>
           </a:p>
         </p:txBody>
@@ -3211,7 +3211,7 @@
         <p:spPr>
           <a:xfrm>
             <a:off x="1940000" y="1760000"/>
-            <a:ext cx="1910000" cy="9408000"/>
+            <a:ext cx="1910000" cy="2184000"/>
           </a:xfrm>
           <a:prstGeom prst="rect">
             <a:avLst/>
@@ -3283,186 +3283,6 @@
               <a:t>Единицы измерения, коэффициенты пересчёта</a:t>
             </a:r>
           </a:p>
-          <a:p>
-            <a:r>
-              <a:rPr sz="900" b="0"/>
-              <a:t>Целевой уровень сервиса</a:t>
-            </a:r>
-          </a:p>
-          <a:p>
-            <a:r>
-              <a:rPr sz="900" b="0"/>
-              <a:t>Тип уровня сервиса</a:t>
-            </a:r>
-          </a:p>
-          <a:p>
-            <a:r>
-              <a:rPr sz="900" b="0"/>
-              <a:t>История прогноза спроса и история расхода</a:t>
-            </a:r>
-          </a:p>
-          <a:p>
-            <a:r>
-              <a:rPr sz="900" b="0"/>
-              <a:t>Будущий прогноз спроса</a:t>
-            </a:r>
-          </a:p>
-          <a:p>
-            <a:r>
-              <a:rPr sz="900" b="0"/>
-              <a:t>СКО ошибки прогноза</a:t>
-            </a:r>
-          </a:p>
-          <a:p>
-            <a:r>
-              <a:rPr sz="900" b="0"/>
-              <a:t>Замороженный период спроса</a:t>
-            </a:r>
-          </a:p>
-          <a:p>
-            <a:r>
-              <a:rPr sz="900" b="0"/>
-              <a:t>Транспортный лидтайм</a:t>
-            </a:r>
-          </a:p>
-          <a:p>
-            <a:r>
-              <a:rPr sz="900" b="0"/>
-              <a:t>СКО транспортного лидтайма</a:t>
-            </a:r>
-          </a:p>
-          <a:p>
-            <a:r>
-              <a:rPr sz="900" b="0"/>
-              <a:t>Минимальный размер партии транспортировки</a:t>
-            </a:r>
-          </a:p>
-          <a:p>
-            <a:r>
-              <a:rPr sz="900" b="0"/>
-              <a:t>Округление партии транспортировки</a:t>
-            </a:r>
-          </a:p>
-          <a:p>
-            <a:r>
-              <a:rPr sz="900" b="0"/>
-              <a:t>Размер партии транспортировки в днях</a:t>
-            </a:r>
-          </a:p>
-          <a:p>
-            <a:r>
-              <a:rPr sz="900" b="0"/>
-              <a:t>Транспортные квоты</a:t>
-            </a:r>
-          </a:p>
-          <a:p>
-            <a:r>
-              <a:rPr sz="900" b="0"/>
-              <a:t>Замороженный период транспортировки</a:t>
-            </a:r>
-          </a:p>
-          <a:p>
-            <a:r>
-              <a:rPr sz="900" b="0"/>
-              <a:t>Производственный лидтайм</a:t>
-            </a:r>
-          </a:p>
-          <a:p>
-            <a:r>
-              <a:rPr sz="900" b="0"/>
-              <a:t>СКО производственного лидтайма</a:t>
-            </a:r>
-          </a:p>
-          <a:p>
-            <a:r>
-              <a:rPr sz="900" b="0"/>
-              <a:t>Минимальный размер партии выпуска</a:t>
-            </a:r>
-          </a:p>
-          <a:p>
-            <a:r>
-              <a:rPr sz="900" b="0"/>
-              <a:t>Округление партии выпуска</a:t>
-            </a:r>
-          </a:p>
-          <a:p>
-            <a:r>
-              <a:rPr sz="900" b="0"/>
-              <a:t>Размер партии выпуска в днях</a:t>
-            </a:r>
-          </a:p>
-          <a:p>
-            <a:r>
-              <a:rPr sz="900" b="0"/>
-              <a:t>Производственные квоты</a:t>
-            </a:r>
-          </a:p>
-          <a:p>
-            <a:r>
-              <a:rPr sz="900" b="0"/>
-              <a:t>Выходной коэффициент готового продукта</a:t>
-            </a:r>
-          </a:p>
-          <a:p>
-            <a:r>
-              <a:rPr sz="900" b="0"/>
-              <a:t>Коэффициент компонента</a:t>
-            </a:r>
-          </a:p>
-          <a:p>
-            <a:r>
-              <a:rPr sz="900" b="0"/>
-              <a:t>Цикл планирования (DBNR)</a:t>
-            </a:r>
-          </a:p>
-          <a:p>
-            <a:r>
-              <a:rPr sz="900" b="0"/>
-              <a:t>Тип узла (хранимый, не хранимый)</a:t>
-            </a:r>
-          </a:p>
-          <a:p>
-            <a:r>
-              <a:rPr sz="900" b="0"/>
-              <a:t>Политика страхового запаса (гибридные узлы)</a:t>
-            </a:r>
-          </a:p>
-          <a:p>
-            <a:r>
-              <a:rPr sz="900" b="0"/>
-              <a:t>Мин. / макс. внутренний уровень сервиса</a:t>
-            </a:r>
-          </a:p>
-          <a:p>
-            <a:r>
-              <a:rPr sz="900" b="0"/>
-              <a:t>Мин. / макс. страховой запас в днях или ЕИ</a:t>
-            </a:r>
-          </a:p>
-          <a:p>
-            <a:r>
-              <a:rPr sz="900" b="0"/>
-              <a:t>Минимально необходимый запас</a:t>
-            </a:r>
-          </a:p>
-          <a:p>
-            <a:r>
-              <a:rPr sz="900" b="0"/>
-              <a:t>Максимальный доступный запас (On-Hand)</a:t>
-            </a:r>
-          </a:p>
-          <a:p>
-            <a:r>
-              <a:rPr sz="900" b="0"/>
-              <a:t>Штраф за превышение максимального запаса</a:t>
-            </a:r>
-          </a:p>
-          <a:p>
-            <a:r>
-              <a:rPr sz="900" b="0"/>
-              <a:t>Удельные затраты на содержание запаса</a:t>
-            </a:r>
-          </a:p>
         </p:txBody>
       </p:sp>
       <p:sp>
@@ -3473,7 +3293,7 @@
         </p:nvSpPr>
         <p:spPr>
           <a:xfrm>
-            <a:off x="1940000" y="11318000"/>
+            <a:off x="1940000" y="4094000"/>
             <a:ext cx="1910000" cy="620000"/>
           </a:xfrm>
           <a:prstGeom prst="roundRect">
@@ -3504,7 +3324,7 @@
             <a:pPr algn="ctr"/>
             <a:r>
               <a:rPr sz="1000"/>
-              <a:t>Проверка мастер-данных</a:t>
+              <a:t>Данные о спросе</a:t>
             </a:r>
           </a:p>
         </p:txBody>
@@ -3517,8 +3337,8 @@
         </p:nvSpPr>
         <p:spPr>
           <a:xfrm>
-            <a:off x="1940000" y="12038000"/>
-            <a:ext cx="1910000" cy="1008000"/>
+            <a:off x="1940000" y="4814000"/>
+            <a:ext cx="1910000" cy="1176000"/>
           </a:xfrm>
           <a:prstGeom prst="rect">
             <a:avLst/>
@@ -3533,25 +3353,37 @@
           <a:p>
             <a:r>
               <a:rPr sz="900" b="0"/>
-              <a:t>Полнота карточек товара и локаций</a:t>
-            </a:r>
-          </a:p>
-          <a:p>
-            <a:r>
-              <a:rPr sz="900" b="0"/>
-              <a:t>Единицы измерения и кратности</a:t>
-            </a:r>
-          </a:p>
-          <a:p>
-            <a:r>
-              <a:rPr sz="900" b="0"/>
-              <a:t>Дубли и неактуальные записи</a:t>
-            </a:r>
-          </a:p>
-          <a:p>
-            <a:r>
-              <a:rPr sz="900" b="0"/>
-              <a:t>Атрибуты сроков годности и температурных режимов</a:t>
+              <a:t>Целевой уровень сервиса</a:t>
+            </a:r>
+          </a:p>
+          <a:p>
+            <a:r>
+              <a:rPr sz="900" b="0"/>
+              <a:t>Тип уровня сервиса</a:t>
+            </a:r>
+          </a:p>
+          <a:p>
+            <a:r>
+              <a:rPr sz="900" b="0"/>
+              <a:t>История прогноза спроса и история расхода</a:t>
+            </a:r>
+          </a:p>
+          <a:p>
+            <a:r>
+              <a:rPr sz="900" b="0"/>
+              <a:t>Будущий прогноз спроса</a:t>
+            </a:r>
+          </a:p>
+          <a:p>
+            <a:r>
+              <a:rPr sz="900" b="0"/>
+              <a:t>СКО ошибки прогноза</a:t>
+            </a:r>
+          </a:p>
+          <a:p>
+            <a:r>
+              <a:rPr sz="900" b="0"/>
+              <a:t>Замороженный период спроса</a:t>
             </a:r>
           </a:p>
         </p:txBody>
@@ -3564,7 +3396,7 @@
         </p:nvSpPr>
         <p:spPr>
           <a:xfrm>
-            <a:off x="1940000" y="13196000"/>
+            <a:off x="1940000" y="6140000"/>
             <a:ext cx="1910000" cy="620000"/>
           </a:xfrm>
           <a:prstGeom prst="roundRect">
@@ -3595,7 +3427,7 @@
             <a:pPr algn="ctr"/>
             <a:r>
               <a:rPr sz="1000"/>
-              <a:t>Проверка цепочки на связанность</a:t>
+              <a:t>Источники поставки</a:t>
             </a:r>
           </a:p>
         </p:txBody>
@@ -3608,8 +3440,8 @@
         </p:nvSpPr>
         <p:spPr>
           <a:xfrm>
-            <a:off x="1940000" y="13916000"/>
-            <a:ext cx="1910000" cy="1176000"/>
+            <a:off x="1940000" y="6860000"/>
+            <a:ext cx="1910000" cy="1848000"/>
           </a:xfrm>
           <a:prstGeom prst="rect">
             <a:avLst/>
@@ -3624,47 +3456,64 @@
           <a:p>
             <a:r>
               <a:rPr sz="900" b="0"/>
-              <a:t>У каждой связки продукт-локация есть источник поставки</a:t>
-            </a:r>
-          </a:p>
-          <a:p>
-            <a:r>
-              <a:rPr sz="900" b="0"/>
-              <a:t>Нет разрывов между эшелонами</a:t>
-            </a:r>
-          </a:p>
-          <a:p>
-            <a:r>
-              <a:rPr sz="900" b="0"/>
-              <a:t>Квоты и маршруты заданы для всех связей</a:t>
-            </a:r>
-          </a:p>
-          <a:p>
-            <a:r>
-              <a:rPr sz="900" b="0"/>
-              <a:t>Лидтаймы проставлены по всем дугам</a:t>
-            </a:r>
-          </a:p>
-        </p:txBody>
-      </p:sp>
-      <p:sp>
-        <p:nvSpPr>
-          <p:cNvPr id="10" name="Rectangle 9"/>
+              <a:t>Транспортный лидтайм</a:t>
+            </a:r>
+          </a:p>
+          <a:p>
+            <a:r>
+              <a:rPr sz="900" b="0"/>
+              <a:t>СКО транспортного лидтайма</a:t>
+            </a:r>
+          </a:p>
+          <a:p>
+            <a:r>
+              <a:rPr sz="900" b="0"/>
+              <a:t>Минимальный размер партии транспортировки</a:t>
+            </a:r>
+          </a:p>
+          <a:p>
+            <a:r>
+              <a:rPr sz="900" b="0"/>
+              <a:t>Округление партии транспортировки</a:t>
+            </a:r>
+          </a:p>
+          <a:p>
+            <a:r>
+              <a:rPr sz="900" b="0"/>
+              <a:t>Размер партии транспортировки в днях</a:t>
+            </a:r>
+          </a:p>
+          <a:p>
+            <a:r>
+              <a:rPr sz="900" b="0"/>
+              <a:t>Транспортные квоты</a:t>
+            </a:r>
+          </a:p>
+          <a:p>
+            <a:r>
+              <a:rPr sz="900" b="0"/>
+              <a:t>Замороженный период транспортировки</a:t>
+            </a:r>
+          </a:p>
+        </p:txBody>
+      </p:sp>
+      <p:sp>
+        <p:nvSpPr>
+          <p:cNvPr id="10" name="Rounded Rectangle 9"/>
           <p:cNvSpPr/>
           <p:nvPr/>
         </p:nvSpPr>
         <p:spPr>
           <a:xfrm>
-            <a:off x="3940000" y="980000"/>
-            <a:ext cx="2030000" cy="13000000"/>
-          </a:xfrm>
-          <a:prstGeom prst="rect">
-            <a:avLst/>
-          </a:prstGeom>
-          <a:noFill/>
-          <a:ln>
-            <a:noFill/>
-          </a:ln>
+            <a:off x="1940000" y="8858000"/>
+            <a:ext cx="1910000" cy="620000"/>
+          </a:xfrm>
+          <a:prstGeom prst="roundRect">
+            <a:avLst/>
+          </a:prstGeom>
+          <a:solidFill>
+            <a:schemeClr val="accent1"/>
+          </a:solidFill>
         </p:spPr>
         <p:style>
           <a:lnRef idx="1">
@@ -3685,6 +3534,10 @@
           <a:lstStyle/>
           <a:p>
             <a:pPr algn="ctr"/>
+            <a:r>
+              <a:rPr sz="1000"/>
+              <a:t>Производственные данные</a:t>
+            </a:r>
           </a:p>
         </p:txBody>
       </p:sp>
@@ -3696,8 +3549,8 @@
         </p:nvSpPr>
         <p:spPr>
           <a:xfrm>
-            <a:off x="3940000" y="500000"/>
-            <a:ext cx="2030000" cy="380000"/>
+            <a:off x="1940000" y="9578000"/>
+            <a:ext cx="1910000" cy="1680000"/>
           </a:xfrm>
           <a:prstGeom prst="rect">
             <a:avLst/>
@@ -3711,8 +3564,50 @@
           <a:lstStyle/>
           <a:p>
             <a:r>
-              <a:rPr sz="1100" b="1"/>
-              <a:t>Подготовка к расчёту</a:t>
+              <a:rPr sz="900" b="0"/>
+              <a:t>Производственный лидтайм</a:t>
+            </a:r>
+          </a:p>
+          <a:p>
+            <a:r>
+              <a:rPr sz="900" b="0"/>
+              <a:t>СКО производственного лидтайма</a:t>
+            </a:r>
+          </a:p>
+          <a:p>
+            <a:r>
+              <a:rPr sz="900" b="0"/>
+              <a:t>Минимальный размер партии выпуска</a:t>
+            </a:r>
+          </a:p>
+          <a:p>
+            <a:r>
+              <a:rPr sz="900" b="0"/>
+              <a:t>Округление партии выпуска</a:t>
+            </a:r>
+          </a:p>
+          <a:p>
+            <a:r>
+              <a:rPr sz="900" b="0"/>
+              <a:t>Размер партии выпуска в днях</a:t>
+            </a:r>
+          </a:p>
+          <a:p>
+            <a:r>
+              <a:rPr sz="900" b="0"/>
+              <a:t>Производственные квоты</a:t>
+            </a:r>
+          </a:p>
+          <a:p>
+            <a:r>
+              <a:rPr sz="900" b="0"/>
+              <a:t>Выходной коэффициент готового продукта</a:t>
+            </a:r>
+          </a:p>
+          <a:p>
+            <a:r>
+              <a:rPr sz="900" b="0"/>
+              <a:t>Коэффициент компонента</a:t>
             </a:r>
           </a:p>
         </p:txBody>
@@ -3725,7 +3620,7 @@
         </p:nvSpPr>
         <p:spPr>
           <a:xfrm>
-            <a:off x="4000000" y="1040000"/>
+            <a:off x="1940000" y="11408000"/>
             <a:ext cx="1910000" cy="620000"/>
           </a:xfrm>
           <a:prstGeom prst="roundRect">
@@ -3756,7 +3651,7 @@
             <a:pPr algn="ctr"/>
             <a:r>
               <a:rPr sz="1000"/>
-              <a:t>Настройка параметров расчёта</a:t>
+              <a:t>Данные о планировании</a:t>
             </a:r>
           </a:p>
         </p:txBody>
@@ -3769,8 +3664,8 @@
         </p:nvSpPr>
         <p:spPr>
           <a:xfrm>
-            <a:off x="4000000" y="1760000"/>
-            <a:ext cx="1910000" cy="1344000"/>
+            <a:off x="1940000" y="12128000"/>
+            <a:ext cx="1910000" cy="2520000"/>
           </a:xfrm>
           <a:prstGeom prst="rect">
             <a:avLst/>
@@ -3785,37 +3680,55 @@
           <a:p>
             <a:r>
               <a:rPr sz="900" b="0"/>
-              <a:t>Плановые лидтаймы и отклонения</a:t>
-            </a:r>
-          </a:p>
-          <a:p>
-            <a:r>
-              <a:rPr sz="900" b="0"/>
-              <a:t>Квоты и приоритеты источников</a:t>
-            </a:r>
-          </a:p>
-          <a:p>
-            <a:r>
-              <a:rPr sz="900" b="0"/>
-              <a:t>Затраты на хранение</a:t>
-            </a:r>
-          </a:p>
-          <a:p>
-            <a:r>
-              <a:rPr sz="900" b="0"/>
-              <a:t>Минимальный размер партии и кратность</a:t>
-            </a:r>
-          </a:p>
-          <a:p>
-            <a:r>
-              <a:rPr sz="900" b="0"/>
-              <a:t>Срок годности и остаточный срок при приёмке</a:t>
-            </a:r>
-          </a:p>
-          <a:p>
-            <a:r>
-              <a:rPr sz="900" b="0"/>
-              <a:t>Политика FEFO</a:t>
+              <a:t>Цикл планирования (DBNR)</a:t>
+            </a:r>
+          </a:p>
+          <a:p>
+            <a:r>
+              <a:rPr sz="900" b="0"/>
+              <a:t>Тип узла (хранимый, не хранимый)</a:t>
+            </a:r>
+          </a:p>
+          <a:p>
+            <a:r>
+              <a:rPr sz="900" b="0"/>
+              <a:t>Политика страхового запаса (гибридные узлы)</a:t>
+            </a:r>
+          </a:p>
+          <a:p>
+            <a:r>
+              <a:rPr sz="900" b="0"/>
+              <a:t>Мин. / макс. внутренний уровень сервиса</a:t>
+            </a:r>
+          </a:p>
+          <a:p>
+            <a:r>
+              <a:rPr sz="900" b="0"/>
+              <a:t>Мин. / макс. страховой запас в днях или ЕИ</a:t>
+            </a:r>
+          </a:p>
+          <a:p>
+            <a:r>
+              <a:rPr sz="900" b="0"/>
+              <a:t>Минимально необходимый запас</a:t>
+            </a:r>
+          </a:p>
+          <a:p>
+            <a:r>
+              <a:rPr sz="900" b="0"/>
+              <a:t>Максимальный доступный запас (On-Hand)</a:t>
+            </a:r>
+          </a:p>
+          <a:p>
+            <a:r>
+              <a:rPr sz="900" b="0"/>
+              <a:t>Штраф за превышение максимального запаса</a:t>
+            </a:r>
+          </a:p>
+          <a:p>
+            <a:r>
+              <a:rPr sz="900" b="0"/>
+              <a:t>Удельные затраты на содержание запаса</a:t>
             </a:r>
           </a:p>
         </p:txBody>
@@ -3828,7 +3741,7 @@
         </p:nvSpPr>
         <p:spPr>
           <a:xfrm>
-            <a:off x="4000000" y="3254000"/>
+            <a:off x="1940000" y="14798000"/>
             <a:ext cx="1910000" cy="620000"/>
           </a:xfrm>
           <a:prstGeom prst="roundRect">
@@ -3859,7 +3772,7 @@
             <a:pPr algn="ctr"/>
             <a:r>
               <a:rPr sz="1000"/>
-              <a:t>Расчёт волатильности спроса</a:t>
+              <a:t>Подготовка данных</a:t>
             </a:r>
           </a:p>
         </p:txBody>
@@ -3872,8 +3785,8 @@
         </p:nvSpPr>
         <p:spPr>
           <a:xfrm>
-            <a:off x="4000000" y="3974000"/>
-            <a:ext cx="1910000" cy="1008000"/>
+            <a:off x="1940000" y="15518000"/>
+            <a:ext cx="1910000" cy="1176000"/>
           </a:xfrm>
           <a:prstGeom prst="rect">
             <a:avLst/>
@@ -3888,25 +3801,31 @@
           <a:p>
             <a:r>
               <a:rPr sz="900" b="0"/>
-              <a:t>История отгрузок за период</a:t>
-            </a:r>
-          </a:p>
-          <a:p>
-            <a:r>
-              <a:rPr sz="900" b="0"/>
-              <a:t>Незакрытый спрос и списания</a:t>
-            </a:r>
-          </a:p>
-          <a:p>
-            <a:r>
-              <a:rPr sz="900" b="0"/>
-              <a:t>Ошибка прогноза по горизонту из DP</a:t>
-            </a:r>
-          </a:p>
-          <a:p>
-            <a:r>
-              <a:rPr sz="900" b="0"/>
-              <a:t>Собственная история прогноза и факта</a:t>
+              <a:t>Собранные основные данные</a:t>
+            </a:r>
+          </a:p>
+          <a:p>
+            <a:r>
+              <a:rPr sz="900" b="0"/>
+              <a:t>Собранные данные о спросе</a:t>
+            </a:r>
+          </a:p>
+          <a:p>
+            <a:r>
+              <a:rPr sz="900" b="0"/>
+              <a:t>Собранные данные об источниках поставки</a:t>
+            </a:r>
+          </a:p>
+          <a:p>
+            <a:r>
+              <a:rPr sz="900" b="0"/>
+              <a:t>Собранные производственные данные</a:t>
+            </a:r>
+          </a:p>
+          <a:p>
+            <a:r>
+              <a:rPr sz="900" b="0"/>
+              <a:t>Собранные данные о планировании</a:t>
             </a:r>
           </a:p>
         </p:txBody>
@@ -3919,7 +3838,7 @@
         </p:nvSpPr>
         <p:spPr>
           <a:xfrm>
-            <a:off x="4000000" y="5132000"/>
+            <a:off x="1940000" y="16844000"/>
             <a:ext cx="1910000" cy="620000"/>
           </a:xfrm>
           <a:prstGeom prst="roundRect">
@@ -3950,7 +3869,7 @@
             <a:pPr algn="ctr"/>
             <a:r>
               <a:rPr sz="1000"/>
-              <a:t>Корректировка CV спроса</a:t>
+              <a:t>Проверка мастер-данных</a:t>
             </a:r>
           </a:p>
         </p:txBody>
@@ -3963,8 +3882,8 @@
         </p:nvSpPr>
         <p:spPr>
           <a:xfrm>
-            <a:off x="4000000" y="5852000"/>
-            <a:ext cx="1910000" cy="840000"/>
+            <a:off x="1940000" y="17564000"/>
+            <a:ext cx="1910000" cy="1008000"/>
           </a:xfrm>
           <a:prstGeom prst="rect">
             <a:avLst/>
@@ -3979,25 +3898,25 @@
           <a:p>
             <a:r>
               <a:rPr sz="900" b="0"/>
-              <a:t>CV спроса</a:t>
-            </a:r>
-          </a:p>
-          <a:p>
-            <a:r>
-              <a:rPr sz="900" b="0"/>
-              <a:t>Новинки без истории</a:t>
-            </a:r>
-          </a:p>
-          <a:p>
-            <a:r>
-              <a:rPr sz="900" b="0"/>
-              <a:t>Позиции со сменой режима поставки</a:t>
-            </a:r>
-          </a:p>
-          <a:p>
-            <a:r>
-              <a:rPr sz="900" b="0"/>
-              <a:t>Экспертная правка по сегментам</a:t>
+              <a:t>Полнота карточек товара и локаций</a:t>
+            </a:r>
+          </a:p>
+          <a:p>
+            <a:r>
+              <a:rPr sz="900" b="0"/>
+              <a:t>Единицы измерения и кратности</a:t>
+            </a:r>
+          </a:p>
+          <a:p>
+            <a:r>
+              <a:rPr sz="900" b="0"/>
+              <a:t>Дубли и неактуальные записи</a:t>
+            </a:r>
+          </a:p>
+          <a:p>
+            <a:r>
+              <a:rPr sz="900" b="0"/>
+              <a:t>Атрибуты сроков годности и температурных режимов</a:t>
             </a:r>
           </a:p>
         </p:txBody>
@@ -4010,7 +3929,7 @@
         </p:nvSpPr>
         <p:spPr>
           <a:xfrm>
-            <a:off x="4000000" y="6842000"/>
+            <a:off x="1940000" y="18722000"/>
             <a:ext cx="1910000" cy="620000"/>
           </a:xfrm>
           <a:prstGeom prst="roundRect">
@@ -4041,7 +3960,7 @@
             <a:pPr algn="ctr"/>
             <a:r>
               <a:rPr sz="1000"/>
-              <a:t>Расчёт CV длительности поставок</a:t>
+              <a:t>Проверка цепочки на связанность</a:t>
             </a:r>
           </a:p>
         </p:txBody>
@@ -4054,8 +3973,8 @@
         </p:nvSpPr>
         <p:spPr>
           <a:xfrm>
-            <a:off x="4000000" y="7562000"/>
-            <a:ext cx="1910000" cy="504000"/>
+            <a:off x="1940000" y="19442000"/>
+            <a:ext cx="1910000" cy="1176000"/>
           </a:xfrm>
           <a:prstGeom prst="rect">
             <a:avLst/>
@@ -4070,34 +3989,47 @@
           <a:p>
             <a:r>
               <a:rPr sz="900" b="0"/>
-              <a:t>Плановые и фактические длительности поставок</a:t>
-            </a:r>
-          </a:p>
-          <a:p>
-            <a:r>
-              <a:rPr sz="900" b="0"/>
-              <a:t>Отклонения по дугам сети</a:t>
-            </a:r>
-          </a:p>
-        </p:txBody>
-      </p:sp>
-      <p:sp>
-        <p:nvSpPr>
-          <p:cNvPr id="20" name="Rounded Rectangle 19"/>
+              <a:t>У каждой связки продукт-локация есть источник поставки</a:t>
+            </a:r>
+          </a:p>
+          <a:p>
+            <a:r>
+              <a:rPr sz="900" b="0"/>
+              <a:t>Нет разрывов между эшелонами</a:t>
+            </a:r>
+          </a:p>
+          <a:p>
+            <a:r>
+              <a:rPr sz="900" b="0"/>
+              <a:t>Квоты и маршруты заданы для всех связей</a:t>
+            </a:r>
+          </a:p>
+          <a:p>
+            <a:r>
+              <a:rPr sz="900" b="0"/>
+              <a:t>Лидтаймы проставлены по всем дугам</a:t>
+            </a:r>
+          </a:p>
+        </p:txBody>
+      </p:sp>
+      <p:sp>
+        <p:nvSpPr>
+          <p:cNvPr id="20" name="Rectangle 19"/>
           <p:cNvSpPr/>
           <p:nvPr/>
         </p:nvSpPr>
         <p:spPr>
           <a:xfrm>
-            <a:off x="4000000" y="8216000"/>
-            <a:ext cx="1910000" cy="620000"/>
-          </a:xfrm>
-          <a:prstGeom prst="roundRect">
-            <a:avLst/>
-          </a:prstGeom>
-          <a:solidFill>
-            <a:schemeClr val="accent1"/>
-          </a:solidFill>
+            <a:off x="3940000" y="980000"/>
+            <a:ext cx="2030000" cy="18500000"/>
+          </a:xfrm>
+          <a:prstGeom prst="rect">
+            <a:avLst/>
+          </a:prstGeom>
+          <a:noFill/>
+          <a:ln>
+            <a:noFill/>
+          </a:ln>
         </p:spPr>
         <p:style>
           <a:lnRef idx="1">
@@ -4118,10 +4050,6 @@
           <a:lstStyle/>
           <a:p>
             <a:pPr algn="ctr"/>
-            <a:r>
-              <a:rPr sz="1000"/>
-              <a:t>Корректировка CV длительности поставок</a:t>
-            </a:r>
           </a:p>
         </p:txBody>
       </p:sp>
@@ -4133,8 +4061,8 @@
         </p:nvSpPr>
         <p:spPr>
           <a:xfrm>
-            <a:off x="4000000" y="8936000"/>
-            <a:ext cx="1910000" cy="840000"/>
+            <a:off x="3940000" y="500000"/>
+            <a:ext cx="2030000" cy="380000"/>
           </a:xfrm>
           <a:prstGeom prst="rect">
             <a:avLst/>
@@ -4148,20 +4076,8 @@
           <a:lstStyle/>
           <a:p>
             <a:r>
-              <a:rPr sz="900" b="0"/>
-              <a:t>CV длительности поставок</a:t>
-            </a:r>
-          </a:p>
-          <a:p>
-            <a:r>
-              <a:rPr sz="900" b="0"/>
-              <a:t>Новые поставщики и маршруты без истории</a:t>
-            </a:r>
-          </a:p>
-          <a:p>
-            <a:r>
-              <a:rPr sz="900" b="0"/>
-              <a:t>Согласованные изменения условий поставки</a:t>
+              <a:rPr sz="1100" b="1"/>
+              <a:t>Подготовка к расчёту</a:t>
             </a:r>
           </a:p>
         </p:txBody>
@@ -4174,7 +4090,7 @@
         </p:nvSpPr>
         <p:spPr>
           <a:xfrm>
-            <a:off x="4000000" y="9926000"/>
+            <a:off x="4000000" y="1040000"/>
             <a:ext cx="1910000" cy="620000"/>
           </a:xfrm>
           <a:prstGeom prst="roundRect">
@@ -4205,7 +4121,7 @@
             <a:pPr algn="ctr"/>
             <a:r>
               <a:rPr sz="1000"/>
-              <a:t>Расчёт CV длительности производства</a:t>
+              <a:t>Настройка параметров расчёта</a:t>
             </a:r>
           </a:p>
         </p:txBody>
@@ -4218,8 +4134,8 @@
         </p:nvSpPr>
         <p:spPr>
           <a:xfrm>
-            <a:off x="4000000" y="10646000"/>
-            <a:ext cx="1910000" cy="672000"/>
+            <a:off x="4000000" y="1760000"/>
+            <a:ext cx="1910000" cy="1344000"/>
           </a:xfrm>
           <a:prstGeom prst="rect">
             <a:avLst/>
@@ -4234,13 +4150,37 @@
           <a:p>
             <a:r>
               <a:rPr sz="900" b="0"/>
-              <a:t>Плановые и фактические длительности производства</a:t>
-            </a:r>
-          </a:p>
-          <a:p>
-            <a:r>
-              <a:rPr sz="900" b="0"/>
-              <a:t>Отклонения по производственным заказам</a:t>
+              <a:t>Плановые лидтаймы и отклонения</a:t>
+            </a:r>
+          </a:p>
+          <a:p>
+            <a:r>
+              <a:rPr sz="900" b="0"/>
+              <a:t>Квоты и приоритеты источников</a:t>
+            </a:r>
+          </a:p>
+          <a:p>
+            <a:r>
+              <a:rPr sz="900" b="0"/>
+              <a:t>Затраты на хранение</a:t>
+            </a:r>
+          </a:p>
+          <a:p>
+            <a:r>
+              <a:rPr sz="900" b="0"/>
+              <a:t>Минимальный размер партии и кратность</a:t>
+            </a:r>
+          </a:p>
+          <a:p>
+            <a:r>
+              <a:rPr sz="900" b="0"/>
+              <a:t>Срок годности и остаточный срок при приёмке</a:t>
+            </a:r>
+          </a:p>
+          <a:p>
+            <a:r>
+              <a:rPr sz="900" b="0"/>
+              <a:t>Политика FEFO</a:t>
             </a:r>
           </a:p>
         </p:txBody>
@@ -4253,7 +4193,7 @@
         </p:nvSpPr>
         <p:spPr>
           <a:xfrm>
-            <a:off x="4000000" y="11468000"/>
+            <a:off x="4000000" y="3254000"/>
             <a:ext cx="1910000" cy="620000"/>
           </a:xfrm>
           <a:prstGeom prst="roundRect">
@@ -4284,7 +4224,7 @@
             <a:pPr algn="ctr"/>
             <a:r>
               <a:rPr sz="1000"/>
-              <a:t>Корректировка CV длительности производства</a:t>
+              <a:t>Расчёт волатильности спроса</a:t>
             </a:r>
           </a:p>
         </p:txBody>
@@ -4297,8 +4237,8 @@
         </p:nvSpPr>
         <p:spPr>
           <a:xfrm>
-            <a:off x="4000000" y="12188000"/>
-            <a:ext cx="1910000" cy="672000"/>
+            <a:off x="4000000" y="3974000"/>
+            <a:ext cx="1910000" cy="1008000"/>
           </a:xfrm>
           <a:prstGeom prst="rect">
             <a:avLst/>
@@ -4313,41 +4253,46 @@
           <a:p>
             <a:r>
               <a:rPr sz="900" b="0"/>
-              <a:t>CV длительности производства</a:t>
-            </a:r>
-          </a:p>
-          <a:p>
-            <a:r>
-              <a:rPr sz="900" b="0"/>
-              <a:t>Плановые остановки и ремонты</a:t>
-            </a:r>
-          </a:p>
-          <a:p>
-            <a:r>
-              <a:rPr sz="900" b="0"/>
-              <a:t>Изменения схемы разделки и глубины переработки</a:t>
-            </a:r>
-          </a:p>
-        </p:txBody>
-      </p:sp>
-      <p:sp>
-        <p:nvSpPr>
-          <p:cNvPr id="26" name="Rectangle 25"/>
+              <a:t>История отгрузок за период</a:t>
+            </a:r>
+          </a:p>
+          <a:p>
+            <a:r>
+              <a:rPr sz="900" b="0"/>
+              <a:t>Незакрытый спрос и списания</a:t>
+            </a:r>
+          </a:p>
+          <a:p>
+            <a:r>
+              <a:rPr sz="900" b="0"/>
+              <a:t>Ошибка прогноза по горизонту из DP</a:t>
+            </a:r>
+          </a:p>
+          <a:p>
+            <a:r>
+              <a:rPr sz="900" b="0"/>
+              <a:t>Собственная история прогноза и факта</a:t>
+            </a:r>
+          </a:p>
+        </p:txBody>
+      </p:sp>
+      <p:sp>
+        <p:nvSpPr>
+          <p:cNvPr id="26" name="Rounded Rectangle 25"/>
           <p:cNvSpPr/>
           <p:nvPr/>
         </p:nvSpPr>
         <p:spPr>
           <a:xfrm>
-            <a:off x="6000000" y="980000"/>
-            <a:ext cx="2030000" cy="13000000"/>
-          </a:xfrm>
-          <a:prstGeom prst="rect">
-            <a:avLst/>
-          </a:prstGeom>
-          <a:noFill/>
-          <a:ln>
-            <a:noFill/>
-          </a:ln>
+            <a:off x="4000000" y="5132000"/>
+            <a:ext cx="1910000" cy="620000"/>
+          </a:xfrm>
+          <a:prstGeom prst="roundRect">
+            <a:avLst/>
+          </a:prstGeom>
+          <a:solidFill>
+            <a:schemeClr val="accent1"/>
+          </a:solidFill>
         </p:spPr>
         <p:style>
           <a:lnRef idx="1">
@@ -4368,6 +4313,10 @@
           <a:lstStyle/>
           <a:p>
             <a:pPr algn="ctr"/>
+            <a:r>
+              <a:rPr sz="1000"/>
+              <a:t>Корректировка CV спроса</a:t>
+            </a:r>
           </a:p>
         </p:txBody>
       </p:sp>
@@ -4379,8 +4328,8 @@
         </p:nvSpPr>
         <p:spPr>
           <a:xfrm>
-            <a:off x="6000000" y="500000"/>
-            <a:ext cx="2030000" cy="380000"/>
+            <a:off x="4000000" y="5852000"/>
+            <a:ext cx="1910000" cy="840000"/>
           </a:xfrm>
           <a:prstGeom prst="rect">
             <a:avLst/>
@@ -4394,8 +4343,26 @@
           <a:lstStyle/>
           <a:p>
             <a:r>
-              <a:rPr sz="1100" b="1"/>
-              <a:t>Сегментация</a:t>
+              <a:rPr sz="900" b="0"/>
+              <a:t>CV спроса</a:t>
+            </a:r>
+          </a:p>
+          <a:p>
+            <a:r>
+              <a:rPr sz="900" b="0"/>
+              <a:t>Новинки без истории</a:t>
+            </a:r>
+          </a:p>
+          <a:p>
+            <a:r>
+              <a:rPr sz="900" b="0"/>
+              <a:t>Позиции со сменой режима поставки</a:t>
+            </a:r>
+          </a:p>
+          <a:p>
+            <a:r>
+              <a:rPr sz="900" b="0"/>
+              <a:t>Экспертная правка по сегментам</a:t>
             </a:r>
           </a:p>
         </p:txBody>
@@ -4408,7 +4375,7 @@
         </p:nvSpPr>
         <p:spPr>
           <a:xfrm>
-            <a:off x="6060000" y="1040000"/>
+            <a:off x="4000000" y="6842000"/>
             <a:ext cx="1910000" cy="620000"/>
           </a:xfrm>
           <a:prstGeom prst="roundRect">
@@ -4439,7 +4406,7 @@
             <a:pPr algn="ctr"/>
             <a:r>
               <a:rPr sz="1000"/>
-              <a:t>ABC-классификация</a:t>
+              <a:t>Расчёт CV длительности поставок</a:t>
             </a:r>
           </a:p>
         </p:txBody>
@@ -4452,7 +4419,7 @@
         </p:nvSpPr>
         <p:spPr>
           <a:xfrm>
-            <a:off x="6060000" y="1760000"/>
+            <a:off x="4000000" y="7562000"/>
             <a:ext cx="1910000" cy="504000"/>
           </a:xfrm>
           <a:prstGeom prst="rect">
@@ -4468,19 +4435,13 @@
           <a:p>
             <a:r>
               <a:rPr sz="900" b="0"/>
-              <a:t>Вклад в оборот</a:t>
-            </a:r>
-          </a:p>
-          <a:p>
-            <a:r>
-              <a:rPr sz="900" b="0"/>
-              <a:t>Вклад в объём</a:t>
-            </a:r>
-          </a:p>
-          <a:p>
-            <a:r>
-              <a:rPr sz="900" b="0"/>
-              <a:t>Пороги классов</a:t>
+              <a:t>Плановые и фактические длительности поставок</a:t>
+            </a:r>
+          </a:p>
+          <a:p>
+            <a:r>
+              <a:rPr sz="900" b="0"/>
+              <a:t>Отклонения по дугам сети</a:t>
             </a:r>
           </a:p>
         </p:txBody>
@@ -4493,7 +4454,7 @@
         </p:nvSpPr>
         <p:spPr>
           <a:xfrm>
-            <a:off x="6060000" y="2414000"/>
+            <a:off x="4000000" y="8216000"/>
             <a:ext cx="1910000" cy="620000"/>
           </a:xfrm>
           <a:prstGeom prst="roundRect">
@@ -4524,7 +4485,7 @@
             <a:pPr algn="ctr"/>
             <a:r>
               <a:rPr sz="1000"/>
-              <a:t>Сегментация</a:t>
+              <a:t>Корректировка CV длительности поставок</a:t>
             </a:r>
           </a:p>
         </p:txBody>
@@ -4537,8 +4498,8 @@
         </p:nvSpPr>
         <p:spPr>
           <a:xfrm>
-            <a:off x="6060000" y="3134000"/>
-            <a:ext cx="1910000" cy="1008000"/>
+            <a:off x="4000000" y="8936000"/>
+            <a:ext cx="1910000" cy="840000"/>
           </a:xfrm>
           <a:prstGeom prst="rect">
             <a:avLst/>
@@ -4553,53 +4514,40 @@
           <a:p>
             <a:r>
               <a:rPr sz="900" b="0"/>
-              <a:t>Lifecycle: стадия жизненного цикла</a:t>
-            </a:r>
-          </a:p>
-          <a:p>
-            <a:r>
-              <a:rPr sz="900" b="0"/>
-              <a:t>ADI-CV: характер спроса</a:t>
-            </a:r>
-          </a:p>
-          <a:p>
-            <a:r>
-              <a:rPr sz="900" b="0"/>
-              <a:t>ABC: вклад в оборот</a:t>
-            </a:r>
-          </a:p>
-          <a:p>
-            <a:r>
-              <a:rPr sz="900" b="0"/>
-              <a:t>FMR: частота обращения</a:t>
-            </a:r>
-          </a:p>
-          <a:p>
-            <a:r>
-              <a:rPr sz="900" b="0"/>
-              <a:t>XYZ: стабильность потребления</a:t>
-            </a:r>
-          </a:p>
-        </p:txBody>
-      </p:sp>
-      <p:sp>
-        <p:nvSpPr>
-          <p:cNvPr id="32" name="Rectangle 31"/>
+              <a:t>CV длительности поставок</a:t>
+            </a:r>
+          </a:p>
+          <a:p>
+            <a:r>
+              <a:rPr sz="900" b="0"/>
+              <a:t>Новые поставщики и маршруты без истории</a:t>
+            </a:r>
+          </a:p>
+          <a:p>
+            <a:r>
+              <a:rPr sz="900" b="0"/>
+              <a:t>Согласованные изменения условий поставки</a:t>
+            </a:r>
+          </a:p>
+        </p:txBody>
+      </p:sp>
+      <p:sp>
+        <p:nvSpPr>
+          <p:cNvPr id="32" name="Rounded Rectangle 31"/>
           <p:cNvSpPr/>
           <p:nvPr/>
         </p:nvSpPr>
         <p:spPr>
           <a:xfrm>
-            <a:off x="8060000" y="980000"/>
-            <a:ext cx="2030000" cy="13000000"/>
-          </a:xfrm>
-          <a:prstGeom prst="rect">
-            <a:avLst/>
-          </a:prstGeom>
-          <a:noFill/>
-          <a:ln>
-            <a:noFill/>
-          </a:ln>
+            <a:off x="4000000" y="9926000"/>
+            <a:ext cx="1910000" cy="620000"/>
+          </a:xfrm>
+          <a:prstGeom prst="roundRect">
+            <a:avLst/>
+          </a:prstGeom>
+          <a:solidFill>
+            <a:schemeClr val="accent1"/>
+          </a:solidFill>
         </p:spPr>
         <p:style>
           <a:lnRef idx="1">
@@ -4620,6 +4568,10 @@
           <a:lstStyle/>
           <a:p>
             <a:pPr algn="ctr"/>
+            <a:r>
+              <a:rPr sz="1000"/>
+              <a:t>Расчёт CV длительности производства</a:t>
+            </a:r>
           </a:p>
         </p:txBody>
       </p:sp>
@@ -4631,8 +4583,8 @@
         </p:nvSpPr>
         <p:spPr>
           <a:xfrm>
-            <a:off x="8060000" y="500000"/>
-            <a:ext cx="2030000" cy="380000"/>
+            <a:off x="4000000" y="10646000"/>
+            <a:ext cx="1910000" cy="672000"/>
           </a:xfrm>
           <a:prstGeom prst="rect">
             <a:avLst/>
@@ -4646,8 +4598,14 @@
           <a:lstStyle/>
           <a:p>
             <a:r>
-              <a:rPr sz="1100" b="1"/>
-              <a:t>Расчёт и анализ</a:t>
+              <a:rPr sz="900" b="0"/>
+              <a:t>Плановые и фактические длительности производства</a:t>
+            </a:r>
+          </a:p>
+          <a:p>
+            <a:r>
+              <a:rPr sz="900" b="0"/>
+              <a:t>Отклонения по производственным заказам</a:t>
             </a:r>
           </a:p>
         </p:txBody>
@@ -4660,7 +4618,7 @@
         </p:nvSpPr>
         <p:spPr>
           <a:xfrm>
-            <a:off x="8120000" y="1040000"/>
+            <a:off x="4000000" y="11468000"/>
             <a:ext cx="1910000" cy="620000"/>
           </a:xfrm>
           <a:prstGeom prst="roundRect">
@@ -4691,7 +4649,7 @@
             <a:pPr algn="ctr"/>
             <a:r>
               <a:rPr sz="1000"/>
-              <a:t>Определение стратегии MTS-MTO</a:t>
+              <a:t>Корректировка CV длительности производства</a:t>
             </a:r>
           </a:p>
         </p:txBody>
@@ -4704,7 +4662,7 @@
         </p:nvSpPr>
         <p:spPr>
           <a:xfrm>
-            <a:off x="8120000" y="1760000"/>
+            <a:off x="4000000" y="12188000"/>
             <a:ext cx="1910000" cy="672000"/>
           </a:xfrm>
           <a:prstGeom prst="rect">
@@ -4720,40 +4678,41 @@
           <a:p>
             <a:r>
               <a:rPr sz="900" b="0"/>
-              <a:t>Сегментация по пяти признакам</a:t>
-            </a:r>
-          </a:p>
-          <a:p>
-            <a:r>
-              <a:rPr sz="900" b="0"/>
-              <a:t>Длительность цикла против срока ожидания клиента</a:t>
-            </a:r>
-          </a:p>
-          <a:p>
-            <a:r>
-              <a:rPr sz="900" b="0"/>
-              <a:t>Срок годности позиции</a:t>
-            </a:r>
-          </a:p>
-        </p:txBody>
-      </p:sp>
-      <p:sp>
-        <p:nvSpPr>
-          <p:cNvPr id="36" name="Rounded Rectangle 35"/>
+              <a:t>CV длительности производства</a:t>
+            </a:r>
+          </a:p>
+          <a:p>
+            <a:r>
+              <a:rPr sz="900" b="0"/>
+              <a:t>Плановые остановки и ремонты</a:t>
+            </a:r>
+          </a:p>
+          <a:p>
+            <a:r>
+              <a:rPr sz="900" b="0"/>
+              <a:t>Изменения схемы разделки и глубины переработки</a:t>
+            </a:r>
+          </a:p>
+        </p:txBody>
+      </p:sp>
+      <p:sp>
+        <p:nvSpPr>
+          <p:cNvPr id="36" name="Rectangle 35"/>
           <p:cNvSpPr/>
           <p:nvPr/>
         </p:nvSpPr>
         <p:spPr>
           <a:xfrm>
-            <a:off x="8120000" y="2582000"/>
-            <a:ext cx="1910000" cy="620000"/>
-          </a:xfrm>
-          <a:prstGeom prst="roundRect">
-            <a:avLst/>
-          </a:prstGeom>
-          <a:solidFill>
-            <a:schemeClr val="accent1"/>
-          </a:solidFill>
+            <a:off x="6000000" y="980000"/>
+            <a:ext cx="2030000" cy="18500000"/>
+          </a:xfrm>
+          <a:prstGeom prst="rect">
+            <a:avLst/>
+          </a:prstGeom>
+          <a:noFill/>
+          <a:ln>
+            <a:noFill/>
+          </a:ln>
         </p:spPr>
         <p:style>
           <a:lnRef idx="1">
@@ -4774,10 +4733,6 @@
           <a:lstStyle/>
           <a:p>
             <a:pPr algn="ctr"/>
-            <a:r>
-              <a:rPr sz="1000"/>
-              <a:t>Выбор политики пополнения</a:t>
-            </a:r>
           </a:p>
         </p:txBody>
       </p:sp>
@@ -4789,8 +4744,8 @@
         </p:nvSpPr>
         <p:spPr>
           <a:xfrm>
-            <a:off x="8120000" y="3302000"/>
-            <a:ext cx="1910000" cy="840000"/>
+            <a:off x="6000000" y="500000"/>
+            <a:ext cx="2030000" cy="380000"/>
           </a:xfrm>
           <a:prstGeom prst="rect">
             <a:avLst/>
@@ -4804,26 +4759,8 @@
           <a:lstStyle/>
           <a:p>
             <a:r>
-              <a:rPr sz="900" b="0"/>
-              <a:t>Стратегия MTS или MTO по позиции</a:t>
-            </a:r>
-          </a:p>
-          <a:p>
-            <a:r>
-              <a:rPr sz="900" b="0"/>
-              <a:t>Сегментация по пяти признакам</a:t>
-            </a:r>
-          </a:p>
-          <a:p>
-            <a:r>
-              <a:rPr sz="900" b="0"/>
-              <a:t>Календари пополнения</a:t>
-            </a:r>
-          </a:p>
-          <a:p>
-            <a:r>
-              <a:rPr sz="900" b="0"/>
-              <a:t>Минимальный размер партии и кратность</a:t>
+              <a:rPr sz="1100" b="1"/>
+              <a:t>Сегментация</a:t>
             </a:r>
           </a:p>
         </p:txBody>
@@ -4836,7 +4773,7 @@
         </p:nvSpPr>
         <p:spPr>
           <a:xfrm>
-            <a:off x="8120000" y="4292000"/>
+            <a:off x="6060000" y="1040000"/>
             <a:ext cx="1910000" cy="620000"/>
           </a:xfrm>
           <a:prstGeom prst="roundRect">
@@ -4867,7 +4804,7 @@
             <a:pPr algn="ctr"/>
             <a:r>
               <a:rPr sz="1000"/>
-              <a:t>Мультиэшелонная оптимизация</a:t>
+              <a:t>ABC-классификация</a:t>
             </a:r>
           </a:p>
         </p:txBody>
@@ -4880,8 +4817,8 @@
         </p:nvSpPr>
         <p:spPr>
           <a:xfrm>
-            <a:off x="8120000" y="5012000"/>
-            <a:ext cx="1910000" cy="1512000"/>
+            <a:off x="6060000" y="1760000"/>
+            <a:ext cx="1910000" cy="504000"/>
           </a:xfrm>
           <a:prstGeom prst="rect">
             <a:avLst/>
@@ -4896,37 +4833,19 @@
           <a:p>
             <a:r>
               <a:rPr sz="900" b="0"/>
-              <a:t>Настроенные параметры расчёта</a:t>
-            </a:r>
-          </a:p>
-          <a:p>
-            <a:r>
-              <a:rPr sz="900" b="0"/>
-              <a:t>Скорректированный CV спроса</a:t>
-            </a:r>
-          </a:p>
-          <a:p>
-            <a:r>
-              <a:rPr sz="900" b="0"/>
-              <a:t>Скорректированный CV длительности поставок</a:t>
-            </a:r>
-          </a:p>
-          <a:p>
-            <a:r>
-              <a:rPr sz="900" b="0"/>
-              <a:t>Скорректированный CV длительности производства</a:t>
-            </a:r>
-          </a:p>
-          <a:p>
-            <a:r>
-              <a:rPr sz="900" b="0"/>
-              <a:t>Политика пополнения по позиции</a:t>
-            </a:r>
-          </a:p>
-          <a:p>
-            <a:r>
-              <a:rPr sz="900" b="0"/>
-              <a:t>Ограничения: мощности, бюджет, срок годности</a:t>
+              <a:t>Вклад в оборот</a:t>
+            </a:r>
+          </a:p>
+          <a:p>
+            <a:r>
+              <a:rPr sz="900" b="0"/>
+              <a:t>Вклад в объём</a:t>
+            </a:r>
+          </a:p>
+          <a:p>
+            <a:r>
+              <a:rPr sz="900" b="0"/>
+              <a:t>Пороги классов</a:t>
             </a:r>
           </a:p>
         </p:txBody>
@@ -4939,7 +4858,7 @@
         </p:nvSpPr>
         <p:spPr>
           <a:xfrm>
-            <a:off x="8120000" y="6674000"/>
+            <a:off x="6060000" y="2414000"/>
             <a:ext cx="1910000" cy="620000"/>
           </a:xfrm>
           <a:prstGeom prst="roundRect">
@@ -4970,7 +4889,7 @@
             <a:pPr algn="ctr"/>
             <a:r>
               <a:rPr sz="1000"/>
-              <a:t>Изолированная оптимизация</a:t>
+              <a:t>Сегментация</a:t>
             </a:r>
           </a:p>
         </p:txBody>
@@ -4983,8 +4902,8 @@
         </p:nvSpPr>
         <p:spPr>
           <a:xfrm>
-            <a:off x="8120000" y="7394000"/>
-            <a:ext cx="1910000" cy="1176000"/>
+            <a:off x="6060000" y="3134000"/>
+            <a:ext cx="1910000" cy="1008000"/>
           </a:xfrm>
           <a:prstGeom prst="rect">
             <a:avLst/>
@@ -4999,52 +4918,53 @@
           <a:p>
             <a:r>
               <a:rPr sz="900" b="0"/>
-              <a:t>Настроенные параметры расчёта</a:t>
-            </a:r>
-          </a:p>
-          <a:p>
-            <a:r>
-              <a:rPr sz="900" b="0"/>
-              <a:t>Скорректированный CV спроса</a:t>
-            </a:r>
-          </a:p>
-          <a:p>
-            <a:r>
-              <a:rPr sz="900" b="0"/>
-              <a:t>Скорректированный CV длительности поставок</a:t>
-            </a:r>
-          </a:p>
-          <a:p>
-            <a:r>
-              <a:rPr sz="900" b="0"/>
-              <a:t>Скорректированный CV длительности производства</a:t>
-            </a:r>
-          </a:p>
-          <a:p>
-            <a:r>
-              <a:rPr sz="900" b="0"/>
-              <a:t>Политика пополнения по позиции</a:t>
-            </a:r>
-          </a:p>
-        </p:txBody>
-      </p:sp>
-      <p:sp>
-        <p:nvSpPr>
-          <p:cNvPr id="42" name="Rounded Rectangle 41"/>
+              <a:t>Lifecycle: стадия жизненного цикла</a:t>
+            </a:r>
+          </a:p>
+          <a:p>
+            <a:r>
+              <a:rPr sz="900" b="0"/>
+              <a:t>ADI-CV: характер спроса</a:t>
+            </a:r>
+          </a:p>
+          <a:p>
+            <a:r>
+              <a:rPr sz="900" b="0"/>
+              <a:t>ABC: вклад в оборот</a:t>
+            </a:r>
+          </a:p>
+          <a:p>
+            <a:r>
+              <a:rPr sz="900" b="0"/>
+              <a:t>FMR: частота обращения</a:t>
+            </a:r>
+          </a:p>
+          <a:p>
+            <a:r>
+              <a:rPr sz="900" b="0"/>
+              <a:t>XYZ: стабильность потребления</a:t>
+            </a:r>
+          </a:p>
+        </p:txBody>
+      </p:sp>
+      <p:sp>
+        <p:nvSpPr>
+          <p:cNvPr id="42" name="Rectangle 41"/>
           <p:cNvSpPr/>
           <p:nvPr/>
         </p:nvSpPr>
         <p:spPr>
           <a:xfrm>
-            <a:off x="8120000" y="8720000"/>
-            <a:ext cx="1910000" cy="620000"/>
-          </a:xfrm>
-          <a:prstGeom prst="roundRect">
-            <a:avLst/>
-          </a:prstGeom>
-          <a:solidFill>
-            <a:schemeClr val="accent1"/>
-          </a:solidFill>
+            <a:off x="8060000" y="980000"/>
+            <a:ext cx="2030000" cy="18500000"/>
+          </a:xfrm>
+          <a:prstGeom prst="rect">
+            <a:avLst/>
+          </a:prstGeom>
+          <a:noFill/>
+          <a:ln>
+            <a:noFill/>
+          </a:ln>
         </p:spPr>
         <p:style>
           <a:lnRef idx="1">
@@ -5065,10 +4985,6 @@
           <a:lstStyle/>
           <a:p>
             <a:pPr algn="ctr"/>
-            <a:r>
-              <a:rPr sz="1000"/>
-              <a:t>Сценарное моделирование</a:t>
-            </a:r>
           </a:p>
         </p:txBody>
       </p:sp>
@@ -5080,8 +4996,8 @@
         </p:nvSpPr>
         <p:spPr>
           <a:xfrm>
-            <a:off x="8120000" y="9440000"/>
-            <a:ext cx="1910000" cy="2016000"/>
+            <a:off x="8060000" y="500000"/>
+            <a:ext cx="2030000" cy="380000"/>
           </a:xfrm>
           <a:prstGeom prst="rect">
             <a:avLst/>
@@ -5095,50 +5011,8 @@
           <a:lstStyle/>
           <a:p>
             <a:r>
-              <a:rPr sz="900" b="0"/>
-              <a:t>База (as is): текущие политики и параметры</a:t>
-            </a:r>
-          </a:p>
-          <a:p>
-            <a:r>
-              <a:rPr sz="900" b="0"/>
-              <a:t>Пересчёт по фильтрам: склад, канал, категория, сегмент</a:t>
-            </a:r>
-          </a:p>
-          <a:p>
-            <a:r>
-              <a:rPr sz="900" b="0"/>
-              <a:t>Сервис 98% по федеральным сетям</a:t>
-            </a:r>
-          </a:p>
-          <a:p>
-            <a:r>
-              <a:rPr sz="900" b="0"/>
-              <a:t>Учащённое пополнение охлаждённой продукции</a:t>
-            </a:r>
-          </a:p>
-          <a:p>
-            <a:r>
-              <a:rPr sz="900" b="0"/>
-              <a:t>Сокращение лидтайма и его разброса</a:t>
-            </a:r>
-          </a:p>
-          <a:p>
-            <a:r>
-              <a:rPr sz="900" b="0"/>
-              <a:t>Ограничение по мощностям холода</a:t>
-            </a:r>
-          </a:p>
-          <a:p>
-            <a:r>
-              <a:rPr sz="900" b="0"/>
-              <a:t>Бюджет запаса −15%</a:t>
-            </a:r>
-          </a:p>
-          <a:p>
-            <a:r>
-              <a:rPr sz="900" b="0"/>
-              <a:t>Сезонный пик: май–сентябрь</a:t>
+              <a:rPr sz="1100" b="1"/>
+              <a:t>Расчёт и анализ</a:t>
             </a:r>
           </a:p>
         </p:txBody>
@@ -5151,7 +5025,7 @@
         </p:nvSpPr>
         <p:spPr>
           <a:xfrm>
-            <a:off x="8120000" y="11606000"/>
+            <a:off x="8120000" y="1040000"/>
             <a:ext cx="1910000" cy="620000"/>
           </a:xfrm>
           <a:prstGeom prst="roundRect">
@@ -5182,7 +5056,7 @@
             <a:pPr algn="ctr"/>
             <a:r>
               <a:rPr sz="1000"/>
-              <a:t>Сравнение со страховыми запасами</a:t>
+              <a:t>Определение стратегии MTS-MTO</a:t>
             </a:r>
           </a:p>
         </p:txBody>
@@ -5195,8 +5069,8 @@
         </p:nvSpPr>
         <p:spPr>
           <a:xfrm>
-            <a:off x="8120000" y="12326000"/>
-            <a:ext cx="1910000" cy="840000"/>
+            <a:off x="8120000" y="1760000"/>
+            <a:ext cx="1910000" cy="672000"/>
           </a:xfrm>
           <a:prstGeom prst="rect">
             <a:avLst/>
@@ -5211,19 +5085,19 @@
           <a:p>
             <a:r>
               <a:rPr sz="900" b="0"/>
-              <a:t>Рекомендованные уровни запасов по эшелонам</a:t>
-            </a:r>
-          </a:p>
-          <a:p>
-            <a:r>
-              <a:rPr sz="900" b="0"/>
-              <a:t>Действующие страховые запасы</a:t>
-            </a:r>
-          </a:p>
-          <a:p>
-            <a:r>
-              <a:rPr sz="900" b="0"/>
-              <a:t>Уровни запасов по узлам без учёта сети</a:t>
+              <a:t>Сегментация по пяти признакам</a:t>
+            </a:r>
+          </a:p>
+          <a:p>
+            <a:r>
+              <a:rPr sz="900" b="0"/>
+              <a:t>Длительность цикла против срока ожидания клиента</a:t>
+            </a:r>
+          </a:p>
+          <a:p>
+            <a:r>
+              <a:rPr sz="900" b="0"/>
+              <a:t>Срок годности позиции</a:t>
             </a:r>
           </a:p>
         </p:txBody>
@@ -5236,7 +5110,7 @@
         </p:nvSpPr>
         <p:spPr>
           <a:xfrm>
-            <a:off x="8120000" y="13316000"/>
+            <a:off x="8120000" y="2582000"/>
             <a:ext cx="1910000" cy="620000"/>
           </a:xfrm>
           <a:prstGeom prst="roundRect">
@@ -5267,7 +5141,7 @@
             <a:pPr algn="ctr"/>
             <a:r>
               <a:rPr sz="1000"/>
-              <a:t>Анализ предупреждений расчёта</a:t>
+              <a:t>Выбор политики пополнения</a:t>
             </a:r>
           </a:p>
         </p:txBody>
@@ -5280,8 +5154,8 @@
         </p:nvSpPr>
         <p:spPr>
           <a:xfrm>
-            <a:off x="8120000" y="14036000"/>
-            <a:ext cx="1910000" cy="1344000"/>
+            <a:off x="8120000" y="3302000"/>
+            <a:ext cx="1910000" cy="840000"/>
           </a:xfrm>
           <a:prstGeom prst="rect">
             <a:avLst/>
@@ -5296,45 +5170,45 @@
           <a:p>
             <a:r>
               <a:rPr sz="900" b="0"/>
-              <a:t>Предупреждение: покрытие превышает остаточный срок годности</a:t>
-            </a:r>
-          </a:p>
-          <a:p>
-            <a:r>
-              <a:rPr sz="900" b="0"/>
-              <a:t>Предупреждение: рекомендованный уровень ниже минимальной партии</a:t>
-            </a:r>
-          </a:p>
-          <a:p>
-            <a:r>
-              <a:rPr sz="900" b="0"/>
-              <a:t>Предупреждение: целевой запас не помещается в мощности хранения</a:t>
-            </a:r>
-          </a:p>
-          <a:p>
-            <a:r>
-              <a:rPr sz="900" b="0"/>
-              <a:t>Предупреждение: отклонение от целевого уровня сервиса</a:t>
-            </a:r>
-          </a:p>
-        </p:txBody>
-      </p:sp>
-      <p:sp>
-        <p:nvSpPr>
-          <p:cNvPr id="48" name="Rectangle 47"/>
+              <a:t>Стратегия MTS или MTO по позиции</a:t>
+            </a:r>
+          </a:p>
+          <a:p>
+            <a:r>
+              <a:rPr sz="900" b="0"/>
+              <a:t>Сегментация по пяти признакам</a:t>
+            </a:r>
+          </a:p>
+          <a:p>
+            <a:r>
+              <a:rPr sz="900" b="0"/>
+              <a:t>Календари пополнения</a:t>
+            </a:r>
+          </a:p>
+          <a:p>
+            <a:r>
+              <a:rPr sz="900" b="0"/>
+              <a:t>Минимальный размер партии и кратность</a:t>
+            </a:r>
+          </a:p>
+        </p:txBody>
+      </p:sp>
+      <p:sp>
+        <p:nvSpPr>
+          <p:cNvPr id="48" name="Rounded Rectangle 47"/>
           <p:cNvSpPr/>
           <p:nvPr/>
         </p:nvSpPr>
         <p:spPr>
           <a:xfrm>
-            <a:off x="8120000" y="15530000"/>
+            <a:off x="8120000" y="4292000"/>
             <a:ext cx="1910000" cy="620000"/>
           </a:xfrm>
-          <a:prstGeom prst="rect">
+          <a:prstGeom prst="roundRect">
             <a:avLst/>
           </a:prstGeom>
           <a:solidFill>
-            <a:schemeClr val="accent2"/>
+            <a:schemeClr val="accent1"/>
           </a:solidFill>
         </p:spPr>
         <p:style>
@@ -5357,30 +5231,88 @@
           <a:p>
             <a:pPr algn="ctr"/>
             <a:r>
-              <a:rPr sz="900"/>
-              <a:t>Уровни запасов в SNP/PS и MRP</a:t>
-            </a:r>
-          </a:p>
-        </p:txBody>
-      </p:sp>
-      <p:sp>
-        <p:nvSpPr>
-          <p:cNvPr id="49" name="Rectangle 48"/>
+              <a:rPr sz="1000"/>
+              <a:t>Мультиэшелонная оптимизация</a:t>
+            </a:r>
+          </a:p>
+        </p:txBody>
+      </p:sp>
+      <p:sp>
+        <p:nvSpPr>
+          <p:cNvPr id="49" name="TextBox 48"/>
+          <p:cNvSpPr txBox="1"/>
+          <p:nvPr/>
+        </p:nvSpPr>
+        <p:spPr>
+          <a:xfrm>
+            <a:off x="8120000" y="5012000"/>
+            <a:ext cx="1910000" cy="1512000"/>
+          </a:xfrm>
+          <a:prstGeom prst="rect">
+            <a:avLst/>
+          </a:prstGeom>
+          <a:noFill/>
+        </p:spPr>
+        <p:txBody>
+          <a:bodyPr wrap="square">
+            <a:spAutoFit/>
+          </a:bodyPr>
+          <a:lstStyle/>
+          <a:p>
+            <a:r>
+              <a:rPr sz="900" b="0"/>
+              <a:t>Настроенные параметры расчёта</a:t>
+            </a:r>
+          </a:p>
+          <a:p>
+            <a:r>
+              <a:rPr sz="900" b="0"/>
+              <a:t>Скорректированный CV спроса</a:t>
+            </a:r>
+          </a:p>
+          <a:p>
+            <a:r>
+              <a:rPr sz="900" b="0"/>
+              <a:t>Скорректированный CV длительности поставок</a:t>
+            </a:r>
+          </a:p>
+          <a:p>
+            <a:r>
+              <a:rPr sz="900" b="0"/>
+              <a:t>Скорректированный CV длительности производства</a:t>
+            </a:r>
+          </a:p>
+          <a:p>
+            <a:r>
+              <a:rPr sz="900" b="0"/>
+              <a:t>Политика пополнения по позиции</a:t>
+            </a:r>
+          </a:p>
+          <a:p>
+            <a:r>
+              <a:rPr sz="900" b="0"/>
+              <a:t>Ограничения: мощности, бюджет, срок годности</a:t>
+            </a:r>
+          </a:p>
+        </p:txBody>
+      </p:sp>
+      <p:sp>
+        <p:nvSpPr>
+          <p:cNvPr id="50" name="Rounded Rectangle 49"/>
           <p:cNvSpPr/>
           <p:nvPr/>
         </p:nvSpPr>
         <p:spPr>
           <a:xfrm>
-            <a:off x="10120000" y="980000"/>
-            <a:ext cx="2030000" cy="13000000"/>
-          </a:xfrm>
-          <a:prstGeom prst="rect">
-            <a:avLst/>
-          </a:prstGeom>
-          <a:noFill/>
-          <a:ln>
-            <a:noFill/>
-          </a:ln>
+            <a:off x="8120000" y="6674000"/>
+            <a:ext cx="1910000" cy="620000"/>
+          </a:xfrm>
+          <a:prstGeom prst="roundRect">
+            <a:avLst/>
+          </a:prstGeom>
+          <a:solidFill>
+            <a:schemeClr val="accent1"/>
+          </a:solidFill>
         </p:spPr>
         <p:style>
           <a:lnRef idx="1">
@@ -5401,19 +5333,23 @@
           <a:lstStyle/>
           <a:p>
             <a:pPr algn="ctr"/>
-          </a:p>
-        </p:txBody>
-      </p:sp>
-      <p:sp>
-        <p:nvSpPr>
-          <p:cNvPr id="50" name="TextBox 49"/>
+            <a:r>
+              <a:rPr sz="1000"/>
+              <a:t>Изолированная оптимизация</a:t>
+            </a:r>
+          </a:p>
+        </p:txBody>
+      </p:sp>
+      <p:sp>
+        <p:nvSpPr>
+          <p:cNvPr id="51" name="TextBox 50"/>
           <p:cNvSpPr txBox="1"/>
           <p:nvPr/>
         </p:nvSpPr>
         <p:spPr>
           <a:xfrm>
-            <a:off x="10120000" y="500000"/>
-            <a:ext cx="2030000" cy="380000"/>
+            <a:off x="8120000" y="7394000"/>
+            <a:ext cx="1910000" cy="1176000"/>
           </a:xfrm>
           <a:prstGeom prst="rect">
             <a:avLst/>
@@ -5427,21 +5363,45 @@
           <a:lstStyle/>
           <a:p>
             <a:r>
-              <a:rPr sz="1100" b="1"/>
-              <a:t>Оценка эффектов</a:t>
-            </a:r>
-          </a:p>
-        </p:txBody>
-      </p:sp>
-      <p:sp>
-        <p:nvSpPr>
-          <p:cNvPr id="51" name="Rounded Rectangle 50"/>
+              <a:rPr sz="900" b="0"/>
+              <a:t>Настроенные параметры расчёта</a:t>
+            </a:r>
+          </a:p>
+          <a:p>
+            <a:r>
+              <a:rPr sz="900" b="0"/>
+              <a:t>Скорректированный CV спроса</a:t>
+            </a:r>
+          </a:p>
+          <a:p>
+            <a:r>
+              <a:rPr sz="900" b="0"/>
+              <a:t>Скорректированный CV длительности поставок</a:t>
+            </a:r>
+          </a:p>
+          <a:p>
+            <a:r>
+              <a:rPr sz="900" b="0"/>
+              <a:t>Скорректированный CV длительности производства</a:t>
+            </a:r>
+          </a:p>
+          <a:p>
+            <a:r>
+              <a:rPr sz="900" b="0"/>
+              <a:t>Политика пополнения по позиции</a:t>
+            </a:r>
+          </a:p>
+        </p:txBody>
+      </p:sp>
+      <p:sp>
+        <p:nvSpPr>
+          <p:cNvPr id="52" name="Rounded Rectangle 51"/>
           <p:cNvSpPr/>
           <p:nvPr/>
         </p:nvSpPr>
         <p:spPr>
           <a:xfrm>
-            <a:off x="10180000" y="1040000"/>
+            <a:off x="8120000" y="8720000"/>
             <a:ext cx="1910000" cy="620000"/>
           </a:xfrm>
           <a:prstGeom prst="roundRect">
@@ -5472,21 +5432,21 @@
             <a:pPr algn="ctr"/>
             <a:r>
               <a:rPr sz="1000"/>
-              <a:t>Отчёт по ошибке прогноза</a:t>
-            </a:r>
-          </a:p>
-        </p:txBody>
-      </p:sp>
-      <p:sp>
-        <p:nvSpPr>
-          <p:cNvPr id="52" name="TextBox 51"/>
+              <a:t>Сценарное моделирование</a:t>
+            </a:r>
+          </a:p>
+        </p:txBody>
+      </p:sp>
+      <p:sp>
+        <p:nvSpPr>
+          <p:cNvPr id="53" name="TextBox 52"/>
           <p:cNvSpPr txBox="1"/>
           <p:nvPr/>
         </p:nvSpPr>
         <p:spPr>
           <a:xfrm>
-            <a:off x="10180000" y="1760000"/>
-            <a:ext cx="1910000" cy="336000"/>
+            <a:off x="8120000" y="9440000"/>
+            <a:ext cx="1910000" cy="2016000"/>
           </a:xfrm>
           <a:prstGeom prst="rect">
             <a:avLst/>
@@ -5501,26 +5461,62 @@
           <a:p>
             <a:r>
               <a:rPr sz="900" b="0"/>
-              <a:t>Прогноз спроса из DP</a:t>
-            </a:r>
-          </a:p>
-          <a:p>
-            <a:r>
-              <a:rPr sz="900" b="0"/>
-              <a:t>Фактические отгрузки за период</a:t>
-            </a:r>
-          </a:p>
-        </p:txBody>
-      </p:sp>
-      <p:sp>
-        <p:nvSpPr>
-          <p:cNvPr id="53" name="Rounded Rectangle 52"/>
+              <a:t>База (as is): текущие политики и параметры</a:t>
+            </a:r>
+          </a:p>
+          <a:p>
+            <a:r>
+              <a:rPr sz="900" b="0"/>
+              <a:t>Пересчёт по фильтрам: склад, канал, категория, сегмент</a:t>
+            </a:r>
+          </a:p>
+          <a:p>
+            <a:r>
+              <a:rPr sz="900" b="0"/>
+              <a:t>Сервис 98% по федеральным сетям</a:t>
+            </a:r>
+          </a:p>
+          <a:p>
+            <a:r>
+              <a:rPr sz="900" b="0"/>
+              <a:t>Учащённое пополнение охлаждённой продукции</a:t>
+            </a:r>
+          </a:p>
+          <a:p>
+            <a:r>
+              <a:rPr sz="900" b="0"/>
+              <a:t>Сокращение лидтайма и его разброса</a:t>
+            </a:r>
+          </a:p>
+          <a:p>
+            <a:r>
+              <a:rPr sz="900" b="0"/>
+              <a:t>Ограничение по мощностям холода</a:t>
+            </a:r>
+          </a:p>
+          <a:p>
+            <a:r>
+              <a:rPr sz="900" b="0"/>
+              <a:t>Бюджет запаса −15%</a:t>
+            </a:r>
+          </a:p>
+          <a:p>
+            <a:r>
+              <a:rPr sz="900" b="0"/>
+              <a:t>Сезонный пик: май–сентябрь</a:t>
+            </a:r>
+          </a:p>
+        </p:txBody>
+      </p:sp>
+      <p:sp>
+        <p:nvSpPr>
+          <p:cNvPr id="54" name="Rounded Rectangle 53"/>
           <p:cNvSpPr/>
           <p:nvPr/>
         </p:nvSpPr>
         <p:spPr>
           <a:xfrm>
-            <a:off x="10180000" y="2246000"/>
+            <a:off x="8120000" y="11606000"/>
             <a:ext cx="1910000" cy="620000"/>
           </a:xfrm>
           <a:prstGeom prst="roundRect">
@@ -5551,21 +5547,21 @@
             <a:pPr algn="ctr"/>
             <a:r>
               <a:rPr sz="1000"/>
-              <a:t>Отчёт по сегментации</a:t>
-            </a:r>
-          </a:p>
-        </p:txBody>
-      </p:sp>
-      <p:sp>
-        <p:nvSpPr>
-          <p:cNvPr id="54" name="TextBox 53"/>
+              <a:t>Сравнение со страховыми запасами</a:t>
+            </a:r>
+          </a:p>
+        </p:txBody>
+      </p:sp>
+      <p:sp>
+        <p:nvSpPr>
+          <p:cNvPr id="55" name="TextBox 54"/>
           <p:cNvSpPr txBox="1"/>
           <p:nvPr/>
         </p:nvSpPr>
         <p:spPr>
           <a:xfrm>
-            <a:off x="10180000" y="2966000"/>
-            <a:ext cx="1910000" cy="336000"/>
+            <a:off x="8120000" y="12326000"/>
+            <a:ext cx="1910000" cy="840000"/>
           </a:xfrm>
           <a:prstGeom prst="rect">
             <a:avLst/>
@@ -5580,26 +5576,32 @@
           <a:p>
             <a:r>
               <a:rPr sz="900" b="0"/>
-              <a:t>Сегментация по пяти признакам</a:t>
-            </a:r>
-          </a:p>
-          <a:p>
-            <a:r>
-              <a:rPr sz="900" b="0"/>
-              <a:t>Классы ABC</a:t>
-            </a:r>
-          </a:p>
-        </p:txBody>
-      </p:sp>
-      <p:sp>
-        <p:nvSpPr>
-          <p:cNvPr id="55" name="Rounded Rectangle 54"/>
+              <a:t>Рекомендованные уровни запасов по эшелонам</a:t>
+            </a:r>
+          </a:p>
+          <a:p>
+            <a:r>
+              <a:rPr sz="900" b="0"/>
+              <a:t>Действующие страховые запасы</a:t>
+            </a:r>
+          </a:p>
+          <a:p>
+            <a:r>
+              <a:rPr sz="900" b="0"/>
+              <a:t>Уровни запасов по узлам без учёта сети</a:t>
+            </a:r>
+          </a:p>
+        </p:txBody>
+      </p:sp>
+      <p:sp>
+        <p:nvSpPr>
+          <p:cNvPr id="56" name="Rounded Rectangle 55"/>
           <p:cNvSpPr/>
           <p:nvPr/>
         </p:nvSpPr>
         <p:spPr>
           <a:xfrm>
-            <a:off x="10180000" y="3452000"/>
+            <a:off x="8120000" y="13316000"/>
             <a:ext cx="1910000" cy="620000"/>
           </a:xfrm>
           <a:prstGeom prst="roundRect">
@@ -5630,21 +5632,21 @@
             <a:pPr algn="ctr"/>
             <a:r>
               <a:rPr sz="1000"/>
-              <a:t>Отчёт по страховым запасам</a:t>
-            </a:r>
-          </a:p>
-        </p:txBody>
-      </p:sp>
-      <p:sp>
-        <p:nvSpPr>
-          <p:cNvPr id="56" name="TextBox 55"/>
+              <a:t>Анализ предупреждений расчёта</a:t>
+            </a:r>
+          </a:p>
+        </p:txBody>
+      </p:sp>
+      <p:sp>
+        <p:nvSpPr>
+          <p:cNvPr id="57" name="TextBox 56"/>
           <p:cNvSpPr txBox="1"/>
           <p:nvPr/>
         </p:nvSpPr>
         <p:spPr>
           <a:xfrm>
-            <a:off x="10180000" y="4172000"/>
-            <a:ext cx="1910000" cy="504000"/>
+            <a:off x="8120000" y="14036000"/>
+            <a:ext cx="1910000" cy="1344000"/>
           </a:xfrm>
           <a:prstGeom prst="rect">
             <a:avLst/>
@@ -5659,33 +5661,45 @@
           <a:p>
             <a:r>
               <a:rPr sz="900" b="0"/>
-              <a:t>Рекомендованные уровни запасов по эшелонам</a:t>
-            </a:r>
-          </a:p>
-          <a:p>
-            <a:r>
-              <a:rPr sz="900" b="0"/>
-              <a:t>Три сценария</a:t>
-            </a:r>
-          </a:p>
-        </p:txBody>
-      </p:sp>
-      <p:sp>
-        <p:nvSpPr>
-          <p:cNvPr id="57" name="Rounded Rectangle 56"/>
+              <a:t>Предупреждение: покрытие превышает остаточный срок годности</a:t>
+            </a:r>
+          </a:p>
+          <a:p>
+            <a:r>
+              <a:rPr sz="900" b="0"/>
+              <a:t>Предупреждение: рекомендованный уровень ниже минимальной партии</a:t>
+            </a:r>
+          </a:p>
+          <a:p>
+            <a:r>
+              <a:rPr sz="900" b="0"/>
+              <a:t>Предупреждение: целевой запас не помещается в мощности хранения</a:t>
+            </a:r>
+          </a:p>
+          <a:p>
+            <a:r>
+              <a:rPr sz="900" b="0"/>
+              <a:t>Предупреждение: отклонение от целевого уровня сервиса</a:t>
+            </a:r>
+          </a:p>
+        </p:txBody>
+      </p:sp>
+      <p:sp>
+        <p:nvSpPr>
+          <p:cNvPr id="58" name="Rectangle 57"/>
           <p:cNvSpPr/>
           <p:nvPr/>
         </p:nvSpPr>
         <p:spPr>
           <a:xfrm>
-            <a:off x="10180000" y="4826000"/>
+            <a:off x="8120000" y="15530000"/>
             <a:ext cx="1910000" cy="620000"/>
           </a:xfrm>
-          <a:prstGeom prst="roundRect">
+          <a:prstGeom prst="rect">
             <a:avLst/>
           </a:prstGeom>
           <a:solidFill>
-            <a:schemeClr val="accent1"/>
+            <a:schemeClr val="accent2"/>
           </a:solidFill>
         </p:spPr>
         <p:style>
@@ -5708,76 +5722,30 @@
           <a:p>
             <a:pPr algn="ctr"/>
             <a:r>
-              <a:rPr sz="1000"/>
-              <a:t>Отчёт по OTIF</a:t>
-            </a:r>
-          </a:p>
-        </p:txBody>
-      </p:sp>
-      <p:sp>
-        <p:nvSpPr>
-          <p:cNvPr id="58" name="TextBox 57"/>
-          <p:cNvSpPr txBox="1"/>
-          <p:nvPr/>
-        </p:nvSpPr>
-        <p:spPr>
-          <a:xfrm>
-            <a:off x="10180000" y="5546000"/>
-            <a:ext cx="1910000" cy="1176000"/>
+              <a:rPr sz="900"/>
+              <a:t>Уровни запасов в SNP/PS и MRP</a:t>
+            </a:r>
+          </a:p>
+        </p:txBody>
+      </p:sp>
+      <p:sp>
+        <p:nvSpPr>
+          <p:cNvPr id="59" name="Rectangle 58"/>
+          <p:cNvSpPr/>
+          <p:nvPr/>
+        </p:nvSpPr>
+        <p:spPr>
+          <a:xfrm>
+            <a:off x="10120000" y="980000"/>
+            <a:ext cx="2030000" cy="18500000"/>
           </a:xfrm>
           <a:prstGeom prst="rect">
             <a:avLst/>
           </a:prstGeom>
           <a:noFill/>
-        </p:spPr>
-        <p:txBody>
-          <a:bodyPr wrap="square">
-            <a:spAutoFit/>
-          </a:bodyPr>
-          <a:lstStyle/>
-          <a:p>
-            <a:r>
-              <a:rPr sz="900" b="0"/>
-              <a:t>Заказы клиентов: даты и количества</a:t>
-            </a:r>
-          </a:p>
-          <a:p>
-            <a:r>
-              <a:rPr sz="900" b="0"/>
-              <a:t>Фактические отгрузки: даты и количества</a:t>
-            </a:r>
-          </a:p>
-          <a:p>
-            <a:r>
-              <a:rPr sz="900" b="0"/>
-              <a:t>Целевой OTIF по каналам и сетям</a:t>
-            </a:r>
-          </a:p>
-          <a:p>
-            <a:r>
-              <a:rPr sz="900" b="0"/>
-              <a:t>Опубликованные нормативы прошлого цикла</a:t>
-            </a:r>
-          </a:p>
-        </p:txBody>
-      </p:sp>
-      <p:sp>
-        <p:nvSpPr>
-          <p:cNvPr id="59" name="Rounded Rectangle 58"/>
-          <p:cNvSpPr/>
-          <p:nvPr/>
-        </p:nvSpPr>
-        <p:spPr>
-          <a:xfrm>
-            <a:off x="10180000" y="6872000"/>
-            <a:ext cx="1910000" cy="620000"/>
-          </a:xfrm>
-          <a:prstGeom prst="roundRect">
-            <a:avLst/>
-          </a:prstGeom>
-          <a:solidFill>
-            <a:schemeClr val="accent1"/>
-          </a:solidFill>
+          <a:ln>
+            <a:noFill/>
+          </a:ln>
         </p:spPr>
         <p:style>
           <a:lnRef idx="1">
@@ -5798,10 +5766,6 @@
           <a:lstStyle/>
           <a:p>
             <a:pPr algn="ctr"/>
-            <a:r>
-              <a:rPr sz="1000"/>
-              <a:t>Оценка эффектов</a:t>
-            </a:r>
           </a:p>
         </p:txBody>
       </p:sp>
@@ -5813,8 +5777,8 @@
         </p:nvSpPr>
         <p:spPr>
           <a:xfrm>
-            <a:off x="10180000" y="7592000"/>
-            <a:ext cx="1910000" cy="672000"/>
+            <a:off x="10120000" y="500000"/>
+            <a:ext cx="2030000" cy="380000"/>
           </a:xfrm>
           <a:prstGeom prst="rect">
             <a:avLst/>
@@ -5828,26 +5792,8 @@
           <a:lstStyle/>
           <a:p>
             <a:r>
-              <a:rPr sz="900" b="0"/>
-              <a:t>Ошибка прогноза по горизонту</a:t>
-            </a:r>
-          </a:p>
-          <a:p>
-            <a:r>
-              <a:rPr sz="900" b="0"/>
-              <a:t>Отчёт по сегментации</a:t>
-            </a:r>
-          </a:p>
-          <a:p>
-            <a:r>
-              <a:rPr sz="900" b="0"/>
-              <a:t>Отчёт по страховым запасам</a:t>
-            </a:r>
-          </a:p>
-          <a:p>
-            <a:r>
-              <a:rPr sz="900" b="0"/>
-              <a:t>Сравнение сценариев по эффектам</a:t>
+              <a:rPr sz="1100" b="1"/>
+              <a:t>Оценка эффектов</a:t>
             </a:r>
           </a:p>
         </p:txBody>
@@ -5860,7 +5806,7 @@
         </p:nvSpPr>
         <p:spPr>
           <a:xfrm>
-            <a:off x="10180000" y="8414000"/>
+            <a:off x="10180000" y="1040000"/>
             <a:ext cx="1910000" cy="620000"/>
           </a:xfrm>
           <a:prstGeom prst="roundRect">
@@ -5891,7 +5837,7 @@
             <a:pPr algn="ctr"/>
             <a:r>
               <a:rPr sz="1000"/>
-              <a:t>Передача нормативов по запасам в SNP</a:t>
+              <a:t>Отчёт по ошибке прогноза</a:t>
             </a:r>
           </a:p>
         </p:txBody>
@@ -5904,8 +5850,8 @@
         </p:nvSpPr>
         <p:spPr>
           <a:xfrm>
-            <a:off x="10180000" y="9134000"/>
-            <a:ext cx="1910000" cy="1008000"/>
+            <a:off x="10180000" y="1760000"/>
+            <a:ext cx="1910000" cy="336000"/>
           </a:xfrm>
           <a:prstGeom prst="rect">
             <a:avLst/>
@@ -5920,39 +5866,33 @@
           <a:p>
             <a:r>
               <a:rPr sz="900" b="0"/>
-              <a:t>Утверждённые уровни запасов по эшелонам</a:t>
-            </a:r>
-          </a:p>
-          <a:p>
-            <a:r>
-              <a:rPr sz="900" b="0"/>
-              <a:t>Точка заказа и рекомендованный уровень сервиса</a:t>
-            </a:r>
-          </a:p>
-          <a:p>
-            <a:r>
-              <a:rPr sz="900" b="0"/>
-              <a:t>Горизонт и дата вступления в силу</a:t>
-            </a:r>
-          </a:p>
-        </p:txBody>
-      </p:sp>
-      <p:sp>
-        <p:nvSpPr>
-          <p:cNvPr id="63" name="Rectangle 62"/>
+              <a:t>Прогноз спроса из DP</a:t>
+            </a:r>
+          </a:p>
+          <a:p>
+            <a:r>
+              <a:rPr sz="900" b="0"/>
+              <a:t>Фактические отгрузки за период</a:t>
+            </a:r>
+          </a:p>
+        </p:txBody>
+      </p:sp>
+      <p:sp>
+        <p:nvSpPr>
+          <p:cNvPr id="63" name="Rounded Rectangle 62"/>
           <p:cNvSpPr/>
           <p:nvPr/>
         </p:nvSpPr>
         <p:spPr>
           <a:xfrm>
-            <a:off x="10180000" y="10292000"/>
+            <a:off x="10180000" y="2246000"/>
             <a:ext cx="1910000" cy="620000"/>
           </a:xfrm>
-          <a:prstGeom prst="rect">
+          <a:prstGeom prst="roundRect">
             <a:avLst/>
           </a:prstGeom>
           <a:solidFill>
-            <a:schemeClr val="accent2"/>
+            <a:schemeClr val="accent1"/>
           </a:solidFill>
         </p:spPr>
         <p:style>
@@ -5975,28 +5915,63 @@
           <a:p>
             <a:pPr algn="ctr"/>
             <a:r>
-              <a:rPr sz="900"/>
-              <a:t>Оценка эффектов и рекомендации</a:t>
-            </a:r>
-          </a:p>
-        </p:txBody>
-      </p:sp>
-      <p:sp>
-        <p:nvSpPr>
-          <p:cNvPr id="64" name="Rectangle 63"/>
+              <a:rPr sz="1000"/>
+              <a:t>Отчёт по сегментации</a:t>
+            </a:r>
+          </a:p>
+        </p:txBody>
+      </p:sp>
+      <p:sp>
+        <p:nvSpPr>
+          <p:cNvPr id="64" name="TextBox 63"/>
+          <p:cNvSpPr txBox="1"/>
+          <p:nvPr/>
+        </p:nvSpPr>
+        <p:spPr>
+          <a:xfrm>
+            <a:off x="10180000" y="2966000"/>
+            <a:ext cx="1910000" cy="336000"/>
+          </a:xfrm>
+          <a:prstGeom prst="rect">
+            <a:avLst/>
+          </a:prstGeom>
+          <a:noFill/>
+        </p:spPr>
+        <p:txBody>
+          <a:bodyPr wrap="square">
+            <a:spAutoFit/>
+          </a:bodyPr>
+          <a:lstStyle/>
+          <a:p>
+            <a:r>
+              <a:rPr sz="900" b="0"/>
+              <a:t>Сегментация по пяти признакам</a:t>
+            </a:r>
+          </a:p>
+          <a:p>
+            <a:r>
+              <a:rPr sz="900" b="0"/>
+              <a:t>Классы ABC</a:t>
+            </a:r>
+          </a:p>
+        </p:txBody>
+      </p:sp>
+      <p:sp>
+        <p:nvSpPr>
+          <p:cNvPr id="65" name="Rounded Rectangle 64"/>
           <p:cNvSpPr/>
           <p:nvPr/>
         </p:nvSpPr>
         <p:spPr>
           <a:xfrm>
-            <a:off x="10180000" y="11062000"/>
+            <a:off x="10180000" y="3452000"/>
             <a:ext cx="1910000" cy="620000"/>
           </a:xfrm>
-          <a:prstGeom prst="rect">
+          <a:prstGeom prst="roundRect">
             <a:avLst/>
           </a:prstGeom>
           <a:solidFill>
-            <a:schemeClr val="accent2"/>
+            <a:schemeClr val="accent1"/>
           </a:solidFill>
         </p:spPr>
         <p:style>
@@ -6019,28 +5994,63 @@
           <a:p>
             <a:pPr algn="ctr"/>
             <a:r>
-              <a:rPr sz="900"/>
-              <a:t>Нормативы запасов в SNP</a:t>
-            </a:r>
-          </a:p>
-        </p:txBody>
-      </p:sp>
-      <p:sp>
-        <p:nvSpPr>
-          <p:cNvPr id="65" name="Rectangle 64"/>
+              <a:rPr sz="1000"/>
+              <a:t>Отчёт по страховым запасам</a:t>
+            </a:r>
+          </a:p>
+        </p:txBody>
+      </p:sp>
+      <p:sp>
+        <p:nvSpPr>
+          <p:cNvPr id="66" name="TextBox 65"/>
+          <p:cNvSpPr txBox="1"/>
+          <p:nvPr/>
+        </p:nvSpPr>
+        <p:spPr>
+          <a:xfrm>
+            <a:off x="10180000" y="4172000"/>
+            <a:ext cx="1910000" cy="504000"/>
+          </a:xfrm>
+          <a:prstGeom prst="rect">
+            <a:avLst/>
+          </a:prstGeom>
+          <a:noFill/>
+        </p:spPr>
+        <p:txBody>
+          <a:bodyPr wrap="square">
+            <a:spAutoFit/>
+          </a:bodyPr>
+          <a:lstStyle/>
+          <a:p>
+            <a:r>
+              <a:rPr sz="900" b="0"/>
+              <a:t>Рекомендованные уровни запасов по эшелонам</a:t>
+            </a:r>
+          </a:p>
+          <a:p>
+            <a:r>
+              <a:rPr sz="900" b="0"/>
+              <a:t>Три сценария</a:t>
+            </a:r>
+          </a:p>
+        </p:txBody>
+      </p:sp>
+      <p:sp>
+        <p:nvSpPr>
+          <p:cNvPr id="67" name="Rounded Rectangle 66"/>
           <p:cNvSpPr/>
           <p:nvPr/>
         </p:nvSpPr>
         <p:spPr>
           <a:xfrm>
-            <a:off x="100000" y="980000"/>
-            <a:ext cx="1600000" cy="620000"/>
-          </a:xfrm>
-          <a:prstGeom prst="rect">
+            <a:off x="10180000" y="4826000"/>
+            <a:ext cx="1910000" cy="620000"/>
+          </a:xfrm>
+          <a:prstGeom prst="roundRect">
             <a:avLst/>
           </a:prstGeom>
           <a:solidFill>
-            <a:schemeClr val="accent2"/>
+            <a:schemeClr val="accent1"/>
           </a:solidFill>
         </p:spPr>
         <p:style>
@@ -6063,28 +6073,75 @@
           <a:p>
             <a:pPr algn="ctr"/>
             <a:r>
-              <a:rPr sz="900"/>
-              <a:t>Структура текущих запасов и фактические отгрузки из ERP</a:t>
-            </a:r>
-          </a:p>
-        </p:txBody>
-      </p:sp>
-      <p:sp>
-        <p:nvSpPr>
-          <p:cNvPr id="66" name="Rectangle 65"/>
+              <a:rPr sz="1000"/>
+              <a:t>Отчёт по OTIF</a:t>
+            </a:r>
+          </a:p>
+        </p:txBody>
+      </p:sp>
+      <p:sp>
+        <p:nvSpPr>
+          <p:cNvPr id="68" name="TextBox 67"/>
+          <p:cNvSpPr txBox="1"/>
+          <p:nvPr/>
+        </p:nvSpPr>
+        <p:spPr>
+          <a:xfrm>
+            <a:off x="10180000" y="5546000"/>
+            <a:ext cx="1910000" cy="1176000"/>
+          </a:xfrm>
+          <a:prstGeom prst="rect">
+            <a:avLst/>
+          </a:prstGeom>
+          <a:noFill/>
+        </p:spPr>
+        <p:txBody>
+          <a:bodyPr wrap="square">
+            <a:spAutoFit/>
+          </a:bodyPr>
+          <a:lstStyle/>
+          <a:p>
+            <a:r>
+              <a:rPr sz="900" b="0"/>
+              <a:t>Заказы клиентов: даты и количества</a:t>
+            </a:r>
+          </a:p>
+          <a:p>
+            <a:r>
+              <a:rPr sz="900" b="0"/>
+              <a:t>Фактические отгрузки: даты и количества</a:t>
+            </a:r>
+          </a:p>
+          <a:p>
+            <a:r>
+              <a:rPr sz="900" b="0"/>
+              <a:t>Целевой OTIF по каналам и сетям</a:t>
+            </a:r>
+          </a:p>
+          <a:p>
+            <a:r>
+              <a:rPr sz="900" b="0"/>
+              <a:t>Опубликованные нормативы прошлого цикла</a:t>
+            </a:r>
+          </a:p>
+        </p:txBody>
+      </p:sp>
+      <p:sp>
+        <p:nvSpPr>
+          <p:cNvPr id="69" name="Rounded Rectangle 68"/>
           <p:cNvSpPr/>
           <p:nvPr/>
         </p:nvSpPr>
         <p:spPr>
           <a:xfrm>
-            <a:off x="100000" y="1956000"/>
-            <a:ext cx="1600000" cy="620000"/>
-          </a:xfrm>
-          <a:prstGeom prst="rect">
+            <a:off x="10180000" y="6872000"/>
+            <a:ext cx="1910000" cy="620000"/>
+          </a:xfrm>
+          <a:prstGeom prst="roundRect">
             <a:avLst/>
           </a:prstGeom>
           <a:solidFill>
-            <a:schemeClr val="accent2"/>
+            <a:schemeClr val="accent1"/>
           </a:solidFill>
         </p:spPr>
         <p:style>
@@ -6107,28 +6164,75 @@
           <a:p>
             <a:pPr algn="ctr"/>
             <a:r>
-              <a:rPr sz="900"/>
-              <a:t>Спрос и волатильность из DP</a:t>
-            </a:r>
-          </a:p>
-        </p:txBody>
-      </p:sp>
-      <p:sp>
-        <p:nvSpPr>
-          <p:cNvPr id="67" name="Rectangle 66"/>
+              <a:rPr sz="1000"/>
+              <a:t>Оценка эффектов</a:t>
+            </a:r>
+          </a:p>
+        </p:txBody>
+      </p:sp>
+      <p:sp>
+        <p:nvSpPr>
+          <p:cNvPr id="70" name="TextBox 69"/>
+          <p:cNvSpPr txBox="1"/>
+          <p:nvPr/>
+        </p:nvSpPr>
+        <p:spPr>
+          <a:xfrm>
+            <a:off x="10180000" y="7592000"/>
+            <a:ext cx="1910000" cy="672000"/>
+          </a:xfrm>
+          <a:prstGeom prst="rect">
+            <a:avLst/>
+          </a:prstGeom>
+          <a:noFill/>
+        </p:spPr>
+        <p:txBody>
+          <a:bodyPr wrap="square">
+            <a:spAutoFit/>
+          </a:bodyPr>
+          <a:lstStyle/>
+          <a:p>
+            <a:r>
+              <a:rPr sz="900" b="0"/>
+              <a:t>Ошибка прогноза по горизонту</a:t>
+            </a:r>
+          </a:p>
+          <a:p>
+            <a:r>
+              <a:rPr sz="900" b="0"/>
+              <a:t>Отчёт по сегментации</a:t>
+            </a:r>
+          </a:p>
+          <a:p>
+            <a:r>
+              <a:rPr sz="900" b="0"/>
+              <a:t>Отчёт по страховым запасам</a:t>
+            </a:r>
+          </a:p>
+          <a:p>
+            <a:r>
+              <a:rPr sz="900" b="0"/>
+              <a:t>Сравнение сценариев по эффектам</a:t>
+            </a:r>
+          </a:p>
+        </p:txBody>
+      </p:sp>
+      <p:sp>
+        <p:nvSpPr>
+          <p:cNvPr id="71" name="Rounded Rectangle 70"/>
           <p:cNvSpPr/>
           <p:nvPr/>
         </p:nvSpPr>
         <p:spPr>
           <a:xfrm>
-            <a:off x="100000" y="2932000"/>
-            <a:ext cx="1600000" cy="620000"/>
-          </a:xfrm>
-          <a:prstGeom prst="rect">
+            <a:off x="10180000" y="8414000"/>
+            <a:ext cx="1910000" cy="620000"/>
+          </a:xfrm>
+          <a:prstGeom prst="roundRect">
             <a:avLst/>
           </a:prstGeom>
           <a:solidFill>
-            <a:schemeClr val="accent2"/>
+            <a:schemeClr val="accent1"/>
           </a:solidFill>
         </p:spPr>
         <p:style>
@@ -6151,22 +6255,63 @@
           <a:p>
             <a:pPr algn="ctr"/>
             <a:r>
-              <a:rPr sz="900"/>
-              <a:t>Ошибка прогноза по горизонту из DP</a:t>
-            </a:r>
-          </a:p>
-        </p:txBody>
-      </p:sp>
-      <p:sp>
-        <p:nvSpPr>
-          <p:cNvPr id="68" name="Rectangle 67"/>
+              <a:rPr sz="1000"/>
+              <a:t>Передача нормативов по запасам в SNP</a:t>
+            </a:r>
+          </a:p>
+        </p:txBody>
+      </p:sp>
+      <p:sp>
+        <p:nvSpPr>
+          <p:cNvPr id="72" name="TextBox 71"/>
+          <p:cNvSpPr txBox="1"/>
+          <p:nvPr/>
+        </p:nvSpPr>
+        <p:spPr>
+          <a:xfrm>
+            <a:off x="10180000" y="9134000"/>
+            <a:ext cx="1910000" cy="1008000"/>
+          </a:xfrm>
+          <a:prstGeom prst="rect">
+            <a:avLst/>
+          </a:prstGeom>
+          <a:noFill/>
+        </p:spPr>
+        <p:txBody>
+          <a:bodyPr wrap="square">
+            <a:spAutoFit/>
+          </a:bodyPr>
+          <a:lstStyle/>
+          <a:p>
+            <a:r>
+              <a:rPr sz="900" b="0"/>
+              <a:t>Утверждённые уровни запасов по эшелонам</a:t>
+            </a:r>
+          </a:p>
+          <a:p>
+            <a:r>
+              <a:rPr sz="900" b="0"/>
+              <a:t>Точка заказа и рекомендованный уровень сервиса</a:t>
+            </a:r>
+          </a:p>
+          <a:p>
+            <a:r>
+              <a:rPr sz="900" b="0"/>
+              <a:t>Горизонт и дата вступления в силу</a:t>
+            </a:r>
+          </a:p>
+        </p:txBody>
+      </p:sp>
+      <p:sp>
+        <p:nvSpPr>
+          <p:cNvPr id="73" name="Rectangle 72"/>
           <p:cNvSpPr/>
           <p:nvPr/>
         </p:nvSpPr>
         <p:spPr>
           <a:xfrm>
-            <a:off x="100000" y="3908000"/>
-            <a:ext cx="1600000" cy="620000"/>
+            <a:off x="10180000" y="10292000"/>
+            <a:ext cx="1910000" cy="620000"/>
           </a:xfrm>
           <a:prstGeom prst="rect">
             <a:avLst/>
@@ -6196,21 +6341,21 @@
             <a:pPr algn="ctr"/>
             <a:r>
               <a:rPr sz="900"/>
-              <a:t>Параметры цепочки из ERP</a:t>
-            </a:r>
-          </a:p>
-        </p:txBody>
-      </p:sp>
-      <p:sp>
-        <p:nvSpPr>
-          <p:cNvPr id="69" name="Rectangle 68"/>
+              <a:t>Оценка эффектов и рекомендации</a:t>
+            </a:r>
+          </a:p>
+        </p:txBody>
+      </p:sp>
+      <p:sp>
+        <p:nvSpPr>
+          <p:cNvPr id="74" name="Rectangle 73"/>
           <p:cNvSpPr/>
           <p:nvPr/>
         </p:nvSpPr>
         <p:spPr>
           <a:xfrm>
-            <a:off x="100000" y="4884000"/>
-            <a:ext cx="1600000" cy="620000"/>
+            <a:off x="10180000" y="11062000"/>
+            <a:ext cx="1910000" cy="620000"/>
           </a:xfrm>
           <a:prstGeom prst="rect">
             <a:avLst/>
@@ -6240,20 +6385,20 @@
             <a:pPr algn="ctr"/>
             <a:r>
               <a:rPr sz="900"/>
-              <a:t>Сроки годности и требования сетей к остаточному сроку из ERP</a:t>
-            </a:r>
-          </a:p>
-        </p:txBody>
-      </p:sp>
-      <p:sp>
-        <p:nvSpPr>
-          <p:cNvPr id="70" name="Rectangle 69"/>
+              <a:t>Нормативы запасов в SNP</a:t>
+            </a:r>
+          </a:p>
+        </p:txBody>
+      </p:sp>
+      <p:sp>
+        <p:nvSpPr>
+          <p:cNvPr id="75" name="Rectangle 74"/>
           <p:cNvSpPr/>
           <p:nvPr/>
         </p:nvSpPr>
         <p:spPr>
           <a:xfrm>
-            <a:off x="100000" y="5860000"/>
+            <a:off x="100000" y="980000"/>
             <a:ext cx="1600000" cy="620000"/>
           </a:xfrm>
           <a:prstGeom prst="rect">
@@ -6284,6 +6429,226 @@
             <a:pPr algn="ctr"/>
             <a:r>
               <a:rPr sz="900"/>
+              <a:t>Структура текущих запасов и фактические отгрузки из ERP</a:t>
+            </a:r>
+          </a:p>
+        </p:txBody>
+      </p:sp>
+      <p:sp>
+        <p:nvSpPr>
+          <p:cNvPr id="76" name="Rectangle 75"/>
+          <p:cNvSpPr/>
+          <p:nvPr/>
+        </p:nvSpPr>
+        <p:spPr>
+          <a:xfrm>
+            <a:off x="100000" y="1956000"/>
+            <a:ext cx="1600000" cy="620000"/>
+          </a:xfrm>
+          <a:prstGeom prst="rect">
+            <a:avLst/>
+          </a:prstGeom>
+          <a:solidFill>
+            <a:schemeClr val="accent2"/>
+          </a:solidFill>
+        </p:spPr>
+        <p:style>
+          <a:lnRef idx="1">
+            <a:schemeClr val="accent1"/>
+          </a:lnRef>
+          <a:fillRef idx="3">
+            <a:schemeClr val="accent1"/>
+          </a:fillRef>
+          <a:effectRef idx="2">
+            <a:schemeClr val="accent1"/>
+          </a:effectRef>
+          <a:fontRef idx="minor">
+            <a:schemeClr val="lt1"/>
+          </a:fontRef>
+        </p:style>
+        <p:txBody>
+          <a:bodyPr rtlCol="0" anchor="ctr" wrap="square"/>
+          <a:lstStyle/>
+          <a:p>
+            <a:pPr algn="ctr"/>
+            <a:r>
+              <a:rPr sz="900"/>
+              <a:t>Спрос и волатильность из DP</a:t>
+            </a:r>
+          </a:p>
+        </p:txBody>
+      </p:sp>
+      <p:sp>
+        <p:nvSpPr>
+          <p:cNvPr id="77" name="Rectangle 76"/>
+          <p:cNvSpPr/>
+          <p:nvPr/>
+        </p:nvSpPr>
+        <p:spPr>
+          <a:xfrm>
+            <a:off x="100000" y="2932000"/>
+            <a:ext cx="1600000" cy="620000"/>
+          </a:xfrm>
+          <a:prstGeom prst="rect">
+            <a:avLst/>
+          </a:prstGeom>
+          <a:solidFill>
+            <a:schemeClr val="accent2"/>
+          </a:solidFill>
+        </p:spPr>
+        <p:style>
+          <a:lnRef idx="1">
+            <a:schemeClr val="accent1"/>
+          </a:lnRef>
+          <a:fillRef idx="3">
+            <a:schemeClr val="accent1"/>
+          </a:fillRef>
+          <a:effectRef idx="2">
+            <a:schemeClr val="accent1"/>
+          </a:effectRef>
+          <a:fontRef idx="minor">
+            <a:schemeClr val="lt1"/>
+          </a:fontRef>
+        </p:style>
+        <p:txBody>
+          <a:bodyPr rtlCol="0" anchor="ctr" wrap="square"/>
+          <a:lstStyle/>
+          <a:p>
+            <a:pPr algn="ctr"/>
+            <a:r>
+              <a:rPr sz="900"/>
+              <a:t>Ошибка прогноза по горизонту из DP</a:t>
+            </a:r>
+          </a:p>
+        </p:txBody>
+      </p:sp>
+      <p:sp>
+        <p:nvSpPr>
+          <p:cNvPr id="78" name="Rectangle 77"/>
+          <p:cNvSpPr/>
+          <p:nvPr/>
+        </p:nvSpPr>
+        <p:spPr>
+          <a:xfrm>
+            <a:off x="100000" y="3908000"/>
+            <a:ext cx="1600000" cy="620000"/>
+          </a:xfrm>
+          <a:prstGeom prst="rect">
+            <a:avLst/>
+          </a:prstGeom>
+          <a:solidFill>
+            <a:schemeClr val="accent2"/>
+          </a:solidFill>
+        </p:spPr>
+        <p:style>
+          <a:lnRef idx="1">
+            <a:schemeClr val="accent1"/>
+          </a:lnRef>
+          <a:fillRef idx="3">
+            <a:schemeClr val="accent1"/>
+          </a:fillRef>
+          <a:effectRef idx="2">
+            <a:schemeClr val="accent1"/>
+          </a:effectRef>
+          <a:fontRef idx="minor">
+            <a:schemeClr val="lt1"/>
+          </a:fontRef>
+        </p:style>
+        <p:txBody>
+          <a:bodyPr rtlCol="0" anchor="ctr" wrap="square"/>
+          <a:lstStyle/>
+          <a:p>
+            <a:pPr algn="ctr"/>
+            <a:r>
+              <a:rPr sz="900"/>
+              <a:t>Параметры цепочки из ERP</a:t>
+            </a:r>
+          </a:p>
+        </p:txBody>
+      </p:sp>
+      <p:sp>
+        <p:nvSpPr>
+          <p:cNvPr id="79" name="Rectangle 78"/>
+          <p:cNvSpPr/>
+          <p:nvPr/>
+        </p:nvSpPr>
+        <p:spPr>
+          <a:xfrm>
+            <a:off x="100000" y="4884000"/>
+            <a:ext cx="1600000" cy="620000"/>
+          </a:xfrm>
+          <a:prstGeom prst="rect">
+            <a:avLst/>
+          </a:prstGeom>
+          <a:solidFill>
+            <a:schemeClr val="accent2"/>
+          </a:solidFill>
+        </p:spPr>
+        <p:style>
+          <a:lnRef idx="1">
+            <a:schemeClr val="accent1"/>
+          </a:lnRef>
+          <a:fillRef idx="3">
+            <a:schemeClr val="accent1"/>
+          </a:fillRef>
+          <a:effectRef idx="2">
+            <a:schemeClr val="accent1"/>
+          </a:effectRef>
+          <a:fontRef idx="minor">
+            <a:schemeClr val="lt1"/>
+          </a:fontRef>
+        </p:style>
+        <p:txBody>
+          <a:bodyPr rtlCol="0" anchor="ctr" wrap="square"/>
+          <a:lstStyle/>
+          <a:p>
+            <a:pPr algn="ctr"/>
+            <a:r>
+              <a:rPr sz="900"/>
+              <a:t>Сроки годности и требования сетей к остаточному сроку из ERP</a:t>
+            </a:r>
+          </a:p>
+        </p:txBody>
+      </p:sp>
+      <p:sp>
+        <p:nvSpPr>
+          <p:cNvPr id="80" name="Rectangle 79"/>
+          <p:cNvSpPr/>
+          <p:nvPr/>
+        </p:nvSpPr>
+        <p:spPr>
+          <a:xfrm>
+            <a:off x="100000" y="5860000"/>
+            <a:ext cx="1600000" cy="620000"/>
+          </a:xfrm>
+          <a:prstGeom prst="rect">
+            <a:avLst/>
+          </a:prstGeom>
+          <a:solidFill>
+            <a:schemeClr val="accent2"/>
+          </a:solidFill>
+        </p:spPr>
+        <p:style>
+          <a:lnRef idx="1">
+            <a:schemeClr val="accent1"/>
+          </a:lnRef>
+          <a:fillRef idx="3">
+            <a:schemeClr val="accent1"/>
+          </a:fillRef>
+          <a:effectRef idx="2">
+            <a:schemeClr val="accent1"/>
+          </a:effectRef>
+          <a:fontRef idx="minor">
+            <a:schemeClr val="lt1"/>
+          </a:fontRef>
+        </p:style>
+        <p:txBody>
+          <a:bodyPr rtlCol="0" anchor="ctr" wrap="square"/>
+          <a:lstStyle/>
+          <a:p>
+            <a:pPr algn="ctr"/>
+            <a:r>
+              <a:rPr sz="900"/>
               <a:t>Мастер-данные номенклатуры из ERP</a:t>
             </a:r>
           </a:p>
@@ -6291,115 +6656,7 @@
       </p:sp>
       <p:cxnSp>
         <p:nvCxnSpPr>
-          <p:cNvPr id="71" name="Connector 70"/>
-          <p:cNvCxnSpPr>
-            <a:stCxn id="4" idx="2"/>
-            <a:endCxn id="6" idx="0"/>
-          </p:cNvCxnSpPr>
-          <p:nvPr/>
-        </p:nvCxnSpPr>
-        <p:spPr>
-          <a:xfrm>
-            <a:off x="2895000" y="1660000"/>
-            <a:ext cx="0" cy="9658000"/>
-          </a:xfrm>
-          <a:prstGeom prst="line">
-            <a:avLst/>
-          </a:prstGeom>
-          <a:ln>
-            <a:tailEnd type="triangle"/>
-          </a:ln>
-        </p:spPr>
-        <p:style>
-          <a:lnRef idx="2">
-            <a:schemeClr val="accent1"/>
-          </a:lnRef>
-          <a:fillRef idx="0">
-            <a:schemeClr val="accent1"/>
-          </a:fillRef>
-          <a:effectRef idx="1">
-            <a:schemeClr val="accent1"/>
-          </a:effectRef>
-          <a:fontRef idx="minor">
-            <a:schemeClr val="tx1"/>
-          </a:fontRef>
-        </p:style>
-      </p:cxnSp>
-      <p:cxnSp>
-        <p:nvCxnSpPr>
-          <p:cNvPr id="72" name="Connector 71"/>
-          <p:cNvCxnSpPr>
-            <a:stCxn id="6" idx="2"/>
-            <a:endCxn id="8" idx="0"/>
-          </p:cNvCxnSpPr>
-          <p:nvPr/>
-        </p:nvCxnSpPr>
-        <p:spPr>
-          <a:xfrm>
-            <a:off x="2895000" y="11938000"/>
-            <a:ext cx="0" cy="1258000"/>
-          </a:xfrm>
-          <a:prstGeom prst="line">
-            <a:avLst/>
-          </a:prstGeom>
-          <a:ln>
-            <a:tailEnd type="triangle"/>
-          </a:ln>
-        </p:spPr>
-        <p:style>
-          <a:lnRef idx="2">
-            <a:schemeClr val="accent1"/>
-          </a:lnRef>
-          <a:fillRef idx="0">
-            <a:schemeClr val="accent1"/>
-          </a:fillRef>
-          <a:effectRef idx="1">
-            <a:schemeClr val="accent1"/>
-          </a:effectRef>
-          <a:fontRef idx="minor">
-            <a:schemeClr val="tx1"/>
-          </a:fontRef>
-        </p:style>
-      </p:cxnSp>
-      <p:cxnSp>
-        <p:nvCxnSpPr>
-          <p:cNvPr id="73" name="Connector 72"/>
-          <p:cNvCxnSpPr>
-            <a:stCxn id="8" idx="0"/>
-            <a:endCxn id="12" idx="2"/>
-          </p:cNvCxnSpPr>
-          <p:nvPr/>
-        </p:nvCxnSpPr>
-        <p:spPr>
-          <a:xfrm flipV="1">
-            <a:off x="2895000" y="1660000"/>
-            <a:ext cx="2060000" cy="11536000"/>
-          </a:xfrm>
-          <a:prstGeom prst="line">
-            <a:avLst/>
-          </a:prstGeom>
-          <a:ln>
-            <a:tailEnd type="triangle"/>
-          </a:ln>
-        </p:spPr>
-        <p:style>
-          <a:lnRef idx="2">
-            <a:schemeClr val="accent1"/>
-          </a:lnRef>
-          <a:fillRef idx="0">
-            <a:schemeClr val="accent1"/>
-          </a:fillRef>
-          <a:effectRef idx="1">
-            <a:schemeClr val="accent1"/>
-          </a:effectRef>
-          <a:fontRef idx="minor">
-            <a:schemeClr val="tx1"/>
-          </a:fontRef>
-        </p:style>
-      </p:cxnSp>
-      <p:cxnSp>
-        <p:nvCxnSpPr>
-          <p:cNvPr id="74" name="Connector 73"/>
+          <p:cNvPr id="81" name="Connector 80"/>
           <p:cNvCxnSpPr>
             <a:stCxn id="12" idx="2"/>
             <a:endCxn id="14" idx="0"/>
@@ -6408,260 +6665,8 @@
         </p:nvCxnSpPr>
         <p:spPr>
           <a:xfrm>
-            <a:off x="4955000" y="1660000"/>
-            <a:ext cx="0" cy="1594000"/>
-          </a:xfrm>
-          <a:prstGeom prst="line">
-            <a:avLst/>
-          </a:prstGeom>
-          <a:ln>
-            <a:tailEnd type="triangle"/>
-          </a:ln>
-        </p:spPr>
-        <p:style>
-          <a:lnRef idx="2">
-            <a:schemeClr val="accent1"/>
-          </a:lnRef>
-          <a:fillRef idx="0">
-            <a:schemeClr val="accent1"/>
-          </a:fillRef>
-          <a:effectRef idx="1">
-            <a:schemeClr val="accent1"/>
-          </a:effectRef>
-          <a:fontRef idx="minor">
-            <a:schemeClr val="tx1"/>
-          </a:fontRef>
-        </p:style>
-      </p:cxnSp>
-      <p:cxnSp>
-        <p:nvCxnSpPr>
-          <p:cNvPr id="75" name="Connector 74"/>
-          <p:cNvCxnSpPr>
-            <a:stCxn id="12" idx="2"/>
-            <a:endCxn id="18" idx="0"/>
-          </p:cNvCxnSpPr>
-          <p:nvPr/>
-        </p:nvCxnSpPr>
-        <p:spPr>
-          <a:xfrm>
-            <a:off x="4955000" y="1660000"/>
-            <a:ext cx="0" cy="5182000"/>
-          </a:xfrm>
-          <a:prstGeom prst="line">
-            <a:avLst/>
-          </a:prstGeom>
-          <a:ln>
-            <a:tailEnd type="triangle"/>
-          </a:ln>
-        </p:spPr>
-        <p:style>
-          <a:lnRef idx="2">
-            <a:schemeClr val="accent1"/>
-          </a:lnRef>
-          <a:fillRef idx="0">
-            <a:schemeClr val="accent1"/>
-          </a:fillRef>
-          <a:effectRef idx="1">
-            <a:schemeClr val="accent1"/>
-          </a:effectRef>
-          <a:fontRef idx="minor">
-            <a:schemeClr val="tx1"/>
-          </a:fontRef>
-        </p:style>
-      </p:cxnSp>
-      <p:cxnSp>
-        <p:nvCxnSpPr>
-          <p:cNvPr id="76" name="Connector 75"/>
-          <p:cNvCxnSpPr>
-            <a:stCxn id="12" idx="2"/>
-            <a:endCxn id="22" idx="0"/>
-          </p:cNvCxnSpPr>
-          <p:nvPr/>
-        </p:nvCxnSpPr>
-        <p:spPr>
-          <a:xfrm>
-            <a:off x="4955000" y="1660000"/>
-            <a:ext cx="0" cy="8266000"/>
-          </a:xfrm>
-          <a:prstGeom prst="line">
-            <a:avLst/>
-          </a:prstGeom>
-          <a:ln>
-            <a:tailEnd type="triangle"/>
-          </a:ln>
-        </p:spPr>
-        <p:style>
-          <a:lnRef idx="2">
-            <a:schemeClr val="accent1"/>
-          </a:lnRef>
-          <a:fillRef idx="0">
-            <a:schemeClr val="accent1"/>
-          </a:fillRef>
-          <a:effectRef idx="1">
-            <a:schemeClr val="accent1"/>
-          </a:effectRef>
-          <a:fontRef idx="minor">
-            <a:schemeClr val="tx1"/>
-          </a:fontRef>
-        </p:style>
-      </p:cxnSp>
-      <p:cxnSp>
-        <p:nvCxnSpPr>
-          <p:cNvPr id="77" name="Connector 76"/>
-          <p:cNvCxnSpPr>
-            <a:stCxn id="14" idx="2"/>
-            <a:endCxn id="16" idx="0"/>
-          </p:cNvCxnSpPr>
-          <p:nvPr/>
-        </p:nvCxnSpPr>
-        <p:spPr>
-          <a:xfrm>
-            <a:off x="4955000" y="3874000"/>
-            <a:ext cx="0" cy="1258000"/>
-          </a:xfrm>
-          <a:prstGeom prst="line">
-            <a:avLst/>
-          </a:prstGeom>
-          <a:ln>
-            <a:tailEnd type="triangle"/>
-          </a:ln>
-        </p:spPr>
-        <p:style>
-          <a:lnRef idx="2">
-            <a:schemeClr val="accent1"/>
-          </a:lnRef>
-          <a:fillRef idx="0">
-            <a:schemeClr val="accent1"/>
-          </a:fillRef>
-          <a:effectRef idx="1">
-            <a:schemeClr val="accent1"/>
-          </a:effectRef>
-          <a:fontRef idx="minor">
-            <a:schemeClr val="tx1"/>
-          </a:fontRef>
-        </p:style>
-      </p:cxnSp>
-      <p:cxnSp>
-        <p:nvCxnSpPr>
-          <p:cNvPr id="78" name="Connector 77"/>
-          <p:cNvCxnSpPr>
-            <a:stCxn id="18" idx="2"/>
-            <a:endCxn id="20" idx="0"/>
-          </p:cNvCxnSpPr>
-          <p:nvPr/>
-        </p:nvCxnSpPr>
-        <p:spPr>
-          <a:xfrm>
-            <a:off x="4955000" y="7462000"/>
-            <a:ext cx="0" cy="754000"/>
-          </a:xfrm>
-          <a:prstGeom prst="line">
-            <a:avLst/>
-          </a:prstGeom>
-          <a:ln>
-            <a:tailEnd type="triangle"/>
-          </a:ln>
-        </p:spPr>
-        <p:style>
-          <a:lnRef idx="2">
-            <a:schemeClr val="accent1"/>
-          </a:lnRef>
-          <a:fillRef idx="0">
-            <a:schemeClr val="accent1"/>
-          </a:fillRef>
-          <a:effectRef idx="1">
-            <a:schemeClr val="accent1"/>
-          </a:effectRef>
-          <a:fontRef idx="minor">
-            <a:schemeClr val="tx1"/>
-          </a:fontRef>
-        </p:style>
-      </p:cxnSp>
-      <p:cxnSp>
-        <p:nvCxnSpPr>
-          <p:cNvPr id="79" name="Connector 78"/>
-          <p:cNvCxnSpPr>
-            <a:stCxn id="22" idx="2"/>
-            <a:endCxn id="24" idx="0"/>
-          </p:cNvCxnSpPr>
-          <p:nvPr/>
-        </p:nvCxnSpPr>
-        <p:spPr>
-          <a:xfrm>
-            <a:off x="4955000" y="10546000"/>
-            <a:ext cx="0" cy="922000"/>
-          </a:xfrm>
-          <a:prstGeom prst="line">
-            <a:avLst/>
-          </a:prstGeom>
-          <a:ln>
-            <a:tailEnd type="triangle"/>
-          </a:ln>
-        </p:spPr>
-        <p:style>
-          <a:lnRef idx="2">
-            <a:schemeClr val="accent1"/>
-          </a:lnRef>
-          <a:fillRef idx="0">
-            <a:schemeClr val="accent1"/>
-          </a:fillRef>
-          <a:effectRef idx="1">
-            <a:schemeClr val="accent1"/>
-          </a:effectRef>
-          <a:fontRef idx="minor">
-            <a:schemeClr val="tx1"/>
-          </a:fontRef>
-        </p:style>
-      </p:cxnSp>
-      <p:cxnSp>
-        <p:nvCxnSpPr>
-          <p:cNvPr id="80" name="Connector 79"/>
-          <p:cNvCxnSpPr>
-            <a:stCxn id="16" idx="0"/>
-            <a:endCxn id="28" idx="2"/>
-          </p:cNvCxnSpPr>
-          <p:nvPr/>
-        </p:nvCxnSpPr>
-        <p:spPr>
-          <a:xfrm flipV="1">
-            <a:off x="4955000" y="1660000"/>
-            <a:ext cx="2060000" cy="3472000"/>
-          </a:xfrm>
-          <a:prstGeom prst="line">
-            <a:avLst/>
-          </a:prstGeom>
-          <a:ln>
-            <a:tailEnd type="triangle"/>
-          </a:ln>
-        </p:spPr>
-        <p:style>
-          <a:lnRef idx="2">
-            <a:schemeClr val="accent1"/>
-          </a:lnRef>
-          <a:fillRef idx="0">
-            <a:schemeClr val="accent1"/>
-          </a:fillRef>
-          <a:effectRef idx="1">
-            <a:schemeClr val="accent1"/>
-          </a:effectRef>
-          <a:fontRef idx="minor">
-            <a:schemeClr val="tx1"/>
-          </a:fontRef>
-        </p:style>
-      </p:cxnSp>
-      <p:cxnSp>
-        <p:nvCxnSpPr>
-          <p:cNvPr id="81" name="Connector 80"/>
-          <p:cNvCxnSpPr>
-            <a:stCxn id="28" idx="2"/>
-            <a:endCxn id="30" idx="0"/>
-          </p:cNvCxnSpPr>
-          <p:nvPr/>
-        </p:nvCxnSpPr>
-        <p:spPr>
-          <a:xfrm>
-            <a:off x="7015000" y="1660000"/>
-            <a:ext cx="0" cy="754000"/>
+            <a:off x="2895000" y="12028000"/>
+            <a:ext cx="0" cy="2770000"/>
           </a:xfrm>
           <a:prstGeom prst="line">
             <a:avLst/>
@@ -6689,15 +6694,15 @@
         <p:nvCxnSpPr>
           <p:cNvPr id="82" name="Connector 81"/>
           <p:cNvCxnSpPr>
-            <a:stCxn id="30" idx="3"/>
-            <a:endCxn id="34" idx="1"/>
+            <a:stCxn id="10" idx="2"/>
+            <a:endCxn id="14" idx="0"/>
           </p:cNvCxnSpPr>
           <p:nvPr/>
         </p:nvCxnSpPr>
         <p:spPr>
-          <a:xfrm flipV="1">
-            <a:off x="7970000" y="1350000"/>
-            <a:ext cx="150000" cy="1374000"/>
+          <a:xfrm>
+            <a:off x="2895000" y="9478000"/>
+            <a:ext cx="0" cy="5320000"/>
           </a:xfrm>
           <a:prstGeom prst="line">
             <a:avLst/>
@@ -6725,15 +6730,15 @@
         <p:nvCxnSpPr>
           <p:cNvPr id="83" name="Connector 82"/>
           <p:cNvCxnSpPr>
-            <a:stCxn id="34" idx="2"/>
-            <a:endCxn id="36" idx="0"/>
+            <a:stCxn id="8" idx="2"/>
+            <a:endCxn id="14" idx="0"/>
           </p:cNvCxnSpPr>
           <p:nvPr/>
         </p:nvCxnSpPr>
         <p:spPr>
           <a:xfrm>
-            <a:off x="9075000" y="1660000"/>
-            <a:ext cx="0" cy="922000"/>
+            <a:off x="2895000" y="6760000"/>
+            <a:ext cx="0" cy="8038000"/>
           </a:xfrm>
           <a:prstGeom prst="line">
             <a:avLst/>
@@ -6761,15 +6766,15 @@
         <p:nvCxnSpPr>
           <p:cNvPr id="84" name="Connector 83"/>
           <p:cNvCxnSpPr>
-            <a:stCxn id="36" idx="2"/>
-            <a:endCxn id="38" idx="0"/>
+            <a:stCxn id="6" idx="2"/>
+            <a:endCxn id="14" idx="0"/>
           </p:cNvCxnSpPr>
           <p:nvPr/>
         </p:nvCxnSpPr>
         <p:spPr>
           <a:xfrm>
-            <a:off x="9075000" y="3202000"/>
-            <a:ext cx="0" cy="1090000"/>
+            <a:off x="2895000" y="4714000"/>
+            <a:ext cx="0" cy="10084000"/>
           </a:xfrm>
           <a:prstGeom prst="line">
             <a:avLst/>
@@ -6797,15 +6802,15 @@
         <p:nvCxnSpPr>
           <p:cNvPr id="85" name="Connector 84"/>
           <p:cNvCxnSpPr>
-            <a:stCxn id="36" idx="2"/>
-            <a:endCxn id="40" idx="0"/>
+            <a:stCxn id="4" idx="2"/>
+            <a:endCxn id="14" idx="0"/>
           </p:cNvCxnSpPr>
           <p:nvPr/>
         </p:nvCxnSpPr>
         <p:spPr>
           <a:xfrm>
-            <a:off x="9075000" y="3202000"/>
-            <a:ext cx="0" cy="3472000"/>
+            <a:off x="2895000" y="1660000"/>
+            <a:ext cx="0" cy="13138000"/>
           </a:xfrm>
           <a:prstGeom prst="line">
             <a:avLst/>
@@ -6833,15 +6838,15 @@
         <p:nvCxnSpPr>
           <p:cNvPr id="86" name="Connector 85"/>
           <p:cNvCxnSpPr>
-            <a:stCxn id="38" idx="2"/>
-            <a:endCxn id="42" idx="0"/>
+            <a:stCxn id="14" idx="2"/>
+            <a:endCxn id="16" idx="0"/>
           </p:cNvCxnSpPr>
           <p:nvPr/>
         </p:nvCxnSpPr>
         <p:spPr>
           <a:xfrm>
-            <a:off x="9075000" y="4912000"/>
-            <a:ext cx="0" cy="3808000"/>
+            <a:off x="2895000" y="15418000"/>
+            <a:ext cx="0" cy="1426000"/>
           </a:xfrm>
           <a:prstGeom prst="line">
             <a:avLst/>
@@ -6869,15 +6874,15 @@
         <p:nvCxnSpPr>
           <p:cNvPr id="87" name="Connector 86"/>
           <p:cNvCxnSpPr>
-            <a:stCxn id="40" idx="2"/>
-            <a:endCxn id="44" idx="0"/>
+            <a:stCxn id="16" idx="2"/>
+            <a:endCxn id="18" idx="0"/>
           </p:cNvCxnSpPr>
           <p:nvPr/>
         </p:nvCxnSpPr>
         <p:spPr>
           <a:xfrm>
-            <a:off x="9075000" y="7294000"/>
-            <a:ext cx="0" cy="4312000"/>
+            <a:off x="2895000" y="17464000"/>
+            <a:ext cx="0" cy="1258000"/>
           </a:xfrm>
           <a:prstGeom prst="line">
             <a:avLst/>
@@ -6905,15 +6910,15 @@
         <p:nvCxnSpPr>
           <p:cNvPr id="88" name="Connector 87"/>
           <p:cNvCxnSpPr>
-            <a:stCxn id="42" idx="2"/>
-            <a:endCxn id="44" idx="0"/>
+            <a:stCxn id="18" idx="0"/>
+            <a:endCxn id="22" idx="2"/>
           </p:cNvCxnSpPr>
           <p:nvPr/>
         </p:nvCxnSpPr>
         <p:spPr>
-          <a:xfrm>
-            <a:off x="9075000" y="9340000"/>
-            <a:ext cx="0" cy="2266000"/>
+          <a:xfrm flipV="1">
+            <a:off x="2895000" y="1660000"/>
+            <a:ext cx="2060000" cy="17062000"/>
           </a:xfrm>
           <a:prstGeom prst="line">
             <a:avLst/>
@@ -6941,15 +6946,15 @@
         <p:nvCxnSpPr>
           <p:cNvPr id="89" name="Connector 88"/>
           <p:cNvCxnSpPr>
-            <a:stCxn id="42" idx="2"/>
-            <a:endCxn id="46" idx="0"/>
+            <a:stCxn id="22" idx="2"/>
+            <a:endCxn id="24" idx="0"/>
           </p:cNvCxnSpPr>
           <p:nvPr/>
         </p:nvCxnSpPr>
         <p:spPr>
           <a:xfrm>
-            <a:off x="9075000" y="9340000"/>
-            <a:ext cx="0" cy="3976000"/>
+            <a:off x="4955000" y="1660000"/>
+            <a:ext cx="0" cy="1594000"/>
           </a:xfrm>
           <a:prstGeom prst="line">
             <a:avLst/>
@@ -6977,15 +6982,15 @@
         <p:nvCxnSpPr>
           <p:cNvPr id="90" name="Connector 89"/>
           <p:cNvCxnSpPr>
-            <a:stCxn id="44" idx="0"/>
-            <a:endCxn id="55" idx="2"/>
+            <a:stCxn id="22" idx="2"/>
+            <a:endCxn id="28" idx="0"/>
           </p:cNvCxnSpPr>
           <p:nvPr/>
         </p:nvCxnSpPr>
         <p:spPr>
-          <a:xfrm flipV="1">
-            <a:off x="9075000" y="4072000"/>
-            <a:ext cx="2060000" cy="7534000"/>
+          <a:xfrm>
+            <a:off x="4955000" y="1660000"/>
+            <a:ext cx="0" cy="5182000"/>
           </a:xfrm>
           <a:prstGeom prst="line">
             <a:avLst/>
@@ -7013,15 +7018,15 @@
         <p:nvCxnSpPr>
           <p:cNvPr id="91" name="Connector 90"/>
           <p:cNvCxnSpPr>
-            <a:stCxn id="42" idx="0"/>
-            <a:endCxn id="51" idx="2"/>
+            <a:stCxn id="22" idx="2"/>
+            <a:endCxn id="32" idx="0"/>
           </p:cNvCxnSpPr>
           <p:nvPr/>
         </p:nvCxnSpPr>
         <p:spPr>
-          <a:xfrm flipV="1">
-            <a:off x="9075000" y="1660000"/>
-            <a:ext cx="2060000" cy="7060000"/>
+          <a:xfrm>
+            <a:off x="4955000" y="1660000"/>
+            <a:ext cx="0" cy="8266000"/>
           </a:xfrm>
           <a:prstGeom prst="line">
             <a:avLst/>
@@ -7049,15 +7054,15 @@
         <p:nvCxnSpPr>
           <p:cNvPr id="92" name="Connector 91"/>
           <p:cNvCxnSpPr>
-            <a:stCxn id="42" idx="0"/>
-            <a:endCxn id="53" idx="2"/>
+            <a:stCxn id="24" idx="2"/>
+            <a:endCxn id="26" idx="0"/>
           </p:cNvCxnSpPr>
           <p:nvPr/>
         </p:nvCxnSpPr>
         <p:spPr>
-          <a:xfrm flipV="1">
-            <a:off x="9075000" y="2866000"/>
-            <a:ext cx="2060000" cy="5854000"/>
+          <a:xfrm>
+            <a:off x="4955000" y="3874000"/>
+            <a:ext cx="0" cy="1258000"/>
           </a:xfrm>
           <a:prstGeom prst="line">
             <a:avLst/>
@@ -7085,15 +7090,15 @@
         <p:nvCxnSpPr>
           <p:cNvPr id="93" name="Connector 92"/>
           <p:cNvCxnSpPr>
-            <a:stCxn id="51" idx="2"/>
-            <a:endCxn id="59" idx="0"/>
+            <a:stCxn id="28" idx="2"/>
+            <a:endCxn id="30" idx="0"/>
           </p:cNvCxnSpPr>
           <p:nvPr/>
         </p:nvCxnSpPr>
         <p:spPr>
           <a:xfrm>
-            <a:off x="11135000" y="1660000"/>
-            <a:ext cx="0" cy="5212000"/>
+            <a:off x="4955000" y="7462000"/>
+            <a:ext cx="0" cy="754000"/>
           </a:xfrm>
           <a:prstGeom prst="line">
             <a:avLst/>
@@ -7121,15 +7126,15 @@
         <p:nvCxnSpPr>
           <p:cNvPr id="94" name="Connector 93"/>
           <p:cNvCxnSpPr>
-            <a:stCxn id="53" idx="2"/>
-            <a:endCxn id="59" idx="0"/>
+            <a:stCxn id="32" idx="2"/>
+            <a:endCxn id="34" idx="0"/>
           </p:cNvCxnSpPr>
           <p:nvPr/>
         </p:nvCxnSpPr>
         <p:spPr>
           <a:xfrm>
-            <a:off x="11135000" y="2866000"/>
-            <a:ext cx="0" cy="4006000"/>
+            <a:off x="4955000" y="10546000"/>
+            <a:ext cx="0" cy="922000"/>
           </a:xfrm>
           <a:prstGeom prst="line">
             <a:avLst/>
@@ -7157,15 +7162,15 @@
         <p:nvCxnSpPr>
           <p:cNvPr id="95" name="Connector 94"/>
           <p:cNvCxnSpPr>
-            <a:stCxn id="55" idx="2"/>
-            <a:endCxn id="59" idx="0"/>
+            <a:stCxn id="26" idx="0"/>
+            <a:endCxn id="38" idx="2"/>
           </p:cNvCxnSpPr>
           <p:nvPr/>
         </p:nvCxnSpPr>
         <p:spPr>
-          <a:xfrm>
-            <a:off x="11135000" y="4072000"/>
-            <a:ext cx="0" cy="2800000"/>
+          <a:xfrm flipV="1">
+            <a:off x="4955000" y="1660000"/>
+            <a:ext cx="2060000" cy="3472000"/>
           </a:xfrm>
           <a:prstGeom prst="line">
             <a:avLst/>
@@ -7193,15 +7198,15 @@
         <p:nvCxnSpPr>
           <p:cNvPr id="96" name="Connector 95"/>
           <p:cNvCxnSpPr>
-            <a:stCxn id="59" idx="2"/>
-            <a:endCxn id="61" idx="0"/>
+            <a:stCxn id="38" idx="2"/>
+            <a:endCxn id="40" idx="0"/>
           </p:cNvCxnSpPr>
           <p:nvPr/>
         </p:nvCxnSpPr>
         <p:spPr>
           <a:xfrm>
-            <a:off x="11135000" y="7492000"/>
-            <a:ext cx="0" cy="922000"/>
+            <a:off x="7015000" y="1660000"/>
+            <a:ext cx="0" cy="754000"/>
           </a:xfrm>
           <a:prstGeom prst="line">
             <a:avLst/>
@@ -7229,15 +7234,15 @@
         <p:nvCxnSpPr>
           <p:cNvPr id="97" name="Connector 96"/>
           <p:cNvCxnSpPr>
-            <a:stCxn id="57" idx="2"/>
-            <a:endCxn id="59" idx="0"/>
+            <a:stCxn id="40" idx="3"/>
+            <a:endCxn id="44" idx="1"/>
           </p:cNvCxnSpPr>
           <p:nvPr/>
         </p:nvCxnSpPr>
         <p:spPr>
-          <a:xfrm>
-            <a:off x="11135000" y="5446000"/>
-            <a:ext cx="0" cy="1426000"/>
+          <a:xfrm flipV="1">
+            <a:off x="7970000" y="1350000"/>
+            <a:ext cx="150000" cy="1374000"/>
           </a:xfrm>
           <a:prstGeom prst="line">
             <a:avLst/>
@@ -7265,15 +7270,15 @@
         <p:nvCxnSpPr>
           <p:cNvPr id="98" name="Connector 97"/>
           <p:cNvCxnSpPr>
-            <a:stCxn id="65" idx="3"/>
-            <a:endCxn id="4" idx="1"/>
+            <a:stCxn id="44" idx="2"/>
+            <a:endCxn id="46" idx="0"/>
           </p:cNvCxnSpPr>
           <p:nvPr/>
         </p:nvCxnSpPr>
         <p:spPr>
           <a:xfrm>
-            <a:off x="1700000" y="1290000"/>
-            <a:ext cx="240000" cy="60000"/>
+            <a:off x="9075000" y="1660000"/>
+            <a:ext cx="0" cy="922000"/>
           </a:xfrm>
           <a:prstGeom prst="line">
             <a:avLst/>
@@ -7301,17 +7306,17 @@
         <p:nvCxnSpPr>
           <p:cNvPr id="99" name="Connector 98"/>
           <p:cNvCxnSpPr>
-            <a:stCxn id="66" idx="3"/>
-            <a:endCxn id="14" idx="1"/>
+            <a:stCxn id="46" idx="2"/>
+            <a:endCxn id="48" idx="0"/>
           </p:cNvCxnSpPr>
           <p:nvPr/>
         </p:nvCxnSpPr>
         <p:spPr>
           <a:xfrm>
-            <a:off x="1700000" y="2266000"/>
-            <a:ext cx="2300000" cy="1298000"/>
-          </a:xfrm>
-          <a:prstGeom prst="bentConnector3">
+            <a:off x="9075000" y="3202000"/>
+            <a:ext cx="0" cy="1090000"/>
+          </a:xfrm>
+          <a:prstGeom prst="line">
             <a:avLst/>
           </a:prstGeom>
           <a:ln>
@@ -7337,17 +7342,17 @@
         <p:nvCxnSpPr>
           <p:cNvPr id="100" name="Connector 99"/>
           <p:cNvCxnSpPr>
-            <a:stCxn id="67" idx="3"/>
-            <a:endCxn id="14" idx="1"/>
+            <a:stCxn id="46" idx="2"/>
+            <a:endCxn id="50" idx="0"/>
           </p:cNvCxnSpPr>
           <p:nvPr/>
         </p:nvCxnSpPr>
         <p:spPr>
           <a:xfrm>
-            <a:off x="1700000" y="3242000"/>
-            <a:ext cx="2300000" cy="322000"/>
-          </a:xfrm>
-          <a:prstGeom prst="bentConnector3">
+            <a:off x="9075000" y="3202000"/>
+            <a:ext cx="0" cy="3472000"/>
+          </a:xfrm>
+          <a:prstGeom prst="line">
             <a:avLst/>
           </a:prstGeom>
           <a:ln>
@@ -7373,17 +7378,17 @@
         <p:nvCxnSpPr>
           <p:cNvPr id="101" name="Connector 100"/>
           <p:cNvCxnSpPr>
-            <a:stCxn id="68" idx="3"/>
-            <a:endCxn id="12" idx="1"/>
+            <a:stCxn id="48" idx="2"/>
+            <a:endCxn id="52" idx="0"/>
           </p:cNvCxnSpPr>
           <p:nvPr/>
         </p:nvCxnSpPr>
         <p:spPr>
-          <a:xfrm flipV="1">
-            <a:off x="1700000" y="1350000"/>
-            <a:ext cx="2300000" cy="2868000"/>
-          </a:xfrm>
-          <a:prstGeom prst="bentConnector3">
+          <a:xfrm>
+            <a:off x="9075000" y="4912000"/>
+            <a:ext cx="0" cy="3808000"/>
+          </a:xfrm>
+          <a:prstGeom prst="line">
             <a:avLst/>
           </a:prstGeom>
           <a:ln>
@@ -7409,17 +7414,17 @@
         <p:nvCxnSpPr>
           <p:cNvPr id="102" name="Connector 101"/>
           <p:cNvCxnSpPr>
-            <a:stCxn id="69" idx="3"/>
-            <a:endCxn id="12" idx="1"/>
+            <a:stCxn id="50" idx="2"/>
+            <a:endCxn id="54" idx="0"/>
           </p:cNvCxnSpPr>
           <p:nvPr/>
         </p:nvCxnSpPr>
         <p:spPr>
-          <a:xfrm flipV="1">
-            <a:off x="1700000" y="1350000"/>
-            <a:ext cx="2300000" cy="3844000"/>
-          </a:xfrm>
-          <a:prstGeom prst="bentConnector3">
+          <a:xfrm>
+            <a:off x="9075000" y="7294000"/>
+            <a:ext cx="0" cy="4312000"/>
+          </a:xfrm>
+          <a:prstGeom prst="line">
             <a:avLst/>
           </a:prstGeom>
           <a:ln>
@@ -7445,17 +7450,17 @@
         <p:nvCxnSpPr>
           <p:cNvPr id="103" name="Connector 102"/>
           <p:cNvCxnSpPr>
-            <a:stCxn id="70" idx="3"/>
-            <a:endCxn id="28" idx="1"/>
+            <a:stCxn id="52" idx="2"/>
+            <a:endCxn id="54" idx="0"/>
           </p:cNvCxnSpPr>
           <p:nvPr/>
         </p:nvCxnSpPr>
         <p:spPr>
-          <a:xfrm flipV="1">
-            <a:off x="1700000" y="1350000"/>
-            <a:ext cx="4360000" cy="4820000"/>
-          </a:xfrm>
-          <a:prstGeom prst="bentConnector3">
+          <a:xfrm>
+            <a:off x="9075000" y="9340000"/>
+            <a:ext cx="0" cy="2266000"/>
+          </a:xfrm>
+          <a:prstGeom prst="line">
             <a:avLst/>
           </a:prstGeom>
           <a:ln>
@@ -7481,15 +7486,15 @@
         <p:nvCxnSpPr>
           <p:cNvPr id="104" name="Connector 103"/>
           <p:cNvCxnSpPr>
-            <a:stCxn id="38" idx="2"/>
-            <a:endCxn id="48" idx="0"/>
+            <a:stCxn id="52" idx="2"/>
+            <a:endCxn id="56" idx="0"/>
           </p:cNvCxnSpPr>
           <p:nvPr/>
         </p:nvCxnSpPr>
         <p:spPr>
           <a:xfrm>
-            <a:off x="9075000" y="4912000"/>
-            <a:ext cx="0" cy="10618000"/>
+            <a:off x="9075000" y="9340000"/>
+            <a:ext cx="0" cy="3976000"/>
           </a:xfrm>
           <a:prstGeom prst="line">
             <a:avLst/>
@@ -7517,15 +7522,15 @@
         <p:nvCxnSpPr>
           <p:cNvPr id="105" name="Connector 104"/>
           <p:cNvCxnSpPr>
-            <a:stCxn id="59" idx="2"/>
-            <a:endCxn id="63" idx="0"/>
+            <a:stCxn id="54" idx="0"/>
+            <a:endCxn id="65" idx="2"/>
           </p:cNvCxnSpPr>
           <p:nvPr/>
         </p:nvCxnSpPr>
         <p:spPr>
-          <a:xfrm>
-            <a:off x="11135000" y="7492000"/>
-            <a:ext cx="0" cy="2800000"/>
+          <a:xfrm flipV="1">
+            <a:off x="9075000" y="4072000"/>
+            <a:ext cx="2060000" cy="7534000"/>
           </a:xfrm>
           <a:prstGeom prst="line">
             <a:avLst/>
@@ -7553,8 +7558,548 @@
         <p:nvCxnSpPr>
           <p:cNvPr id="106" name="Connector 105"/>
           <p:cNvCxnSpPr>
+            <a:stCxn id="52" idx="0"/>
+            <a:endCxn id="61" idx="2"/>
+          </p:cNvCxnSpPr>
+          <p:nvPr/>
+        </p:nvCxnSpPr>
+        <p:spPr>
+          <a:xfrm flipV="1">
+            <a:off x="9075000" y="1660000"/>
+            <a:ext cx="2060000" cy="7060000"/>
+          </a:xfrm>
+          <a:prstGeom prst="line">
+            <a:avLst/>
+          </a:prstGeom>
+          <a:ln>
+            <a:tailEnd type="triangle"/>
+          </a:ln>
+        </p:spPr>
+        <p:style>
+          <a:lnRef idx="2">
+            <a:schemeClr val="accent1"/>
+          </a:lnRef>
+          <a:fillRef idx="0">
+            <a:schemeClr val="accent1"/>
+          </a:fillRef>
+          <a:effectRef idx="1">
+            <a:schemeClr val="accent1"/>
+          </a:effectRef>
+          <a:fontRef idx="minor">
+            <a:schemeClr val="tx1"/>
+          </a:fontRef>
+        </p:style>
+      </p:cxnSp>
+      <p:cxnSp>
+        <p:nvCxnSpPr>
+          <p:cNvPr id="107" name="Connector 106"/>
+          <p:cNvCxnSpPr>
+            <a:stCxn id="52" idx="0"/>
+            <a:endCxn id="63" idx="2"/>
+          </p:cNvCxnSpPr>
+          <p:nvPr/>
+        </p:nvCxnSpPr>
+        <p:spPr>
+          <a:xfrm flipV="1">
+            <a:off x="9075000" y="2866000"/>
+            <a:ext cx="2060000" cy="5854000"/>
+          </a:xfrm>
+          <a:prstGeom prst="line">
+            <a:avLst/>
+          </a:prstGeom>
+          <a:ln>
+            <a:tailEnd type="triangle"/>
+          </a:ln>
+        </p:spPr>
+        <p:style>
+          <a:lnRef idx="2">
+            <a:schemeClr val="accent1"/>
+          </a:lnRef>
+          <a:fillRef idx="0">
+            <a:schemeClr val="accent1"/>
+          </a:fillRef>
+          <a:effectRef idx="1">
+            <a:schemeClr val="accent1"/>
+          </a:effectRef>
+          <a:fontRef idx="minor">
+            <a:schemeClr val="tx1"/>
+          </a:fontRef>
+        </p:style>
+      </p:cxnSp>
+      <p:cxnSp>
+        <p:nvCxnSpPr>
+          <p:cNvPr id="108" name="Connector 107"/>
+          <p:cNvCxnSpPr>
             <a:stCxn id="61" idx="2"/>
-            <a:endCxn id="64" idx="0"/>
+            <a:endCxn id="69" idx="0"/>
+          </p:cNvCxnSpPr>
+          <p:nvPr/>
+        </p:nvCxnSpPr>
+        <p:spPr>
+          <a:xfrm>
+            <a:off x="11135000" y="1660000"/>
+            <a:ext cx="0" cy="5212000"/>
+          </a:xfrm>
+          <a:prstGeom prst="line">
+            <a:avLst/>
+          </a:prstGeom>
+          <a:ln>
+            <a:tailEnd type="triangle"/>
+          </a:ln>
+        </p:spPr>
+        <p:style>
+          <a:lnRef idx="2">
+            <a:schemeClr val="accent1"/>
+          </a:lnRef>
+          <a:fillRef idx="0">
+            <a:schemeClr val="accent1"/>
+          </a:fillRef>
+          <a:effectRef idx="1">
+            <a:schemeClr val="accent1"/>
+          </a:effectRef>
+          <a:fontRef idx="minor">
+            <a:schemeClr val="tx1"/>
+          </a:fontRef>
+        </p:style>
+      </p:cxnSp>
+      <p:cxnSp>
+        <p:nvCxnSpPr>
+          <p:cNvPr id="109" name="Connector 108"/>
+          <p:cNvCxnSpPr>
+            <a:stCxn id="63" idx="2"/>
+            <a:endCxn id="69" idx="0"/>
+          </p:cNvCxnSpPr>
+          <p:nvPr/>
+        </p:nvCxnSpPr>
+        <p:spPr>
+          <a:xfrm>
+            <a:off x="11135000" y="2866000"/>
+            <a:ext cx="0" cy="4006000"/>
+          </a:xfrm>
+          <a:prstGeom prst="line">
+            <a:avLst/>
+          </a:prstGeom>
+          <a:ln>
+            <a:tailEnd type="triangle"/>
+          </a:ln>
+        </p:spPr>
+        <p:style>
+          <a:lnRef idx="2">
+            <a:schemeClr val="accent1"/>
+          </a:lnRef>
+          <a:fillRef idx="0">
+            <a:schemeClr val="accent1"/>
+          </a:fillRef>
+          <a:effectRef idx="1">
+            <a:schemeClr val="accent1"/>
+          </a:effectRef>
+          <a:fontRef idx="minor">
+            <a:schemeClr val="tx1"/>
+          </a:fontRef>
+        </p:style>
+      </p:cxnSp>
+      <p:cxnSp>
+        <p:nvCxnSpPr>
+          <p:cNvPr id="110" name="Connector 109"/>
+          <p:cNvCxnSpPr>
+            <a:stCxn id="65" idx="2"/>
+            <a:endCxn id="69" idx="0"/>
+          </p:cNvCxnSpPr>
+          <p:nvPr/>
+        </p:nvCxnSpPr>
+        <p:spPr>
+          <a:xfrm>
+            <a:off x="11135000" y="4072000"/>
+            <a:ext cx="0" cy="2800000"/>
+          </a:xfrm>
+          <a:prstGeom prst="line">
+            <a:avLst/>
+          </a:prstGeom>
+          <a:ln>
+            <a:tailEnd type="triangle"/>
+          </a:ln>
+        </p:spPr>
+        <p:style>
+          <a:lnRef idx="2">
+            <a:schemeClr val="accent1"/>
+          </a:lnRef>
+          <a:fillRef idx="0">
+            <a:schemeClr val="accent1"/>
+          </a:fillRef>
+          <a:effectRef idx="1">
+            <a:schemeClr val="accent1"/>
+          </a:effectRef>
+          <a:fontRef idx="minor">
+            <a:schemeClr val="tx1"/>
+          </a:fontRef>
+        </p:style>
+      </p:cxnSp>
+      <p:cxnSp>
+        <p:nvCxnSpPr>
+          <p:cNvPr id="111" name="Connector 110"/>
+          <p:cNvCxnSpPr>
+            <a:stCxn id="69" idx="2"/>
+            <a:endCxn id="71" idx="0"/>
+          </p:cNvCxnSpPr>
+          <p:nvPr/>
+        </p:nvCxnSpPr>
+        <p:spPr>
+          <a:xfrm>
+            <a:off x="11135000" y="7492000"/>
+            <a:ext cx="0" cy="922000"/>
+          </a:xfrm>
+          <a:prstGeom prst="line">
+            <a:avLst/>
+          </a:prstGeom>
+          <a:ln>
+            <a:tailEnd type="triangle"/>
+          </a:ln>
+        </p:spPr>
+        <p:style>
+          <a:lnRef idx="2">
+            <a:schemeClr val="accent1"/>
+          </a:lnRef>
+          <a:fillRef idx="0">
+            <a:schemeClr val="accent1"/>
+          </a:fillRef>
+          <a:effectRef idx="1">
+            <a:schemeClr val="accent1"/>
+          </a:effectRef>
+          <a:fontRef idx="minor">
+            <a:schemeClr val="tx1"/>
+          </a:fontRef>
+        </p:style>
+      </p:cxnSp>
+      <p:cxnSp>
+        <p:nvCxnSpPr>
+          <p:cNvPr id="112" name="Connector 111"/>
+          <p:cNvCxnSpPr>
+            <a:stCxn id="67" idx="2"/>
+            <a:endCxn id="69" idx="0"/>
+          </p:cNvCxnSpPr>
+          <p:nvPr/>
+        </p:nvCxnSpPr>
+        <p:spPr>
+          <a:xfrm>
+            <a:off x="11135000" y="5446000"/>
+            <a:ext cx="0" cy="1426000"/>
+          </a:xfrm>
+          <a:prstGeom prst="line">
+            <a:avLst/>
+          </a:prstGeom>
+          <a:ln>
+            <a:tailEnd type="triangle"/>
+          </a:ln>
+        </p:spPr>
+        <p:style>
+          <a:lnRef idx="2">
+            <a:schemeClr val="accent1"/>
+          </a:lnRef>
+          <a:fillRef idx="0">
+            <a:schemeClr val="accent1"/>
+          </a:fillRef>
+          <a:effectRef idx="1">
+            <a:schemeClr val="accent1"/>
+          </a:effectRef>
+          <a:fontRef idx="minor">
+            <a:schemeClr val="tx1"/>
+          </a:fontRef>
+        </p:style>
+      </p:cxnSp>
+      <p:cxnSp>
+        <p:nvCxnSpPr>
+          <p:cNvPr id="113" name="Connector 112"/>
+          <p:cNvCxnSpPr>
+            <a:stCxn id="75" idx="2"/>
+            <a:endCxn id="14" idx="0"/>
+          </p:cNvCxnSpPr>
+          <p:nvPr/>
+        </p:nvCxnSpPr>
+        <p:spPr>
+          <a:xfrm>
+            <a:off x="900000" y="1600000"/>
+            <a:ext cx="1995000" cy="13198000"/>
+          </a:xfrm>
+          <a:prstGeom prst="line">
+            <a:avLst/>
+          </a:prstGeom>
+          <a:ln>
+            <a:tailEnd type="triangle"/>
+          </a:ln>
+        </p:spPr>
+        <p:style>
+          <a:lnRef idx="2">
+            <a:schemeClr val="accent1"/>
+          </a:lnRef>
+          <a:fillRef idx="0">
+            <a:schemeClr val="accent1"/>
+          </a:fillRef>
+          <a:effectRef idx="1">
+            <a:schemeClr val="accent1"/>
+          </a:effectRef>
+          <a:fontRef idx="minor">
+            <a:schemeClr val="tx1"/>
+          </a:fontRef>
+        </p:style>
+      </p:cxnSp>
+      <p:cxnSp>
+        <p:nvCxnSpPr>
+          <p:cNvPr id="114" name="Connector 113"/>
+          <p:cNvCxnSpPr>
+            <a:stCxn id="76" idx="3"/>
+            <a:endCxn id="24" idx="1"/>
+          </p:cNvCxnSpPr>
+          <p:nvPr/>
+        </p:nvCxnSpPr>
+        <p:spPr>
+          <a:xfrm>
+            <a:off x="1700000" y="2266000"/>
+            <a:ext cx="2300000" cy="1298000"/>
+          </a:xfrm>
+          <a:prstGeom prst="bentConnector3">
+            <a:avLst/>
+          </a:prstGeom>
+          <a:ln>
+            <a:tailEnd type="triangle"/>
+          </a:ln>
+        </p:spPr>
+        <p:style>
+          <a:lnRef idx="2">
+            <a:schemeClr val="accent1"/>
+          </a:lnRef>
+          <a:fillRef idx="0">
+            <a:schemeClr val="accent1"/>
+          </a:fillRef>
+          <a:effectRef idx="1">
+            <a:schemeClr val="accent1"/>
+          </a:effectRef>
+          <a:fontRef idx="minor">
+            <a:schemeClr val="tx1"/>
+          </a:fontRef>
+        </p:style>
+      </p:cxnSp>
+      <p:cxnSp>
+        <p:nvCxnSpPr>
+          <p:cNvPr id="115" name="Connector 114"/>
+          <p:cNvCxnSpPr>
+            <a:stCxn id="77" idx="3"/>
+            <a:endCxn id="24" idx="1"/>
+          </p:cNvCxnSpPr>
+          <p:nvPr/>
+        </p:nvCxnSpPr>
+        <p:spPr>
+          <a:xfrm>
+            <a:off x="1700000" y="3242000"/>
+            <a:ext cx="2300000" cy="322000"/>
+          </a:xfrm>
+          <a:prstGeom prst="bentConnector3">
+            <a:avLst/>
+          </a:prstGeom>
+          <a:ln>
+            <a:tailEnd type="triangle"/>
+          </a:ln>
+        </p:spPr>
+        <p:style>
+          <a:lnRef idx="2">
+            <a:schemeClr val="accent1"/>
+          </a:lnRef>
+          <a:fillRef idx="0">
+            <a:schemeClr val="accent1"/>
+          </a:fillRef>
+          <a:effectRef idx="1">
+            <a:schemeClr val="accent1"/>
+          </a:effectRef>
+          <a:fontRef idx="minor">
+            <a:schemeClr val="tx1"/>
+          </a:fontRef>
+        </p:style>
+      </p:cxnSp>
+      <p:cxnSp>
+        <p:nvCxnSpPr>
+          <p:cNvPr id="116" name="Connector 115"/>
+          <p:cNvCxnSpPr>
+            <a:stCxn id="78" idx="3"/>
+            <a:endCxn id="22" idx="1"/>
+          </p:cNvCxnSpPr>
+          <p:nvPr/>
+        </p:nvCxnSpPr>
+        <p:spPr>
+          <a:xfrm flipV="1">
+            <a:off x="1700000" y="1350000"/>
+            <a:ext cx="2300000" cy="2868000"/>
+          </a:xfrm>
+          <a:prstGeom prst="bentConnector3">
+            <a:avLst/>
+          </a:prstGeom>
+          <a:ln>
+            <a:tailEnd type="triangle"/>
+          </a:ln>
+        </p:spPr>
+        <p:style>
+          <a:lnRef idx="2">
+            <a:schemeClr val="accent1"/>
+          </a:lnRef>
+          <a:fillRef idx="0">
+            <a:schemeClr val="accent1"/>
+          </a:fillRef>
+          <a:effectRef idx="1">
+            <a:schemeClr val="accent1"/>
+          </a:effectRef>
+          <a:fontRef idx="minor">
+            <a:schemeClr val="tx1"/>
+          </a:fontRef>
+        </p:style>
+      </p:cxnSp>
+      <p:cxnSp>
+        <p:nvCxnSpPr>
+          <p:cNvPr id="117" name="Connector 116"/>
+          <p:cNvCxnSpPr>
+            <a:stCxn id="79" idx="3"/>
+            <a:endCxn id="22" idx="1"/>
+          </p:cNvCxnSpPr>
+          <p:nvPr/>
+        </p:nvCxnSpPr>
+        <p:spPr>
+          <a:xfrm flipV="1">
+            <a:off x="1700000" y="1350000"/>
+            <a:ext cx="2300000" cy="3844000"/>
+          </a:xfrm>
+          <a:prstGeom prst="bentConnector3">
+            <a:avLst/>
+          </a:prstGeom>
+          <a:ln>
+            <a:tailEnd type="triangle"/>
+          </a:ln>
+        </p:spPr>
+        <p:style>
+          <a:lnRef idx="2">
+            <a:schemeClr val="accent1"/>
+          </a:lnRef>
+          <a:fillRef idx="0">
+            <a:schemeClr val="accent1"/>
+          </a:fillRef>
+          <a:effectRef idx="1">
+            <a:schemeClr val="accent1"/>
+          </a:effectRef>
+          <a:fontRef idx="minor">
+            <a:schemeClr val="tx1"/>
+          </a:fontRef>
+        </p:style>
+      </p:cxnSp>
+      <p:cxnSp>
+        <p:nvCxnSpPr>
+          <p:cNvPr id="118" name="Connector 117"/>
+          <p:cNvCxnSpPr>
+            <a:stCxn id="80" idx="3"/>
+            <a:endCxn id="38" idx="1"/>
+          </p:cNvCxnSpPr>
+          <p:nvPr/>
+        </p:nvCxnSpPr>
+        <p:spPr>
+          <a:xfrm flipV="1">
+            <a:off x="1700000" y="1350000"/>
+            <a:ext cx="4360000" cy="4820000"/>
+          </a:xfrm>
+          <a:prstGeom prst="bentConnector3">
+            <a:avLst/>
+          </a:prstGeom>
+          <a:ln>
+            <a:tailEnd type="triangle"/>
+          </a:ln>
+        </p:spPr>
+        <p:style>
+          <a:lnRef idx="2">
+            <a:schemeClr val="accent1"/>
+          </a:lnRef>
+          <a:fillRef idx="0">
+            <a:schemeClr val="accent1"/>
+          </a:fillRef>
+          <a:effectRef idx="1">
+            <a:schemeClr val="accent1"/>
+          </a:effectRef>
+          <a:fontRef idx="minor">
+            <a:schemeClr val="tx1"/>
+          </a:fontRef>
+        </p:style>
+      </p:cxnSp>
+      <p:cxnSp>
+        <p:nvCxnSpPr>
+          <p:cNvPr id="119" name="Connector 118"/>
+          <p:cNvCxnSpPr>
+            <a:stCxn id="48" idx="2"/>
+            <a:endCxn id="58" idx="0"/>
+          </p:cNvCxnSpPr>
+          <p:nvPr/>
+        </p:nvCxnSpPr>
+        <p:spPr>
+          <a:xfrm>
+            <a:off x="9075000" y="4912000"/>
+            <a:ext cx="0" cy="10618000"/>
+          </a:xfrm>
+          <a:prstGeom prst="line">
+            <a:avLst/>
+          </a:prstGeom>
+          <a:ln>
+            <a:tailEnd type="triangle"/>
+          </a:ln>
+        </p:spPr>
+        <p:style>
+          <a:lnRef idx="2">
+            <a:schemeClr val="accent1"/>
+          </a:lnRef>
+          <a:fillRef idx="0">
+            <a:schemeClr val="accent1"/>
+          </a:fillRef>
+          <a:effectRef idx="1">
+            <a:schemeClr val="accent1"/>
+          </a:effectRef>
+          <a:fontRef idx="minor">
+            <a:schemeClr val="tx1"/>
+          </a:fontRef>
+        </p:style>
+      </p:cxnSp>
+      <p:cxnSp>
+        <p:nvCxnSpPr>
+          <p:cNvPr id="120" name="Connector 119"/>
+          <p:cNvCxnSpPr>
+            <a:stCxn id="69" idx="2"/>
+            <a:endCxn id="73" idx="0"/>
+          </p:cNvCxnSpPr>
+          <p:nvPr/>
+        </p:nvCxnSpPr>
+        <p:spPr>
+          <a:xfrm>
+            <a:off x="11135000" y="7492000"/>
+            <a:ext cx="0" cy="2800000"/>
+          </a:xfrm>
+          <a:prstGeom prst="line">
+            <a:avLst/>
+          </a:prstGeom>
+          <a:ln>
+            <a:tailEnd type="triangle"/>
+          </a:ln>
+        </p:spPr>
+        <p:style>
+          <a:lnRef idx="2">
+            <a:schemeClr val="accent1"/>
+          </a:lnRef>
+          <a:fillRef idx="0">
+            <a:schemeClr val="accent1"/>
+          </a:fillRef>
+          <a:effectRef idx="1">
+            <a:schemeClr val="accent1"/>
+          </a:effectRef>
+          <a:fontRef idx="minor">
+            <a:schemeClr val="tx1"/>
+          </a:fontRef>
+        </p:style>
+      </p:cxnSp>
+      <p:cxnSp>
+        <p:nvCxnSpPr>
+          <p:cNvPr id="121" name="Connector 120"/>
+          <p:cNvCxnSpPr>
+            <a:stCxn id="71" idx="2"/>
+            <a:endCxn id="74" idx="0"/>
           </p:cNvCxnSpPr>
           <p:nvPr/>
         </p:nvCxnSpPr>
